--- a/blocks/D_sensors/M13_lidar_sensor/M13_2D_LiDAR_LaserScan.pptx
+++ b/blocks/D_sensors/M13_lidar_sensor/M13_2D_LiDAR_LaserScan.pptx
@@ -47,6 +47,9 @@
     <p:sldId id="295" r:id="rId47"/>
     <p:sldId id="296" r:id="rId48"/>
     <p:sldId id="297" r:id="rId49"/>
+    <p:sldId id="298" r:id="rId50"/>
+    <p:sldId id="299" r:id="rId51"/>
+    <p:sldId id="300" r:id="rId52"/>
   </p:sldIdLst>
   <p:sldSz cx="12191999" cy="6858000" type="screen4x3"/>
   <p:notesSz cx="6858000" cy="9144000"/>
@@ -633,7 +636,7 @@
           <a:lstStyle/>
           <a:p>
             <a:r>
-              <a:t>[설명] ~/agv_ws/src/agv_gazebo/models/agv/model.sdf의 전체 파일을 2/21 구간으로 작성한다.</a:t>
+              <a:t>[설명] ~/agv_ws/src/agv_gazebo/models/agv/model.sdf의 전체 파일을 2/24 구간으로 작성한다.</a:t>
             </a:r>
           </a:p>
           <a:p>
@@ -723,7 +726,7 @@
           <a:lstStyle/>
           <a:p>
             <a:r>
-              <a:t>[설명] ~/agv_ws/src/agv_gazebo/models/agv/model.sdf의 전체 파일을 3/21 구간으로 작성한다.</a:t>
+              <a:t>[설명] ~/agv_ws/src/agv_gazebo/models/agv/model.sdf의 전체 파일을 3/24 구간으로 작성한다.</a:t>
             </a:r>
           </a:p>
           <a:p>
@@ -813,7 +816,7 @@
           <a:lstStyle/>
           <a:p>
             <a:r>
-              <a:t>[설명] ~/agv_ws/src/agv_gazebo/models/agv/model.sdf의 전체 파일을 4/21 구간으로 작성한다.</a:t>
+              <a:t>[설명] ~/agv_ws/src/agv_gazebo/models/agv/model.sdf의 전체 파일을 4/24 구간으로 작성한다.</a:t>
             </a:r>
           </a:p>
           <a:p>
@@ -903,7 +906,7 @@
           <a:lstStyle/>
           <a:p>
             <a:r>
-              <a:t>[설명] ~/agv_ws/src/agv_gazebo/models/agv/model.sdf의 전체 파일을 5/21 구간으로 작성한다.</a:t>
+              <a:t>[설명] ~/agv_ws/src/agv_gazebo/models/agv/model.sdf의 전체 파일을 5/24 구간으로 작성한다.</a:t>
             </a:r>
           </a:p>
           <a:p>
@@ -993,7 +996,7 @@
           <a:lstStyle/>
           <a:p>
             <a:r>
-              <a:t>[설명] ~/agv_ws/src/agv_gazebo/models/agv/model.sdf의 전체 파일을 6/21 구간으로 작성한다.</a:t>
+              <a:t>[설명] ~/agv_ws/src/agv_gazebo/models/agv/model.sdf의 전체 파일을 6/24 구간으로 작성한다.</a:t>
             </a:r>
           </a:p>
           <a:p>
@@ -1083,7 +1086,7 @@
           <a:lstStyle/>
           <a:p>
             <a:r>
-              <a:t>[설명] ~/agv_ws/src/agv_gazebo/models/agv/model.sdf의 전체 파일을 7/21 구간으로 작성한다.</a:t>
+              <a:t>[설명] ~/agv_ws/src/agv_gazebo/models/agv/model.sdf의 전체 파일을 7/24 구간으로 작성한다.</a:t>
             </a:r>
           </a:p>
           <a:p>
@@ -1173,7 +1176,7 @@
           <a:lstStyle/>
           <a:p>
             <a:r>
-              <a:t>[설명] ~/agv_ws/src/agv_gazebo/models/agv/model.sdf의 전체 파일을 8/21 구간으로 작성한다.</a:t>
+              <a:t>[설명] ~/agv_ws/src/agv_gazebo/models/agv/model.sdf의 전체 파일을 8/24 구간으로 작성한다.</a:t>
             </a:r>
           </a:p>
           <a:p>
@@ -1263,7 +1266,7 @@
           <a:lstStyle/>
           <a:p>
             <a:r>
-              <a:t>[설명] ~/agv_ws/src/agv_gazebo/models/agv/model.sdf의 전체 파일을 9/21 구간으로 작성한다.</a:t>
+              <a:t>[설명] ~/agv_ws/src/agv_gazebo/models/agv/model.sdf의 전체 파일을 9/24 구간으로 작성한다.</a:t>
             </a:r>
           </a:p>
           <a:p>
@@ -1353,7 +1356,7 @@
           <a:lstStyle/>
           <a:p>
             <a:r>
-              <a:t>[설명] ~/agv_ws/src/agv_gazebo/models/agv/model.sdf의 전체 파일을 10/21 구간으로 작성한다.</a:t>
+              <a:t>[설명] ~/agv_ws/src/agv_gazebo/models/agv/model.sdf의 전체 파일을 10/24 구간으로 작성한다.</a:t>
             </a:r>
           </a:p>
           <a:p>
@@ -1443,7 +1446,7 @@
           <a:lstStyle/>
           <a:p>
             <a:r>
-              <a:t>[설명] ~/agv_ws/src/agv_gazebo/models/agv/model.sdf의 전체 파일을 11/21 구간으로 작성한다.</a:t>
+              <a:t>[설명] ~/agv_ws/src/agv_gazebo/models/agv/model.sdf의 전체 파일을 11/24 구간으로 작성한다.</a:t>
             </a:r>
           </a:p>
           <a:p>
@@ -1623,7 +1626,7 @@
           <a:lstStyle/>
           <a:p>
             <a:r>
-              <a:t>[설명] ~/agv_ws/src/agv_gazebo/models/agv/model.sdf의 전체 파일을 12/21 구간으로 작성한다.</a:t>
+              <a:t>[설명] ~/agv_ws/src/agv_gazebo/models/agv/model.sdf의 전체 파일을 12/24 구간으로 작성한다.</a:t>
             </a:r>
           </a:p>
           <a:p>
@@ -1713,7 +1716,7 @@
           <a:lstStyle/>
           <a:p>
             <a:r>
-              <a:t>[설명] ~/agv_ws/src/agv_gazebo/models/agv/model.sdf의 전체 파일을 13/21 구간으로 작성한다.</a:t>
+              <a:t>[설명] ~/agv_ws/src/agv_gazebo/models/agv/model.sdf의 전체 파일을 13/24 구간으로 작성한다.</a:t>
             </a:r>
           </a:p>
           <a:p>
@@ -1803,7 +1806,7 @@
           <a:lstStyle/>
           <a:p>
             <a:r>
-              <a:t>[설명] ~/agv_ws/src/agv_gazebo/models/agv/model.sdf의 전체 파일을 14/21 구간으로 작성한다.</a:t>
+              <a:t>[설명] ~/agv_ws/src/agv_gazebo/models/agv/model.sdf의 전체 파일을 14/24 구간으로 작성한다.</a:t>
             </a:r>
           </a:p>
           <a:p>
@@ -1893,7 +1896,7 @@
           <a:lstStyle/>
           <a:p>
             <a:r>
-              <a:t>[설명] ~/agv_ws/src/agv_gazebo/models/agv/model.sdf의 전체 파일을 15/21 구간으로 작성한다.</a:t>
+              <a:t>[설명] ~/agv_ws/src/agv_gazebo/models/agv/model.sdf의 전체 파일을 15/24 구간으로 작성한다.</a:t>
             </a:r>
           </a:p>
           <a:p>
@@ -1983,7 +1986,7 @@
           <a:lstStyle/>
           <a:p>
             <a:r>
-              <a:t>[설명] ~/agv_ws/src/agv_gazebo/models/agv/model.sdf의 전체 파일을 16/21 구간으로 작성한다.</a:t>
+              <a:t>[설명] ~/agv_ws/src/agv_gazebo/models/agv/model.sdf의 전체 파일을 16/24 구간으로 작성한다.</a:t>
             </a:r>
           </a:p>
           <a:p>
@@ -2073,7 +2076,7 @@
           <a:lstStyle/>
           <a:p>
             <a:r>
-              <a:t>[설명] ~/agv_ws/src/agv_gazebo/models/agv/model.sdf의 전체 파일을 17/21 구간으로 작성한다.</a:t>
+              <a:t>[설명] ~/agv_ws/src/agv_gazebo/models/agv/model.sdf의 전체 파일을 17/24 구간으로 작성한다.</a:t>
             </a:r>
           </a:p>
           <a:p>
@@ -2163,7 +2166,7 @@
           <a:lstStyle/>
           <a:p>
             <a:r>
-              <a:t>[설명] ~/agv_ws/src/agv_gazebo/models/agv/model.sdf의 전체 파일을 18/21 구간으로 작성한다.</a:t>
+              <a:t>[설명] ~/agv_ws/src/agv_gazebo/models/agv/model.sdf의 전체 파일을 18/24 구간으로 작성한다.</a:t>
             </a:r>
           </a:p>
           <a:p>
@@ -2253,7 +2256,7 @@
           <a:lstStyle/>
           <a:p>
             <a:r>
-              <a:t>[설명] ~/agv_ws/src/agv_gazebo/models/agv/model.sdf의 전체 파일을 19/21 구간으로 작성한다.</a:t>
+              <a:t>[설명] ~/agv_ws/src/agv_gazebo/models/agv/model.sdf의 전체 파일을 19/24 구간으로 작성한다.</a:t>
             </a:r>
           </a:p>
           <a:p>
@@ -2343,7 +2346,7 @@
           <a:lstStyle/>
           <a:p>
             <a:r>
-              <a:t>[설명] ~/agv_ws/src/agv_gazebo/models/agv/model.sdf의 전체 파일을 20/21 구간으로 작성한다.</a:t>
+              <a:t>[설명] ~/agv_ws/src/agv_gazebo/models/agv/model.sdf의 전체 파일을 20/24 구간으로 작성한다.</a:t>
             </a:r>
           </a:p>
           <a:p>
@@ -2433,7 +2436,7 @@
           <a:lstStyle/>
           <a:p>
             <a:r>
-              <a:t>[설명] ~/agv_ws/src/agv_gazebo/models/agv/model.sdf의 전체 파일을 21/21 구간으로 작성한다.</a:t>
+              <a:t>[설명] ~/agv_ws/src/agv_gazebo/models/agv/model.sdf의 전체 파일을 21/24 구간으로 작성한다.</a:t>
             </a:r>
           </a:p>
           <a:p>
@@ -2613,12 +2616,12 @@
           <a:lstStyle/>
           <a:p>
             <a:r>
-              <a:t>[설명] ~/agv_ws/src/agv_gazebo/config/bridge.yaml의 전체 파일을 1/3 구간으로 작성한다.</a:t>
-            </a:r>
-          </a:p>
-          <a:p>
-            <a:r>
-              <a:t>[실행] nano ~/agv_ws/src/agv_gazebo/config/bridge.yaml</a:t>
+              <a:t>[설명] ~/agv_ws/src/agv_gazebo/models/agv/model.sdf의 전체 파일을 22/24 구간으로 작성한다.</a:t>
+            </a:r>
+          </a:p>
+          <a:p>
+            <a:r>
+              <a:t>[실행] nano ~/agv_ws/src/agv_gazebo/models/agv/model.sdf</a:t>
             </a:r>
           </a:p>
           <a:p>
@@ -2703,12 +2706,12 @@
           <a:lstStyle/>
           <a:p>
             <a:r>
-              <a:t>[설명] ~/agv_ws/src/agv_gazebo/config/bridge.yaml의 전체 파일을 2/3 구간으로 작성한다.</a:t>
-            </a:r>
-          </a:p>
-          <a:p>
-            <a:r>
-              <a:t>[실행] nano ~/agv_ws/src/agv_gazebo/config/bridge.yaml</a:t>
+              <a:t>[설명] ~/agv_ws/src/agv_gazebo/models/agv/model.sdf의 전체 파일을 23/24 구간으로 작성한다.</a:t>
+            </a:r>
+          </a:p>
+          <a:p>
+            <a:r>
+              <a:t>[실행] nano ~/agv_ws/src/agv_gazebo/models/agv/model.sdf</a:t>
             </a:r>
           </a:p>
           <a:p>
@@ -2793,12 +2796,12 @@
           <a:lstStyle/>
           <a:p>
             <a:r>
-              <a:t>[설명] ~/agv_ws/src/agv_gazebo/config/bridge.yaml의 전체 파일을 3/3 구간으로 작성한다.</a:t>
-            </a:r>
-          </a:p>
-          <a:p>
-            <a:r>
-              <a:t>[실행] nano ~/agv_ws/src/agv_gazebo/config/bridge.yaml</a:t>
+              <a:t>[설명] ~/agv_ws/src/agv_gazebo/models/agv/model.sdf의 전체 파일을 24/24 구간으로 작성한다.</a:t>
+            </a:r>
+          </a:p>
+          <a:p>
+            <a:r>
+              <a:t>[실행] nano ~/agv_ws/src/agv_gazebo/models/agv/model.sdf</a:t>
             </a:r>
           </a:p>
           <a:p>
@@ -2883,12 +2886,12 @@
           <a:lstStyle/>
           <a:p>
             <a:r>
-              <a:t>[설명] ~/agv_ws/src/agv_sensors/agv_sensors/lidar_processor.py의 전체 파일을 1/3 구간으로 작성한다.</a:t>
-            </a:r>
-          </a:p>
-          <a:p>
-            <a:r>
-              <a:t>[실행] nano ~/agv_ws/src/agv_sensors/agv_sensors/lidar_processor.py</a:t>
+              <a:t>[설명] ~/agv_ws/src/agv_gazebo/config/bridge.yaml의 전체 파일을 1/3 구간으로 작성한다.</a:t>
+            </a:r>
+          </a:p>
+          <a:p>
+            <a:r>
+              <a:t>[실행] nano ~/agv_ws/src/agv_gazebo/config/bridge.yaml</a:t>
             </a:r>
           </a:p>
           <a:p>
@@ -2973,12 +2976,12 @@
           <a:lstStyle/>
           <a:p>
             <a:r>
-              <a:t>[설명] ~/agv_ws/src/agv_sensors/agv_sensors/lidar_processor.py의 전체 파일을 2/3 구간으로 작성한다.</a:t>
-            </a:r>
-          </a:p>
-          <a:p>
-            <a:r>
-              <a:t>[실행] nano ~/agv_ws/src/agv_sensors/agv_sensors/lidar_processor.py</a:t>
+              <a:t>[설명] ~/agv_ws/src/agv_gazebo/config/bridge.yaml의 전체 파일을 2/3 구간으로 작성한다.</a:t>
+            </a:r>
+          </a:p>
+          <a:p>
+            <a:r>
+              <a:t>[실행] nano ~/agv_ws/src/agv_gazebo/config/bridge.yaml</a:t>
             </a:r>
           </a:p>
           <a:p>
@@ -3063,12 +3066,12 @@
           <a:lstStyle/>
           <a:p>
             <a:r>
-              <a:t>[설명] ~/agv_ws/src/agv_sensors/agv_sensors/lidar_processor.py의 전체 파일을 3/3 구간으로 작성한다.</a:t>
-            </a:r>
-          </a:p>
-          <a:p>
-            <a:r>
-              <a:t>[실행] nano ~/agv_ws/src/agv_sensors/agv_sensors/lidar_processor.py</a:t>
+              <a:t>[설명] ~/agv_ws/src/agv_gazebo/config/bridge.yaml의 전체 파일을 3/3 구간으로 작성한다.</a:t>
+            </a:r>
+          </a:p>
+          <a:p>
+            <a:r>
+              <a:t>[실행] nano ~/agv_ws/src/agv_gazebo/config/bridge.yaml</a:t>
             </a:r>
           </a:p>
           <a:p>
@@ -3153,22 +3156,17 @@
           <a:lstStyle/>
           <a:p>
             <a:r>
-              <a:t>[설명] build/source/run을 생략 없이 실행한다.</a:t>
-            </a:r>
-          </a:p>
-          <a:p>
-            <a:r>
-              <a:t>[실행] ros2 launch agv_bringup agv_sim.launch.py rviz:=false</a:t>
-            </a:r>
-          </a:p>
-          <a:p>
-            <a:r>
-              <a:t># 새 터미널: ros2 run agv_sensors lidar_processor</a:t>
-            </a:r>
-          </a:p>
-          <a:p>
-            <a:r>
-              <a:t>[확인] /scan frame·RViz point·/obstacle_distance 출력이 장애물 위치에 반응한다.</a:t>
+              <a:t>[설명] ~/agv_ws/src/agv_sensors/agv_sensors/lidar_processor.py의 전체 파일을 1/3 구간으로 작성한다.</a:t>
+            </a:r>
+          </a:p>
+          <a:p>
+            <a:r>
+              <a:t>[실행] nano ~/agv_ws/src/agv_sensors/agv_sensors/lidar_processor.py</a:t>
+            </a:r>
+          </a:p>
+          <a:p>
+            <a:r>
+              <a:t>[확인] 코드를 저장하고 다음 코드 슬라이드 또는 build 단계로 이동한다.</a:t>
             </a:r>
           </a:p>
           <a:p>
@@ -3178,7 +3176,7 @@
           </a:p>
           <a:p>
             <a:r>
-              <a:t>[오류] 오류가 나면 현재 폴더, source, 파일 경로를 먼저 확인한다.</a:t>
+              <a:t>[오류] 들여쓰기·XML 태그·따옴표가 슬라이드와 정확히 같은지 확인한다.</a:t>
             </a:r>
           </a:p>
         </p:txBody>
@@ -3248,17 +3246,17 @@
           <a:lstStyle/>
           <a:p>
             <a:r>
-              <a:t>[설명] 실제 Ubuntu/ROS 2 환경에서 생성한 검증 화면이다.</a:t>
-            </a:r>
-          </a:p>
-          <a:p>
-            <a:r>
-              <a:t>[실행] 슬라이드의 명령 또는 파일 작성 단계를 진행한다.</a:t>
-            </a:r>
-          </a:p>
-          <a:p>
-            <a:r>
-              <a:t>[확인] 캡처의 명령과 다음 슬라이드의 검증 명령을 비교한다.</a:t>
+              <a:t>[설명] ~/agv_ws/src/agv_sensors/agv_sensors/lidar_processor.py의 전체 파일을 2/3 구간으로 작성한다.</a:t>
+            </a:r>
+          </a:p>
+          <a:p>
+            <a:r>
+              <a:t>[실행] nano ~/agv_ws/src/agv_sensors/agv_sensors/lidar_processor.py</a:t>
+            </a:r>
+          </a:p>
+          <a:p>
+            <a:r>
+              <a:t>[확인] 코드를 저장하고 다음 코드 슬라이드 또는 build 단계로 이동한다.</a:t>
             </a:r>
           </a:p>
           <a:p>
@@ -3268,7 +3266,7 @@
           </a:p>
           <a:p>
             <a:r>
-              <a:t>[오류] 오류가 나면 현재 폴더, source, 파일 경로를 먼저 확인한다.</a:t>
+              <a:t>[오류] 들여쓰기·XML 태그·따옴표가 슬라이드와 정확히 같은지 확인한다.</a:t>
             </a:r>
           </a:p>
         </p:txBody>
@@ -3338,27 +3336,17 @@
           <a:lstStyle/>
           <a:p>
             <a:r>
-              <a:t>[설명] 검증 명령은 GUI 결과와 별도로 실행해 재현 가능한 완료 기준을 만든다.</a:t>
-            </a:r>
-          </a:p>
-          <a:p>
-            <a:r>
-              <a:t>[실행] ros2 topic info /scan</a:t>
-            </a:r>
-          </a:p>
-          <a:p>
-            <a:r>
-              <a:t>ros2 topic hz /scan</a:t>
-            </a:r>
-          </a:p>
-          <a:p>
-            <a:r>
-              <a:t>ros2 topic echo /obstacle_distance --once</a:t>
-            </a:r>
-          </a:p>
-          <a:p>
-            <a:r>
-              <a:t>[확인] /scan frame·RViz point·/obstacle_distance 출력이 장애물 위치에 반응한다.</a:t>
+              <a:t>[설명] ~/agv_ws/src/agv_sensors/agv_sensors/lidar_processor.py의 전체 파일을 3/3 구간으로 작성한다.</a:t>
+            </a:r>
+          </a:p>
+          <a:p>
+            <a:r>
+              <a:t>[실행] nano ~/agv_ws/src/agv_sensors/agv_sensors/lidar_processor.py</a:t>
+            </a:r>
+          </a:p>
+          <a:p>
+            <a:r>
+              <a:t>[확인] 코드를 저장하고 다음 코드 슬라이드 또는 build 단계로 이동한다.</a:t>
             </a:r>
           </a:p>
           <a:p>
@@ -3368,7 +3356,7 @@
           </a:p>
           <a:p>
             <a:r>
-              <a:t>[오류] 오류가 나면 현재 폴더, source, 파일 경로를 먼저 확인한다.</a:t>
+              <a:t>[오류] 들여쓰기·XML 태그·따옴표가 슬라이드와 정확히 같은지 확인한다.</a:t>
             </a:r>
           </a:p>
         </p:txBody>
@@ -3438,17 +3426,22 @@
           <a:lstStyle/>
           <a:p>
             <a:r>
-              <a:t>[설명] 오류를 대신 해결하지 말고 증상부터 우선 확인 순서대로 교육생이 실행하게 한다.</a:t>
-            </a:r>
-          </a:p>
-          <a:p>
-            <a:r>
-              <a:t>[실행] 슬라이드의 명령 또는 파일 작성 단계를 진행한다.</a:t>
-            </a:r>
-          </a:p>
-          <a:p>
-            <a:r>
-              <a:t>[확인] 수정 뒤 첫 검증 명령을 다시 실행한다.</a:t>
+              <a:t>[설명] build/source/run을 생략 없이 실행한다.</a:t>
+            </a:r>
+          </a:p>
+          <a:p>
+            <a:r>
+              <a:t>[실행] ros2 launch agv_bringup agv_sim.launch.py rviz:=false</a:t>
+            </a:r>
+          </a:p>
+          <a:p>
+            <a:r>
+              <a:t># 새 터미널: ros2 run agv_sensors lidar_processor</a:t>
+            </a:r>
+          </a:p>
+          <a:p>
+            <a:r>
+              <a:t>[확인] /scan frame·RViz point·/obstacle_distance 출력이 장애물 위치에 반응한다.</a:t>
             </a:r>
           </a:p>
           <a:p>
@@ -3458,7 +3451,7 @@
           </a:p>
           <a:p>
             <a:r>
-              <a:t>[오류] 슬라이드의 두 대표 오류를 먼저 사용한다.</a:t>
+              <a:t>[오류] 오류가 나면 현재 폴더, source, 파일 경로를 먼저 확인한다.</a:t>
             </a:r>
           </a:p>
         </p:txBody>
@@ -3618,7 +3611,7 @@
           <a:lstStyle/>
           <a:p>
             <a:r>
-              <a:t>[설명] 교육생이 직접 한 값만 바꿔 원인과 결과를 연결하게 한다.</a:t>
+              <a:t>[설명] 실제 Ubuntu/ROS 2 환경에서 생성한 검증 화면이다.</a:t>
             </a:r>
           </a:p>
           <a:p>
@@ -3628,7 +3621,7 @@
           </a:p>
           <a:p>
             <a:r>
-              <a:t>[확인] 원래 값과 변경 값을 모두 기록한다.</a:t>
+              <a:t>[확인] 캡처의 명령과 다음 슬라이드의 검증 명령을 비교한다.</a:t>
             </a:r>
           </a:p>
           <a:p>
@@ -3708,17 +3701,27 @@
           <a:lstStyle/>
           <a:p>
             <a:r>
-              <a:t>[설명] 교육생이 Complete·캡처·로그를 저장했는지 확인하고 다음 모듈의 시작 상태를 읽는다.</a:t>
-            </a:r>
-          </a:p>
-          <a:p>
-            <a:r>
-              <a:t>[실행] 슬라이드의 명령 또는 파일 작성 단계를 진행한다.</a:t>
-            </a:r>
-          </a:p>
-          <a:p>
-            <a:r>
-              <a:t>[확인] M14 IMU 시작 조건을 말할 수 있다.</a:t>
+              <a:t>[설명] 검증 명령은 GUI 결과와 별도로 실행해 재현 가능한 완료 기준을 만든다.</a:t>
+            </a:r>
+          </a:p>
+          <a:p>
+            <a:r>
+              <a:t>[실행] ros2 topic info /scan</a:t>
+            </a:r>
+          </a:p>
+          <a:p>
+            <a:r>
+              <a:t>ros2 topic hz /scan</a:t>
+            </a:r>
+          </a:p>
+          <a:p>
+            <a:r>
+              <a:t>ros2 topic echo /obstacle_distance --once</a:t>
+            </a:r>
+          </a:p>
+          <a:p>
+            <a:r>
+              <a:t>[확인] /scan frame·RViz point·/obstacle_distance 출력이 장애물 위치에 반응한다.</a:t>
             </a:r>
           </a:p>
           <a:p>
@@ -3798,6 +3801,276 @@
           <a:lstStyle/>
           <a:p>
             <a:r>
+              <a:t>[설명] 오류를 대신 해결하지 말고 증상부터 우선 확인 순서대로 교육생이 실행하게 한다.</a:t>
+            </a:r>
+          </a:p>
+          <a:p>
+            <a:r>
+              <a:t>[실행] 슬라이드의 명령 또는 파일 작성 단계를 진행한다.</a:t>
+            </a:r>
+          </a:p>
+          <a:p>
+            <a:r>
+              <a:t>[확인] 수정 뒤 첫 검증 명령을 다시 실행한다.</a:t>
+            </a:r>
+          </a:p>
+          <a:p>
+            <a:r>
+              <a:t>[멈춤] 교육생이 현재 체크포인트를 통과할 때까지 기다린다.</a:t>
+            </a:r>
+          </a:p>
+          <a:p>
+            <a:r>
+              <a:t>[오류] 슬라이드의 두 대표 오류를 먼저 사용한다.</a:t>
+            </a:r>
+          </a:p>
+        </p:txBody>
+      </p:sp>
+      <p:sp>
+        <p:nvSpPr>
+          <p:cNvPr id="4" name="Slide Number Placeholder 3"/>
+          <p:cNvSpPr>
+            <a:spLocks noGrp="1"/>
+          </p:cNvSpPr>
+          <p:nvPr>
+            <p:ph type="sldNum" idx="5" sz="quarter"/>
+          </p:nvPr>
+        </p:nvSpPr>
+        <p:spPr/>
+      </p:sp>
+    </p:spTree>
+  </p:cSld>
+  <p:clrMapOvr>
+    <a:masterClrMapping/>
+  </p:clrMapOvr>
+</p:notes>
+</file>
+
+<file path=ppt/notesSlides/notesSlide43.xml><?xml version="1.0" encoding="utf-8"?>
+<p:notes xmlns:a="http://schemas.openxmlformats.org/drawingml/2006/main" xmlns:p="http://schemas.openxmlformats.org/presentationml/2006/main" xmlns:r="http://schemas.openxmlformats.org/officeDocument/2006/relationships">
+  <p:cSld>
+    <p:spTree>
+      <p:nvGrpSpPr>
+        <p:cNvPr id="1" name=""/>
+        <p:cNvGrpSpPr/>
+        <p:nvPr/>
+      </p:nvGrpSpPr>
+      <p:grpSpPr>
+        <a:xfrm>
+          <a:off x="0" y="0"/>
+          <a:ext cx="0" cy="0"/>
+          <a:chOff x="0" y="0"/>
+          <a:chExt cx="0" cy="0"/>
+        </a:xfrm>
+      </p:grpSpPr>
+      <p:sp>
+        <p:nvSpPr>
+          <p:cNvPr id="2" name="Slide Image Placeholder 1"/>
+          <p:cNvSpPr>
+            <a:spLocks noGrp="1"/>
+          </p:cNvSpPr>
+          <p:nvPr>
+            <p:ph type="sldImg" idx="2"/>
+          </p:nvPr>
+        </p:nvSpPr>
+        <p:spPr/>
+      </p:sp>
+      <p:sp>
+        <p:nvSpPr>
+          <p:cNvPr id="3" name="Notes Placeholder 2"/>
+          <p:cNvSpPr>
+            <a:spLocks noGrp="1"/>
+          </p:cNvSpPr>
+          <p:nvPr>
+            <p:ph type="body" idx="3" sz="quarter"/>
+          </p:nvPr>
+        </p:nvSpPr>
+        <p:spPr/>
+        <p:txBody>
+          <a:bodyPr/>
+          <a:lstStyle/>
+          <a:p>
+            <a:r>
+              <a:t>[설명] 교육생이 직접 한 값만 바꿔 원인과 결과를 연결하게 한다.</a:t>
+            </a:r>
+          </a:p>
+          <a:p>
+            <a:r>
+              <a:t>[실행] 슬라이드의 명령 또는 파일 작성 단계를 진행한다.</a:t>
+            </a:r>
+          </a:p>
+          <a:p>
+            <a:r>
+              <a:t>[확인] 원래 값과 변경 값을 모두 기록한다.</a:t>
+            </a:r>
+          </a:p>
+          <a:p>
+            <a:r>
+              <a:t>[멈춤] 교육생이 현재 체크포인트를 통과할 때까지 기다린다.</a:t>
+            </a:r>
+          </a:p>
+          <a:p>
+            <a:r>
+              <a:t>[오류] 오류가 나면 현재 폴더, source, 파일 경로를 먼저 확인한다.</a:t>
+            </a:r>
+          </a:p>
+        </p:txBody>
+      </p:sp>
+      <p:sp>
+        <p:nvSpPr>
+          <p:cNvPr id="4" name="Slide Number Placeholder 3"/>
+          <p:cNvSpPr>
+            <a:spLocks noGrp="1"/>
+          </p:cNvSpPr>
+          <p:nvPr>
+            <p:ph type="sldNum" idx="5" sz="quarter"/>
+          </p:nvPr>
+        </p:nvSpPr>
+        <p:spPr/>
+      </p:sp>
+    </p:spTree>
+  </p:cSld>
+  <p:clrMapOvr>
+    <a:masterClrMapping/>
+  </p:clrMapOvr>
+</p:notes>
+</file>
+
+<file path=ppt/notesSlides/notesSlide44.xml><?xml version="1.0" encoding="utf-8"?>
+<p:notes xmlns:a="http://schemas.openxmlformats.org/drawingml/2006/main" xmlns:p="http://schemas.openxmlformats.org/presentationml/2006/main" xmlns:r="http://schemas.openxmlformats.org/officeDocument/2006/relationships">
+  <p:cSld>
+    <p:spTree>
+      <p:nvGrpSpPr>
+        <p:cNvPr id="1" name=""/>
+        <p:cNvGrpSpPr/>
+        <p:nvPr/>
+      </p:nvGrpSpPr>
+      <p:grpSpPr>
+        <a:xfrm>
+          <a:off x="0" y="0"/>
+          <a:ext cx="0" cy="0"/>
+          <a:chOff x="0" y="0"/>
+          <a:chExt cx="0" cy="0"/>
+        </a:xfrm>
+      </p:grpSpPr>
+      <p:sp>
+        <p:nvSpPr>
+          <p:cNvPr id="2" name="Slide Image Placeholder 1"/>
+          <p:cNvSpPr>
+            <a:spLocks noGrp="1"/>
+          </p:cNvSpPr>
+          <p:nvPr>
+            <p:ph type="sldImg" idx="2"/>
+          </p:nvPr>
+        </p:nvSpPr>
+        <p:spPr/>
+      </p:sp>
+      <p:sp>
+        <p:nvSpPr>
+          <p:cNvPr id="3" name="Notes Placeholder 2"/>
+          <p:cNvSpPr>
+            <a:spLocks noGrp="1"/>
+          </p:cNvSpPr>
+          <p:nvPr>
+            <p:ph type="body" idx="3" sz="quarter"/>
+          </p:nvPr>
+        </p:nvSpPr>
+        <p:spPr/>
+        <p:txBody>
+          <a:bodyPr/>
+          <a:lstStyle/>
+          <a:p>
+            <a:r>
+              <a:t>[설명] 교육생이 Complete·캡처·로그를 저장했는지 확인하고 다음 모듈의 시작 상태를 읽는다.</a:t>
+            </a:r>
+          </a:p>
+          <a:p>
+            <a:r>
+              <a:t>[실행] 슬라이드의 명령 또는 파일 작성 단계를 진행한다.</a:t>
+            </a:r>
+          </a:p>
+          <a:p>
+            <a:r>
+              <a:t>[확인] M14 IMU 시작 조건을 말할 수 있다.</a:t>
+            </a:r>
+          </a:p>
+          <a:p>
+            <a:r>
+              <a:t>[멈춤] 교육생이 현재 체크포인트를 통과할 때까지 기다린다.</a:t>
+            </a:r>
+          </a:p>
+          <a:p>
+            <a:r>
+              <a:t>[오류] 오류가 나면 현재 폴더, source, 파일 경로를 먼저 확인한다.</a:t>
+            </a:r>
+          </a:p>
+        </p:txBody>
+      </p:sp>
+      <p:sp>
+        <p:nvSpPr>
+          <p:cNvPr id="4" name="Slide Number Placeholder 3"/>
+          <p:cNvSpPr>
+            <a:spLocks noGrp="1"/>
+          </p:cNvSpPr>
+          <p:nvPr>
+            <p:ph type="sldNum" idx="5" sz="quarter"/>
+          </p:nvPr>
+        </p:nvSpPr>
+        <p:spPr/>
+      </p:sp>
+    </p:spTree>
+  </p:cSld>
+  <p:clrMapOvr>
+    <a:masterClrMapping/>
+  </p:clrMapOvr>
+</p:notes>
+</file>
+
+<file path=ppt/notesSlides/notesSlide45.xml><?xml version="1.0" encoding="utf-8"?>
+<p:notes xmlns:a="http://schemas.openxmlformats.org/drawingml/2006/main" xmlns:p="http://schemas.openxmlformats.org/presentationml/2006/main" xmlns:r="http://schemas.openxmlformats.org/officeDocument/2006/relationships">
+  <p:cSld>
+    <p:spTree>
+      <p:nvGrpSpPr>
+        <p:cNvPr id="1" name=""/>
+        <p:cNvGrpSpPr/>
+        <p:nvPr/>
+      </p:nvGrpSpPr>
+      <p:grpSpPr>
+        <a:xfrm>
+          <a:off x="0" y="0"/>
+          <a:ext cx="0" cy="0"/>
+          <a:chOff x="0" y="0"/>
+          <a:chExt cx="0" cy="0"/>
+        </a:xfrm>
+      </p:grpSpPr>
+      <p:sp>
+        <p:nvSpPr>
+          <p:cNvPr id="2" name="Slide Image Placeholder 1"/>
+          <p:cNvSpPr>
+            <a:spLocks noGrp="1"/>
+          </p:cNvSpPr>
+          <p:nvPr>
+            <p:ph type="sldImg" idx="2"/>
+          </p:nvPr>
+        </p:nvSpPr>
+        <p:spPr/>
+      </p:sp>
+      <p:sp>
+        <p:nvSpPr>
+          <p:cNvPr id="3" name="Notes Placeholder 2"/>
+          <p:cNvSpPr>
+            <a:spLocks noGrp="1"/>
+          </p:cNvSpPr>
+          <p:nvPr>
+            <p:ph type="body" idx="3" sz="quarter"/>
+          </p:nvPr>
+        </p:nvSpPr>
+        <p:spPr/>
+        <p:txBody>
+          <a:bodyPr/>
+          <a:lstStyle/>
+          <a:p>
+            <a:r>
               <a:t>[설명] 공식 문서는 버전 차이와 확장 학습을 확인할 때 사용한다.</a:t>
             </a:r>
           </a:p>
@@ -4263,7 +4536,7 @@
           <a:lstStyle/>
           <a:p>
             <a:r>
-              <a:t>[설명] ~/agv_ws/src/agv_gazebo/models/agv/model.sdf의 전체 파일을 1/21 구간으로 작성한다.</a:t>
+              <a:t>[설명] ~/agv_ws/src/agv_gazebo/models/agv/model.sdf의 전체 파일을 1/24 구간으로 작성한다.</a:t>
             </a:r>
           </a:p>
           <a:p>
@@ -7656,7 +7929,7 @@
               </a:defRPr>
             </a:pPr>
             <a:r>
-              <a:t>파일을 계속 작성하고 저장한다 (2/21)</a:t>
+              <a:t>파일을 계속 작성하고 저장한다 (2/24)</a:t>
             </a:r>
           </a:p>
         </p:txBody>
@@ -7831,7 +8104,7 @@
               </a:defRPr>
             </a:pPr>
             <a:r>
-              <a:t>현재 단계 4/24    |    현재 폴더 ~/agv_ws    |    현재 터미널</a:t>
+              <a:t>현재 단계 4/27    |    현재 폴더 ~/agv_ws    |    현재 터미널</a:t>
             </a:r>
           </a:p>
         </p:txBody>
@@ -7844,8 +8117,8 @@
         </p:nvSpPr>
         <p:spPr>
           <a:xfrm>
-            <a:off x="658368" y="1682496"/>
-            <a:ext cx="10972800" cy="347472"/>
+            <a:off x="658368" y="1627632"/>
+            <a:ext cx="10972800" cy="256032"/>
           </a:xfrm>
           <a:prstGeom prst="rect">
             <a:avLst/>
@@ -7862,7 +8135,7 @@
               <a:spcAft>
                 <a:spcPts val="0"/>
               </a:spcAft>
-              <a:defRPr sz="1700" b="1">
+              <a:defRPr sz="1500" b="1">
                 <a:solidFill>
                   <a:srgbClr val="122C4E"/>
                 </a:solidFill>
@@ -7883,8 +8156,8 @@
         </p:nvSpPr>
         <p:spPr>
           <a:xfrm>
-            <a:off x="658368" y="2103120"/>
-            <a:ext cx="10972800" cy="493776"/>
+            <a:off x="658368" y="1956816"/>
+            <a:ext cx="10972800" cy="603504"/>
           </a:xfrm>
           <a:prstGeom prst="rect">
             <a:avLst/>
@@ -7928,7 +8201,11 @@
               </a:defRPr>
             </a:pPr>
             <a:r>
-              <a:t>파일 생성/열기: mkdir -p ~/agv_ws/src/agv_gazebo/models/agv    &amp;&amp;    nano ~/agv_ws/src/agv_gazebo/models/agv/model.sdf</a:t>
+              <a:t>파일 생성: mkdir -p ~/agv_ws/src/agv_gazebo/models/agv</a:t>
+            </a:r>
+            <a:br/>
+            <a:r>
+              <a:t>파일 열기: nano ~/agv_ws/src/agv_gazebo/models/agv/model.sdf</a:t>
             </a:r>
           </a:p>
         </p:txBody>
@@ -7941,8 +8218,8 @@
         </p:nvSpPr>
         <p:spPr>
           <a:xfrm>
-            <a:off x="658368" y="2761488"/>
-            <a:ext cx="10972800" cy="3383280"/>
+            <a:off x="658368" y="2706624"/>
+            <a:ext cx="10972800" cy="3364992"/>
           </a:xfrm>
           <a:prstGeom prst="rect">
             <a:avLst/>
@@ -7986,6 +8263,14 @@
               </a:defRPr>
             </a:pPr>
             <a:r>
+              <a:t>      </a:t>
+            </a:r>
+            <a:br/>
+            <a:r>
+              <a:t>      &lt;inertial&gt;</a:t>
+            </a:r>
+            <a:br/>
+            <a:r>
               <a:t>        &lt;mass&gt;12.0&lt;/mass&gt;</a:t>
             </a:r>
             <a:br/>
@@ -8023,22 +8308,6 @@
             <a:br/>
             <a:r>
               <a:t>      &lt;visual name="body"&gt;</a:t>
-            </a:r>
-            <a:br/>
-            <a:r>
-              <a:t>        &lt;geometry&gt;</a:t>
-            </a:r>
-            <a:br/>
-            <a:r>
-              <a:t>          &lt;box&gt;</a:t>
-            </a:r>
-            <a:br/>
-            <a:r>
-              <a:t>            &lt;size&gt;0.60 0.42 0.16&lt;/size&gt;</a:t>
-            </a:r>
-            <a:br/>
-            <a:r>
-              <a:t>          &lt;/box&gt;</a:t>
             </a:r>
           </a:p>
         </p:txBody>
@@ -8051,7 +8320,7 @@
         </p:nvSpPr>
         <p:spPr>
           <a:xfrm>
-            <a:off x="749808" y="6199632"/>
+            <a:off x="749808" y="6181344"/>
             <a:ext cx="10789920" cy="201168"/>
           </a:xfrm>
           <a:prstGeom prst="rect">
@@ -8077,7 +8346,7 @@
               </a:defRPr>
             </a:pPr>
             <a:r>
-              <a:t>파일 전체 2/21 · 이 슬라이드 다음에 같은 파일의 나머지 줄이 이어집니다.</a:t>
+              <a:t>파일 전체 2/24 · 이 슬라이드 다음에 같은 파일의 나머지 줄이 이어집니다.</a:t>
             </a:r>
           </a:p>
         </p:txBody>
@@ -8134,7 +8403,7 @@
               </a:defRPr>
             </a:pPr>
             <a:r>
-              <a:t>파일을 계속 작성하고 저장한다 (3/21)</a:t>
+              <a:t>파일을 계속 작성하고 저장한다 (3/24)</a:t>
             </a:r>
           </a:p>
         </p:txBody>
@@ -8309,7 +8578,7 @@
               </a:defRPr>
             </a:pPr>
             <a:r>
-              <a:t>현재 단계 5/24    |    현재 폴더 ~/agv_ws    |    현재 터미널</a:t>
+              <a:t>현재 단계 5/27    |    현재 폴더 ~/agv_ws    |    현재 터미널</a:t>
             </a:r>
           </a:p>
         </p:txBody>
@@ -8322,8 +8591,8 @@
         </p:nvSpPr>
         <p:spPr>
           <a:xfrm>
-            <a:off x="658368" y="1682496"/>
-            <a:ext cx="10972800" cy="347472"/>
+            <a:off x="658368" y="1627632"/>
+            <a:ext cx="10972800" cy="256032"/>
           </a:xfrm>
           <a:prstGeom prst="rect">
             <a:avLst/>
@@ -8340,7 +8609,7 @@
               <a:spcAft>
                 <a:spcPts val="0"/>
               </a:spcAft>
-              <a:defRPr sz="1700" b="1">
+              <a:defRPr sz="1500" b="1">
                 <a:solidFill>
                   <a:srgbClr val="122C4E"/>
                 </a:solidFill>
@@ -8361,8 +8630,8 @@
         </p:nvSpPr>
         <p:spPr>
           <a:xfrm>
-            <a:off x="658368" y="2103120"/>
-            <a:ext cx="10972800" cy="493776"/>
+            <a:off x="658368" y="1956816"/>
+            <a:ext cx="10972800" cy="603504"/>
           </a:xfrm>
           <a:prstGeom prst="rect">
             <a:avLst/>
@@ -8406,7 +8675,11 @@
               </a:defRPr>
             </a:pPr>
             <a:r>
-              <a:t>파일 생성/열기: mkdir -p ~/agv_ws/src/agv_gazebo/models/agv    &amp;&amp;    nano ~/agv_ws/src/agv_gazebo/models/agv/model.sdf</a:t>
+              <a:t>파일 생성: mkdir -p ~/agv_ws/src/agv_gazebo/models/agv</a:t>
+            </a:r>
+            <a:br/>
+            <a:r>
+              <a:t>파일 열기: nano ~/agv_ws/src/agv_gazebo/models/agv/model.sdf</a:t>
             </a:r>
           </a:p>
         </p:txBody>
@@ -8419,8 +8692,8 @@
         </p:nvSpPr>
         <p:spPr>
           <a:xfrm>
-            <a:off x="658368" y="2761488"/>
-            <a:ext cx="10972800" cy="3383280"/>
+            <a:off x="658368" y="2706624"/>
+            <a:ext cx="10972800" cy="3364992"/>
           </a:xfrm>
           <a:prstGeom prst="rect">
             <a:avLst/>
@@ -8464,6 +8737,22 @@
               </a:defRPr>
             </a:pPr>
             <a:r>
+              <a:t>        &lt;geometry&gt;</a:t>
+            </a:r>
+            <a:br/>
+            <a:r>
+              <a:t>          &lt;box&gt;</a:t>
+            </a:r>
+            <a:br/>
+            <a:r>
+              <a:t>            &lt;size&gt;0.60 0.42 0.16&lt;/size&gt;</a:t>
+            </a:r>
+            <a:br/>
+            <a:r>
+              <a:t>          &lt;/box&gt;</a:t>
+            </a:r>
+            <a:br/>
+            <a:r>
               <a:t>        &lt;/geometry&gt;</a:t>
             </a:r>
             <a:br/>
@@ -8493,30 +8782,6 @@
             <a:br/>
             <a:r>
               <a:t>      &lt;collision name="body_collision"&gt;</a:t>
-            </a:r>
-            <a:br/>
-            <a:r>
-              <a:t>        &lt;geometry&gt;</a:t>
-            </a:r>
-            <a:br/>
-            <a:r>
-              <a:t>          &lt;box&gt;</a:t>
-            </a:r>
-            <a:br/>
-            <a:r>
-              <a:t>            &lt;size&gt;0.60 0.42 0.16&lt;/size&gt;</a:t>
-            </a:r>
-            <a:br/>
-            <a:r>
-              <a:t>          &lt;/box&gt;</a:t>
-            </a:r>
-            <a:br/>
-            <a:r>
-              <a:t>        &lt;/geometry&gt;</a:t>
-            </a:r>
-            <a:br/>
-            <a:r>
-              <a:t>      &lt;/collision&gt;</a:t>
             </a:r>
           </a:p>
         </p:txBody>
@@ -8529,7 +8794,7 @@
         </p:nvSpPr>
         <p:spPr>
           <a:xfrm>
-            <a:off x="749808" y="6199632"/>
+            <a:off x="749808" y="6181344"/>
             <a:ext cx="10789920" cy="201168"/>
           </a:xfrm>
           <a:prstGeom prst="rect">
@@ -8555,7 +8820,7 @@
               </a:defRPr>
             </a:pPr>
             <a:r>
-              <a:t>파일 전체 3/21 · 이 슬라이드 다음에 같은 파일의 나머지 줄이 이어집니다.</a:t>
+              <a:t>파일 전체 3/24 · 이 슬라이드 다음에 같은 파일의 나머지 줄이 이어집니다.</a:t>
             </a:r>
           </a:p>
         </p:txBody>
@@ -8612,7 +8877,7 @@
               </a:defRPr>
             </a:pPr>
             <a:r>
-              <a:t>파일을 계속 작성하고 저장한다 (4/21)</a:t>
+              <a:t>파일을 계속 작성하고 저장한다 (4/24)</a:t>
             </a:r>
           </a:p>
         </p:txBody>
@@ -8787,7 +9052,7 @@
               </a:defRPr>
             </a:pPr>
             <a:r>
-              <a:t>현재 단계 6/24    |    현재 폴더 ~/agv_ws    |    현재 터미널</a:t>
+              <a:t>현재 단계 6/27    |    현재 폴더 ~/agv_ws    |    현재 터미널</a:t>
             </a:r>
           </a:p>
         </p:txBody>
@@ -8800,8 +9065,8 @@
         </p:nvSpPr>
         <p:spPr>
           <a:xfrm>
-            <a:off x="658368" y="1682496"/>
-            <a:ext cx="10972800" cy="347472"/>
+            <a:off x="658368" y="1627632"/>
+            <a:ext cx="10972800" cy="256032"/>
           </a:xfrm>
           <a:prstGeom prst="rect">
             <a:avLst/>
@@ -8818,7 +9083,7 @@
               <a:spcAft>
                 <a:spcPts val="0"/>
               </a:spcAft>
-              <a:defRPr sz="1700" b="1">
+              <a:defRPr sz="1500" b="1">
                 <a:solidFill>
                   <a:srgbClr val="122C4E"/>
                 </a:solidFill>
@@ -8839,8 +9104,8 @@
         </p:nvSpPr>
         <p:spPr>
           <a:xfrm>
-            <a:off x="658368" y="2103120"/>
-            <a:ext cx="10972800" cy="493776"/>
+            <a:off x="658368" y="1956816"/>
+            <a:ext cx="10972800" cy="603504"/>
           </a:xfrm>
           <a:prstGeom prst="rect">
             <a:avLst/>
@@ -8884,7 +9149,11 @@
               </a:defRPr>
             </a:pPr>
             <a:r>
-              <a:t>파일 생성/열기: mkdir -p ~/agv_ws/src/agv_gazebo/models/agv    &amp;&amp;    nano ~/agv_ws/src/agv_gazebo/models/agv/model.sdf</a:t>
+              <a:t>파일 생성: mkdir -p ~/agv_ws/src/agv_gazebo/models/agv</a:t>
+            </a:r>
+            <a:br/>
+            <a:r>
+              <a:t>파일 열기: nano ~/agv_ws/src/agv_gazebo/models/agv/model.sdf</a:t>
             </a:r>
           </a:p>
         </p:txBody>
@@ -8897,8 +9166,8 @@
         </p:nvSpPr>
         <p:spPr>
           <a:xfrm>
-            <a:off x="658368" y="2761488"/>
-            <a:ext cx="10972800" cy="3383280"/>
+            <a:off x="658368" y="2706624"/>
+            <a:ext cx="10972800" cy="3364992"/>
           </a:xfrm>
           <a:prstGeom prst="rect">
             <a:avLst/>
@@ -8942,6 +9211,30 @@
               </a:defRPr>
             </a:pPr>
             <a:r>
+              <a:t>        &lt;geometry&gt;</a:t>
+            </a:r>
+            <a:br/>
+            <a:r>
+              <a:t>          &lt;box&gt;</a:t>
+            </a:r>
+            <a:br/>
+            <a:r>
+              <a:t>            &lt;size&gt;0.60 0.42 0.16&lt;/size&gt;</a:t>
+            </a:r>
+            <a:br/>
+            <a:r>
+              <a:t>          &lt;/box&gt;</a:t>
+            </a:r>
+            <a:br/>
+            <a:r>
+              <a:t>        &lt;/geometry&gt;</a:t>
+            </a:r>
+            <a:br/>
+            <a:r>
+              <a:t>      &lt;/collision&gt;</a:t>
+            </a:r>
+            <a:br/>
+            <a:r>
               <a:t>      </a:t>
             </a:r>
             <a:br/>
@@ -8963,38 +9256,6 @@
             <a:br/>
             <a:r>
               <a:t>        &lt;update_rate&gt;100&lt;/update_rate&gt;</a:t>
-            </a:r>
-            <a:br/>
-            <a:r>
-              <a:t>        &lt;imu&gt;</a:t>
-            </a:r>
-            <a:br/>
-            <a:r>
-              <a:t>          &lt;angular_velocity&gt;</a:t>
-            </a:r>
-            <a:br/>
-            <a:r>
-              <a:t>            &lt;x&gt;</a:t>
-            </a:r>
-            <a:br/>
-            <a:r>
-              <a:t>              &lt;noise type="gaussian"&gt;</a:t>
-            </a:r>
-            <a:br/>
-            <a:r>
-              <a:t>                &lt;mean&gt;0&lt;/mean&gt;</a:t>
-            </a:r>
-            <a:br/>
-            <a:r>
-              <a:t>                &lt;stddev&gt;0.001&lt;/stddev&gt;</a:t>
-            </a:r>
-            <a:br/>
-            <a:r>
-              <a:t>              &lt;/noise&gt;</a:t>
-            </a:r>
-            <a:br/>
-            <a:r>
-              <a:t>            &lt;/x&gt;</a:t>
             </a:r>
           </a:p>
         </p:txBody>
@@ -9007,7 +9268,7 @@
         </p:nvSpPr>
         <p:spPr>
           <a:xfrm>
-            <a:off x="749808" y="6199632"/>
+            <a:off x="749808" y="6181344"/>
             <a:ext cx="10789920" cy="201168"/>
           </a:xfrm>
           <a:prstGeom prst="rect">
@@ -9033,7 +9294,7 @@
               </a:defRPr>
             </a:pPr>
             <a:r>
-              <a:t>파일 전체 4/21 · 이 슬라이드 다음에 같은 파일의 나머지 줄이 이어집니다.</a:t>
+              <a:t>파일 전체 4/24 · 이 슬라이드 다음에 같은 파일의 나머지 줄이 이어집니다.</a:t>
             </a:r>
           </a:p>
         </p:txBody>
@@ -9090,7 +9351,7 @@
               </a:defRPr>
             </a:pPr>
             <a:r>
-              <a:t>파일을 계속 작성하고 저장한다 (5/21)</a:t>
+              <a:t>파일을 계속 작성하고 저장한다 (5/24)</a:t>
             </a:r>
           </a:p>
         </p:txBody>
@@ -9265,7 +9526,7 @@
               </a:defRPr>
             </a:pPr>
             <a:r>
-              <a:t>현재 단계 7/24    |    현재 폴더 ~/agv_ws    |    현재 터미널</a:t>
+              <a:t>현재 단계 7/27    |    현재 폴더 ~/agv_ws    |    현재 터미널</a:t>
             </a:r>
           </a:p>
         </p:txBody>
@@ -9278,8 +9539,8 @@
         </p:nvSpPr>
         <p:spPr>
           <a:xfrm>
-            <a:off x="658368" y="1682496"/>
-            <a:ext cx="10972800" cy="347472"/>
+            <a:off x="658368" y="1627632"/>
+            <a:ext cx="10972800" cy="256032"/>
           </a:xfrm>
           <a:prstGeom prst="rect">
             <a:avLst/>
@@ -9296,7 +9557,7 @@
               <a:spcAft>
                 <a:spcPts val="0"/>
               </a:spcAft>
-              <a:defRPr sz="1700" b="1">
+              <a:defRPr sz="1500" b="1">
                 <a:solidFill>
                   <a:srgbClr val="122C4E"/>
                 </a:solidFill>
@@ -9317,8 +9578,8 @@
         </p:nvSpPr>
         <p:spPr>
           <a:xfrm>
-            <a:off x="658368" y="2103120"/>
-            <a:ext cx="10972800" cy="493776"/>
+            <a:off x="658368" y="1956816"/>
+            <a:ext cx="10972800" cy="603504"/>
           </a:xfrm>
           <a:prstGeom prst="rect">
             <a:avLst/>
@@ -9362,7 +9623,11 @@
               </a:defRPr>
             </a:pPr>
             <a:r>
-              <a:t>파일 생성/열기: mkdir -p ~/agv_ws/src/agv_gazebo/models/agv    &amp;&amp;    nano ~/agv_ws/src/agv_gazebo/models/agv/model.sdf</a:t>
+              <a:t>파일 생성: mkdir -p ~/agv_ws/src/agv_gazebo/models/agv</a:t>
+            </a:r>
+            <a:br/>
+            <a:r>
+              <a:t>파일 열기: nano ~/agv_ws/src/agv_gazebo/models/agv/model.sdf</a:t>
             </a:r>
           </a:p>
         </p:txBody>
@@ -9375,8 +9640,8 @@
         </p:nvSpPr>
         <p:spPr>
           <a:xfrm>
-            <a:off x="658368" y="2761488"/>
-            <a:ext cx="10972800" cy="3383280"/>
+            <a:off x="658368" y="2706624"/>
+            <a:ext cx="10972800" cy="3364992"/>
           </a:xfrm>
           <a:prstGeom prst="rect">
             <a:avLst/>
@@ -9420,6 +9685,38 @@
               </a:defRPr>
             </a:pPr>
             <a:r>
+              <a:t>        &lt;imu&gt;</a:t>
+            </a:r>
+            <a:br/>
+            <a:r>
+              <a:t>          &lt;angular_velocity&gt;</a:t>
+            </a:r>
+            <a:br/>
+            <a:r>
+              <a:t>            &lt;x&gt;</a:t>
+            </a:r>
+            <a:br/>
+            <a:r>
+              <a:t>              &lt;noise type="gaussian"&gt;</a:t>
+            </a:r>
+            <a:br/>
+            <a:r>
+              <a:t>                &lt;mean&gt;0&lt;/mean&gt;</a:t>
+            </a:r>
+            <a:br/>
+            <a:r>
+              <a:t>                &lt;stddev&gt;0.001&lt;/stddev&gt;</a:t>
+            </a:r>
+            <a:br/>
+            <a:r>
+              <a:t>              &lt;/noise&gt;</a:t>
+            </a:r>
+            <a:br/>
+            <a:r>
+              <a:t>            &lt;/x&gt;</a:t>
+            </a:r>
+            <a:br/>
+            <a:r>
               <a:t>          &lt;/angular_velocity&gt;</a:t>
             </a:r>
             <a:br/>
@@ -9433,46 +9730,6 @@
             <a:br/>
             <a:r>
               <a:t>      </a:t>
-            </a:r>
-            <a:br/>
-            <a:r>
-              <a:t>    </a:t>
-            </a:r>
-            <a:br/>
-            <a:r>
-              <a:t>    &lt;/link&gt;</a:t>
-            </a:r>
-            <a:br/>
-            <a:r>
-              <a:t>    </a:t>
-            </a:r>
-            <a:br/>
-            <a:r>
-              <a:t>    </a:t>
-            </a:r>
-            <a:br/>
-            <a:r>
-              <a:t>    &lt;link name="left_wheel_link"&gt;</a:t>
-            </a:r>
-            <a:br/>
-            <a:r>
-              <a:t>      &lt;pose relative_to="base_link"&gt;0 0.19 -0.08 1.5708 0 0&lt;/pose&gt;</a:t>
-            </a:r>
-            <a:br/>
-            <a:r>
-              <a:t>      &lt;inertial&gt;</a:t>
-            </a:r>
-            <a:br/>
-            <a:r>
-              <a:t>        &lt;mass&gt;0.6&lt;/mass&gt;</a:t>
-            </a:r>
-            <a:br/>
-            <a:r>
-              <a:t>        &lt;inertia&gt;</a:t>
-            </a:r>
-            <a:br/>
-            <a:r>
-              <a:t>          &lt;ixx&gt;0.002&lt;/ixx&gt;</a:t>
             </a:r>
           </a:p>
         </p:txBody>
@@ -9485,7 +9742,7 @@
         </p:nvSpPr>
         <p:spPr>
           <a:xfrm>
-            <a:off x="749808" y="6199632"/>
+            <a:off x="749808" y="6181344"/>
             <a:ext cx="10789920" cy="201168"/>
           </a:xfrm>
           <a:prstGeom prst="rect">
@@ -9511,7 +9768,7 @@
               </a:defRPr>
             </a:pPr>
             <a:r>
-              <a:t>파일 전체 5/21 · 이 슬라이드 다음에 같은 파일의 나머지 줄이 이어집니다.</a:t>
+              <a:t>파일 전체 5/24 · 이 슬라이드 다음에 같은 파일의 나머지 줄이 이어집니다.</a:t>
             </a:r>
           </a:p>
         </p:txBody>
@@ -9568,7 +9825,7 @@
               </a:defRPr>
             </a:pPr>
             <a:r>
-              <a:t>파일을 계속 작성하고 저장한다 (6/21)</a:t>
+              <a:t>파일을 계속 작성하고 저장한다 (6/24)</a:t>
             </a:r>
           </a:p>
         </p:txBody>
@@ -9743,7 +10000,7 @@
               </a:defRPr>
             </a:pPr>
             <a:r>
-              <a:t>현재 단계 8/24    |    현재 폴더 ~/agv_ws    |    현재 터미널</a:t>
+              <a:t>현재 단계 8/27    |    현재 폴더 ~/agv_ws    |    현재 터미널</a:t>
             </a:r>
           </a:p>
         </p:txBody>
@@ -9756,8 +10013,8 @@
         </p:nvSpPr>
         <p:spPr>
           <a:xfrm>
-            <a:off x="658368" y="1682496"/>
-            <a:ext cx="10972800" cy="347472"/>
+            <a:off x="658368" y="1627632"/>
+            <a:ext cx="10972800" cy="256032"/>
           </a:xfrm>
           <a:prstGeom prst="rect">
             <a:avLst/>
@@ -9774,7 +10031,7 @@
               <a:spcAft>
                 <a:spcPts val="0"/>
               </a:spcAft>
-              <a:defRPr sz="1700" b="1">
+              <a:defRPr sz="1500" b="1">
                 <a:solidFill>
                   <a:srgbClr val="122C4E"/>
                 </a:solidFill>
@@ -9795,8 +10052,8 @@
         </p:nvSpPr>
         <p:spPr>
           <a:xfrm>
-            <a:off x="658368" y="2103120"/>
-            <a:ext cx="10972800" cy="493776"/>
+            <a:off x="658368" y="1956816"/>
+            <a:ext cx="10972800" cy="603504"/>
           </a:xfrm>
           <a:prstGeom prst="rect">
             <a:avLst/>
@@ -9840,7 +10097,11 @@
               </a:defRPr>
             </a:pPr>
             <a:r>
-              <a:t>파일 생성/열기: mkdir -p ~/agv_ws/src/agv_gazebo/models/agv    &amp;&amp;    nano ~/agv_ws/src/agv_gazebo/models/agv/model.sdf</a:t>
+              <a:t>파일 생성: mkdir -p ~/agv_ws/src/agv_gazebo/models/agv</a:t>
+            </a:r>
+            <a:br/>
+            <a:r>
+              <a:t>파일 열기: nano ~/agv_ws/src/agv_gazebo/models/agv/model.sdf</a:t>
             </a:r>
           </a:p>
         </p:txBody>
@@ -9853,8 +10114,8 @@
         </p:nvSpPr>
         <p:spPr>
           <a:xfrm>
-            <a:off x="658368" y="2761488"/>
-            <a:ext cx="10972800" cy="3383280"/>
+            <a:off x="658368" y="2706624"/>
+            <a:ext cx="10972800" cy="3364992"/>
           </a:xfrm>
           <a:prstGeom prst="rect">
             <a:avLst/>
@@ -9898,59 +10159,51 @@
               </a:defRPr>
             </a:pPr>
             <a:r>
+              <a:t>    </a:t>
+            </a:r>
+            <a:br/>
+            <a:r>
+              <a:t>    &lt;/link&gt;</a:t>
+            </a:r>
+            <a:br/>
+            <a:r>
+              <a:t>    </a:t>
+            </a:r>
+            <a:br/>
+            <a:r>
+              <a:t>    </a:t>
+            </a:r>
+            <a:br/>
+            <a:r>
+              <a:t>    &lt;link name="left_wheel_link"&gt;</a:t>
+            </a:r>
+            <a:br/>
+            <a:r>
+              <a:t>      &lt;pose relative_to="base_link"&gt;0 0.19 -0.08 1.5708 0 0&lt;/pose&gt;</a:t>
+            </a:r>
+            <a:br/>
+            <a:r>
+              <a:t>      &lt;inertial&gt;</a:t>
+            </a:r>
+            <a:br/>
+            <a:r>
+              <a:t>        &lt;mass&gt;0.6&lt;/mass&gt;</a:t>
+            </a:r>
+            <a:br/>
+            <a:r>
+              <a:t>        &lt;inertia&gt;</a:t>
+            </a:r>
+            <a:br/>
+            <a:r>
+              <a:t>          &lt;ixx&gt;0.002&lt;/ixx&gt;</a:t>
+            </a:r>
+            <a:br/>
+            <a:r>
               <a:t>          &lt;iyy&gt;0.002&lt;/iyy&gt;</a:t>
             </a:r>
             <a:br/>
             <a:r>
               <a:t>          &lt;izz&gt;0.001&lt;/izz&gt;</a:t>
-            </a:r>
-            <a:br/>
-            <a:r>
-              <a:t>        &lt;/inertia&gt;</a:t>
-            </a:r>
-            <a:br/>
-            <a:r>
-              <a:t>      &lt;/inertial&gt;</a:t>
-            </a:r>
-            <a:br/>
-            <a:r>
-              <a:t>      &lt;visual name="wheel"&gt;</a:t>
-            </a:r>
-            <a:br/>
-            <a:r>
-              <a:t>        &lt;geometry&gt;</a:t>
-            </a:r>
-            <a:br/>
-            <a:r>
-              <a:t>          &lt;cylinder&gt;</a:t>
-            </a:r>
-            <a:br/>
-            <a:r>
-              <a:t>            &lt;radius&gt;0.08&lt;/radius&gt;</a:t>
-            </a:r>
-            <a:br/>
-            <a:r>
-              <a:t>            &lt;length&gt;0.05&lt;/length&gt;</a:t>
-            </a:r>
-            <a:br/>
-            <a:r>
-              <a:t>          &lt;/cylinder&gt;</a:t>
-            </a:r>
-            <a:br/>
-            <a:r>
-              <a:t>        &lt;/geometry&gt;</a:t>
-            </a:r>
-            <a:br/>
-            <a:r>
-              <a:t>      &lt;/visual&gt;</a:t>
-            </a:r>
-            <a:br/>
-            <a:r>
-              <a:t>      &lt;collision name="wheel_collision"&gt;</a:t>
-            </a:r>
-            <a:br/>
-            <a:r>
-              <a:t>        &lt;geometry&gt;</a:t>
             </a:r>
           </a:p>
         </p:txBody>
@@ -9963,7 +10216,7 @@
         </p:nvSpPr>
         <p:spPr>
           <a:xfrm>
-            <a:off x="749808" y="6199632"/>
+            <a:off x="749808" y="6181344"/>
             <a:ext cx="10789920" cy="201168"/>
           </a:xfrm>
           <a:prstGeom prst="rect">
@@ -9989,7 +10242,7 @@
               </a:defRPr>
             </a:pPr>
             <a:r>
-              <a:t>파일 전체 6/21 · 이 슬라이드 다음에 같은 파일의 나머지 줄이 이어집니다.</a:t>
+              <a:t>파일 전체 6/24 · 이 슬라이드 다음에 같은 파일의 나머지 줄이 이어집니다.</a:t>
             </a:r>
           </a:p>
         </p:txBody>
@@ -10046,7 +10299,7 @@
               </a:defRPr>
             </a:pPr>
             <a:r>
-              <a:t>파일을 계속 작성하고 저장한다 (7/21)</a:t>
+              <a:t>파일을 계속 작성하고 저장한다 (7/24)</a:t>
             </a:r>
           </a:p>
         </p:txBody>
@@ -10221,7 +10474,7 @@
               </a:defRPr>
             </a:pPr>
             <a:r>
-              <a:t>현재 단계 9/24    |    현재 폴더 ~/agv_ws    |    현재 터미널</a:t>
+              <a:t>현재 단계 9/27    |    현재 폴더 ~/agv_ws    |    현재 터미널</a:t>
             </a:r>
           </a:p>
         </p:txBody>
@@ -10234,8 +10487,8 @@
         </p:nvSpPr>
         <p:spPr>
           <a:xfrm>
-            <a:off x="658368" y="1682496"/>
-            <a:ext cx="10972800" cy="347472"/>
+            <a:off x="658368" y="1627632"/>
+            <a:ext cx="10972800" cy="256032"/>
           </a:xfrm>
           <a:prstGeom prst="rect">
             <a:avLst/>
@@ -10252,7 +10505,7 @@
               <a:spcAft>
                 <a:spcPts val="0"/>
               </a:spcAft>
-              <a:defRPr sz="1700" b="1">
+              <a:defRPr sz="1500" b="1">
                 <a:solidFill>
                   <a:srgbClr val="122C4E"/>
                 </a:solidFill>
@@ -10273,8 +10526,8 @@
         </p:nvSpPr>
         <p:spPr>
           <a:xfrm>
-            <a:off x="658368" y="2103120"/>
-            <a:ext cx="10972800" cy="493776"/>
+            <a:off x="658368" y="1956816"/>
+            <a:ext cx="10972800" cy="603504"/>
           </a:xfrm>
           <a:prstGeom prst="rect">
             <a:avLst/>
@@ -10318,7 +10571,11 @@
               </a:defRPr>
             </a:pPr>
             <a:r>
-              <a:t>파일 생성/열기: mkdir -p ~/agv_ws/src/agv_gazebo/models/agv    &amp;&amp;    nano ~/agv_ws/src/agv_gazebo/models/agv/model.sdf</a:t>
+              <a:t>파일 생성: mkdir -p ~/agv_ws/src/agv_gazebo/models/agv</a:t>
+            </a:r>
+            <a:br/>
+            <a:r>
+              <a:t>파일 열기: nano ~/agv_ws/src/agv_gazebo/models/agv/model.sdf</a:t>
             </a:r>
           </a:p>
         </p:txBody>
@@ -10331,8 +10588,8 @@
         </p:nvSpPr>
         <p:spPr>
           <a:xfrm>
-            <a:off x="658368" y="2761488"/>
-            <a:ext cx="10972800" cy="3383280"/>
+            <a:off x="658368" y="2706624"/>
+            <a:ext cx="10972800" cy="3364992"/>
           </a:xfrm>
           <a:prstGeom prst="rect">
             <a:avLst/>
@@ -10376,6 +10633,22 @@
               </a:defRPr>
             </a:pPr>
             <a:r>
+              <a:t>        &lt;/inertia&gt;</a:t>
+            </a:r>
+            <a:br/>
+            <a:r>
+              <a:t>      &lt;/inertial&gt;</a:t>
+            </a:r>
+            <a:br/>
+            <a:r>
+              <a:t>      &lt;visual name="wheel"&gt;</a:t>
+            </a:r>
+            <a:br/>
+            <a:r>
+              <a:t>        &lt;geometry&gt;</a:t>
+            </a:r>
+            <a:br/>
+            <a:r>
               <a:t>          &lt;cylinder&gt;</a:t>
             </a:r>
             <a:br/>
@@ -10396,39 +10669,15 @@
             </a:r>
             <a:br/>
             <a:r>
-              <a:t>        &lt;surface&gt;</a:t>
-            </a:r>
-            <a:br/>
-            <a:r>
-              <a:t>          &lt;friction&gt;</a:t>
-            </a:r>
-            <a:br/>
-            <a:r>
-              <a:t>            &lt;ode&gt;</a:t>
-            </a:r>
-            <a:br/>
-            <a:r>
-              <a:t>              &lt;mu&gt;1.0&lt;/mu&gt;</a:t>
-            </a:r>
-            <a:br/>
-            <a:r>
-              <a:t>              &lt;mu2&gt;1.0&lt;/mu2&gt;</a:t>
-            </a:r>
-            <a:br/>
-            <a:r>
-              <a:t>            &lt;/ode&gt;</a:t>
-            </a:r>
-            <a:br/>
-            <a:r>
-              <a:t>          &lt;/friction&gt;</a:t>
-            </a:r>
-            <a:br/>
-            <a:r>
-              <a:t>        &lt;/surface&gt;</a:t>
-            </a:r>
-            <a:br/>
-            <a:r>
-              <a:t>      &lt;/collision&gt;</a:t>
+              <a:t>      &lt;/visual&gt;</a:t>
+            </a:r>
+            <a:br/>
+            <a:r>
+              <a:t>      &lt;collision name="wheel_collision"&gt;</a:t>
+            </a:r>
+            <a:br/>
+            <a:r>
+              <a:t>        &lt;geometry&gt;</a:t>
             </a:r>
           </a:p>
         </p:txBody>
@@ -10441,7 +10690,7 @@
         </p:nvSpPr>
         <p:spPr>
           <a:xfrm>
-            <a:off x="749808" y="6199632"/>
+            <a:off x="749808" y="6181344"/>
             <a:ext cx="10789920" cy="201168"/>
           </a:xfrm>
           <a:prstGeom prst="rect">
@@ -10467,7 +10716,7 @@
               </a:defRPr>
             </a:pPr>
             <a:r>
-              <a:t>파일 전체 7/21 · 이 슬라이드 다음에 같은 파일의 나머지 줄이 이어집니다.</a:t>
+              <a:t>파일 전체 7/24 · 이 슬라이드 다음에 같은 파일의 나머지 줄이 이어집니다.</a:t>
             </a:r>
           </a:p>
         </p:txBody>
@@ -10524,7 +10773,7 @@
               </a:defRPr>
             </a:pPr>
             <a:r>
-              <a:t>파일을 계속 작성하고 저장한다 (8/21)</a:t>
+              <a:t>파일을 계속 작성하고 저장한다 (8/24)</a:t>
             </a:r>
           </a:p>
         </p:txBody>
@@ -10699,7 +10948,7 @@
               </a:defRPr>
             </a:pPr>
             <a:r>
-              <a:t>현재 단계 10/24    |    현재 폴더 ~/agv_ws    |    현재 터미널</a:t>
+              <a:t>현재 단계 10/27    |    현재 폴더 ~/agv_ws    |    현재 터미널</a:t>
             </a:r>
           </a:p>
         </p:txBody>
@@ -10712,8 +10961,8 @@
         </p:nvSpPr>
         <p:spPr>
           <a:xfrm>
-            <a:off x="658368" y="1682496"/>
-            <a:ext cx="10972800" cy="347472"/>
+            <a:off x="658368" y="1627632"/>
+            <a:ext cx="10972800" cy="256032"/>
           </a:xfrm>
           <a:prstGeom prst="rect">
             <a:avLst/>
@@ -10730,7 +10979,7 @@
               <a:spcAft>
                 <a:spcPts val="0"/>
               </a:spcAft>
-              <a:defRPr sz="1700" b="1">
+              <a:defRPr sz="1500" b="1">
                 <a:solidFill>
                   <a:srgbClr val="122C4E"/>
                 </a:solidFill>
@@ -10751,8 +11000,8 @@
         </p:nvSpPr>
         <p:spPr>
           <a:xfrm>
-            <a:off x="658368" y="2103120"/>
-            <a:ext cx="10972800" cy="493776"/>
+            <a:off x="658368" y="1956816"/>
+            <a:ext cx="10972800" cy="603504"/>
           </a:xfrm>
           <a:prstGeom prst="rect">
             <a:avLst/>
@@ -10796,7 +11045,11 @@
               </a:defRPr>
             </a:pPr>
             <a:r>
-              <a:t>파일 생성/열기: mkdir -p ~/agv_ws/src/agv_gazebo/models/agv    &amp;&amp;    nano ~/agv_ws/src/agv_gazebo/models/agv/model.sdf</a:t>
+              <a:t>파일 생성: mkdir -p ~/agv_ws/src/agv_gazebo/models/agv</a:t>
+            </a:r>
+            <a:br/>
+            <a:r>
+              <a:t>파일 열기: nano ~/agv_ws/src/agv_gazebo/models/agv/model.sdf</a:t>
             </a:r>
           </a:p>
         </p:txBody>
@@ -10809,8 +11062,8 @@
         </p:nvSpPr>
         <p:spPr>
           <a:xfrm>
-            <a:off x="658368" y="2761488"/>
-            <a:ext cx="10972800" cy="3383280"/>
+            <a:off x="658368" y="2706624"/>
+            <a:ext cx="10972800" cy="3364992"/>
           </a:xfrm>
           <a:prstGeom prst="rect">
             <a:avLst/>
@@ -10854,59 +11107,51 @@
               </a:defRPr>
             </a:pPr>
             <a:r>
-              <a:t>    &lt;/link&gt;</a:t>
-            </a:r>
-            <a:br/>
-            <a:r>
-              <a:t>    </a:t>
-            </a:r>
-            <a:br/>
-            <a:r>
-              <a:t>    </a:t>
-            </a:r>
-            <a:br/>
-            <a:r>
-              <a:t>    &lt;link name="right_wheel_link"&gt;</a:t>
-            </a:r>
-            <a:br/>
-            <a:r>
-              <a:t>      &lt;pose relative_to="base_link"&gt;0 -0.19 -0.08 1.5708 0 0&lt;/pose&gt;</a:t>
-            </a:r>
-            <a:br/>
-            <a:r>
-              <a:t>      &lt;inertial&gt;</a:t>
-            </a:r>
-            <a:br/>
-            <a:r>
-              <a:t>        &lt;mass&gt;0.6&lt;/mass&gt;</a:t>
-            </a:r>
-            <a:br/>
-            <a:r>
-              <a:t>        &lt;inertia&gt;</a:t>
-            </a:r>
-            <a:br/>
-            <a:r>
-              <a:t>          &lt;ixx&gt;0.002&lt;/ixx&gt;</a:t>
-            </a:r>
-            <a:br/>
-            <a:r>
-              <a:t>          &lt;iyy&gt;0.002&lt;/iyy&gt;</a:t>
-            </a:r>
-            <a:br/>
-            <a:r>
-              <a:t>          &lt;izz&gt;0.001&lt;/izz&gt;</a:t>
-            </a:r>
-            <a:br/>
-            <a:r>
-              <a:t>        &lt;/inertia&gt;</a:t>
-            </a:r>
-            <a:br/>
-            <a:r>
-              <a:t>      &lt;/inertial&gt;</a:t>
-            </a:r>
-            <a:br/>
-            <a:r>
-              <a:t>      &lt;visual name="wheel"&gt;</a:t>
+              <a:t>          &lt;cylinder&gt;</a:t>
+            </a:r>
+            <a:br/>
+            <a:r>
+              <a:t>            &lt;radius&gt;0.08&lt;/radius&gt;</a:t>
+            </a:r>
+            <a:br/>
+            <a:r>
+              <a:t>            &lt;length&gt;0.05&lt;/length&gt;</a:t>
+            </a:r>
+            <a:br/>
+            <a:r>
+              <a:t>          &lt;/cylinder&gt;</a:t>
+            </a:r>
+            <a:br/>
+            <a:r>
+              <a:t>        &lt;/geometry&gt;</a:t>
+            </a:r>
+            <a:br/>
+            <a:r>
+              <a:t>        &lt;surface&gt;</a:t>
+            </a:r>
+            <a:br/>
+            <a:r>
+              <a:t>          &lt;friction&gt;</a:t>
+            </a:r>
+            <a:br/>
+            <a:r>
+              <a:t>            &lt;ode&gt;</a:t>
+            </a:r>
+            <a:br/>
+            <a:r>
+              <a:t>              &lt;mu&gt;1.0&lt;/mu&gt;</a:t>
+            </a:r>
+            <a:br/>
+            <a:r>
+              <a:t>              &lt;mu2&gt;1.0&lt;/mu2&gt;</a:t>
+            </a:r>
+            <a:br/>
+            <a:r>
+              <a:t>            &lt;/ode&gt;</a:t>
+            </a:r>
+            <a:br/>
+            <a:r>
+              <a:t>          &lt;/friction&gt;</a:t>
             </a:r>
           </a:p>
         </p:txBody>
@@ -10919,7 +11164,7 @@
         </p:nvSpPr>
         <p:spPr>
           <a:xfrm>
-            <a:off x="749808" y="6199632"/>
+            <a:off x="749808" y="6181344"/>
             <a:ext cx="10789920" cy="201168"/>
           </a:xfrm>
           <a:prstGeom prst="rect">
@@ -10945,7 +11190,7 @@
               </a:defRPr>
             </a:pPr>
             <a:r>
-              <a:t>파일 전체 8/21 · 이 슬라이드 다음에 같은 파일의 나머지 줄이 이어집니다.</a:t>
+              <a:t>파일 전체 8/24 · 이 슬라이드 다음에 같은 파일의 나머지 줄이 이어집니다.</a:t>
             </a:r>
           </a:p>
         </p:txBody>
@@ -11002,7 +11247,7 @@
               </a:defRPr>
             </a:pPr>
             <a:r>
-              <a:t>파일을 계속 작성하고 저장한다 (9/21)</a:t>
+              <a:t>파일을 계속 작성하고 저장한다 (9/24)</a:t>
             </a:r>
           </a:p>
         </p:txBody>
@@ -11177,7 +11422,7 @@
               </a:defRPr>
             </a:pPr>
             <a:r>
-              <a:t>현재 단계 11/24    |    현재 폴더 ~/agv_ws    |    현재 터미널</a:t>
+              <a:t>현재 단계 11/27    |    현재 폴더 ~/agv_ws    |    현재 터미널</a:t>
             </a:r>
           </a:p>
         </p:txBody>
@@ -11190,8 +11435,8 @@
         </p:nvSpPr>
         <p:spPr>
           <a:xfrm>
-            <a:off x="658368" y="1682496"/>
-            <a:ext cx="10972800" cy="347472"/>
+            <a:off x="658368" y="1627632"/>
+            <a:ext cx="10972800" cy="256032"/>
           </a:xfrm>
           <a:prstGeom prst="rect">
             <a:avLst/>
@@ -11208,7 +11453,7 @@
               <a:spcAft>
                 <a:spcPts val="0"/>
               </a:spcAft>
-              <a:defRPr sz="1700" b="1">
+              <a:defRPr sz="1500" b="1">
                 <a:solidFill>
                   <a:srgbClr val="122C4E"/>
                 </a:solidFill>
@@ -11229,8 +11474,8 @@
         </p:nvSpPr>
         <p:spPr>
           <a:xfrm>
-            <a:off x="658368" y="2103120"/>
-            <a:ext cx="10972800" cy="493776"/>
+            <a:off x="658368" y="1956816"/>
+            <a:ext cx="10972800" cy="603504"/>
           </a:xfrm>
           <a:prstGeom prst="rect">
             <a:avLst/>
@@ -11274,7 +11519,11 @@
               </a:defRPr>
             </a:pPr>
             <a:r>
-              <a:t>파일 생성/열기: mkdir -p ~/agv_ws/src/agv_gazebo/models/agv    &amp;&amp;    nano ~/agv_ws/src/agv_gazebo/models/agv/model.sdf</a:t>
+              <a:t>파일 생성: mkdir -p ~/agv_ws/src/agv_gazebo/models/agv</a:t>
+            </a:r>
+            <a:br/>
+            <a:r>
+              <a:t>파일 열기: nano ~/agv_ws/src/agv_gazebo/models/agv/model.sdf</a:t>
             </a:r>
           </a:p>
         </p:txBody>
@@ -11287,8 +11536,8 @@
         </p:nvSpPr>
         <p:spPr>
           <a:xfrm>
-            <a:off x="658368" y="2761488"/>
-            <a:ext cx="10972800" cy="3383280"/>
+            <a:off x="658368" y="2706624"/>
+            <a:ext cx="10972800" cy="3364992"/>
           </a:xfrm>
           <a:prstGeom prst="rect">
             <a:avLst/>
@@ -11332,59 +11581,51 @@
               </a:defRPr>
             </a:pPr>
             <a:r>
-              <a:t>        &lt;geometry&gt;</a:t>
-            </a:r>
-            <a:br/>
-            <a:r>
-              <a:t>          &lt;cylinder&gt;</a:t>
-            </a:r>
-            <a:br/>
-            <a:r>
-              <a:t>            &lt;radius&gt;0.08&lt;/radius&gt;</a:t>
-            </a:r>
-            <a:br/>
-            <a:r>
-              <a:t>            &lt;length&gt;0.05&lt;/length&gt;</a:t>
-            </a:r>
-            <a:br/>
-            <a:r>
-              <a:t>          &lt;/cylinder&gt;</a:t>
-            </a:r>
-            <a:br/>
-            <a:r>
-              <a:t>        &lt;/geometry&gt;</a:t>
-            </a:r>
-            <a:br/>
-            <a:r>
-              <a:t>      &lt;/visual&gt;</a:t>
-            </a:r>
-            <a:br/>
-            <a:r>
-              <a:t>      &lt;collision name="wheel_collision"&gt;</a:t>
-            </a:r>
-            <a:br/>
-            <a:r>
-              <a:t>        &lt;geometry&gt;</a:t>
-            </a:r>
-            <a:br/>
-            <a:r>
-              <a:t>          &lt;cylinder&gt;</a:t>
-            </a:r>
-            <a:br/>
-            <a:r>
-              <a:t>            &lt;radius&gt;0.08&lt;/radius&gt;</a:t>
-            </a:r>
-            <a:br/>
-            <a:r>
-              <a:t>            &lt;length&gt;0.05&lt;/length&gt;</a:t>
-            </a:r>
-            <a:br/>
-            <a:r>
-              <a:t>          &lt;/cylinder&gt;</a:t>
-            </a:r>
-            <a:br/>
-            <a:r>
-              <a:t>        &lt;/geometry&gt;</a:t>
+              <a:t>        &lt;/surface&gt;</a:t>
+            </a:r>
+            <a:br/>
+            <a:r>
+              <a:t>      &lt;/collision&gt;</a:t>
+            </a:r>
+            <a:br/>
+            <a:r>
+              <a:t>    &lt;/link&gt;</a:t>
+            </a:r>
+            <a:br/>
+            <a:r>
+              <a:t>    </a:t>
+            </a:r>
+            <a:br/>
+            <a:r>
+              <a:t>    </a:t>
+            </a:r>
+            <a:br/>
+            <a:r>
+              <a:t>    &lt;link name="right_wheel_link"&gt;</a:t>
+            </a:r>
+            <a:br/>
+            <a:r>
+              <a:t>      &lt;pose relative_to="base_link"&gt;0 -0.19 -0.08 1.5708 0 0&lt;/pose&gt;</a:t>
+            </a:r>
+            <a:br/>
+            <a:r>
+              <a:t>      &lt;inertial&gt;</a:t>
+            </a:r>
+            <a:br/>
+            <a:r>
+              <a:t>        &lt;mass&gt;0.6&lt;/mass&gt;</a:t>
+            </a:r>
+            <a:br/>
+            <a:r>
+              <a:t>        &lt;inertia&gt;</a:t>
+            </a:r>
+            <a:br/>
+            <a:r>
+              <a:t>          &lt;ixx&gt;0.002&lt;/ixx&gt;</a:t>
+            </a:r>
+            <a:br/>
+            <a:r>
+              <a:t>          &lt;iyy&gt;0.002&lt;/iyy&gt;</a:t>
             </a:r>
           </a:p>
         </p:txBody>
@@ -11397,7 +11638,7 @@
         </p:nvSpPr>
         <p:spPr>
           <a:xfrm>
-            <a:off x="749808" y="6199632"/>
+            <a:off x="749808" y="6181344"/>
             <a:ext cx="10789920" cy="201168"/>
           </a:xfrm>
           <a:prstGeom prst="rect">
@@ -11423,7 +11664,7 @@
               </a:defRPr>
             </a:pPr>
             <a:r>
-              <a:t>파일 전체 9/21 · 이 슬라이드 다음에 같은 파일의 나머지 줄이 이어집니다.</a:t>
+              <a:t>파일 전체 9/24 · 이 슬라이드 다음에 같은 파일의 나머지 줄이 이어집니다.</a:t>
             </a:r>
           </a:p>
         </p:txBody>
@@ -11480,7 +11721,7 @@
               </a:defRPr>
             </a:pPr>
             <a:r>
-              <a:t>파일을 계속 작성하고 저장한다 (10/21)</a:t>
+              <a:t>파일을 계속 작성하고 저장한다 (10/24)</a:t>
             </a:r>
           </a:p>
         </p:txBody>
@@ -11655,7 +11896,7 @@
               </a:defRPr>
             </a:pPr>
             <a:r>
-              <a:t>현재 단계 12/24    |    현재 폴더 ~/agv_ws    |    현재 터미널</a:t>
+              <a:t>현재 단계 12/27    |    현재 폴더 ~/agv_ws    |    현재 터미널</a:t>
             </a:r>
           </a:p>
         </p:txBody>
@@ -11668,8 +11909,8 @@
         </p:nvSpPr>
         <p:spPr>
           <a:xfrm>
-            <a:off x="658368" y="1682496"/>
-            <a:ext cx="10972800" cy="347472"/>
+            <a:off x="658368" y="1627632"/>
+            <a:ext cx="10972800" cy="256032"/>
           </a:xfrm>
           <a:prstGeom prst="rect">
             <a:avLst/>
@@ -11686,7 +11927,7 @@
               <a:spcAft>
                 <a:spcPts val="0"/>
               </a:spcAft>
-              <a:defRPr sz="1700" b="1">
+              <a:defRPr sz="1500" b="1">
                 <a:solidFill>
                   <a:srgbClr val="122C4E"/>
                 </a:solidFill>
@@ -11707,8 +11948,8 @@
         </p:nvSpPr>
         <p:spPr>
           <a:xfrm>
-            <a:off x="658368" y="2103120"/>
-            <a:ext cx="10972800" cy="493776"/>
+            <a:off x="658368" y="1956816"/>
+            <a:ext cx="10972800" cy="603504"/>
           </a:xfrm>
           <a:prstGeom prst="rect">
             <a:avLst/>
@@ -11752,7 +11993,11 @@
               </a:defRPr>
             </a:pPr>
             <a:r>
-              <a:t>파일 생성/열기: mkdir -p ~/agv_ws/src/agv_gazebo/models/agv    &amp;&amp;    nano ~/agv_ws/src/agv_gazebo/models/agv/model.sdf</a:t>
+              <a:t>파일 생성: mkdir -p ~/agv_ws/src/agv_gazebo/models/agv</a:t>
+            </a:r>
+            <a:br/>
+            <a:r>
+              <a:t>파일 열기: nano ~/agv_ws/src/agv_gazebo/models/agv/model.sdf</a:t>
             </a:r>
           </a:p>
         </p:txBody>
@@ -11765,8 +12010,8 @@
         </p:nvSpPr>
         <p:spPr>
           <a:xfrm>
-            <a:off x="658368" y="2761488"/>
-            <a:ext cx="10972800" cy="3383280"/>
+            <a:off x="658368" y="2706624"/>
+            <a:ext cx="10972800" cy="3364992"/>
           </a:xfrm>
           <a:prstGeom prst="rect">
             <a:avLst/>
@@ -11810,59 +12055,51 @@
               </a:defRPr>
             </a:pPr>
             <a:r>
-              <a:t>        &lt;surface&gt;</a:t>
-            </a:r>
-            <a:br/>
-            <a:r>
-              <a:t>          &lt;friction&gt;</a:t>
-            </a:r>
-            <a:br/>
-            <a:r>
-              <a:t>            &lt;ode&gt;</a:t>
-            </a:r>
-            <a:br/>
-            <a:r>
-              <a:t>              &lt;mu&gt;1.0&lt;/mu&gt;</a:t>
-            </a:r>
-            <a:br/>
-            <a:r>
-              <a:t>              &lt;mu2&gt;1.0&lt;/mu2&gt;</a:t>
-            </a:r>
-            <a:br/>
-            <a:r>
-              <a:t>            &lt;/ode&gt;</a:t>
-            </a:r>
-            <a:br/>
-            <a:r>
-              <a:t>          &lt;/friction&gt;</a:t>
-            </a:r>
-            <a:br/>
-            <a:r>
-              <a:t>        &lt;/surface&gt;</a:t>
-            </a:r>
-            <a:br/>
-            <a:r>
-              <a:t>      &lt;/collision&gt;</a:t>
-            </a:r>
-            <a:br/>
-            <a:r>
-              <a:t>    &lt;/link&gt;</a:t>
-            </a:r>
-            <a:br/>
-            <a:r>
-              <a:t>    </a:t>
-            </a:r>
-            <a:br/>
-            <a:r>
-              <a:t>    </a:t>
-            </a:r>
-            <a:br/>
-            <a:r>
-              <a:t>    &lt;joint name="left_wheel_joint" type="revolute"&gt;</a:t>
-            </a:r>
-            <a:br/>
-            <a:r>
-              <a:t>      &lt;parent&gt;base_link&lt;/parent&gt;</a:t>
+              <a:t>          &lt;izz&gt;0.001&lt;/izz&gt;</a:t>
+            </a:r>
+            <a:br/>
+            <a:r>
+              <a:t>        &lt;/inertia&gt;</a:t>
+            </a:r>
+            <a:br/>
+            <a:r>
+              <a:t>      &lt;/inertial&gt;</a:t>
+            </a:r>
+            <a:br/>
+            <a:r>
+              <a:t>      &lt;visual name="wheel"&gt;</a:t>
+            </a:r>
+            <a:br/>
+            <a:r>
+              <a:t>        &lt;geometry&gt;</a:t>
+            </a:r>
+            <a:br/>
+            <a:r>
+              <a:t>          &lt;cylinder&gt;</a:t>
+            </a:r>
+            <a:br/>
+            <a:r>
+              <a:t>            &lt;radius&gt;0.08&lt;/radius&gt;</a:t>
+            </a:r>
+            <a:br/>
+            <a:r>
+              <a:t>            &lt;length&gt;0.05&lt;/length&gt;</a:t>
+            </a:r>
+            <a:br/>
+            <a:r>
+              <a:t>          &lt;/cylinder&gt;</a:t>
+            </a:r>
+            <a:br/>
+            <a:r>
+              <a:t>        &lt;/geometry&gt;</a:t>
+            </a:r>
+            <a:br/>
+            <a:r>
+              <a:t>      &lt;/visual&gt;</a:t>
+            </a:r>
+            <a:br/>
+            <a:r>
+              <a:t>      &lt;collision name="wheel_collision"&gt;</a:t>
             </a:r>
           </a:p>
         </p:txBody>
@@ -11875,7 +12112,7 @@
         </p:nvSpPr>
         <p:spPr>
           <a:xfrm>
-            <a:off x="749808" y="6199632"/>
+            <a:off x="749808" y="6181344"/>
             <a:ext cx="10789920" cy="201168"/>
           </a:xfrm>
           <a:prstGeom prst="rect">
@@ -11901,7 +12138,7 @@
               </a:defRPr>
             </a:pPr>
             <a:r>
-              <a:t>파일 전체 10/21 · 이 슬라이드 다음에 같은 파일의 나머지 줄이 이어집니다.</a:t>
+              <a:t>파일 전체 10/24 · 이 슬라이드 다음에 같은 파일의 나머지 줄이 이어집니다.</a:t>
             </a:r>
           </a:p>
         </p:txBody>
@@ -11958,7 +12195,7 @@
               </a:defRPr>
             </a:pPr>
             <a:r>
-              <a:t>파일을 계속 작성하고 저장한다 (11/21)</a:t>
+              <a:t>파일을 계속 작성하고 저장한다 (11/24)</a:t>
             </a:r>
           </a:p>
         </p:txBody>
@@ -12133,7 +12370,7 @@
               </a:defRPr>
             </a:pPr>
             <a:r>
-              <a:t>현재 단계 13/24    |    현재 폴더 ~/agv_ws    |    현재 터미널</a:t>
+              <a:t>현재 단계 13/27    |    현재 폴더 ~/agv_ws    |    현재 터미널</a:t>
             </a:r>
           </a:p>
         </p:txBody>
@@ -12146,8 +12383,8 @@
         </p:nvSpPr>
         <p:spPr>
           <a:xfrm>
-            <a:off x="658368" y="1682496"/>
-            <a:ext cx="10972800" cy="347472"/>
+            <a:off x="658368" y="1627632"/>
+            <a:ext cx="10972800" cy="256032"/>
           </a:xfrm>
           <a:prstGeom prst="rect">
             <a:avLst/>
@@ -12164,7 +12401,7 @@
               <a:spcAft>
                 <a:spcPts val="0"/>
               </a:spcAft>
-              <a:defRPr sz="1700" b="1">
+              <a:defRPr sz="1500" b="1">
                 <a:solidFill>
                   <a:srgbClr val="122C4E"/>
                 </a:solidFill>
@@ -12185,8 +12422,8 @@
         </p:nvSpPr>
         <p:spPr>
           <a:xfrm>
-            <a:off x="658368" y="2103120"/>
-            <a:ext cx="10972800" cy="493776"/>
+            <a:off x="658368" y="1956816"/>
+            <a:ext cx="10972800" cy="603504"/>
           </a:xfrm>
           <a:prstGeom prst="rect">
             <a:avLst/>
@@ -12230,7 +12467,11 @@
               </a:defRPr>
             </a:pPr>
             <a:r>
-              <a:t>파일 생성/열기: mkdir -p ~/agv_ws/src/agv_gazebo/models/agv    &amp;&amp;    nano ~/agv_ws/src/agv_gazebo/models/agv/model.sdf</a:t>
+              <a:t>파일 생성: mkdir -p ~/agv_ws/src/agv_gazebo/models/agv</a:t>
+            </a:r>
+            <a:br/>
+            <a:r>
+              <a:t>파일 열기: nano ~/agv_ws/src/agv_gazebo/models/agv/model.sdf</a:t>
             </a:r>
           </a:p>
         </p:txBody>
@@ -12243,8 +12484,8 @@
         </p:nvSpPr>
         <p:spPr>
           <a:xfrm>
-            <a:off x="658368" y="2761488"/>
-            <a:ext cx="10972800" cy="3383280"/>
+            <a:off x="658368" y="2706624"/>
+            <a:ext cx="10972800" cy="3364992"/>
           </a:xfrm>
           <a:prstGeom prst="rect">
             <a:avLst/>
@@ -12288,59 +12529,51 @@
               </a:defRPr>
             </a:pPr>
             <a:r>
-              <a:t>      &lt;child&gt;left_wheel_link&lt;/child&gt;</a:t>
-            </a:r>
-            <a:br/>
-            <a:r>
-              <a:t>      &lt;axis&gt;</a:t>
-            </a:r>
-            <a:br/>
-            <a:r>
-              <a:t>        &lt;xyz&gt;0 1 0&lt;/xyz&gt;</a:t>
-            </a:r>
-            <a:br/>
-            <a:r>
-              <a:t>        &lt;limit&gt;</a:t>
-            </a:r>
-            <a:br/>
-            <a:r>
-              <a:t>          &lt;lower&gt;-1e16&lt;/lower&gt;</a:t>
-            </a:r>
-            <a:br/>
-            <a:r>
-              <a:t>          &lt;upper&gt;1e16&lt;/upper&gt;</a:t>
-            </a:r>
-            <a:br/>
-            <a:r>
-              <a:t>        &lt;/limit&gt;</a:t>
-            </a:r>
-            <a:br/>
-            <a:r>
-              <a:t>      &lt;/axis&gt;</a:t>
-            </a:r>
-            <a:br/>
-            <a:r>
-              <a:t>    &lt;/joint&gt;</a:t>
-            </a:r>
-            <a:br/>
-            <a:r>
-              <a:t>    </a:t>
-            </a:r>
-            <a:br/>
-            <a:r>
-              <a:t>    </a:t>
-            </a:r>
-            <a:br/>
-            <a:r>
-              <a:t>    &lt;joint name="right_wheel_joint" type="revolute"&gt;</a:t>
-            </a:r>
-            <a:br/>
-            <a:r>
-              <a:t>      &lt;parent&gt;base_link&lt;/parent&gt;</a:t>
-            </a:r>
-            <a:br/>
-            <a:r>
-              <a:t>      &lt;child&gt;right_wheel_link&lt;/child&gt;</a:t>
+              <a:t>        &lt;geometry&gt;</a:t>
+            </a:r>
+            <a:br/>
+            <a:r>
+              <a:t>          &lt;cylinder&gt;</a:t>
+            </a:r>
+            <a:br/>
+            <a:r>
+              <a:t>            &lt;radius&gt;0.08&lt;/radius&gt;</a:t>
+            </a:r>
+            <a:br/>
+            <a:r>
+              <a:t>            &lt;length&gt;0.05&lt;/length&gt;</a:t>
+            </a:r>
+            <a:br/>
+            <a:r>
+              <a:t>          &lt;/cylinder&gt;</a:t>
+            </a:r>
+            <a:br/>
+            <a:r>
+              <a:t>        &lt;/geometry&gt;</a:t>
+            </a:r>
+            <a:br/>
+            <a:r>
+              <a:t>        &lt;surface&gt;</a:t>
+            </a:r>
+            <a:br/>
+            <a:r>
+              <a:t>          &lt;friction&gt;</a:t>
+            </a:r>
+            <a:br/>
+            <a:r>
+              <a:t>            &lt;ode&gt;</a:t>
+            </a:r>
+            <a:br/>
+            <a:r>
+              <a:t>              &lt;mu&gt;1.0&lt;/mu&gt;</a:t>
+            </a:r>
+            <a:br/>
+            <a:r>
+              <a:t>              &lt;mu2&gt;1.0&lt;/mu2&gt;</a:t>
+            </a:r>
+            <a:br/>
+            <a:r>
+              <a:t>            &lt;/ode&gt;</a:t>
             </a:r>
           </a:p>
         </p:txBody>
@@ -12353,7 +12586,7 @@
         </p:nvSpPr>
         <p:spPr>
           <a:xfrm>
-            <a:off x="749808" y="6199632"/>
+            <a:off x="749808" y="6181344"/>
             <a:ext cx="10789920" cy="201168"/>
           </a:xfrm>
           <a:prstGeom prst="rect">
@@ -12379,7 +12612,7 @@
               </a:defRPr>
             </a:pPr>
             <a:r>
-              <a:t>파일 전체 11/21 · 이 슬라이드 다음에 같은 파일의 나머지 줄이 이어집니다.</a:t>
+              <a:t>파일 전체 11/24 · 이 슬라이드 다음에 같은 파일의 나머지 줄이 이어집니다.</a:t>
             </a:r>
           </a:p>
         </p:txBody>
@@ -12897,7 +13130,7 @@
               </a:defRPr>
             </a:pPr>
             <a:r>
-              <a:t>파일을 계속 작성하고 저장한다 (12/21)</a:t>
+              <a:t>파일을 계속 작성하고 저장한다 (12/24)</a:t>
             </a:r>
           </a:p>
         </p:txBody>
@@ -13072,7 +13305,7 @@
               </a:defRPr>
             </a:pPr>
             <a:r>
-              <a:t>현재 단계 14/24    |    현재 폴더 ~/agv_ws    |    현재 터미널</a:t>
+              <a:t>현재 단계 14/27    |    현재 폴더 ~/agv_ws    |    현재 터미널</a:t>
             </a:r>
           </a:p>
         </p:txBody>
@@ -13085,8 +13318,8 @@
         </p:nvSpPr>
         <p:spPr>
           <a:xfrm>
-            <a:off x="658368" y="1682496"/>
-            <a:ext cx="10972800" cy="347472"/>
+            <a:off x="658368" y="1627632"/>
+            <a:ext cx="10972800" cy="256032"/>
           </a:xfrm>
           <a:prstGeom prst="rect">
             <a:avLst/>
@@ -13103,7 +13336,7 @@
               <a:spcAft>
                 <a:spcPts val="0"/>
               </a:spcAft>
-              <a:defRPr sz="1700" b="1">
+              <a:defRPr sz="1500" b="1">
                 <a:solidFill>
                   <a:srgbClr val="122C4E"/>
                 </a:solidFill>
@@ -13124,8 +13357,8 @@
         </p:nvSpPr>
         <p:spPr>
           <a:xfrm>
-            <a:off x="658368" y="2103120"/>
-            <a:ext cx="10972800" cy="493776"/>
+            <a:off x="658368" y="1956816"/>
+            <a:ext cx="10972800" cy="603504"/>
           </a:xfrm>
           <a:prstGeom prst="rect">
             <a:avLst/>
@@ -13169,7 +13402,11 @@
               </a:defRPr>
             </a:pPr>
             <a:r>
-              <a:t>파일 생성/열기: mkdir -p ~/agv_ws/src/agv_gazebo/models/agv    &amp;&amp;    nano ~/agv_ws/src/agv_gazebo/models/agv/model.sdf</a:t>
+              <a:t>파일 생성: mkdir -p ~/agv_ws/src/agv_gazebo/models/agv</a:t>
+            </a:r>
+            <a:br/>
+            <a:r>
+              <a:t>파일 열기: nano ~/agv_ws/src/agv_gazebo/models/agv/model.sdf</a:t>
             </a:r>
           </a:p>
         </p:txBody>
@@ -13182,8 +13419,8 @@
         </p:nvSpPr>
         <p:spPr>
           <a:xfrm>
-            <a:off x="658368" y="2761488"/>
-            <a:ext cx="10972800" cy="3383280"/>
+            <a:off x="658368" y="2706624"/>
+            <a:ext cx="10972800" cy="3364992"/>
           </a:xfrm>
           <a:prstGeom prst="rect">
             <a:avLst/>
@@ -13227,6 +13464,42 @@
               </a:defRPr>
             </a:pPr>
             <a:r>
+              <a:t>          &lt;/friction&gt;</a:t>
+            </a:r>
+            <a:br/>
+            <a:r>
+              <a:t>        &lt;/surface&gt;</a:t>
+            </a:r>
+            <a:br/>
+            <a:r>
+              <a:t>      &lt;/collision&gt;</a:t>
+            </a:r>
+            <a:br/>
+            <a:r>
+              <a:t>    &lt;/link&gt;</a:t>
+            </a:r>
+            <a:br/>
+            <a:r>
+              <a:t>    </a:t>
+            </a:r>
+            <a:br/>
+            <a:r>
+              <a:t>    </a:t>
+            </a:r>
+            <a:br/>
+            <a:r>
+              <a:t>    &lt;joint name="left_wheel_joint" type="revolute"&gt;</a:t>
+            </a:r>
+            <a:br/>
+            <a:r>
+              <a:t>      &lt;parent&gt;base_link&lt;/parent&gt;</a:t>
+            </a:r>
+            <a:br/>
+            <a:r>
+              <a:t>      &lt;child&gt;left_wheel_link&lt;/child&gt;</a:t>
+            </a:r>
+            <a:br/>
+            <a:r>
               <a:t>      &lt;axis&gt;</a:t>
             </a:r>
             <a:br/>
@@ -13236,50 +13509,6 @@
             <a:br/>
             <a:r>
               <a:t>        &lt;limit&gt;</a:t>
-            </a:r>
-            <a:br/>
-            <a:r>
-              <a:t>          &lt;lower&gt;-1e16&lt;/lower&gt;</a:t>
-            </a:r>
-            <a:br/>
-            <a:r>
-              <a:t>          &lt;upper&gt;1e16&lt;/upper&gt;</a:t>
-            </a:r>
-            <a:br/>
-            <a:r>
-              <a:t>        &lt;/limit&gt;</a:t>
-            </a:r>
-            <a:br/>
-            <a:r>
-              <a:t>      &lt;/axis&gt;</a:t>
-            </a:r>
-            <a:br/>
-            <a:r>
-              <a:t>    &lt;/joint&gt;</a:t>
-            </a:r>
-            <a:br/>
-            <a:r>
-              <a:t>    </a:t>
-            </a:r>
-            <a:br/>
-            <a:r>
-              <a:t>    </a:t>
-            </a:r>
-            <a:br/>
-            <a:r>
-              <a:t>    &lt;link name="caster_link"&gt;</a:t>
-            </a:r>
-            <a:br/>
-            <a:r>
-              <a:t>      &lt;pose relative_to="base_link"&gt;-0.24 0 -0.12 0 0 0&lt;/pose&gt;</a:t>
-            </a:r>
-            <a:br/>
-            <a:r>
-              <a:t>      &lt;inertial&gt;</a:t>
-            </a:r>
-            <a:br/>
-            <a:r>
-              <a:t>        &lt;mass&gt;0.15&lt;/mass&gt;</a:t>
             </a:r>
           </a:p>
         </p:txBody>
@@ -13292,7 +13521,7 @@
         </p:nvSpPr>
         <p:spPr>
           <a:xfrm>
-            <a:off x="749808" y="6199632"/>
+            <a:off x="749808" y="6181344"/>
             <a:ext cx="10789920" cy="201168"/>
           </a:xfrm>
           <a:prstGeom prst="rect">
@@ -13318,7 +13547,7 @@
               </a:defRPr>
             </a:pPr>
             <a:r>
-              <a:t>파일 전체 12/21 · 이 슬라이드 다음에 같은 파일의 나머지 줄이 이어집니다.</a:t>
+              <a:t>파일 전체 12/24 · 이 슬라이드 다음에 같은 파일의 나머지 줄이 이어집니다.</a:t>
             </a:r>
           </a:p>
         </p:txBody>
@@ -13375,7 +13604,7 @@
               </a:defRPr>
             </a:pPr>
             <a:r>
-              <a:t>파일을 계속 작성하고 저장한다 (13/21)</a:t>
+              <a:t>파일을 계속 작성하고 저장한다 (13/24)</a:t>
             </a:r>
           </a:p>
         </p:txBody>
@@ -13550,7 +13779,7 @@
               </a:defRPr>
             </a:pPr>
             <a:r>
-              <a:t>현재 단계 15/24    |    현재 폴더 ~/agv_ws    |    현재 터미널</a:t>
+              <a:t>현재 단계 15/27    |    현재 폴더 ~/agv_ws    |    현재 터미널</a:t>
             </a:r>
           </a:p>
         </p:txBody>
@@ -13563,8 +13792,8 @@
         </p:nvSpPr>
         <p:spPr>
           <a:xfrm>
-            <a:off x="658368" y="1682496"/>
-            <a:ext cx="10972800" cy="347472"/>
+            <a:off x="658368" y="1627632"/>
+            <a:ext cx="10972800" cy="256032"/>
           </a:xfrm>
           <a:prstGeom prst="rect">
             <a:avLst/>
@@ -13581,7 +13810,7 @@
               <a:spcAft>
                 <a:spcPts val="0"/>
               </a:spcAft>
-              <a:defRPr sz="1700" b="1">
+              <a:defRPr sz="1500" b="1">
                 <a:solidFill>
                   <a:srgbClr val="122C4E"/>
                 </a:solidFill>
@@ -13602,8 +13831,8 @@
         </p:nvSpPr>
         <p:spPr>
           <a:xfrm>
-            <a:off x="658368" y="2103120"/>
-            <a:ext cx="10972800" cy="493776"/>
+            <a:off x="658368" y="1956816"/>
+            <a:ext cx="10972800" cy="603504"/>
           </a:xfrm>
           <a:prstGeom prst="rect">
             <a:avLst/>
@@ -13647,7 +13876,11 @@
               </a:defRPr>
             </a:pPr>
             <a:r>
-              <a:t>파일 생성/열기: mkdir -p ~/agv_ws/src/agv_gazebo/models/agv    &amp;&amp;    nano ~/agv_ws/src/agv_gazebo/models/agv/model.sdf</a:t>
+              <a:t>파일 생성: mkdir -p ~/agv_ws/src/agv_gazebo/models/agv</a:t>
+            </a:r>
+            <a:br/>
+            <a:r>
+              <a:t>파일 열기: nano ~/agv_ws/src/agv_gazebo/models/agv/model.sdf</a:t>
             </a:r>
           </a:p>
         </p:txBody>
@@ -13660,8 +13893,8 @@
         </p:nvSpPr>
         <p:spPr>
           <a:xfrm>
-            <a:off x="658368" y="2761488"/>
-            <a:ext cx="10972800" cy="3383280"/>
+            <a:off x="658368" y="2706624"/>
+            <a:ext cx="10972800" cy="3364992"/>
           </a:xfrm>
           <a:prstGeom prst="rect">
             <a:avLst/>
@@ -13705,59 +13938,51 @@
               </a:defRPr>
             </a:pPr>
             <a:r>
-              <a:t>        &lt;inertia&gt;</a:t>
-            </a:r>
-            <a:br/>
-            <a:r>
-              <a:t>          &lt;ixx&gt;0.0001&lt;/ixx&gt;</a:t>
-            </a:r>
-            <a:br/>
-            <a:r>
-              <a:t>          &lt;iyy&gt;0.0001&lt;/iyy&gt;</a:t>
-            </a:r>
-            <a:br/>
-            <a:r>
-              <a:t>          &lt;izz&gt;0.0001&lt;/izz&gt;</a:t>
-            </a:r>
-            <a:br/>
-            <a:r>
-              <a:t>        &lt;/inertia&gt;</a:t>
-            </a:r>
-            <a:br/>
-            <a:r>
-              <a:t>      &lt;/inertial&gt;</a:t>
-            </a:r>
-            <a:br/>
-            <a:r>
-              <a:t>      &lt;visual name="caster"&gt;</a:t>
-            </a:r>
-            <a:br/>
-            <a:r>
-              <a:t>        &lt;geometry&gt;</a:t>
-            </a:r>
-            <a:br/>
-            <a:r>
-              <a:t>          &lt;sphere&gt;</a:t>
-            </a:r>
-            <a:br/>
-            <a:r>
-              <a:t>            &lt;radius&gt;0.04&lt;/radius&gt;</a:t>
-            </a:r>
-            <a:br/>
-            <a:r>
-              <a:t>          &lt;/sphere&gt;</a:t>
-            </a:r>
-            <a:br/>
-            <a:r>
-              <a:t>        &lt;/geometry&gt;</a:t>
-            </a:r>
-            <a:br/>
-            <a:r>
-              <a:t>      &lt;/visual&gt;</a:t>
-            </a:r>
-            <a:br/>
-            <a:r>
-              <a:t>      &lt;collision name="caster_collision"&gt;</a:t>
+              <a:t>          &lt;lower&gt;-1e16&lt;/lower&gt;</a:t>
+            </a:r>
+            <a:br/>
+            <a:r>
+              <a:t>          &lt;upper&gt;1e16&lt;/upper&gt;</a:t>
+            </a:r>
+            <a:br/>
+            <a:r>
+              <a:t>        &lt;/limit&gt;</a:t>
+            </a:r>
+            <a:br/>
+            <a:r>
+              <a:t>      &lt;/axis&gt;</a:t>
+            </a:r>
+            <a:br/>
+            <a:r>
+              <a:t>    &lt;/joint&gt;</a:t>
+            </a:r>
+            <a:br/>
+            <a:r>
+              <a:t>    </a:t>
+            </a:r>
+            <a:br/>
+            <a:r>
+              <a:t>    </a:t>
+            </a:r>
+            <a:br/>
+            <a:r>
+              <a:t>    &lt;joint name="right_wheel_joint" type="revolute"&gt;</a:t>
+            </a:r>
+            <a:br/>
+            <a:r>
+              <a:t>      &lt;parent&gt;base_link&lt;/parent&gt;</a:t>
+            </a:r>
+            <a:br/>
+            <a:r>
+              <a:t>      &lt;child&gt;right_wheel_link&lt;/child&gt;</a:t>
+            </a:r>
+            <a:br/>
+            <a:r>
+              <a:t>      &lt;axis&gt;</a:t>
+            </a:r>
+            <a:br/>
+            <a:r>
+              <a:t>        &lt;xyz&gt;0 1 0&lt;/xyz&gt;</a:t>
             </a:r>
           </a:p>
         </p:txBody>
@@ -13770,7 +13995,7 @@
         </p:nvSpPr>
         <p:spPr>
           <a:xfrm>
-            <a:off x="749808" y="6199632"/>
+            <a:off x="749808" y="6181344"/>
             <a:ext cx="10789920" cy="201168"/>
           </a:xfrm>
           <a:prstGeom prst="rect">
@@ -13796,7 +14021,7 @@
               </a:defRPr>
             </a:pPr>
             <a:r>
-              <a:t>파일 전체 13/21 · 이 슬라이드 다음에 같은 파일의 나머지 줄이 이어집니다.</a:t>
+              <a:t>파일 전체 13/24 · 이 슬라이드 다음에 같은 파일의 나머지 줄이 이어집니다.</a:t>
             </a:r>
           </a:p>
         </p:txBody>
@@ -13853,7 +14078,7 @@
               </a:defRPr>
             </a:pPr>
             <a:r>
-              <a:t>파일을 계속 작성하고 저장한다 (14/21)</a:t>
+              <a:t>파일을 계속 작성하고 저장한다 (14/24)</a:t>
             </a:r>
           </a:p>
         </p:txBody>
@@ -14028,7 +14253,7 @@
               </a:defRPr>
             </a:pPr>
             <a:r>
-              <a:t>현재 단계 16/24    |    현재 폴더 ~/agv_ws    |    현재 터미널</a:t>
+              <a:t>현재 단계 16/27    |    현재 폴더 ~/agv_ws    |    현재 터미널</a:t>
             </a:r>
           </a:p>
         </p:txBody>
@@ -14041,8 +14266,8 @@
         </p:nvSpPr>
         <p:spPr>
           <a:xfrm>
-            <a:off x="658368" y="1682496"/>
-            <a:ext cx="10972800" cy="347472"/>
+            <a:off x="658368" y="1627632"/>
+            <a:ext cx="10972800" cy="256032"/>
           </a:xfrm>
           <a:prstGeom prst="rect">
             <a:avLst/>
@@ -14059,7 +14284,7 @@
               <a:spcAft>
                 <a:spcPts val="0"/>
               </a:spcAft>
-              <a:defRPr sz="1700" b="1">
+              <a:defRPr sz="1500" b="1">
                 <a:solidFill>
                   <a:srgbClr val="122C4E"/>
                 </a:solidFill>
@@ -14080,8 +14305,8 @@
         </p:nvSpPr>
         <p:spPr>
           <a:xfrm>
-            <a:off x="658368" y="2103120"/>
-            <a:ext cx="10972800" cy="493776"/>
+            <a:off x="658368" y="1956816"/>
+            <a:ext cx="10972800" cy="603504"/>
           </a:xfrm>
           <a:prstGeom prst="rect">
             <a:avLst/>
@@ -14125,7 +14350,11 @@
               </a:defRPr>
             </a:pPr>
             <a:r>
-              <a:t>파일 생성/열기: mkdir -p ~/agv_ws/src/agv_gazebo/models/agv    &amp;&amp;    nano ~/agv_ws/src/agv_gazebo/models/agv/model.sdf</a:t>
+              <a:t>파일 생성: mkdir -p ~/agv_ws/src/agv_gazebo/models/agv</a:t>
+            </a:r>
+            <a:br/>
+            <a:r>
+              <a:t>파일 열기: nano ~/agv_ws/src/agv_gazebo/models/agv/model.sdf</a:t>
             </a:r>
           </a:p>
         </p:txBody>
@@ -14138,8 +14367,8 @@
         </p:nvSpPr>
         <p:spPr>
           <a:xfrm>
-            <a:off x="658368" y="2761488"/>
-            <a:ext cx="10972800" cy="3383280"/>
+            <a:off x="658368" y="2706624"/>
+            <a:ext cx="10972800" cy="3364992"/>
           </a:xfrm>
           <a:prstGeom prst="rect">
             <a:avLst/>
@@ -14183,31 +14412,27 @@
               </a:defRPr>
             </a:pPr>
             <a:r>
-              <a:t>        &lt;geometry&gt;</a:t>
-            </a:r>
-            <a:br/>
-            <a:r>
-              <a:t>          &lt;sphere&gt;</a:t>
-            </a:r>
-            <a:br/>
-            <a:r>
-              <a:t>            &lt;radius&gt;0.04&lt;/radius&gt;</a:t>
-            </a:r>
-            <a:br/>
-            <a:r>
-              <a:t>          &lt;/sphere&gt;</a:t>
-            </a:r>
-            <a:br/>
-            <a:r>
-              <a:t>        &lt;/geometry&gt;</a:t>
-            </a:r>
-            <a:br/>
-            <a:r>
-              <a:t>      &lt;/collision&gt;</a:t>
-            </a:r>
-            <a:br/>
-            <a:r>
-              <a:t>    &lt;/link&gt;</a:t>
+              <a:t>        &lt;limit&gt;</a:t>
+            </a:r>
+            <a:br/>
+            <a:r>
+              <a:t>          &lt;lower&gt;-1e16&lt;/lower&gt;</a:t>
+            </a:r>
+            <a:br/>
+            <a:r>
+              <a:t>          &lt;upper&gt;1e16&lt;/upper&gt;</a:t>
+            </a:r>
+            <a:br/>
+            <a:r>
+              <a:t>        &lt;/limit&gt;</a:t>
+            </a:r>
+            <a:br/>
+            <a:r>
+              <a:t>      &lt;/axis&gt;</a:t>
+            </a:r>
+            <a:br/>
+            <a:r>
+              <a:t>    &lt;/joint&gt;</a:t>
             </a:r>
             <a:br/>
             <a:r>
@@ -14219,23 +14444,19 @@
             </a:r>
             <a:br/>
             <a:r>
-              <a:t>    &lt;joint name="caster_joint" type="fixed"&gt;</a:t>
-            </a:r>
-            <a:br/>
-            <a:r>
-              <a:t>      &lt;parent&gt;base_link&lt;/parent&gt;</a:t>
-            </a:r>
-            <a:br/>
-            <a:r>
-              <a:t>      &lt;child&gt;caster_link&lt;/child&gt;</a:t>
-            </a:r>
-            <a:br/>
-            <a:r>
-              <a:t>    &lt;/joint&gt;</a:t>
-            </a:r>
-            <a:br/>
-            <a:r>
-              <a:t>    </a:t>
+              <a:t>    &lt;link name="caster_link"&gt;</a:t>
+            </a:r>
+            <a:br/>
+            <a:r>
+              <a:t>      &lt;pose relative_to="base_link"&gt;-0.24 0 -0.12 0 0 0&lt;/pose&gt;</a:t>
+            </a:r>
+            <a:br/>
+            <a:r>
+              <a:t>      &lt;inertial&gt;</a:t>
+            </a:r>
+            <a:br/>
+            <a:r>
+              <a:t>        &lt;mass&gt;0.15&lt;/mass&gt;</a:t>
             </a:r>
           </a:p>
         </p:txBody>
@@ -14248,7 +14469,7 @@
         </p:nvSpPr>
         <p:spPr>
           <a:xfrm>
-            <a:off x="749808" y="6199632"/>
+            <a:off x="749808" y="6181344"/>
             <a:ext cx="10789920" cy="201168"/>
           </a:xfrm>
           <a:prstGeom prst="rect">
@@ -14274,7 +14495,7 @@
               </a:defRPr>
             </a:pPr>
             <a:r>
-              <a:t>파일 전체 14/21 · 이 슬라이드 다음에 같은 파일의 나머지 줄이 이어집니다.</a:t>
+              <a:t>파일 전체 14/24 · 이 슬라이드 다음에 같은 파일의 나머지 줄이 이어집니다.</a:t>
             </a:r>
           </a:p>
         </p:txBody>
@@ -14331,7 +14552,7 @@
               </a:defRPr>
             </a:pPr>
             <a:r>
-              <a:t>파일을 계속 작성하고 저장한다 (15/21)</a:t>
+              <a:t>파일을 계속 작성하고 저장한다 (15/24)</a:t>
             </a:r>
           </a:p>
         </p:txBody>
@@ -14506,7 +14727,7 @@
               </a:defRPr>
             </a:pPr>
             <a:r>
-              <a:t>현재 단계 17/24    |    현재 폴더 ~/agv_ws    |    현재 터미널</a:t>
+              <a:t>현재 단계 17/27    |    현재 폴더 ~/agv_ws    |    현재 터미널</a:t>
             </a:r>
           </a:p>
         </p:txBody>
@@ -14519,8 +14740,8 @@
         </p:nvSpPr>
         <p:spPr>
           <a:xfrm>
-            <a:off x="658368" y="1682496"/>
-            <a:ext cx="10972800" cy="347472"/>
+            <a:off x="658368" y="1627632"/>
+            <a:ext cx="10972800" cy="256032"/>
           </a:xfrm>
           <a:prstGeom prst="rect">
             <a:avLst/>
@@ -14537,7 +14758,7 @@
               <a:spcAft>
                 <a:spcPts val="0"/>
               </a:spcAft>
-              <a:defRPr sz="1700" b="1">
+              <a:defRPr sz="1500" b="1">
                 <a:solidFill>
                   <a:srgbClr val="122C4E"/>
                 </a:solidFill>
@@ -14558,8 +14779,8 @@
         </p:nvSpPr>
         <p:spPr>
           <a:xfrm>
-            <a:off x="658368" y="2103120"/>
-            <a:ext cx="10972800" cy="493776"/>
+            <a:off x="658368" y="1956816"/>
+            <a:ext cx="10972800" cy="603504"/>
           </a:xfrm>
           <a:prstGeom prst="rect">
             <a:avLst/>
@@ -14603,7 +14824,11 @@
               </a:defRPr>
             </a:pPr>
             <a:r>
-              <a:t>파일 생성/열기: mkdir -p ~/agv_ws/src/agv_gazebo/models/agv    &amp;&amp;    nano ~/agv_ws/src/agv_gazebo/models/agv/model.sdf</a:t>
+              <a:t>파일 생성: mkdir -p ~/agv_ws/src/agv_gazebo/models/agv</a:t>
+            </a:r>
+            <a:br/>
+            <a:r>
+              <a:t>파일 열기: nano ~/agv_ws/src/agv_gazebo/models/agv/model.sdf</a:t>
             </a:r>
           </a:p>
         </p:txBody>
@@ -14616,8 +14841,8 @@
         </p:nvSpPr>
         <p:spPr>
           <a:xfrm>
-            <a:off x="658368" y="2761488"/>
-            <a:ext cx="10972800" cy="3383280"/>
+            <a:off x="658368" y="2706624"/>
+            <a:ext cx="10972800" cy="3364992"/>
           </a:xfrm>
           <a:prstGeom prst="rect">
             <a:avLst/>
@@ -14661,19 +14886,31 @@
               </a:defRPr>
             </a:pPr>
             <a:r>
-              <a:t>    </a:t>
-            </a:r>
-            <a:br/>
-            <a:r>
-              <a:t>    &lt;link name="lidar_link"&gt;</a:t>
-            </a:r>
-            <a:br/>
-            <a:r>
-              <a:t>      &lt;pose relative_to="base_link"&gt;0.12 0 0.13 0 0 0&lt;/pose&gt;</a:t>
-            </a:r>
-            <a:br/>
-            <a:r>
-              <a:t>      &lt;visual name="housing"&gt;</a:t>
+              <a:t>        &lt;inertia&gt;</a:t>
+            </a:r>
+            <a:br/>
+            <a:r>
+              <a:t>          &lt;ixx&gt;0.0001&lt;/ixx&gt;</a:t>
+            </a:r>
+            <a:br/>
+            <a:r>
+              <a:t>          &lt;iyy&gt;0.0001&lt;/iyy&gt;</a:t>
+            </a:r>
+            <a:br/>
+            <a:r>
+              <a:t>          &lt;izz&gt;0.0001&lt;/izz&gt;</a:t>
+            </a:r>
+            <a:br/>
+            <a:r>
+              <a:t>        &lt;/inertia&gt;</a:t>
+            </a:r>
+            <a:br/>
+            <a:r>
+              <a:t>      &lt;/inertial&gt;</a:t>
+            </a:r>
+            <a:br/>
+            <a:r>
+              <a:t>      &lt;visual name="caster"&gt;</a:t>
             </a:r>
             <a:br/>
             <a:r>
@@ -14681,39 +14918,19 @@
             </a:r>
             <a:br/>
             <a:r>
-              <a:t>          &lt;cylinder&gt;</a:t>
-            </a:r>
-            <a:br/>
-            <a:r>
-              <a:t>            &lt;radius&gt;0.045&lt;/radius&gt;</a:t>
-            </a:r>
-            <a:br/>
-            <a:r>
-              <a:t>            &lt;length&gt;0.05&lt;/length&gt;</a:t>
-            </a:r>
-            <a:br/>
-            <a:r>
-              <a:t>          &lt;/cylinder&gt;</a:t>
+              <a:t>          &lt;sphere&gt;</a:t>
+            </a:r>
+            <a:br/>
+            <a:r>
+              <a:t>            &lt;radius&gt;0.04&lt;/radius&gt;</a:t>
+            </a:r>
+            <a:br/>
+            <a:r>
+              <a:t>          &lt;/sphere&gt;</a:t>
             </a:r>
             <a:br/>
             <a:r>
               <a:t>        &lt;/geometry&gt;</a:t>
-            </a:r>
-            <a:br/>
-            <a:r>
-              <a:t>      &lt;/visual&gt;</a:t>
-            </a:r>
-            <a:br/>
-            <a:r>
-              <a:t>      &lt;sensor name="lidar" type="gpu_lidar"&gt;</a:t>
-            </a:r>
-            <a:br/>
-            <a:r>
-              <a:t>        &lt;topic&gt;/scan&lt;/topic&gt;</a:t>
-            </a:r>
-            <a:br/>
-            <a:r>
-              <a:t>        &lt;always_on&gt;true&lt;/always_on&gt;</a:t>
             </a:r>
           </a:p>
         </p:txBody>
@@ -14726,7 +14943,7 @@
         </p:nvSpPr>
         <p:spPr>
           <a:xfrm>
-            <a:off x="749808" y="6199632"/>
+            <a:off x="749808" y="6181344"/>
             <a:ext cx="10789920" cy="201168"/>
           </a:xfrm>
           <a:prstGeom prst="rect">
@@ -14752,7 +14969,7 @@
               </a:defRPr>
             </a:pPr>
             <a:r>
-              <a:t>파일 전체 15/21 · 이 슬라이드 다음에 같은 파일의 나머지 줄이 이어집니다.</a:t>
+              <a:t>파일 전체 15/24 · 이 슬라이드 다음에 같은 파일의 나머지 줄이 이어집니다.</a:t>
             </a:r>
           </a:p>
         </p:txBody>
@@ -14809,7 +15026,7 @@
               </a:defRPr>
             </a:pPr>
             <a:r>
-              <a:t>파일을 계속 작성하고 저장한다 (16/21)</a:t>
+              <a:t>파일을 계속 작성하고 저장한다 (16/24)</a:t>
             </a:r>
           </a:p>
         </p:txBody>
@@ -14984,7 +15201,7 @@
               </a:defRPr>
             </a:pPr>
             <a:r>
-              <a:t>현재 단계 18/24    |    현재 폴더 ~/agv_ws    |    현재 터미널</a:t>
+              <a:t>현재 단계 18/27    |    현재 폴더 ~/agv_ws    |    현재 터미널</a:t>
             </a:r>
           </a:p>
         </p:txBody>
@@ -14997,8 +15214,8 @@
         </p:nvSpPr>
         <p:spPr>
           <a:xfrm>
-            <a:off x="658368" y="1682496"/>
-            <a:ext cx="10972800" cy="347472"/>
+            <a:off x="658368" y="1627632"/>
+            <a:ext cx="10972800" cy="256032"/>
           </a:xfrm>
           <a:prstGeom prst="rect">
             <a:avLst/>
@@ -15015,7 +15232,7 @@
               <a:spcAft>
                 <a:spcPts val="0"/>
               </a:spcAft>
-              <a:defRPr sz="1700" b="1">
+              <a:defRPr sz="1500" b="1">
                 <a:solidFill>
                   <a:srgbClr val="122C4E"/>
                 </a:solidFill>
@@ -15036,8 +15253,8 @@
         </p:nvSpPr>
         <p:spPr>
           <a:xfrm>
-            <a:off x="658368" y="2103120"/>
-            <a:ext cx="10972800" cy="493776"/>
+            <a:off x="658368" y="1956816"/>
+            <a:ext cx="10972800" cy="603504"/>
           </a:xfrm>
           <a:prstGeom prst="rect">
             <a:avLst/>
@@ -15081,7 +15298,11 @@
               </a:defRPr>
             </a:pPr>
             <a:r>
-              <a:t>파일 생성/열기: mkdir -p ~/agv_ws/src/agv_gazebo/models/agv    &amp;&amp;    nano ~/agv_ws/src/agv_gazebo/models/agv/model.sdf</a:t>
+              <a:t>파일 생성: mkdir -p ~/agv_ws/src/agv_gazebo/models/agv</a:t>
+            </a:r>
+            <a:br/>
+            <a:r>
+              <a:t>파일 열기: nano ~/agv_ws/src/agv_gazebo/models/agv/model.sdf</a:t>
             </a:r>
           </a:p>
         </p:txBody>
@@ -15094,8 +15315,8 @@
         </p:nvSpPr>
         <p:spPr>
           <a:xfrm>
-            <a:off x="658368" y="2761488"/>
-            <a:ext cx="10972800" cy="3383280"/>
+            <a:off x="658368" y="2706624"/>
+            <a:ext cx="10972800" cy="3364992"/>
           </a:xfrm>
           <a:prstGeom prst="rect">
             <a:avLst/>
@@ -15139,59 +15360,51 @@
               </a:defRPr>
             </a:pPr>
             <a:r>
-              <a:t>        &lt;update_rate&gt;10&lt;/update_rate&gt;</a:t>
-            </a:r>
-            <a:br/>
-            <a:r>
-              <a:t>        &lt;visualize&gt;false&lt;/visualize&gt;</a:t>
-            </a:r>
-            <a:br/>
-            <a:r>
-              <a:t>        &lt;lidar&gt;</a:t>
-            </a:r>
-            <a:br/>
-            <a:r>
-              <a:t>          &lt;scan&gt;</a:t>
-            </a:r>
-            <a:br/>
-            <a:r>
-              <a:t>            &lt;horizontal&gt;</a:t>
-            </a:r>
-            <a:br/>
-            <a:r>
-              <a:t>              &lt;samples&gt;720&lt;/samples&gt;</a:t>
-            </a:r>
-            <a:br/>
-            <a:r>
-              <a:t>              &lt;resolution&gt;1&lt;/resolution&gt;</a:t>
-            </a:r>
-            <a:br/>
-            <a:r>
-              <a:t>              &lt;min_angle&gt;-3.14159&lt;/min_angle&gt;</a:t>
-            </a:r>
-            <a:br/>
-            <a:r>
-              <a:t>              &lt;max_angle&gt;3.14159&lt;/max_angle&gt;</a:t>
-            </a:r>
-            <a:br/>
-            <a:r>
-              <a:t>            &lt;/horizontal&gt;</a:t>
-            </a:r>
-            <a:br/>
-            <a:r>
-              <a:t>          &lt;/scan&gt;</a:t>
-            </a:r>
-            <a:br/>
-            <a:r>
-              <a:t>          &lt;range&gt;</a:t>
-            </a:r>
-            <a:br/>
-            <a:r>
-              <a:t>            &lt;min&gt;0.12&lt;/min&gt;</a:t>
-            </a:r>
-            <a:br/>
-            <a:r>
-              <a:t>            &lt;max&gt;12.0&lt;/max&gt;</a:t>
+              <a:t>      &lt;/visual&gt;</a:t>
+            </a:r>
+            <a:br/>
+            <a:r>
+              <a:t>      &lt;collision name="caster_collision"&gt;</a:t>
+            </a:r>
+            <a:br/>
+            <a:r>
+              <a:t>        &lt;geometry&gt;</a:t>
+            </a:r>
+            <a:br/>
+            <a:r>
+              <a:t>          &lt;sphere&gt;</a:t>
+            </a:r>
+            <a:br/>
+            <a:r>
+              <a:t>            &lt;radius&gt;0.04&lt;/radius&gt;</a:t>
+            </a:r>
+            <a:br/>
+            <a:r>
+              <a:t>          &lt;/sphere&gt;</a:t>
+            </a:r>
+            <a:br/>
+            <a:r>
+              <a:t>        &lt;/geometry&gt;</a:t>
+            </a:r>
+            <a:br/>
+            <a:r>
+              <a:t>      &lt;/collision&gt;</a:t>
+            </a:r>
+            <a:br/>
+            <a:r>
+              <a:t>    &lt;/link&gt;</a:t>
+            </a:r>
+            <a:br/>
+            <a:r>
+              <a:t>    </a:t>
+            </a:r>
+            <a:br/>
+            <a:r>
+              <a:t>    </a:t>
+            </a:r>
+            <a:br/>
+            <a:r>
+              <a:t>    &lt;joint name="caster_joint" type="fixed"&gt;</a:t>
             </a:r>
           </a:p>
         </p:txBody>
@@ -15204,7 +15417,7 @@
         </p:nvSpPr>
         <p:spPr>
           <a:xfrm>
-            <a:off x="749808" y="6199632"/>
+            <a:off x="749808" y="6181344"/>
             <a:ext cx="10789920" cy="201168"/>
           </a:xfrm>
           <a:prstGeom prst="rect">
@@ -15230,7 +15443,7 @@
               </a:defRPr>
             </a:pPr>
             <a:r>
-              <a:t>파일 전체 16/21 · 이 슬라이드 다음에 같은 파일의 나머지 줄이 이어집니다.</a:t>
+              <a:t>파일 전체 16/24 · 이 슬라이드 다음에 같은 파일의 나머지 줄이 이어집니다.</a:t>
             </a:r>
           </a:p>
         </p:txBody>
@@ -15287,7 +15500,7 @@
               </a:defRPr>
             </a:pPr>
             <a:r>
-              <a:t>파일을 계속 작성하고 저장한다 (17/21)</a:t>
+              <a:t>파일을 계속 작성하고 저장한다 (17/24)</a:t>
             </a:r>
           </a:p>
         </p:txBody>
@@ -15462,7 +15675,7 @@
               </a:defRPr>
             </a:pPr>
             <a:r>
-              <a:t>현재 단계 19/24    |    현재 폴더 ~/agv_ws    |    현재 터미널</a:t>
+              <a:t>현재 단계 19/27    |    현재 폴더 ~/agv_ws    |    현재 터미널</a:t>
             </a:r>
           </a:p>
         </p:txBody>
@@ -15475,8 +15688,8 @@
         </p:nvSpPr>
         <p:spPr>
           <a:xfrm>
-            <a:off x="658368" y="1682496"/>
-            <a:ext cx="10972800" cy="347472"/>
+            <a:off x="658368" y="1627632"/>
+            <a:ext cx="10972800" cy="256032"/>
           </a:xfrm>
           <a:prstGeom prst="rect">
             <a:avLst/>
@@ -15493,7 +15706,7 @@
               <a:spcAft>
                 <a:spcPts val="0"/>
               </a:spcAft>
-              <a:defRPr sz="1700" b="1">
+              <a:defRPr sz="1500" b="1">
                 <a:solidFill>
                   <a:srgbClr val="122C4E"/>
                 </a:solidFill>
@@ -15514,8 +15727,8 @@
         </p:nvSpPr>
         <p:spPr>
           <a:xfrm>
-            <a:off x="658368" y="2103120"/>
-            <a:ext cx="10972800" cy="493776"/>
+            <a:off x="658368" y="1956816"/>
+            <a:ext cx="10972800" cy="603504"/>
           </a:xfrm>
           <a:prstGeom prst="rect">
             <a:avLst/>
@@ -15559,7 +15772,11 @@
               </a:defRPr>
             </a:pPr>
             <a:r>
-              <a:t>파일 생성/열기: mkdir -p ~/agv_ws/src/agv_gazebo/models/agv    &amp;&amp;    nano ~/agv_ws/src/agv_gazebo/models/agv/model.sdf</a:t>
+              <a:t>파일 생성: mkdir -p ~/agv_ws/src/agv_gazebo/models/agv</a:t>
+            </a:r>
+            <a:br/>
+            <a:r>
+              <a:t>파일 열기: nano ~/agv_ws/src/agv_gazebo/models/agv/model.sdf</a:t>
             </a:r>
           </a:p>
         </p:txBody>
@@ -15572,8 +15789,8 @@
         </p:nvSpPr>
         <p:spPr>
           <a:xfrm>
-            <a:off x="658368" y="2761488"/>
-            <a:ext cx="10972800" cy="3383280"/>
+            <a:off x="658368" y="2706624"/>
+            <a:ext cx="10972800" cy="3364992"/>
           </a:xfrm>
           <a:prstGeom prst="rect">
             <a:avLst/>
@@ -15617,23 +15834,15 @@
               </a:defRPr>
             </a:pPr>
             <a:r>
-              <a:t>            &lt;resolution&gt;0.01&lt;/resolution&gt;</a:t>
-            </a:r>
-            <a:br/>
-            <a:r>
-              <a:t>          &lt;/range&gt;</a:t>
-            </a:r>
-            <a:br/>
-            <a:r>
-              <a:t>        &lt;/lidar&gt;</a:t>
-            </a:r>
-            <a:br/>
-            <a:r>
-              <a:t>      &lt;/sensor&gt;</a:t>
-            </a:r>
-            <a:br/>
-            <a:r>
-              <a:t>    &lt;/link&gt;</a:t>
+              <a:t>      &lt;parent&gt;base_link&lt;/parent&gt;</a:t>
+            </a:r>
+            <a:br/>
+            <a:r>
+              <a:t>      &lt;child&gt;caster_link&lt;/child&gt;</a:t>
+            </a:r>
+            <a:br/>
+            <a:r>
+              <a:t>    &lt;/joint&gt;</a:t>
             </a:r>
             <a:br/>
             <a:r>
@@ -15645,31 +15854,31 @@
             </a:r>
             <a:br/>
             <a:r>
-              <a:t>    &lt;joint name="lidar_joint" type="fixed"&gt;</a:t>
-            </a:r>
-            <a:br/>
-            <a:r>
-              <a:t>      &lt;parent&gt;base_link&lt;/parent&gt;</a:t>
-            </a:r>
-            <a:br/>
-            <a:r>
-              <a:t>      &lt;child&gt;lidar_link&lt;/child&gt;</a:t>
-            </a:r>
-            <a:br/>
-            <a:r>
-              <a:t>    &lt;/joint&gt;</a:t>
-            </a:r>
-            <a:br/>
-            <a:r>
-              <a:t>    </a:t>
-            </a:r>
-            <a:br/>
-            <a:r>
-              <a:t>    </a:t>
-            </a:r>
-            <a:br/>
-            <a:r>
-              <a:t>    &lt;link name="camera_link"&gt;</a:t>
+              <a:t>    &lt;link name="lidar_link"&gt;</a:t>
+            </a:r>
+            <a:br/>
+            <a:r>
+              <a:t>      &lt;pose relative_to="base_link"&gt;0.12 0 0.13 0 0 0&lt;/pose&gt;</a:t>
+            </a:r>
+            <a:br/>
+            <a:r>
+              <a:t>      &lt;visual name="housing"&gt;</a:t>
+            </a:r>
+            <a:br/>
+            <a:r>
+              <a:t>        &lt;geometry&gt;</a:t>
+            </a:r>
+            <a:br/>
+            <a:r>
+              <a:t>          &lt;cylinder&gt;</a:t>
+            </a:r>
+            <a:br/>
+            <a:r>
+              <a:t>            &lt;radius&gt;0.045&lt;/radius&gt;</a:t>
+            </a:r>
+            <a:br/>
+            <a:r>
+              <a:t>            &lt;length&gt;0.05&lt;/length&gt;</a:t>
             </a:r>
           </a:p>
         </p:txBody>
@@ -15682,7 +15891,7 @@
         </p:nvSpPr>
         <p:spPr>
           <a:xfrm>
-            <a:off x="749808" y="6199632"/>
+            <a:off x="749808" y="6181344"/>
             <a:ext cx="10789920" cy="201168"/>
           </a:xfrm>
           <a:prstGeom prst="rect">
@@ -15708,7 +15917,7 @@
               </a:defRPr>
             </a:pPr>
             <a:r>
-              <a:t>파일 전체 17/21 · 이 슬라이드 다음에 같은 파일의 나머지 줄이 이어집니다.</a:t>
+              <a:t>파일 전체 17/24 · 이 슬라이드 다음에 같은 파일의 나머지 줄이 이어집니다.</a:t>
             </a:r>
           </a:p>
         </p:txBody>
@@ -15765,7 +15974,7 @@
               </a:defRPr>
             </a:pPr>
             <a:r>
-              <a:t>파일을 계속 작성하고 저장한다 (18/21)</a:t>
+              <a:t>파일을 계속 작성하고 저장한다 (18/24)</a:t>
             </a:r>
           </a:p>
         </p:txBody>
@@ -15940,7 +16149,7 @@
               </a:defRPr>
             </a:pPr>
             <a:r>
-              <a:t>현재 단계 20/24    |    현재 폴더 ~/agv_ws    |    현재 터미널</a:t>
+              <a:t>현재 단계 20/27    |    현재 폴더 ~/agv_ws    |    현재 터미널</a:t>
             </a:r>
           </a:p>
         </p:txBody>
@@ -15953,8 +16162,8 @@
         </p:nvSpPr>
         <p:spPr>
           <a:xfrm>
-            <a:off x="658368" y="1682496"/>
-            <a:ext cx="10972800" cy="347472"/>
+            <a:off x="658368" y="1627632"/>
+            <a:ext cx="10972800" cy="256032"/>
           </a:xfrm>
           <a:prstGeom prst="rect">
             <a:avLst/>
@@ -15971,7 +16180,7 @@
               <a:spcAft>
                 <a:spcPts val="0"/>
               </a:spcAft>
-              <a:defRPr sz="1700" b="1">
+              <a:defRPr sz="1500" b="1">
                 <a:solidFill>
                   <a:srgbClr val="122C4E"/>
                 </a:solidFill>
@@ -15992,8 +16201,8 @@
         </p:nvSpPr>
         <p:spPr>
           <a:xfrm>
-            <a:off x="658368" y="2103120"/>
-            <a:ext cx="10972800" cy="493776"/>
+            <a:off x="658368" y="1956816"/>
+            <a:ext cx="10972800" cy="603504"/>
           </a:xfrm>
           <a:prstGeom prst="rect">
             <a:avLst/>
@@ -16037,7 +16246,11 @@
               </a:defRPr>
             </a:pPr>
             <a:r>
-              <a:t>파일 생성/열기: mkdir -p ~/agv_ws/src/agv_gazebo/models/agv    &amp;&amp;    nano ~/agv_ws/src/agv_gazebo/models/agv/model.sdf</a:t>
+              <a:t>파일 생성: mkdir -p ~/agv_ws/src/agv_gazebo/models/agv</a:t>
+            </a:r>
+            <a:br/>
+            <a:r>
+              <a:t>파일 열기: nano ~/agv_ws/src/agv_gazebo/models/agv/model.sdf</a:t>
             </a:r>
           </a:p>
         </p:txBody>
@@ -16050,8 +16263,8 @@
         </p:nvSpPr>
         <p:spPr>
           <a:xfrm>
-            <a:off x="658368" y="2761488"/>
-            <a:ext cx="10972800" cy="3383280"/>
+            <a:off x="658368" y="2706624"/>
+            <a:ext cx="10972800" cy="3364992"/>
           </a:xfrm>
           <a:prstGeom prst="rect">
             <a:avLst/>
@@ -16095,27 +16308,7 @@
               </a:defRPr>
             </a:pPr>
             <a:r>
-              <a:t>      &lt;pose relative_to="base_link"&gt;0.30 0 0.10 0 0 0&lt;/pose&gt;</a:t>
-            </a:r>
-            <a:br/>
-            <a:r>
-              <a:t>      &lt;visual name="housing"&gt;</a:t>
-            </a:r>
-            <a:br/>
-            <a:r>
-              <a:t>        &lt;geometry&gt;</a:t>
-            </a:r>
-            <a:br/>
-            <a:r>
-              <a:t>          &lt;box&gt;</a:t>
-            </a:r>
-            <a:br/>
-            <a:r>
-              <a:t>            &lt;size&gt;0.05 0.08 0.05&lt;/size&gt;</a:t>
-            </a:r>
-            <a:br/>
-            <a:r>
-              <a:t>          &lt;/box&gt;</a:t>
+              <a:t>          &lt;/cylinder&gt;</a:t>
             </a:r>
             <a:br/>
             <a:r>
@@ -16127,11 +16320,11 @@
             </a:r>
             <a:br/>
             <a:r>
-              <a:t>      &lt;sensor name="camera" type="camera"&gt;</a:t>
-            </a:r>
-            <a:br/>
-            <a:r>
-              <a:t>        &lt;topic&gt;/camera/image_raw&lt;/topic&gt;</a:t>
+              <a:t>      &lt;sensor name="lidar" type="gpu_lidar"&gt;</a:t>
+            </a:r>
+            <a:br/>
+            <a:r>
+              <a:t>        &lt;topic&gt;/scan&lt;/topic&gt;</a:t>
             </a:r>
             <a:br/>
             <a:r>
@@ -16139,15 +16332,27 @@
             </a:r>
             <a:br/>
             <a:r>
-              <a:t>        &lt;update_rate&gt;15&lt;/update_rate&gt;</a:t>
-            </a:r>
-            <a:br/>
-            <a:r>
-              <a:t>        &lt;camera&gt;</a:t>
-            </a:r>
-            <a:br/>
-            <a:r>
-              <a:t>          &lt;horizontal_fov&gt;1.047&lt;/horizontal_fov&gt;</a:t>
+              <a:t>        &lt;update_rate&gt;10&lt;/update_rate&gt;</a:t>
+            </a:r>
+            <a:br/>
+            <a:r>
+              <a:t>        &lt;visualize&gt;false&lt;/visualize&gt;</a:t>
+            </a:r>
+            <a:br/>
+            <a:r>
+              <a:t>        &lt;lidar&gt;</a:t>
+            </a:r>
+            <a:br/>
+            <a:r>
+              <a:t>          &lt;scan&gt;</a:t>
+            </a:r>
+            <a:br/>
+            <a:r>
+              <a:t>            &lt;horizontal&gt;</a:t>
+            </a:r>
+            <a:br/>
+            <a:r>
+              <a:t>              &lt;samples&gt;720&lt;/samples&gt;</a:t>
             </a:r>
           </a:p>
         </p:txBody>
@@ -16160,7 +16365,7 @@
         </p:nvSpPr>
         <p:spPr>
           <a:xfrm>
-            <a:off x="749808" y="6199632"/>
+            <a:off x="749808" y="6181344"/>
             <a:ext cx="10789920" cy="201168"/>
           </a:xfrm>
           <a:prstGeom prst="rect">
@@ -16186,7 +16391,7 @@
               </a:defRPr>
             </a:pPr>
             <a:r>
-              <a:t>파일 전체 18/21 · 이 슬라이드 다음에 같은 파일의 나머지 줄이 이어집니다.</a:t>
+              <a:t>파일 전체 18/24 · 이 슬라이드 다음에 같은 파일의 나머지 줄이 이어집니다.</a:t>
             </a:r>
           </a:p>
         </p:txBody>
@@ -16243,7 +16448,7 @@
               </a:defRPr>
             </a:pPr>
             <a:r>
-              <a:t>파일을 계속 작성하고 저장한다 (19/21)</a:t>
+              <a:t>파일을 계속 작성하고 저장한다 (19/24)</a:t>
             </a:r>
           </a:p>
         </p:txBody>
@@ -16418,7 +16623,7 @@
               </a:defRPr>
             </a:pPr>
             <a:r>
-              <a:t>현재 단계 21/24    |    현재 폴더 ~/agv_ws    |    현재 터미널</a:t>
+              <a:t>현재 단계 21/27    |    현재 폴더 ~/agv_ws    |    현재 터미널</a:t>
             </a:r>
           </a:p>
         </p:txBody>
@@ -16431,8 +16636,8 @@
         </p:nvSpPr>
         <p:spPr>
           <a:xfrm>
-            <a:off x="658368" y="1682496"/>
-            <a:ext cx="10972800" cy="347472"/>
+            <a:off x="658368" y="1627632"/>
+            <a:ext cx="10972800" cy="256032"/>
           </a:xfrm>
           <a:prstGeom prst="rect">
             <a:avLst/>
@@ -16449,7 +16654,7 @@
               <a:spcAft>
                 <a:spcPts val="0"/>
               </a:spcAft>
-              <a:defRPr sz="1700" b="1">
+              <a:defRPr sz="1500" b="1">
                 <a:solidFill>
                   <a:srgbClr val="122C4E"/>
                 </a:solidFill>
@@ -16470,8 +16675,8 @@
         </p:nvSpPr>
         <p:spPr>
           <a:xfrm>
-            <a:off x="658368" y="2103120"/>
-            <a:ext cx="10972800" cy="493776"/>
+            <a:off x="658368" y="1956816"/>
+            <a:ext cx="10972800" cy="603504"/>
           </a:xfrm>
           <a:prstGeom prst="rect">
             <a:avLst/>
@@ -16515,7 +16720,11 @@
               </a:defRPr>
             </a:pPr>
             <a:r>
-              <a:t>파일 생성/열기: mkdir -p ~/agv_ws/src/agv_gazebo/models/agv    &amp;&amp;    nano ~/agv_ws/src/agv_gazebo/models/agv/model.sdf</a:t>
+              <a:t>파일 생성: mkdir -p ~/agv_ws/src/agv_gazebo/models/agv</a:t>
+            </a:r>
+            <a:br/>
+            <a:r>
+              <a:t>파일 열기: nano ~/agv_ws/src/agv_gazebo/models/agv/model.sdf</a:t>
             </a:r>
           </a:p>
         </p:txBody>
@@ -16528,8 +16737,8 @@
         </p:nvSpPr>
         <p:spPr>
           <a:xfrm>
-            <a:off x="658368" y="2761488"/>
-            <a:ext cx="10972800" cy="3383280"/>
+            <a:off x="658368" y="2706624"/>
+            <a:ext cx="10972800" cy="3364992"/>
           </a:xfrm>
           <a:prstGeom prst="rect">
             <a:avLst/>
@@ -16573,59 +16782,51 @@
               </a:defRPr>
             </a:pPr>
             <a:r>
-              <a:t>          &lt;image&gt;</a:t>
-            </a:r>
-            <a:br/>
-            <a:r>
-              <a:t>            &lt;width&gt;640&lt;/width&gt;</a:t>
-            </a:r>
-            <a:br/>
-            <a:r>
-              <a:t>            &lt;height&gt;480&lt;/height&gt;</a:t>
-            </a:r>
-            <a:br/>
-            <a:r>
-              <a:t>            &lt;format&gt;R8G8B8&lt;/format&gt;</a:t>
-            </a:r>
-            <a:br/>
-            <a:r>
-              <a:t>          &lt;/image&gt;</a:t>
-            </a:r>
-            <a:br/>
-            <a:r>
-              <a:t>          &lt;clip&gt;</a:t>
-            </a:r>
-            <a:br/>
-            <a:r>
-              <a:t>            &lt;near&gt;0.1&lt;/near&gt;</a:t>
-            </a:r>
-            <a:br/>
-            <a:r>
-              <a:t>            &lt;far&gt;20&lt;/far&gt;</a:t>
-            </a:r>
-            <a:br/>
-            <a:r>
-              <a:t>          &lt;/clip&gt;</a:t>
-            </a:r>
-            <a:br/>
-            <a:r>
-              <a:t>        &lt;/camera&gt;</a:t>
+              <a:t>              &lt;resolution&gt;1&lt;/resolution&gt;</a:t>
+            </a:r>
+            <a:br/>
+            <a:r>
+              <a:t>              &lt;min_angle&gt;-3.14159&lt;/min_angle&gt;</a:t>
+            </a:r>
+            <a:br/>
+            <a:r>
+              <a:t>              &lt;max_angle&gt;3.14159&lt;/max_angle&gt;</a:t>
+            </a:r>
+            <a:br/>
+            <a:r>
+              <a:t>            &lt;/horizontal&gt;</a:t>
+            </a:r>
+            <a:br/>
+            <a:r>
+              <a:t>          &lt;/scan&gt;</a:t>
+            </a:r>
+            <a:br/>
+            <a:r>
+              <a:t>          &lt;range&gt;</a:t>
+            </a:r>
+            <a:br/>
+            <a:r>
+              <a:t>            &lt;min&gt;0.12&lt;/min&gt;</a:t>
+            </a:r>
+            <a:br/>
+            <a:r>
+              <a:t>            &lt;max&gt;12.0&lt;/max&gt;</a:t>
+            </a:r>
+            <a:br/>
+            <a:r>
+              <a:t>            &lt;resolution&gt;0.01&lt;/resolution&gt;</a:t>
+            </a:r>
+            <a:br/>
+            <a:r>
+              <a:t>          &lt;/range&gt;</a:t>
+            </a:r>
+            <a:br/>
+            <a:r>
+              <a:t>        &lt;/lidar&gt;</a:t>
             </a:r>
             <a:br/>
             <a:r>
               <a:t>      &lt;/sensor&gt;</a:t>
-            </a:r>
-            <a:br/>
-            <a:r>
-              <a:t>    &lt;/link&gt;</a:t>
-            </a:r>
-            <a:br/>
-            <a:r>
-              <a:t>    </a:t>
-            </a:r>
-            <a:br/>
-            <a:r>
-              <a:t>    </a:t>
             </a:r>
           </a:p>
         </p:txBody>
@@ -16638,7 +16839,7 @@
         </p:nvSpPr>
         <p:spPr>
           <a:xfrm>
-            <a:off x="749808" y="6199632"/>
+            <a:off x="749808" y="6181344"/>
             <a:ext cx="10789920" cy="201168"/>
           </a:xfrm>
           <a:prstGeom prst="rect">
@@ -16664,7 +16865,7 @@
               </a:defRPr>
             </a:pPr>
             <a:r>
-              <a:t>파일 전체 19/21 · 이 슬라이드 다음에 같은 파일의 나머지 줄이 이어집니다.</a:t>
+              <a:t>파일 전체 19/24 · 이 슬라이드 다음에 같은 파일의 나머지 줄이 이어집니다.</a:t>
             </a:r>
           </a:p>
         </p:txBody>
@@ -16721,7 +16922,7 @@
               </a:defRPr>
             </a:pPr>
             <a:r>
-              <a:t>파일을 계속 작성하고 저장한다 (20/21)</a:t>
+              <a:t>파일을 계속 작성하고 저장한다 (20/24)</a:t>
             </a:r>
           </a:p>
         </p:txBody>
@@ -16896,7 +17097,7 @@
               </a:defRPr>
             </a:pPr>
             <a:r>
-              <a:t>현재 단계 22/24    |    현재 폴더 ~/agv_ws    |    현재 터미널</a:t>
+              <a:t>현재 단계 22/27    |    현재 폴더 ~/agv_ws    |    현재 터미널</a:t>
             </a:r>
           </a:p>
         </p:txBody>
@@ -16909,8 +17110,8 @@
         </p:nvSpPr>
         <p:spPr>
           <a:xfrm>
-            <a:off x="658368" y="1682496"/>
-            <a:ext cx="10972800" cy="347472"/>
+            <a:off x="658368" y="1627632"/>
+            <a:ext cx="10972800" cy="256032"/>
           </a:xfrm>
           <a:prstGeom prst="rect">
             <a:avLst/>
@@ -16927,7 +17128,7 @@
               <a:spcAft>
                 <a:spcPts val="0"/>
               </a:spcAft>
-              <a:defRPr sz="1700" b="1">
+              <a:defRPr sz="1500" b="1">
                 <a:solidFill>
                   <a:srgbClr val="122C4E"/>
                 </a:solidFill>
@@ -16948,8 +17149,8 @@
         </p:nvSpPr>
         <p:spPr>
           <a:xfrm>
-            <a:off x="658368" y="2103120"/>
-            <a:ext cx="10972800" cy="493776"/>
+            <a:off x="658368" y="1956816"/>
+            <a:ext cx="10972800" cy="603504"/>
           </a:xfrm>
           <a:prstGeom prst="rect">
             <a:avLst/>
@@ -16993,7 +17194,11 @@
               </a:defRPr>
             </a:pPr>
             <a:r>
-              <a:t>파일 생성/열기: mkdir -p ~/agv_ws/src/agv_gazebo/models/agv    &amp;&amp;    nano ~/agv_ws/src/agv_gazebo/models/agv/model.sdf</a:t>
+              <a:t>파일 생성: mkdir -p ~/agv_ws/src/agv_gazebo/models/agv</a:t>
+            </a:r>
+            <a:br/>
+            <a:r>
+              <a:t>파일 열기: nano ~/agv_ws/src/agv_gazebo/models/agv/model.sdf</a:t>
             </a:r>
           </a:p>
         </p:txBody>
@@ -17006,8 +17211,8 @@
         </p:nvSpPr>
         <p:spPr>
           <a:xfrm>
-            <a:off x="658368" y="2761488"/>
-            <a:ext cx="10972800" cy="3383280"/>
+            <a:off x="658368" y="2706624"/>
+            <a:ext cx="10972800" cy="3364992"/>
           </a:xfrm>
           <a:prstGeom prst="rect">
             <a:avLst/>
@@ -17051,7 +17256,19 @@
               </a:defRPr>
             </a:pPr>
             <a:r>
-              <a:t>    &lt;joint name="camera_joint" type="fixed"&gt;</a:t>
+              <a:t>    &lt;/link&gt;</a:t>
+            </a:r>
+            <a:br/>
+            <a:r>
+              <a:t>    </a:t>
+            </a:r>
+            <a:br/>
+            <a:r>
+              <a:t>    </a:t>
+            </a:r>
+            <a:br/>
+            <a:r>
+              <a:t>    &lt;joint name="lidar_joint" type="fixed"&gt;</a:t>
             </a:r>
             <a:br/>
             <a:r>
@@ -17059,7 +17276,7 @@
             </a:r>
             <a:br/>
             <a:r>
-              <a:t>      &lt;child&gt;camera_link&lt;/child&gt;</a:t>
+              <a:t>      &lt;child&gt;lidar_link&lt;/child&gt;</a:t>
             </a:r>
             <a:br/>
             <a:r>
@@ -17075,35 +17292,15 @@
             </a:r>
             <a:br/>
             <a:r>
-              <a:t>    &lt;plugin filename="gz-sim-diff-drive-system" name="gz::sim::systems::DiffDrive"&gt;</a:t>
-            </a:r>
-            <a:br/>
-            <a:r>
-              <a:t>      &lt;left_joint&gt;left_wheel_joint&lt;/left_joint&gt;</a:t>
-            </a:r>
-            <a:br/>
-            <a:r>
-              <a:t>      &lt;right_joint&gt;right_wheel_joint&lt;/right_joint&gt;</a:t>
-            </a:r>
-            <a:br/>
-            <a:r>
-              <a:t>      &lt;wheel_separation&gt;0.38&lt;/wheel_separation&gt;</a:t>
-            </a:r>
-            <a:br/>
-            <a:r>
-              <a:t>      &lt;wheel_radius&gt;0.08&lt;/wheel_radius&gt;</a:t>
-            </a:r>
-            <a:br/>
-            <a:r>
-              <a:t>      &lt;topic&gt;/cmd_vel&lt;/topic&gt;</a:t>
-            </a:r>
-            <a:br/>
-            <a:r>
-              <a:t>      &lt;odom_topic&gt;/odom&lt;/odom_topic&gt;</a:t>
-            </a:r>
-            <a:br/>
-            <a:r>
-              <a:t>      &lt;frame_id&gt;odom&lt;/frame_id&gt;</a:t>
+              <a:t>    &lt;link name="camera_link"&gt;</a:t>
+            </a:r>
+            <a:br/>
+            <a:r>
+              <a:t>      &lt;pose relative_to="base_link"&gt;0.30 0 0.10 0 0 0&lt;/pose&gt;</a:t>
+            </a:r>
+            <a:br/>
+            <a:r>
+              <a:t>      &lt;visual name="housing"&gt;</a:t>
             </a:r>
           </a:p>
         </p:txBody>
@@ -17116,7 +17313,7 @@
         </p:nvSpPr>
         <p:spPr>
           <a:xfrm>
-            <a:off x="749808" y="6199632"/>
+            <a:off x="749808" y="6181344"/>
             <a:ext cx="10789920" cy="201168"/>
           </a:xfrm>
           <a:prstGeom prst="rect">
@@ -17142,7 +17339,7 @@
               </a:defRPr>
             </a:pPr>
             <a:r>
-              <a:t>파일 전체 20/21 · 이 슬라이드 다음에 같은 파일의 나머지 줄이 이어집니다.</a:t>
+              <a:t>파일 전체 20/24 · 이 슬라이드 다음에 같은 파일의 나머지 줄이 이어집니다.</a:t>
             </a:r>
           </a:p>
         </p:txBody>
@@ -17199,7 +17396,7 @@
               </a:defRPr>
             </a:pPr>
             <a:r>
-              <a:t>파일을 계속 작성하고 저장한다 (21/21)</a:t>
+              <a:t>파일을 계속 작성하고 저장한다 (21/24)</a:t>
             </a:r>
           </a:p>
         </p:txBody>
@@ -17374,7 +17571,7 @@
               </a:defRPr>
             </a:pPr>
             <a:r>
-              <a:t>현재 단계 23/24    |    현재 폴더 ~/agv_ws    |    현재 터미널</a:t>
+              <a:t>현재 단계 23/27    |    현재 폴더 ~/agv_ws    |    현재 터미널</a:t>
             </a:r>
           </a:p>
         </p:txBody>
@@ -17387,8 +17584,8 @@
         </p:nvSpPr>
         <p:spPr>
           <a:xfrm>
-            <a:off x="658368" y="1682496"/>
-            <a:ext cx="10972800" cy="347472"/>
+            <a:off x="658368" y="1627632"/>
+            <a:ext cx="10972800" cy="256032"/>
           </a:xfrm>
           <a:prstGeom prst="rect">
             <a:avLst/>
@@ -17405,7 +17602,7 @@
               <a:spcAft>
                 <a:spcPts val="0"/>
               </a:spcAft>
-              <a:defRPr sz="1700" b="1">
+              <a:defRPr sz="1500" b="1">
                 <a:solidFill>
                   <a:srgbClr val="122C4E"/>
                 </a:solidFill>
@@ -17426,8 +17623,8 @@
         </p:nvSpPr>
         <p:spPr>
           <a:xfrm>
-            <a:off x="658368" y="2103120"/>
-            <a:ext cx="10972800" cy="493776"/>
+            <a:off x="658368" y="1956816"/>
+            <a:ext cx="10972800" cy="603504"/>
           </a:xfrm>
           <a:prstGeom prst="rect">
             <a:avLst/>
@@ -17471,7 +17668,11 @@
               </a:defRPr>
             </a:pPr>
             <a:r>
-              <a:t>파일 생성/열기: mkdir -p ~/agv_ws/src/agv_gazebo/models/agv    &amp;&amp;    nano ~/agv_ws/src/agv_gazebo/models/agv/model.sdf</a:t>
+              <a:t>파일 생성: mkdir -p ~/agv_ws/src/agv_gazebo/models/agv</a:t>
+            </a:r>
+            <a:br/>
+            <a:r>
+              <a:t>파일 열기: nano ~/agv_ws/src/agv_gazebo/models/agv/model.sdf</a:t>
             </a:r>
           </a:p>
         </p:txBody>
@@ -17484,8 +17685,8 @@
         </p:nvSpPr>
         <p:spPr>
           <a:xfrm>
-            <a:off x="658368" y="2761488"/>
-            <a:ext cx="10972800" cy="3383280"/>
+            <a:off x="658368" y="2706624"/>
+            <a:ext cx="10972800" cy="3364992"/>
           </a:xfrm>
           <a:prstGeom prst="rect">
             <a:avLst/>
@@ -17529,32 +17730,51 @@
               </a:defRPr>
             </a:pPr>
             <a:r>
-              <a:t>      &lt;child_frame_id&gt;base_link&lt;/child_frame_id&gt;</a:t>
-            </a:r>
-            <a:br/>
-            <a:r>
-              <a:t>    &lt;/plugin&gt;</a:t>
-            </a:r>
-            <a:br/>
-            <a:r>
-              <a:t>    </a:t>
-            </a:r>
-            <a:br/>
-            <a:r>
-              <a:t>  </a:t>
-            </a:r>
-            <a:br/>
-            <a:r>
-              <a:t>  &lt;/model&gt;</a:t>
-            </a:r>
-            <a:br/>
-            <a:r>
-              <a:t>  </a:t>
-            </a:r>
-            <a:br/>
-            <a:br/>
-            <a:r>
-              <a:t>&lt;/sdf&gt;</a:t>
+              <a:t>        &lt;geometry&gt;</a:t>
+            </a:r>
+            <a:br/>
+            <a:r>
+              <a:t>          &lt;box&gt;</a:t>
+            </a:r>
+            <a:br/>
+            <a:r>
+              <a:t>            &lt;size&gt;0.05 0.08 0.05&lt;/size&gt;</a:t>
+            </a:r>
+            <a:br/>
+            <a:r>
+              <a:t>          &lt;/box&gt;</a:t>
+            </a:r>
+            <a:br/>
+            <a:r>
+              <a:t>        &lt;/geometry&gt;</a:t>
+            </a:r>
+            <a:br/>
+            <a:r>
+              <a:t>      &lt;/visual&gt;</a:t>
+            </a:r>
+            <a:br/>
+            <a:r>
+              <a:t>      &lt;sensor name="camera" type="camera"&gt;</a:t>
+            </a:r>
+            <a:br/>
+            <a:r>
+              <a:t>        &lt;topic&gt;/camera/image_raw&lt;/topic&gt;</a:t>
+            </a:r>
+            <a:br/>
+            <a:r>
+              <a:t>        &lt;always_on&gt;true&lt;/always_on&gt;</a:t>
+            </a:r>
+            <a:br/>
+            <a:r>
+              <a:t>        &lt;update_rate&gt;15&lt;/update_rate&gt;</a:t>
+            </a:r>
+            <a:br/>
+            <a:r>
+              <a:t>        &lt;camera&gt;</a:t>
+            </a:r>
+            <a:br/>
+            <a:r>
+              <a:t>          &lt;horizontal_fov&gt;1.047&lt;/horizontal_fov&gt;</a:t>
             </a:r>
           </a:p>
         </p:txBody>
@@ -17567,7 +17787,7 @@
         </p:nvSpPr>
         <p:spPr>
           <a:xfrm>
-            <a:off x="749808" y="6199632"/>
+            <a:off x="749808" y="6181344"/>
             <a:ext cx="10789920" cy="201168"/>
           </a:xfrm>
           <a:prstGeom prst="rect">
@@ -17593,7 +17813,7 @@
               </a:defRPr>
             </a:pPr>
             <a:r>
-              <a:t>파일 전체 21/21 · 이 슬라이드 다음에 같은 파일의 나머지 줄이 이어집니다.</a:t>
+              <a:t>파일 전체 21/24 · 이 슬라이드 다음에 같은 파일의 나머지 줄이 이어집니다.</a:t>
             </a:r>
           </a:p>
         </p:txBody>
@@ -18069,7 +18289,7 @@
               </a:defRPr>
             </a:pPr>
             <a:r>
-              <a:t>파일을 새로 만들고 저장한다 (1/3)</a:t>
+              <a:t>파일을 계속 작성하고 저장한다 (22/24)</a:t>
             </a:r>
           </a:p>
         </p:txBody>
@@ -18108,7 +18328,7 @@
               </a:defRPr>
             </a:pPr>
             <a:r>
-              <a:t>~/agv_ws/src/agv_gazebo/config/bridge.yaml</a:t>
+              <a:t>~/agv_ws/src/agv_gazebo/models/agv/model.sdf</a:t>
             </a:r>
           </a:p>
         </p:txBody>
@@ -18257,8 +18477,8 @@
         </p:nvSpPr>
         <p:spPr>
           <a:xfrm>
-            <a:off x="658368" y="1682496"/>
-            <a:ext cx="10972800" cy="347472"/>
+            <a:off x="658368" y="1627632"/>
+            <a:ext cx="10972800" cy="256032"/>
           </a:xfrm>
           <a:prstGeom prst="rect">
             <a:avLst/>
@@ -18275,7 +18495,7 @@
               <a:spcAft>
                 <a:spcPts val="0"/>
               </a:spcAft>
-              <a:defRPr sz="1700" b="1">
+              <a:defRPr sz="1500" b="1">
                 <a:solidFill>
                   <a:srgbClr val="122C4E"/>
                 </a:solidFill>
@@ -18296,8 +18516,8 @@
         </p:nvSpPr>
         <p:spPr>
           <a:xfrm>
-            <a:off x="658368" y="2103120"/>
-            <a:ext cx="10972800" cy="493776"/>
+            <a:off x="658368" y="1956816"/>
+            <a:ext cx="10972800" cy="603504"/>
           </a:xfrm>
           <a:prstGeom prst="rect">
             <a:avLst/>
@@ -18341,7 +18561,11 @@
               </a:defRPr>
             </a:pPr>
             <a:r>
-              <a:t>파일 생성/열기: mkdir -p ~/agv_ws/src/agv_gazebo/config    &amp;&amp;    nano ~/agv_ws/src/agv_gazebo/config/bridge.yaml</a:t>
+              <a:t>파일 생성: mkdir -p ~/agv_ws/src/agv_gazebo/models/agv</a:t>
+            </a:r>
+            <a:br/>
+            <a:r>
+              <a:t>파일 열기: nano ~/agv_ws/src/agv_gazebo/models/agv/model.sdf</a:t>
             </a:r>
           </a:p>
         </p:txBody>
@@ -18354,8 +18578,8 @@
         </p:nvSpPr>
         <p:spPr>
           <a:xfrm>
-            <a:off x="658368" y="2761488"/>
-            <a:ext cx="10972800" cy="3383280"/>
+            <a:off x="658368" y="2706624"/>
+            <a:ext cx="10972800" cy="3364992"/>
           </a:xfrm>
           <a:prstGeom prst="rect">
             <a:avLst/>
@@ -18399,59 +18623,51 @@
               </a:defRPr>
             </a:pPr>
             <a:r>
-              <a:t>- ros_topic_name: "/cmd_vel"</a:t>
-            </a:r>
-            <a:br/>
-            <a:r>
-              <a:t>  gz_topic_name: "/cmd_vel"</a:t>
-            </a:r>
-            <a:br/>
-            <a:r>
-              <a:t>  ros_type_name: "geometry_msgs/msg/Twist"</a:t>
-            </a:r>
-            <a:br/>
-            <a:r>
-              <a:t>  gz_type_name: "gz.msgs.Twist"</a:t>
-            </a:r>
-            <a:br/>
-            <a:r>
-              <a:t>  direction: ROS_TO_GZ</a:t>
-            </a:r>
-            <a:br/>
-            <a:r>
-              <a:t>- ros_topic_name: "/odom"</a:t>
-            </a:r>
-            <a:br/>
-            <a:r>
-              <a:t>  gz_topic_name: "/odom"</a:t>
-            </a:r>
-            <a:br/>
-            <a:r>
-              <a:t>  ros_type_name: "nav_msgs/msg/Odometry"</a:t>
-            </a:r>
-            <a:br/>
-            <a:r>
-              <a:t>  gz_type_name: "gz.msgs.Odometry"</a:t>
-            </a:r>
-            <a:br/>
-            <a:r>
-              <a:t>  direction: GZ_TO_ROS</a:t>
-            </a:r>
-            <a:br/>
-            <a:r>
-              <a:t>- ros_topic_name: "/scan"</a:t>
-            </a:r>
-            <a:br/>
-            <a:r>
-              <a:t>  gz_topic_name: "/scan"</a:t>
-            </a:r>
-            <a:br/>
-            <a:r>
-              <a:t>  ros_type_name: "sensor_msgs/msg/LaserScan"</a:t>
-            </a:r>
-            <a:br/>
-            <a:r>
-              <a:t>  gz_type_name: "gz.msgs.LaserScan"</a:t>
+              <a:t>          &lt;image&gt;</a:t>
+            </a:r>
+            <a:br/>
+            <a:r>
+              <a:t>            &lt;width&gt;640&lt;/width&gt;</a:t>
+            </a:r>
+            <a:br/>
+            <a:r>
+              <a:t>            &lt;height&gt;480&lt;/height&gt;</a:t>
+            </a:r>
+            <a:br/>
+            <a:r>
+              <a:t>            &lt;format&gt;R8G8B8&lt;/format&gt;</a:t>
+            </a:r>
+            <a:br/>
+            <a:r>
+              <a:t>          &lt;/image&gt;</a:t>
+            </a:r>
+            <a:br/>
+            <a:r>
+              <a:t>          &lt;clip&gt;</a:t>
+            </a:r>
+            <a:br/>
+            <a:r>
+              <a:t>            &lt;near&gt;0.1&lt;/near&gt;</a:t>
+            </a:r>
+            <a:br/>
+            <a:r>
+              <a:t>            &lt;far&gt;20&lt;/far&gt;</a:t>
+            </a:r>
+            <a:br/>
+            <a:r>
+              <a:t>          &lt;/clip&gt;</a:t>
+            </a:r>
+            <a:br/>
+            <a:r>
+              <a:t>        &lt;/camera&gt;</a:t>
+            </a:r>
+            <a:br/>
+            <a:r>
+              <a:t>      &lt;/sensor&gt;</a:t>
+            </a:r>
+            <a:br/>
+            <a:r>
+              <a:t>    &lt;/link&gt;</a:t>
             </a:r>
           </a:p>
         </p:txBody>
@@ -18464,7 +18680,7 @@
         </p:nvSpPr>
         <p:spPr>
           <a:xfrm>
-            <a:off x="749808" y="6199632"/>
+            <a:off x="749808" y="6181344"/>
             <a:ext cx="10789920" cy="201168"/>
           </a:xfrm>
           <a:prstGeom prst="rect">
@@ -18490,7 +18706,7 @@
               </a:defRPr>
             </a:pPr>
             <a:r>
-              <a:t>파일 전체 1/3 · 이 슬라이드 다음에 같은 파일의 나머지 줄이 이어집니다.</a:t>
+              <a:t>파일 전체 22/24 · 이 슬라이드 다음에 같은 파일의 나머지 줄이 이어집니다.</a:t>
             </a:r>
           </a:p>
         </p:txBody>
@@ -18547,7 +18763,7 @@
               </a:defRPr>
             </a:pPr>
             <a:r>
-              <a:t>파일을 계속 작성하고 저장한다 (2/3)</a:t>
+              <a:t>파일을 계속 작성하고 저장한다 (23/24)</a:t>
             </a:r>
           </a:p>
         </p:txBody>
@@ -18586,7 +18802,7 @@
               </a:defRPr>
             </a:pPr>
             <a:r>
-              <a:t>~/agv_ws/src/agv_gazebo/config/bridge.yaml</a:t>
+              <a:t>~/agv_ws/src/agv_gazebo/models/agv/model.sdf</a:t>
             </a:r>
           </a:p>
         </p:txBody>
@@ -18735,8 +18951,8 @@
         </p:nvSpPr>
         <p:spPr>
           <a:xfrm>
-            <a:off x="658368" y="1682496"/>
-            <a:ext cx="10972800" cy="347472"/>
+            <a:off x="658368" y="1627632"/>
+            <a:ext cx="10972800" cy="256032"/>
           </a:xfrm>
           <a:prstGeom prst="rect">
             <a:avLst/>
@@ -18753,7 +18969,7 @@
               <a:spcAft>
                 <a:spcPts val="0"/>
               </a:spcAft>
-              <a:defRPr sz="1700" b="1">
+              <a:defRPr sz="1500" b="1">
                 <a:solidFill>
                   <a:srgbClr val="122C4E"/>
                 </a:solidFill>
@@ -18774,8 +18990,8 @@
         </p:nvSpPr>
         <p:spPr>
           <a:xfrm>
-            <a:off x="658368" y="2103120"/>
-            <a:ext cx="10972800" cy="493776"/>
+            <a:off x="658368" y="1956816"/>
+            <a:ext cx="10972800" cy="603504"/>
           </a:xfrm>
           <a:prstGeom prst="rect">
             <a:avLst/>
@@ -18819,7 +19035,11 @@
               </a:defRPr>
             </a:pPr>
             <a:r>
-              <a:t>파일 생성/열기: mkdir -p ~/agv_ws/src/agv_gazebo/config    &amp;&amp;    nano ~/agv_ws/src/agv_gazebo/config/bridge.yaml</a:t>
+              <a:t>파일 생성: mkdir -p ~/agv_ws/src/agv_gazebo/models/agv</a:t>
+            </a:r>
+            <a:br/>
+            <a:r>
+              <a:t>파일 열기: nano ~/agv_ws/src/agv_gazebo/models/agv/model.sdf</a:t>
             </a:r>
           </a:p>
         </p:txBody>
@@ -18832,8 +19052,8 @@
         </p:nvSpPr>
         <p:spPr>
           <a:xfrm>
-            <a:off x="658368" y="2761488"/>
-            <a:ext cx="10972800" cy="3383280"/>
+            <a:off x="658368" y="2706624"/>
+            <a:ext cx="10972800" cy="3364992"/>
           </a:xfrm>
           <a:prstGeom prst="rect">
             <a:avLst/>
@@ -18877,59 +19097,51 @@
               </a:defRPr>
             </a:pPr>
             <a:r>
-              <a:t>  direction: GZ_TO_ROS</a:t>
-            </a:r>
-            <a:br/>
-            <a:r>
-              <a:t>- ros_topic_name: "/imu/data"</a:t>
-            </a:r>
-            <a:br/>
-            <a:r>
-              <a:t>  gz_topic_name: "/imu/data"</a:t>
-            </a:r>
-            <a:br/>
-            <a:r>
-              <a:t>  ros_type_name: "sensor_msgs/msg/Imu"</a:t>
-            </a:r>
-            <a:br/>
-            <a:r>
-              <a:t>  gz_type_name: "gz.msgs.IMU"</a:t>
-            </a:r>
-            <a:br/>
-            <a:r>
-              <a:t>  direction: GZ_TO_ROS</a:t>
-            </a:r>
-            <a:br/>
-            <a:r>
-              <a:t>- ros_topic_name: "/camera/image_raw"</a:t>
-            </a:r>
-            <a:br/>
-            <a:r>
-              <a:t>  gz_topic_name: "/camera/image_raw"</a:t>
-            </a:r>
-            <a:br/>
-            <a:r>
-              <a:t>  ros_type_name: "sensor_msgs/msg/Image"</a:t>
-            </a:r>
-            <a:br/>
-            <a:r>
-              <a:t>  gz_type_name: "gz.msgs.Image"</a:t>
-            </a:r>
-            <a:br/>
-            <a:r>
-              <a:t>  direction: GZ_TO_ROS</a:t>
-            </a:r>
-            <a:br/>
-            <a:r>
-              <a:t>- ros_topic_name: "/clock"</a:t>
-            </a:r>
-            <a:br/>
-            <a:r>
-              <a:t>  gz_topic_name: "/clock"</a:t>
-            </a:r>
-            <a:br/>
-            <a:r>
-              <a:t>  ros_type_name: "rosgraph_msgs/msg/Clock"</a:t>
+              <a:t>    </a:t>
+            </a:r>
+            <a:br/>
+            <a:r>
+              <a:t>    </a:t>
+            </a:r>
+            <a:br/>
+            <a:r>
+              <a:t>    &lt;joint name="camera_joint" type="fixed"&gt;</a:t>
+            </a:r>
+            <a:br/>
+            <a:r>
+              <a:t>      &lt;parent&gt;base_link&lt;/parent&gt;</a:t>
+            </a:r>
+            <a:br/>
+            <a:r>
+              <a:t>      &lt;child&gt;camera_link&lt;/child&gt;</a:t>
+            </a:r>
+            <a:br/>
+            <a:r>
+              <a:t>    &lt;/joint&gt;</a:t>
+            </a:r>
+            <a:br/>
+            <a:r>
+              <a:t>    </a:t>
+            </a:r>
+            <a:br/>
+            <a:r>
+              <a:t>    </a:t>
+            </a:r>
+            <a:br/>
+            <a:r>
+              <a:t>    &lt;plugin filename="gz-sim-diff-drive-system" name="gz::sim::systems::DiffDrive"&gt;</a:t>
+            </a:r>
+            <a:br/>
+            <a:r>
+              <a:t>      &lt;left_joint&gt;left_wheel_joint&lt;/left_joint&gt;</a:t>
+            </a:r>
+            <a:br/>
+            <a:r>
+              <a:t>      &lt;right_joint&gt;right_wheel_joint&lt;/right_joint&gt;</a:t>
+            </a:r>
+            <a:br/>
+            <a:r>
+              <a:t>      &lt;wheel_separation&gt;0.38&lt;/wheel_separation&gt;</a:t>
             </a:r>
           </a:p>
         </p:txBody>
@@ -18942,7 +19154,7 @@
         </p:nvSpPr>
         <p:spPr>
           <a:xfrm>
-            <a:off x="749808" y="6199632"/>
+            <a:off x="749808" y="6181344"/>
             <a:ext cx="10789920" cy="201168"/>
           </a:xfrm>
           <a:prstGeom prst="rect">
@@ -18968,7 +19180,7 @@
               </a:defRPr>
             </a:pPr>
             <a:r>
-              <a:t>파일 전체 2/3 · 이 슬라이드 다음에 같은 파일의 나머지 줄이 이어집니다.</a:t>
+              <a:t>파일 전체 23/24 · 이 슬라이드 다음에 같은 파일의 나머지 줄이 이어집니다.</a:t>
             </a:r>
           </a:p>
         </p:txBody>
@@ -19025,7 +19237,7 @@
               </a:defRPr>
             </a:pPr>
             <a:r>
-              <a:t>파일을 계속 작성하고 저장한다 (3/3)</a:t>
+              <a:t>파일을 계속 작성하고 저장한다 (24/24)</a:t>
             </a:r>
           </a:p>
         </p:txBody>
@@ -19064,7 +19276,7 @@
               </a:defRPr>
             </a:pPr>
             <a:r>
-              <a:t>~/agv_ws/src/agv_gazebo/config/bridge.yaml</a:t>
+              <a:t>~/agv_ws/src/agv_gazebo/models/agv/model.sdf</a:t>
             </a:r>
           </a:p>
         </p:txBody>
@@ -19213,8 +19425,8 @@
         </p:nvSpPr>
         <p:spPr>
           <a:xfrm>
-            <a:off x="658368" y="1682496"/>
-            <a:ext cx="10972800" cy="347472"/>
+            <a:off x="658368" y="1627632"/>
+            <a:ext cx="10972800" cy="256032"/>
           </a:xfrm>
           <a:prstGeom prst="rect">
             <a:avLst/>
@@ -19231,7 +19443,7 @@
               <a:spcAft>
                 <a:spcPts val="0"/>
               </a:spcAft>
-              <a:defRPr sz="1700" b="1">
+              <a:defRPr sz="1500" b="1">
                 <a:solidFill>
                   <a:srgbClr val="122C4E"/>
                 </a:solidFill>
@@ -19252,8 +19464,8 @@
         </p:nvSpPr>
         <p:spPr>
           <a:xfrm>
-            <a:off x="658368" y="2103120"/>
-            <a:ext cx="10972800" cy="493776"/>
+            <a:off x="658368" y="1956816"/>
+            <a:ext cx="10972800" cy="603504"/>
           </a:xfrm>
           <a:prstGeom prst="rect">
             <a:avLst/>
@@ -19297,7 +19509,11 @@
               </a:defRPr>
             </a:pPr>
             <a:r>
-              <a:t>파일 생성/열기: mkdir -p ~/agv_ws/src/agv_gazebo/config    &amp;&amp;    nano ~/agv_ws/src/agv_gazebo/config/bridge.yaml</a:t>
+              <a:t>파일 생성: mkdir -p ~/agv_ws/src/agv_gazebo/models/agv</a:t>
+            </a:r>
+            <a:br/>
+            <a:r>
+              <a:t>파일 열기: nano ~/agv_ws/src/agv_gazebo/models/agv/model.sdf</a:t>
             </a:r>
           </a:p>
         </p:txBody>
@@ -19310,8 +19526,8 @@
         </p:nvSpPr>
         <p:spPr>
           <a:xfrm>
-            <a:off x="658368" y="2761488"/>
-            <a:ext cx="10972800" cy="3383280"/>
+            <a:off x="658368" y="2706624"/>
+            <a:ext cx="10972800" cy="3364992"/>
           </a:xfrm>
           <a:prstGeom prst="rect">
             <a:avLst/>
@@ -19355,11 +19571,48 @@
               </a:defRPr>
             </a:pPr>
             <a:r>
-              <a:t>  gz_type_name: "gz.msgs.Clock"</a:t>
-            </a:r>
-            <a:br/>
-            <a:r>
-              <a:t>  direction: GZ_TO_ROS</a:t>
+              <a:t>      &lt;wheel_radius&gt;0.08&lt;/wheel_radius&gt;</a:t>
+            </a:r>
+            <a:br/>
+            <a:r>
+              <a:t>      &lt;topic&gt;/cmd_vel&lt;/topic&gt;</a:t>
+            </a:r>
+            <a:br/>
+            <a:r>
+              <a:t>      &lt;odom_topic&gt;/odom&lt;/odom_topic&gt;</a:t>
+            </a:r>
+            <a:br/>
+            <a:r>
+              <a:t>      &lt;frame_id&gt;odom&lt;/frame_id&gt;</a:t>
+            </a:r>
+            <a:br/>
+            <a:r>
+              <a:t>      &lt;child_frame_id&gt;base_link&lt;/child_frame_id&gt;</a:t>
+            </a:r>
+            <a:br/>
+            <a:r>
+              <a:t>    &lt;/plugin&gt;</a:t>
+            </a:r>
+            <a:br/>
+            <a:r>
+              <a:t>    </a:t>
+            </a:r>
+            <a:br/>
+            <a:r>
+              <a:t>  </a:t>
+            </a:r>
+            <a:br/>
+            <a:r>
+              <a:t>  &lt;/model&gt;</a:t>
+            </a:r>
+            <a:br/>
+            <a:r>
+              <a:t>  </a:t>
+            </a:r>
+            <a:br/>
+            <a:br/>
+            <a:r>
+              <a:t>&lt;/sdf&gt;</a:t>
             </a:r>
           </a:p>
         </p:txBody>
@@ -19372,7 +19625,7 @@
         </p:nvSpPr>
         <p:spPr>
           <a:xfrm>
-            <a:off x="749808" y="6199632"/>
+            <a:off x="749808" y="6181344"/>
             <a:ext cx="10789920" cy="201168"/>
           </a:xfrm>
           <a:prstGeom prst="rect">
@@ -19398,7 +19651,7 @@
               </a:defRPr>
             </a:pPr>
             <a:r>
-              <a:t>파일 전체 3/3 · 이 슬라이드 다음에 같은 파일의 나머지 줄이 이어집니다.</a:t>
+              <a:t>파일 전체 24/24 · 이 슬라이드 다음에 같은 파일의 나머지 줄이 이어집니다.</a:t>
             </a:r>
           </a:p>
         </p:txBody>
@@ -19494,7 +19747,7 @@
               </a:defRPr>
             </a:pPr>
             <a:r>
-              <a:t>~/agv_ws/src/agv_sensors/agv_sensors/lidar_processor.py</a:t>
+              <a:t>~/agv_ws/src/agv_gazebo/config/bridge.yaml</a:t>
             </a:r>
           </a:p>
         </p:txBody>
@@ -19643,8 +19896,8 @@
         </p:nvSpPr>
         <p:spPr>
           <a:xfrm>
-            <a:off x="658368" y="1682496"/>
-            <a:ext cx="10972800" cy="347472"/>
+            <a:off x="658368" y="1627632"/>
+            <a:ext cx="10972800" cy="256032"/>
           </a:xfrm>
           <a:prstGeom prst="rect">
             <a:avLst/>
@@ -19661,7 +19914,7 @@
               <a:spcAft>
                 <a:spcPts val="0"/>
               </a:spcAft>
-              <a:defRPr sz="1700" b="1">
+              <a:defRPr sz="1500" b="1">
                 <a:solidFill>
                   <a:srgbClr val="122C4E"/>
                 </a:solidFill>
@@ -19682,8 +19935,8 @@
         </p:nvSpPr>
         <p:spPr>
           <a:xfrm>
-            <a:off x="658368" y="2103120"/>
-            <a:ext cx="10972800" cy="493776"/>
+            <a:off x="658368" y="1956816"/>
+            <a:ext cx="10972800" cy="603504"/>
           </a:xfrm>
           <a:prstGeom prst="rect">
             <a:avLst/>
@@ -19727,7 +19980,11 @@
               </a:defRPr>
             </a:pPr>
             <a:r>
-              <a:t>파일 생성/열기: mkdir -p ~/agv_ws/src/agv_sensors/agv_sensors    &amp;&amp;    nano ~/agv_ws/src/agv_sensors/agv_sensors/lidar_processor.py</a:t>
+              <a:t>파일 생성: mkdir -p ~/agv_ws/src/agv_gazebo/config</a:t>
+            </a:r>
+            <a:br/>
+            <a:r>
+              <a:t>파일 열기: nano ~/agv_ws/src/agv_gazebo/config/bridge.yaml</a:t>
             </a:r>
           </a:p>
         </p:txBody>
@@ -19740,8 +19997,8 @@
         </p:nvSpPr>
         <p:spPr>
           <a:xfrm>
-            <a:off x="658368" y="2761488"/>
-            <a:ext cx="10972800" cy="3383280"/>
+            <a:off x="658368" y="2706624"/>
+            <a:ext cx="10972800" cy="3364992"/>
           </a:xfrm>
           <a:prstGeom prst="rect">
             <a:avLst/>
@@ -19785,53 +20042,51 @@
               </a:defRPr>
             </a:pPr>
             <a:r>
-              <a:t>import math</a:t>
-            </a:r>
-            <a:br/>
-            <a:r>
-              <a:t>import rclpy</a:t>
-            </a:r>
-            <a:br/>
-            <a:r>
-              <a:t>from rclpy.node import Node</a:t>
-            </a:r>
-            <a:br/>
-            <a:r>
-              <a:t>from rclpy.qos import qos_profile_sensor_data</a:t>
-            </a:r>
-            <a:br/>
-            <a:r>
-              <a:t>from sensor_msgs.msg import LaserScan</a:t>
-            </a:r>
-            <a:br/>
-            <a:r>
-              <a:t>from std_msgs.msg import Float32</a:t>
-            </a:r>
-            <a:br/>
-            <a:br/>
-            <a:r>
-              <a:t>class LidarProcessor(Node):</a:t>
-            </a:r>
-            <a:br/>
-            <a:br/>
-            <a:r>
-              <a:t>    def __init__(self):</a:t>
-            </a:r>
-            <a:br/>
-            <a:r>
-              <a:t>        super().__init__('lidar_processor')</a:t>
-            </a:r>
-            <a:br/>
-            <a:r>
-              <a:t>        self.declare_parameter('front_half_angle_deg', 15.0)</a:t>
-            </a:r>
-            <a:br/>
-            <a:r>
-              <a:t>        self.subscription = self.create_subscription(LaserScan, '/scan', self.callback,</a:t>
-            </a:r>
-            <a:br/>
-            <a:r>
-              <a:t>            qos_profile_sensor_data)</a:t>
+              <a:t>- ros_topic_name: "/cmd_vel"</a:t>
+            </a:r>
+            <a:br/>
+            <a:r>
+              <a:t>  gz_topic_name: "/cmd_vel"</a:t>
+            </a:r>
+            <a:br/>
+            <a:r>
+              <a:t>  ros_type_name: "geometry_msgs/msg/Twist"</a:t>
+            </a:r>
+            <a:br/>
+            <a:r>
+              <a:t>  gz_type_name: "gz.msgs.Twist"</a:t>
+            </a:r>
+            <a:br/>
+            <a:r>
+              <a:t>  direction: ROS_TO_GZ</a:t>
+            </a:r>
+            <a:br/>
+            <a:r>
+              <a:t>- ros_topic_name: "/odom"</a:t>
+            </a:r>
+            <a:br/>
+            <a:r>
+              <a:t>  gz_topic_name: "/odom"</a:t>
+            </a:r>
+            <a:br/>
+            <a:r>
+              <a:t>  ros_type_name: "nav_msgs/msg/Odometry"</a:t>
+            </a:r>
+            <a:br/>
+            <a:r>
+              <a:t>  gz_type_name: "gz.msgs.Odometry"</a:t>
+            </a:r>
+            <a:br/>
+            <a:r>
+              <a:t>  direction: GZ_TO_ROS</a:t>
+            </a:r>
+            <a:br/>
+            <a:r>
+              <a:t>- ros_topic_name: "/scan"</a:t>
+            </a:r>
+            <a:br/>
+            <a:r>
+              <a:t>  gz_topic_name: "/scan"</a:t>
             </a:r>
           </a:p>
         </p:txBody>
@@ -19844,7 +20099,7 @@
         </p:nvSpPr>
         <p:spPr>
           <a:xfrm>
-            <a:off x="749808" y="6199632"/>
+            <a:off x="749808" y="6181344"/>
             <a:ext cx="10789920" cy="201168"/>
           </a:xfrm>
           <a:prstGeom prst="rect">
@@ -19966,7 +20221,7 @@
               </a:defRPr>
             </a:pPr>
             <a:r>
-              <a:t>~/agv_ws/src/agv_sensors/agv_sensors/lidar_processor.py</a:t>
+              <a:t>~/agv_ws/src/agv_gazebo/config/bridge.yaml</a:t>
             </a:r>
           </a:p>
         </p:txBody>
@@ -20115,8 +20370,8 @@
         </p:nvSpPr>
         <p:spPr>
           <a:xfrm>
-            <a:off x="658368" y="1682496"/>
-            <a:ext cx="10972800" cy="347472"/>
+            <a:off x="658368" y="1627632"/>
+            <a:ext cx="10972800" cy="256032"/>
           </a:xfrm>
           <a:prstGeom prst="rect">
             <a:avLst/>
@@ -20133,7 +20388,7 @@
               <a:spcAft>
                 <a:spcPts val="0"/>
               </a:spcAft>
-              <a:defRPr sz="1700" b="1">
+              <a:defRPr sz="1500" b="1">
                 <a:solidFill>
                   <a:srgbClr val="122C4E"/>
                 </a:solidFill>
@@ -20154,8 +20409,8 @@
         </p:nvSpPr>
         <p:spPr>
           <a:xfrm>
-            <a:off x="658368" y="2103120"/>
-            <a:ext cx="10972800" cy="493776"/>
+            <a:off x="658368" y="1956816"/>
+            <a:ext cx="10972800" cy="603504"/>
           </a:xfrm>
           <a:prstGeom prst="rect">
             <a:avLst/>
@@ -20199,7 +20454,11 @@
               </a:defRPr>
             </a:pPr>
             <a:r>
-              <a:t>파일 생성/열기: mkdir -p ~/agv_ws/src/agv_sensors/agv_sensors    &amp;&amp;    nano ~/agv_ws/src/agv_sensors/agv_sensors/lidar_processor.py</a:t>
+              <a:t>파일 생성: mkdir -p ~/agv_ws/src/agv_gazebo/config</a:t>
+            </a:r>
+            <a:br/>
+            <a:r>
+              <a:t>파일 열기: nano ~/agv_ws/src/agv_gazebo/config/bridge.yaml</a:t>
             </a:r>
           </a:p>
         </p:txBody>
@@ -20212,8 +20471,8 @@
         </p:nvSpPr>
         <p:spPr>
           <a:xfrm>
-            <a:off x="658368" y="2761488"/>
-            <a:ext cx="10972800" cy="3383280"/>
+            <a:off x="658368" y="2706624"/>
+            <a:ext cx="10972800" cy="3364992"/>
           </a:xfrm>
           <a:prstGeom prst="rect">
             <a:avLst/>
@@ -20257,53 +20516,51 @@
               </a:defRPr>
             </a:pPr>
             <a:r>
-              <a:t>        self.publisher = self.create_publisher(Float32, '/obstacle_distance', 10)</a:t>
-            </a:r>
-            <a:br/>
-            <a:br/>
-            <a:r>
-              <a:t>    def callback(self, scan):</a:t>
-            </a:r>
-            <a:br/>
-            <a:r>
-              <a:t>        half_angle = math.radians(self.get_parameter('front_half_angle_deg').value)</a:t>
-            </a:r>
-            <a:br/>
-            <a:r>
-              <a:t>        front_ranges = [distance for index,</a:t>
-            </a:r>
-            <a:br/>
-            <a:r>
-              <a:t>            distance in enumerate(scan.ranges) if abs(scan.angle_min + index * scan.angle_increment) &lt;= half_angle and math.isfinite(distance)]</a:t>
-            </a:r>
-            <a:br/>
-            <a:r>
-              <a:t>        result = Float32(data=min(front_ranges) if front_ranges else float('inf'))</a:t>
-            </a:r>
-            <a:br/>
-            <a:r>
-              <a:t>        self.publisher.publish(result)</a:t>
-            </a:r>
-            <a:br/>
-            <a:br/>
-            <a:r>
-              <a:t>def main():</a:t>
-            </a:r>
-            <a:br/>
-            <a:r>
-              <a:t>    rclpy.init()</a:t>
-            </a:r>
-            <a:br/>
-            <a:r>
-              <a:t>    node = LidarProcessor()</a:t>
-            </a:r>
-            <a:br/>
-            <a:r>
-              <a:t>    try:</a:t>
-            </a:r>
-            <a:br/>
-            <a:r>
-              <a:t>        rclpy.spin(node)</a:t>
+              <a:t>  ros_type_name: "sensor_msgs/msg/LaserScan"</a:t>
+            </a:r>
+            <a:br/>
+            <a:r>
+              <a:t>  gz_type_name: "gz.msgs.LaserScan"</a:t>
+            </a:r>
+            <a:br/>
+            <a:r>
+              <a:t>  direction: GZ_TO_ROS</a:t>
+            </a:r>
+            <a:br/>
+            <a:r>
+              <a:t>- ros_topic_name: "/imu/data"</a:t>
+            </a:r>
+            <a:br/>
+            <a:r>
+              <a:t>  gz_topic_name: "/imu/data"</a:t>
+            </a:r>
+            <a:br/>
+            <a:r>
+              <a:t>  ros_type_name: "sensor_msgs/msg/Imu"</a:t>
+            </a:r>
+            <a:br/>
+            <a:r>
+              <a:t>  gz_type_name: "gz.msgs.IMU"</a:t>
+            </a:r>
+            <a:br/>
+            <a:r>
+              <a:t>  direction: GZ_TO_ROS</a:t>
+            </a:r>
+            <a:br/>
+            <a:r>
+              <a:t>- ros_topic_name: "/camera/image_raw"</a:t>
+            </a:r>
+            <a:br/>
+            <a:r>
+              <a:t>  gz_topic_name: "/camera/image_raw"</a:t>
+            </a:r>
+            <a:br/>
+            <a:r>
+              <a:t>  ros_type_name: "sensor_msgs/msg/Image"</a:t>
+            </a:r>
+            <a:br/>
+            <a:r>
+              <a:t>  gz_type_name: "gz.msgs.Image"</a:t>
             </a:r>
           </a:p>
         </p:txBody>
@@ -20316,7 +20573,7 @@
         </p:nvSpPr>
         <p:spPr>
           <a:xfrm>
-            <a:off x="749808" y="6199632"/>
+            <a:off x="749808" y="6181344"/>
             <a:ext cx="10789920" cy="201168"/>
           </a:xfrm>
           <a:prstGeom prst="rect">
@@ -20438,7 +20695,7 @@
               </a:defRPr>
             </a:pPr>
             <a:r>
-              <a:t>~/agv_ws/src/agv_sensors/agv_sensors/lidar_processor.py</a:t>
+              <a:t>~/agv_ws/src/agv_gazebo/config/bridge.yaml</a:t>
             </a:r>
           </a:p>
         </p:txBody>
@@ -20587,8 +20844,8 @@
         </p:nvSpPr>
         <p:spPr>
           <a:xfrm>
-            <a:off x="658368" y="1682496"/>
-            <a:ext cx="10972800" cy="347472"/>
+            <a:off x="658368" y="1627632"/>
+            <a:ext cx="10972800" cy="256032"/>
           </a:xfrm>
           <a:prstGeom prst="rect">
             <a:avLst/>
@@ -20605,7 +20862,7 @@
               <a:spcAft>
                 <a:spcPts val="0"/>
               </a:spcAft>
-              <a:defRPr sz="1700" b="1">
+              <a:defRPr sz="1500" b="1">
                 <a:solidFill>
                   <a:srgbClr val="122C4E"/>
                 </a:solidFill>
@@ -20626,8 +20883,8 @@
         </p:nvSpPr>
         <p:spPr>
           <a:xfrm>
-            <a:off x="658368" y="2103120"/>
-            <a:ext cx="10972800" cy="493776"/>
+            <a:off x="658368" y="1956816"/>
+            <a:ext cx="10972800" cy="603504"/>
           </a:xfrm>
           <a:prstGeom prst="rect">
             <a:avLst/>
@@ -20671,7 +20928,11 @@
               </a:defRPr>
             </a:pPr>
             <a:r>
-              <a:t>파일 생성/열기: mkdir -p ~/agv_ws/src/agv_sensors/agv_sensors    &amp;&amp;    nano ~/agv_ws/src/agv_sensors/agv_sensors/lidar_processor.py</a:t>
+              <a:t>파일 생성: mkdir -p ~/agv_ws/src/agv_gazebo/config</a:t>
+            </a:r>
+            <a:br/>
+            <a:r>
+              <a:t>파일 열기: nano ~/agv_ws/src/agv_gazebo/config/bridge.yaml</a:t>
             </a:r>
           </a:p>
         </p:txBody>
@@ -20684,8 +20945,8 @@
         </p:nvSpPr>
         <p:spPr>
           <a:xfrm>
-            <a:off x="658368" y="2761488"/>
-            <a:ext cx="10972800" cy="3383280"/>
+            <a:off x="658368" y="2706624"/>
+            <a:ext cx="10972800" cy="3364992"/>
           </a:xfrm>
           <a:prstGeom prst="rect">
             <a:avLst/>
@@ -20729,27 +20990,27 @@
               </a:defRPr>
             </a:pPr>
             <a:r>
-              <a:t>    except KeyboardInterrupt:</a:t>
-            </a:r>
-            <a:br/>
-            <a:r>
-              <a:t>        pass</a:t>
-            </a:r>
-            <a:br/>
-            <a:r>
-              <a:t>    finally:</a:t>
-            </a:r>
-            <a:br/>
-            <a:r>
-              <a:t>        node.destroy_node()</a:t>
-            </a:r>
-            <a:br/>
-            <a:r>
-              <a:t>        if rclpy.ok():</a:t>
-            </a:r>
-            <a:br/>
-            <a:r>
-              <a:t>            rclpy.shutdown()</a:t>
+              <a:t>  direction: GZ_TO_ROS</a:t>
+            </a:r>
+            <a:br/>
+            <a:r>
+              <a:t>- ros_topic_name: "/clock"</a:t>
+            </a:r>
+            <a:br/>
+            <a:r>
+              <a:t>  gz_topic_name: "/clock"</a:t>
+            </a:r>
+            <a:br/>
+            <a:r>
+              <a:t>  ros_type_name: "rosgraph_msgs/msg/Clock"</a:t>
+            </a:r>
+            <a:br/>
+            <a:r>
+              <a:t>  gz_type_name: "gz.msgs.Clock"</a:t>
+            </a:r>
+            <a:br/>
+            <a:r>
+              <a:t>  direction: GZ_TO_ROS</a:t>
             </a:r>
           </a:p>
         </p:txBody>
@@ -20762,7 +21023,7 @@
         </p:nvSpPr>
         <p:spPr>
           <a:xfrm>
-            <a:off x="749808" y="6199632"/>
+            <a:off x="749808" y="6181344"/>
             <a:ext cx="10789920" cy="201168"/>
           </a:xfrm>
           <a:prstGeom prst="rect">
@@ -20845,7 +21106,7 @@
               </a:defRPr>
             </a:pPr>
             <a:r>
-              <a:t>build → source → run 순서로 실행한다</a:t>
+              <a:t>파일을 새로 만들고 저장한다 (1/3)</a:t>
             </a:r>
           </a:p>
         </p:txBody>
@@ -20884,7 +21145,7 @@
               </a:defRPr>
             </a:pPr>
             <a:r>
-              <a:t>새 파일 또는 수정 파일은 build와 source 뒤에만 실행 이름·설정에 반영됩니다.</a:t>
+              <a:t>~/agv_ws/src/agv_sensors/agv_sensors/lidar_processor.py</a:t>
             </a:r>
           </a:p>
         </p:txBody>
@@ -21020,23 +21281,124 @@
               </a:defRPr>
             </a:pPr>
             <a:r>
-              <a:t>현재 단계 실행    |    현재 폴더 ~/agv_ws    |    현재 터미널</a:t>
-            </a:r>
-          </a:p>
-        </p:txBody>
-      </p:sp>
-      <p:sp>
-        <p:nvSpPr>
-          <p:cNvPr id="7" name="Rounded Rectangle 6"/>
+              <a:t>현재 단계 30/33    |    현재 폴더 ~/agv_ws    |    현재 터미널</a:t>
+            </a:r>
+          </a:p>
+        </p:txBody>
+      </p:sp>
+      <p:sp>
+        <p:nvSpPr>
+          <p:cNvPr id="7" name="TextBox 6"/>
+          <p:cNvSpPr txBox="1"/>
+          <p:nvPr/>
+        </p:nvSpPr>
+        <p:spPr>
+          <a:xfrm>
+            <a:off x="658368" y="1627632"/>
+            <a:ext cx="10972800" cy="256032"/>
+          </a:xfrm>
+          <a:prstGeom prst="rect">
+            <a:avLst/>
+          </a:prstGeom>
+          <a:noFill/>
+        </p:spPr>
+        <p:txBody>
+          <a:bodyPr wrap="square" lIns="73152" rIns="73152" tIns="36576" bIns="36576">
+            <a:spAutoFit/>
+          </a:bodyPr>
+          <a:lstStyle/>
+          <a:p>
+            <a:pPr algn="l">
+              <a:spcAft>
+                <a:spcPts val="0"/>
+              </a:spcAft>
+              <a:defRPr sz="1500" b="1">
+                <a:solidFill>
+                  <a:srgbClr val="122C4E"/>
+                </a:solidFill>
+                <a:latin typeface="Noto Sans CJK KR"/>
+              </a:defRPr>
+            </a:pPr>
+            <a:r>
+              <a:t>이번 단계: 파일의 전체 내용을 중간 생략 없이 작성합니다. 아래 줄 범위를 끝까지 입력하세요.</a:t>
+            </a:r>
+          </a:p>
+        </p:txBody>
+      </p:sp>
+      <p:sp>
+        <p:nvSpPr>
+          <p:cNvPr id="8" name="Rectangle 7"/>
           <p:cNvSpPr/>
           <p:nvPr/>
         </p:nvSpPr>
         <p:spPr>
           <a:xfrm>
-            <a:off x="658368" y="1700784"/>
-            <a:ext cx="10972800" cy="3182112"/>
-          </a:xfrm>
-          <a:prstGeom prst="roundRect">
+            <a:off x="658368" y="1956816"/>
+            <a:ext cx="10972800" cy="603504"/>
+          </a:xfrm>
+          <a:prstGeom prst="rect">
+            <a:avLst/>
+          </a:prstGeom>
+          <a:solidFill>
+            <a:srgbClr val="F4F7FB"/>
+          </a:solidFill>
+          <a:ln>
+            <a:solidFill>
+              <a:srgbClr val="F4F7FB"/>
+            </a:solidFill>
+          </a:ln>
+        </p:spPr>
+        <p:style>
+          <a:lnRef idx="1">
+            <a:schemeClr val="accent1"/>
+          </a:lnRef>
+          <a:fillRef idx="3">
+            <a:schemeClr val="accent1"/>
+          </a:fillRef>
+          <a:effectRef idx="2">
+            <a:schemeClr val="accent1"/>
+          </a:effectRef>
+          <a:fontRef idx="minor">
+            <a:schemeClr val="lt1"/>
+          </a:fontRef>
+        </p:style>
+        <p:txBody>
+          <a:bodyPr rtlCol="0" anchor="ctr" wrap="square" lIns="73152" rIns="73152" tIns="36576" bIns="36576"/>
+          <a:lstStyle/>
+          <a:p>
+            <a:pPr algn="l">
+              <a:spcAft>
+                <a:spcPts val="0"/>
+              </a:spcAft>
+              <a:defRPr sz="1400" b="0">
+                <a:solidFill>
+                  <a:srgbClr val="122C4E"/>
+                </a:solidFill>
+                <a:latin typeface="DejaVu Sans Mono"/>
+              </a:defRPr>
+            </a:pPr>
+            <a:r>
+              <a:t>파일 생성: mkdir -p ~/agv_ws/src/agv_sensors/agv_sensors</a:t>
+            </a:r>
+            <a:br/>
+            <a:r>
+              <a:t>파일 열기: nano ~/agv_ws/src/agv_sensors/agv_sensors/lidar_processor.py</a:t>
+            </a:r>
+          </a:p>
+        </p:txBody>
+      </p:sp>
+      <p:sp>
+        <p:nvSpPr>
+          <p:cNvPr id="9" name="Rectangle 8"/>
+          <p:cNvSpPr/>
+          <p:nvPr/>
+        </p:nvSpPr>
+        <p:spPr>
+          <a:xfrm>
+            <a:off x="658368" y="2706624"/>
+            <a:ext cx="10972800" cy="3364992"/>
+          </a:xfrm>
+          <a:prstGeom prst="rect">
             <a:avLst/>
           </a:prstGeom>
           <a:solidFill>
@@ -21063,14 +21425,14 @@
           </a:fontRef>
         </p:style>
         <p:txBody>
-          <a:bodyPr rtlCol="0" anchor="ctr" wrap="square" lIns="73152" rIns="73152" tIns="36576" bIns="36576"/>
-          <a:lstStyle/>
-          <a:p>
-            <a:pPr algn="l">
-              <a:spcAft>
-                <a:spcPts val="0"/>
-              </a:spcAft>
-              <a:defRPr sz="1600" b="0">
+          <a:bodyPr rtlCol="0" anchor="ctr" wrap="square" lIns="164592" rIns="164592" tIns="109728" bIns="36576"/>
+          <a:lstStyle/>
+          <a:p>
+            <a:pPr algn="l">
+              <a:spcAft>
+                <a:spcPts val="0"/>
+              </a:spcAft>
+              <a:defRPr sz="1400" b="0">
                 <a:solidFill>
                   <a:srgbClr val="FFFFFF"/>
                 </a:solidFill>
@@ -21078,25 +21440,59 @@
               </a:defRPr>
             </a:pPr>
             <a:r>
-              <a:t>ros2 launch agv_bringup agv_sim.launch.py rviz:=false</a:t>
-            </a:r>
-            <a:br/>
-            <a:r>
-              <a:t># 새 터미널: ros2 run agv_sensors lidar_processor</a:t>
-            </a:r>
-          </a:p>
-        </p:txBody>
-      </p:sp>
-      <p:sp>
-        <p:nvSpPr>
-          <p:cNvPr id="8" name="TextBox 7"/>
+              <a:t>import math</a:t>
+            </a:r>
+            <a:br/>
+            <a:r>
+              <a:t>import rclpy</a:t>
+            </a:r>
+            <a:br/>
+            <a:r>
+              <a:t>from rclpy.node import Node</a:t>
+            </a:r>
+            <a:br/>
+            <a:r>
+              <a:t>from rclpy.qos import qos_profile_sensor_data</a:t>
+            </a:r>
+            <a:br/>
+            <a:r>
+              <a:t>from sensor_msgs.msg import LaserScan</a:t>
+            </a:r>
+            <a:br/>
+            <a:r>
+              <a:t>from std_msgs.msg import Float32</a:t>
+            </a:r>
+            <a:br/>
+            <a:br/>
+            <a:r>
+              <a:t>class LidarProcessor(Node):</a:t>
+            </a:r>
+            <a:br/>
+            <a:br/>
+            <a:r>
+              <a:t>    def __init__(self):</a:t>
+            </a:r>
+            <a:br/>
+            <a:r>
+              <a:t>        super().__init__('lidar_processor')</a:t>
+            </a:r>
+            <a:br/>
+            <a:r>
+              <a:t>        self.declare_parameter('front_half_angle_deg', 15.0)</a:t>
+            </a:r>
+          </a:p>
+        </p:txBody>
+      </p:sp>
+      <p:sp>
+        <p:nvSpPr>
+          <p:cNvPr id="10" name="TextBox 9"/>
           <p:cNvSpPr txBox="1"/>
           <p:nvPr/>
         </p:nvSpPr>
         <p:spPr>
           <a:xfrm>
-            <a:off x="786384" y="5239512"/>
-            <a:ext cx="1261872" cy="237744"/>
+            <a:off x="749808" y="6181344"/>
+            <a:ext cx="10789920" cy="201168"/>
           </a:xfrm>
           <a:prstGeom prst="rect">
             <a:avLst/>
@@ -21113,54 +21509,15 @@
               <a:spcAft>
                 <a:spcPts val="0"/>
               </a:spcAft>
-              <a:defRPr sz="1800" b="1">
-                <a:solidFill>
-                  <a:srgbClr val="2A8B5A"/>
-                </a:solidFill>
-                <a:latin typeface="Noto Sans CJK KR"/>
-              </a:defRPr>
-            </a:pPr>
-            <a:r>
-              <a:t>확인 기준</a:t>
-            </a:r>
-          </a:p>
-        </p:txBody>
-      </p:sp>
-      <p:sp>
-        <p:nvSpPr>
-          <p:cNvPr id="9" name="TextBox 8"/>
-          <p:cNvSpPr txBox="1"/>
-          <p:nvPr/>
-        </p:nvSpPr>
-        <p:spPr>
-          <a:xfrm>
-            <a:off x="786384" y="5532120"/>
-            <a:ext cx="10469880" cy="420624"/>
-          </a:xfrm>
-          <a:prstGeom prst="rect">
-            <a:avLst/>
-          </a:prstGeom>
-          <a:noFill/>
-        </p:spPr>
-        <p:txBody>
-          <a:bodyPr wrap="square" lIns="73152" rIns="73152" tIns="36576" bIns="36576">
-            <a:spAutoFit/>
-          </a:bodyPr>
-          <a:lstStyle/>
-          <a:p>
-            <a:pPr algn="l">
-              <a:spcAft>
-                <a:spcPts val="0"/>
-              </a:spcAft>
-              <a:defRPr sz="1800" b="0">
-                <a:solidFill>
-                  <a:srgbClr val="122C4E"/>
-                </a:solidFill>
-                <a:latin typeface="Noto Sans CJK KR"/>
-              </a:defRPr>
-            </a:pPr>
-            <a:r>
-              <a:t>/scan frame·RViz point·/obstacle_distance 출력이 장애물 위치에 반응한다.</a:t>
+              <a:defRPr sz="1000" b="0">
+                <a:solidFill>
+                  <a:srgbClr val="5C6672"/>
+                </a:solidFill>
+                <a:latin typeface="Noto Sans CJK KR"/>
+              </a:defRPr>
+            </a:pPr>
+            <a:r>
+              <a:t>파일 전체 1/3 · 이 슬라이드 다음에 같은 파일의 나머지 줄이 이어집니다.</a:t>
             </a:r>
           </a:p>
         </p:txBody>
@@ -21217,7 +21574,7 @@
               </a:defRPr>
             </a:pPr>
             <a:r>
-              <a:t>정상 결과: 실제 환경에서 확인한 출력</a:t>
+              <a:t>파일을 계속 작성하고 저장한다 (2/3)</a:t>
             </a:r>
           </a:p>
         </p:txBody>
@@ -21256,7 +21613,7 @@
               </a:defRPr>
             </a:pPr>
             <a:r>
-              <a:t>실제 ROS 2 환경의 파일·패키지·구성 검증 로그</a:t>
+              <a:t>~/agv_ws/src/agv_sensors/agv_sensors/lidar_processor.py</a:t>
             </a:r>
           </a:p>
         </p:txBody>
@@ -21339,30 +21696,64 @@
           </a:p>
         </p:txBody>
       </p:sp>
-      <p:pic>
-        <p:nvPicPr>
-          <p:cNvPr id="6" name="Picture 5" descr="validation_terminal.png"/>
-          <p:cNvPicPr>
-            <a:picLocks noChangeAspect="1"/>
-          </p:cNvPicPr>
-          <p:nvPr/>
-        </p:nvPicPr>
-        <p:blipFill>
-          <a:blip r:embed="rId2"/>
-          <a:stretch>
-            <a:fillRect/>
-          </a:stretch>
-        </p:blipFill>
-        <p:spPr>
-          <a:xfrm>
-            <a:off x="790956" y="1884338"/>
-            <a:ext cx="10607040" cy="3738546"/>
-          </a:xfrm>
-          <a:prstGeom prst="rect">
-            <a:avLst/>
-          </a:prstGeom>
-        </p:spPr>
-      </p:pic>
+      <p:sp>
+        <p:nvSpPr>
+          <p:cNvPr id="6" name="Rectangle 5"/>
+          <p:cNvSpPr/>
+          <p:nvPr/>
+        </p:nvSpPr>
+        <p:spPr>
+          <a:xfrm>
+            <a:off x="566928" y="1188720"/>
+            <a:ext cx="11064240" cy="347472"/>
+          </a:xfrm>
+          <a:prstGeom prst="rect">
+            <a:avLst/>
+          </a:prstGeom>
+          <a:solidFill>
+            <a:srgbClr val="F4F7FB"/>
+          </a:solidFill>
+          <a:ln>
+            <a:solidFill>
+              <a:srgbClr val="F4F7FB"/>
+            </a:solidFill>
+          </a:ln>
+        </p:spPr>
+        <p:style>
+          <a:lnRef idx="1">
+            <a:schemeClr val="accent1"/>
+          </a:lnRef>
+          <a:fillRef idx="3">
+            <a:schemeClr val="accent1"/>
+          </a:fillRef>
+          <a:effectRef idx="2">
+            <a:schemeClr val="accent1"/>
+          </a:effectRef>
+          <a:fontRef idx="minor">
+            <a:schemeClr val="lt1"/>
+          </a:fontRef>
+        </p:style>
+        <p:txBody>
+          <a:bodyPr rtlCol="0" anchor="ctr" wrap="square" lIns="73152" rIns="73152" tIns="36576" bIns="36576"/>
+          <a:lstStyle/>
+          <a:p>
+            <a:pPr algn="l">
+              <a:spcAft>
+                <a:spcPts val="0"/>
+              </a:spcAft>
+              <a:defRPr sz="1300" b="1">
+                <a:solidFill>
+                  <a:srgbClr val="122C4E"/>
+                </a:solidFill>
+                <a:latin typeface="Noto Sans CJK KR"/>
+              </a:defRPr>
+            </a:pPr>
+            <a:r>
+              <a:t>현재 단계 31/33    |    현재 폴더 ~/agv_ws    |    현재 터미널</a:t>
+            </a:r>
+          </a:p>
+        </p:txBody>
+      </p:sp>
       <p:sp>
         <p:nvSpPr>
           <p:cNvPr id="7" name="TextBox 6"/>
@@ -21371,8 +21762,8 @@
         </p:nvSpPr>
         <p:spPr>
           <a:xfrm>
-            <a:off x="777240" y="6217920"/>
-            <a:ext cx="10607040" cy="182880"/>
+            <a:off x="658368" y="1627632"/>
+            <a:ext cx="10972800" cy="256032"/>
           </a:xfrm>
           <a:prstGeom prst="rect">
             <a:avLst/>
@@ -21385,19 +21776,216 @@
           </a:bodyPr>
           <a:lstStyle/>
           <a:p>
-            <a:pPr algn="ctr">
-              <a:spcAft>
-                <a:spcPts val="0"/>
-              </a:spcAft>
-              <a:defRPr sz="1100" b="1">
-                <a:solidFill>
-                  <a:srgbClr val="2A8B5A"/>
-                </a:solidFill>
-                <a:latin typeface="Noto Sans CJK KR"/>
-              </a:defRPr>
-            </a:pPr>
-            <a:r>
-              <a:t>① 명령/설정  ② 정상 출력 또는 화면  ③ 다음 검증 명령으로 재확인</a:t>
+            <a:pPr algn="l">
+              <a:spcAft>
+                <a:spcPts val="0"/>
+              </a:spcAft>
+              <a:defRPr sz="1500" b="1">
+                <a:solidFill>
+                  <a:srgbClr val="122C4E"/>
+                </a:solidFill>
+                <a:latin typeface="Noto Sans CJK KR"/>
+              </a:defRPr>
+            </a:pPr>
+            <a:r>
+              <a:t>이번 단계: 파일의 전체 내용을 중간 생략 없이 작성합니다. 아래 줄 범위를 끝까지 입력하세요.</a:t>
+            </a:r>
+          </a:p>
+        </p:txBody>
+      </p:sp>
+      <p:sp>
+        <p:nvSpPr>
+          <p:cNvPr id="8" name="Rectangle 7"/>
+          <p:cNvSpPr/>
+          <p:nvPr/>
+        </p:nvSpPr>
+        <p:spPr>
+          <a:xfrm>
+            <a:off x="658368" y="1956816"/>
+            <a:ext cx="10972800" cy="603504"/>
+          </a:xfrm>
+          <a:prstGeom prst="rect">
+            <a:avLst/>
+          </a:prstGeom>
+          <a:solidFill>
+            <a:srgbClr val="F4F7FB"/>
+          </a:solidFill>
+          <a:ln>
+            <a:solidFill>
+              <a:srgbClr val="F4F7FB"/>
+            </a:solidFill>
+          </a:ln>
+        </p:spPr>
+        <p:style>
+          <a:lnRef idx="1">
+            <a:schemeClr val="accent1"/>
+          </a:lnRef>
+          <a:fillRef idx="3">
+            <a:schemeClr val="accent1"/>
+          </a:fillRef>
+          <a:effectRef idx="2">
+            <a:schemeClr val="accent1"/>
+          </a:effectRef>
+          <a:fontRef idx="minor">
+            <a:schemeClr val="lt1"/>
+          </a:fontRef>
+        </p:style>
+        <p:txBody>
+          <a:bodyPr rtlCol="0" anchor="ctr" wrap="square" lIns="73152" rIns="73152" tIns="36576" bIns="36576"/>
+          <a:lstStyle/>
+          <a:p>
+            <a:pPr algn="l">
+              <a:spcAft>
+                <a:spcPts val="0"/>
+              </a:spcAft>
+              <a:defRPr sz="1400" b="0">
+                <a:solidFill>
+                  <a:srgbClr val="122C4E"/>
+                </a:solidFill>
+                <a:latin typeface="DejaVu Sans Mono"/>
+              </a:defRPr>
+            </a:pPr>
+            <a:r>
+              <a:t>파일 생성: mkdir -p ~/agv_ws/src/agv_sensors/agv_sensors</a:t>
+            </a:r>
+            <a:br/>
+            <a:r>
+              <a:t>파일 열기: nano ~/agv_ws/src/agv_sensors/agv_sensors/lidar_processor.py</a:t>
+            </a:r>
+          </a:p>
+        </p:txBody>
+      </p:sp>
+      <p:sp>
+        <p:nvSpPr>
+          <p:cNvPr id="9" name="Rectangle 8"/>
+          <p:cNvSpPr/>
+          <p:nvPr/>
+        </p:nvSpPr>
+        <p:spPr>
+          <a:xfrm>
+            <a:off x="658368" y="2706624"/>
+            <a:ext cx="10972800" cy="3364992"/>
+          </a:xfrm>
+          <a:prstGeom prst="rect">
+            <a:avLst/>
+          </a:prstGeom>
+          <a:solidFill>
+            <a:srgbClr val="1D232D"/>
+          </a:solidFill>
+          <a:ln>
+            <a:solidFill>
+              <a:srgbClr val="1D232D"/>
+            </a:solidFill>
+          </a:ln>
+        </p:spPr>
+        <p:style>
+          <a:lnRef idx="1">
+            <a:schemeClr val="accent1"/>
+          </a:lnRef>
+          <a:fillRef idx="3">
+            <a:schemeClr val="accent1"/>
+          </a:fillRef>
+          <a:effectRef idx="2">
+            <a:schemeClr val="accent1"/>
+          </a:effectRef>
+          <a:fontRef idx="minor">
+            <a:schemeClr val="lt1"/>
+          </a:fontRef>
+        </p:style>
+        <p:txBody>
+          <a:bodyPr rtlCol="0" anchor="ctr" wrap="square" lIns="164592" rIns="164592" tIns="109728" bIns="36576"/>
+          <a:lstStyle/>
+          <a:p>
+            <a:pPr algn="l">
+              <a:spcAft>
+                <a:spcPts val="0"/>
+              </a:spcAft>
+              <a:defRPr sz="1400" b="0">
+                <a:solidFill>
+                  <a:srgbClr val="FFFFFF"/>
+                </a:solidFill>
+                <a:latin typeface="DejaVu Sans Mono"/>
+              </a:defRPr>
+            </a:pPr>
+            <a:r>
+              <a:t>        self.subscription = self.create_subscription(LaserScan, '/scan', self.callback,</a:t>
+            </a:r>
+            <a:br/>
+            <a:r>
+              <a:t>            qos_profile_sensor_data)</a:t>
+            </a:r>
+            <a:br/>
+            <a:r>
+              <a:t>        self.publisher = self.create_publisher(Float32, '/obstacle_distance', 10)</a:t>
+            </a:r>
+            <a:br/>
+            <a:br/>
+            <a:r>
+              <a:t>    def callback(self, scan):</a:t>
+            </a:r>
+            <a:br/>
+            <a:r>
+              <a:t>        half_angle = math.radians(self.get_parameter('front_half_angle_deg').value)</a:t>
+            </a:r>
+            <a:br/>
+            <a:r>
+              <a:t>        front_ranges = [distance for index,</a:t>
+            </a:r>
+            <a:br/>
+            <a:r>
+              <a:t>            distance in enumerate(scan.ranges) if abs(scan.angle_min + index * scan.angle_increment) &lt;= half_angle and math.isfinite(distance)]</a:t>
+            </a:r>
+            <a:br/>
+            <a:r>
+              <a:t>        result = Float32(data=min(front_ranges) if front_ranges else float('inf'))</a:t>
+            </a:r>
+            <a:br/>
+            <a:r>
+              <a:t>        self.publisher.publish(result)</a:t>
+            </a:r>
+            <a:br/>
+            <a:br/>
+            <a:r>
+              <a:t>def main():</a:t>
+            </a:r>
+          </a:p>
+        </p:txBody>
+      </p:sp>
+      <p:sp>
+        <p:nvSpPr>
+          <p:cNvPr id="10" name="TextBox 9"/>
+          <p:cNvSpPr txBox="1"/>
+          <p:nvPr/>
+        </p:nvSpPr>
+        <p:spPr>
+          <a:xfrm>
+            <a:off x="749808" y="6181344"/>
+            <a:ext cx="10789920" cy="201168"/>
+          </a:xfrm>
+          <a:prstGeom prst="rect">
+            <a:avLst/>
+          </a:prstGeom>
+          <a:noFill/>
+        </p:spPr>
+        <p:txBody>
+          <a:bodyPr wrap="square" lIns="73152" rIns="73152" tIns="36576" bIns="36576">
+            <a:spAutoFit/>
+          </a:bodyPr>
+          <a:lstStyle/>
+          <a:p>
+            <a:pPr algn="l">
+              <a:spcAft>
+                <a:spcPts val="0"/>
+              </a:spcAft>
+              <a:defRPr sz="1000" b="0">
+                <a:solidFill>
+                  <a:srgbClr val="5C6672"/>
+                </a:solidFill>
+                <a:latin typeface="Noto Sans CJK KR"/>
+              </a:defRPr>
+            </a:pPr>
+            <a:r>
+              <a:t>파일 전체 2/3 · 이 슬라이드 다음에 같은 파일의 나머지 줄이 이어집니다.</a:t>
             </a:r>
           </a:p>
         </p:txBody>
@@ -21454,7 +22042,7 @@
               </a:defRPr>
             </a:pPr>
             <a:r>
-              <a:t>객관적 검증 명령으로 완료를 확인한다</a:t>
+              <a:t>파일을 계속 작성하고 저장한다 (3/3)</a:t>
             </a:r>
           </a:p>
         </p:txBody>
@@ -21493,7 +22081,7 @@
               </a:defRPr>
             </a:pPr>
             <a:r>
-              <a:t>화면만 보지 말고 topic·frame·파일·parameter를 다시 확인합니다.</a:t>
+              <a:t>~/agv_ws/src/agv_sensors/agv_sensors/lidar_processor.py</a:t>
             </a:r>
           </a:p>
         </p:txBody>
@@ -21629,23 +22217,124 @@
               </a:defRPr>
             </a:pPr>
             <a:r>
-              <a:t>현재 단계 검증    |    현재 폴더 ~/agv_ws    |    현재 터미널</a:t>
-            </a:r>
-          </a:p>
-        </p:txBody>
-      </p:sp>
-      <p:sp>
-        <p:nvSpPr>
-          <p:cNvPr id="7" name="Rounded Rectangle 6"/>
+              <a:t>현재 단계 32/33    |    현재 폴더 ~/agv_ws    |    현재 터미널</a:t>
+            </a:r>
+          </a:p>
+        </p:txBody>
+      </p:sp>
+      <p:sp>
+        <p:nvSpPr>
+          <p:cNvPr id="7" name="TextBox 6"/>
+          <p:cNvSpPr txBox="1"/>
+          <p:nvPr/>
+        </p:nvSpPr>
+        <p:spPr>
+          <a:xfrm>
+            <a:off x="658368" y="1627632"/>
+            <a:ext cx="10972800" cy="256032"/>
+          </a:xfrm>
+          <a:prstGeom prst="rect">
+            <a:avLst/>
+          </a:prstGeom>
+          <a:noFill/>
+        </p:spPr>
+        <p:txBody>
+          <a:bodyPr wrap="square" lIns="73152" rIns="73152" tIns="36576" bIns="36576">
+            <a:spAutoFit/>
+          </a:bodyPr>
+          <a:lstStyle/>
+          <a:p>
+            <a:pPr algn="l">
+              <a:spcAft>
+                <a:spcPts val="0"/>
+              </a:spcAft>
+              <a:defRPr sz="1500" b="1">
+                <a:solidFill>
+                  <a:srgbClr val="122C4E"/>
+                </a:solidFill>
+                <a:latin typeface="Noto Sans CJK KR"/>
+              </a:defRPr>
+            </a:pPr>
+            <a:r>
+              <a:t>이번 단계: 파일의 전체 내용을 중간 생략 없이 작성합니다. 아래 줄 범위를 끝까지 입력하세요.</a:t>
+            </a:r>
+          </a:p>
+        </p:txBody>
+      </p:sp>
+      <p:sp>
+        <p:nvSpPr>
+          <p:cNvPr id="8" name="Rectangle 7"/>
           <p:cNvSpPr/>
           <p:nvPr/>
         </p:nvSpPr>
         <p:spPr>
           <a:xfrm>
-            <a:off x="658368" y="1755648"/>
-            <a:ext cx="10972800" cy="2148840"/>
-          </a:xfrm>
-          <a:prstGeom prst="roundRect">
+            <a:off x="658368" y="1956816"/>
+            <a:ext cx="10972800" cy="603504"/>
+          </a:xfrm>
+          <a:prstGeom prst="rect">
+            <a:avLst/>
+          </a:prstGeom>
+          <a:solidFill>
+            <a:srgbClr val="F4F7FB"/>
+          </a:solidFill>
+          <a:ln>
+            <a:solidFill>
+              <a:srgbClr val="F4F7FB"/>
+            </a:solidFill>
+          </a:ln>
+        </p:spPr>
+        <p:style>
+          <a:lnRef idx="1">
+            <a:schemeClr val="accent1"/>
+          </a:lnRef>
+          <a:fillRef idx="3">
+            <a:schemeClr val="accent1"/>
+          </a:fillRef>
+          <a:effectRef idx="2">
+            <a:schemeClr val="accent1"/>
+          </a:effectRef>
+          <a:fontRef idx="minor">
+            <a:schemeClr val="lt1"/>
+          </a:fontRef>
+        </p:style>
+        <p:txBody>
+          <a:bodyPr rtlCol="0" anchor="ctr" wrap="square" lIns="73152" rIns="73152" tIns="36576" bIns="36576"/>
+          <a:lstStyle/>
+          <a:p>
+            <a:pPr algn="l">
+              <a:spcAft>
+                <a:spcPts val="0"/>
+              </a:spcAft>
+              <a:defRPr sz="1400" b="0">
+                <a:solidFill>
+                  <a:srgbClr val="122C4E"/>
+                </a:solidFill>
+                <a:latin typeface="DejaVu Sans Mono"/>
+              </a:defRPr>
+            </a:pPr>
+            <a:r>
+              <a:t>파일 생성: mkdir -p ~/agv_ws/src/agv_sensors/agv_sensors</a:t>
+            </a:r>
+            <a:br/>
+            <a:r>
+              <a:t>파일 열기: nano ~/agv_ws/src/agv_sensors/agv_sensors/lidar_processor.py</a:t>
+            </a:r>
+          </a:p>
+        </p:txBody>
+      </p:sp>
+      <p:sp>
+        <p:nvSpPr>
+          <p:cNvPr id="9" name="Rectangle 8"/>
+          <p:cNvSpPr/>
+          <p:nvPr/>
+        </p:nvSpPr>
+        <p:spPr>
+          <a:xfrm>
+            <a:off x="658368" y="2706624"/>
+            <a:ext cx="10972800" cy="3364992"/>
+          </a:xfrm>
+          <a:prstGeom prst="rect">
             <a:avLst/>
           </a:prstGeom>
           <a:solidFill>
@@ -21672,14 +22361,14 @@
           </a:fontRef>
         </p:style>
         <p:txBody>
-          <a:bodyPr rtlCol="0" anchor="ctr" wrap="square" lIns="73152" rIns="73152" tIns="36576" bIns="36576"/>
-          <a:lstStyle/>
-          <a:p>
-            <a:pPr algn="l">
-              <a:spcAft>
-                <a:spcPts val="0"/>
-              </a:spcAft>
-              <a:defRPr sz="1600" b="0">
+          <a:bodyPr rtlCol="0" anchor="ctr" wrap="square" lIns="164592" rIns="164592" tIns="109728" bIns="36576"/>
+          <a:lstStyle/>
+          <a:p>
+            <a:pPr algn="l">
+              <a:spcAft>
+                <a:spcPts val="0"/>
+              </a:spcAft>
+              <a:defRPr sz="1400" b="0">
                 <a:solidFill>
                   <a:srgbClr val="FFFFFF"/>
                 </a:solidFill>
@@ -21687,99 +22376,57 @@
               </a:defRPr>
             </a:pPr>
             <a:r>
-              <a:t>ros2 topic info /scan</a:t>
-            </a:r>
-            <a:br/>
-            <a:r>
-              <a:t>ros2 topic hz /scan</a:t>
-            </a:r>
-            <a:br/>
-            <a:r>
-              <a:t>ros2 topic echo /obstacle_distance --once</a:t>
-            </a:r>
-          </a:p>
-        </p:txBody>
-      </p:sp>
-      <p:sp>
-        <p:nvSpPr>
-          <p:cNvPr id="8" name="Rounded Rectangle 7"/>
-          <p:cNvSpPr/>
-          <p:nvPr/>
-        </p:nvSpPr>
-        <p:spPr>
-          <a:xfrm>
-            <a:off x="658368" y="4206240"/>
-            <a:ext cx="10972800" cy="1554480"/>
-          </a:xfrm>
-          <a:prstGeom prst="roundRect">
-            <a:avLst/>
-          </a:prstGeom>
-          <a:solidFill>
-            <a:srgbClr val="F4F7FB"/>
-          </a:solidFill>
-          <a:ln>
-            <a:solidFill>
-              <a:srgbClr val="D1DFD5"/>
-            </a:solidFill>
-          </a:ln>
-        </p:spPr>
-        <p:style>
-          <a:lnRef idx="1">
-            <a:schemeClr val="accent1"/>
-          </a:lnRef>
-          <a:fillRef idx="3">
-            <a:schemeClr val="accent1"/>
-          </a:fillRef>
-          <a:effectRef idx="2">
-            <a:schemeClr val="accent1"/>
-          </a:effectRef>
-          <a:fontRef idx="minor">
-            <a:schemeClr val="lt1"/>
-          </a:fontRef>
-        </p:style>
-        <p:txBody>
-          <a:bodyPr rtlCol="0" anchor="ctr" wrap="square" lIns="73152" rIns="73152" tIns="36576" bIns="36576"/>
-          <a:lstStyle/>
-          <a:p>
-            <a:pPr algn="l">
-              <a:spcAft>
-                <a:spcPts val="0"/>
-              </a:spcAft>
-              <a:defRPr sz="1800" b="1">
-                <a:solidFill>
-                  <a:srgbClr val="2A8B5A"/>
-                </a:solidFill>
-                <a:latin typeface="Noto Sans CJK KR"/>
-              </a:defRPr>
-            </a:pPr>
-            <a:r>
-              <a:t>완료 체크</a:t>
-            </a:r>
-            <a:br/>
-            <a:r>
-              <a:t>□ 명령이 오류 없이 실행된다.</a:t>
-            </a:r>
-            <a:br/>
-            <a:r>
-              <a:t>□ 기대한 파일·topic·frame·parameter 이름이 보인다.</a:t>
-            </a:r>
-            <a:br/>
-            <a:r>
-              <a:t>□ 값의 단위와 방향을 한 문장으로 설명할 수 있다.</a:t>
-            </a:r>
-          </a:p>
-        </p:txBody>
-      </p:sp>
-      <p:sp>
-        <p:nvSpPr>
-          <p:cNvPr id="9" name="TextBox 8"/>
+              <a:t>    rclpy.init()</a:t>
+            </a:r>
+            <a:br/>
+            <a:r>
+              <a:t>    node = LidarProcessor()</a:t>
+            </a:r>
+            <a:br/>
+            <a:r>
+              <a:t>    try:</a:t>
+            </a:r>
+            <a:br/>
+            <a:r>
+              <a:t>        rclpy.spin(node)</a:t>
+            </a:r>
+            <a:br/>
+            <a:r>
+              <a:t>    except KeyboardInterrupt:</a:t>
+            </a:r>
+            <a:br/>
+            <a:r>
+              <a:t>        pass</a:t>
+            </a:r>
+            <a:br/>
+            <a:r>
+              <a:t>    finally:</a:t>
+            </a:r>
+            <a:br/>
+            <a:r>
+              <a:t>        node.destroy_node()</a:t>
+            </a:r>
+            <a:br/>
+            <a:r>
+              <a:t>        if rclpy.ok():</a:t>
+            </a:r>
+            <a:br/>
+            <a:r>
+              <a:t>            rclpy.shutdown()</a:t>
+            </a:r>
+          </a:p>
+        </p:txBody>
+      </p:sp>
+      <p:sp>
+        <p:nvSpPr>
+          <p:cNvPr id="10" name="TextBox 9"/>
           <p:cNvSpPr txBox="1"/>
           <p:nvPr/>
         </p:nvSpPr>
         <p:spPr>
           <a:xfrm>
-            <a:off x="731520" y="5989320"/>
-            <a:ext cx="10789920" cy="237744"/>
+            <a:off x="749808" y="6181344"/>
+            <a:ext cx="10789920" cy="201168"/>
           </a:xfrm>
           <a:prstGeom prst="rect">
             <a:avLst/>
@@ -21796,15 +22443,15 @@
               <a:spcAft>
                 <a:spcPts val="0"/>
               </a:spcAft>
-              <a:defRPr sz="1500" b="1">
-                <a:solidFill>
-                  <a:srgbClr val="122C4E"/>
-                </a:solidFill>
-                <a:latin typeface="Noto Sans CJK KR"/>
-              </a:defRPr>
-            </a:pPr>
-            <a:r>
-              <a:t>완료 조건: /scan frame·RViz point·/obstacle_distance 출력이 장애물 위치에 반응한다.</a:t>
+              <a:defRPr sz="1000" b="0">
+                <a:solidFill>
+                  <a:srgbClr val="5C6672"/>
+                </a:solidFill>
+                <a:latin typeface="Noto Sans CJK KR"/>
+              </a:defRPr>
+            </a:pPr>
+            <a:r>
+              <a:t>파일 전체 3/3 · 이 슬라이드 다음에 같은 파일의 나머지 줄이 이어집니다.</a:t>
             </a:r>
           </a:p>
         </p:txBody>
@@ -21861,7 +22508,7 @@
               </a:defRPr>
             </a:pPr>
             <a:r>
-              <a:t>막히면: 증상 → 우선 확인 → 재검증</a:t>
+              <a:t>build → source → run 순서로 실행한다</a:t>
             </a:r>
           </a:p>
         </p:txBody>
@@ -21900,7 +22547,7 @@
               </a:defRPr>
             </a:pPr>
             <a:r>
-              <a:t>오류 메시지를 숨기지 않고 같은 순서로 점검합니다.</a:t>
+              <a:t>새 파일 또는 수정 파일은 build와 source 뒤에만 실행 이름·설정에 반영됩니다.</a:t>
             </a:r>
           </a:p>
         </p:txBody>
@@ -22036,7 +22683,7 @@
               </a:defRPr>
             </a:pPr>
             <a:r>
-              <a:t>현재 단계 오류 대응    |    현재 폴더 ~/agv_ws    |    현재 터미널</a:t>
+              <a:t>현재 단계 실행    |    현재 폴더 ~/agv_ws    |    현재 터미널</a:t>
             </a:r>
           </a:p>
         </p:txBody>
@@ -22049,18 +22696,18 @@
         </p:nvSpPr>
         <p:spPr>
           <a:xfrm>
-            <a:off x="694944" y="1755648"/>
-            <a:ext cx="10972800" cy="1115568"/>
+            <a:off x="658368" y="1700784"/>
+            <a:ext cx="10972800" cy="3182112"/>
           </a:xfrm>
           <a:prstGeom prst="roundRect">
             <a:avLst/>
           </a:prstGeom>
           <a:solidFill>
-            <a:srgbClr val="FFF7F4"/>
+            <a:srgbClr val="1D232D"/>
           </a:solidFill>
           <a:ln>
             <a:solidFill>
-              <a:srgbClr val="EDBEB4"/>
+              <a:srgbClr val="1D232D"/>
             </a:solidFill>
           </a:ln>
         </p:spPr>
@@ -22079,10 +22726,27 @@
           </a:fontRef>
         </p:style>
         <p:txBody>
-          <a:bodyPr rtlCol="0" anchor="ctr"/>
-          <a:lstStyle/>
-          <a:p>
-            <a:pPr algn="ctr"/>
+          <a:bodyPr rtlCol="0" anchor="ctr" wrap="square" lIns="73152" rIns="73152" tIns="36576" bIns="36576"/>
+          <a:lstStyle/>
+          <a:p>
+            <a:pPr algn="l">
+              <a:spcAft>
+                <a:spcPts val="0"/>
+              </a:spcAft>
+              <a:defRPr sz="1600" b="0">
+                <a:solidFill>
+                  <a:srgbClr val="FFFFFF"/>
+                </a:solidFill>
+                <a:latin typeface="DejaVu Sans Mono"/>
+              </a:defRPr>
+            </a:pPr>
+            <a:r>
+              <a:t>ros2 launch agv_bringup agv_sim.launch.py rviz:=false</a:t>
+            </a:r>
+            <a:br/>
+            <a:r>
+              <a:t># 새 터미널: ros2 run agv_sensors lidar_processor</a:t>
+            </a:r>
           </a:p>
         </p:txBody>
       </p:sp>
@@ -22094,8 +22758,8 @@
         </p:nvSpPr>
         <p:spPr>
           <a:xfrm>
-            <a:off x="896112" y="1901952"/>
-            <a:ext cx="2926080" cy="274320"/>
+            <a:off x="786384" y="5239512"/>
+            <a:ext cx="1261872" cy="237744"/>
           </a:xfrm>
           <a:prstGeom prst="rect">
             <a:avLst/>
@@ -22114,13 +22778,13 @@
               </a:spcAft>
               <a:defRPr sz="1800" b="1">
                 <a:solidFill>
-                  <a:srgbClr val="BE3B3B"/>
-                </a:solidFill>
-                <a:latin typeface="Noto Sans CJK KR"/>
-              </a:defRPr>
-            </a:pPr>
-            <a:r>
-              <a:t>증상 1: /scan이 없음</a:t>
+                  <a:srgbClr val="2A8B5A"/>
+                </a:solidFill>
+                <a:latin typeface="Noto Sans CJK KR"/>
+              </a:defRPr>
+            </a:pPr>
+            <a:r>
+              <a:t>확인 기준</a:t>
             </a:r>
           </a:p>
         </p:txBody>
@@ -22133,8 +22797,8 @@
         </p:nvSpPr>
         <p:spPr>
           <a:xfrm>
-            <a:off x="3794760" y="1883664"/>
-            <a:ext cx="7543800" cy="621792"/>
+            <a:off x="786384" y="5532120"/>
+            <a:ext cx="10469880" cy="420624"/>
           </a:xfrm>
           <a:prstGeom prst="rect">
             <a:avLst/>
@@ -22151,7 +22815,7 @@
               <a:spcAft>
                 <a:spcPts val="0"/>
               </a:spcAft>
-              <a:defRPr sz="1600" b="0">
+              <a:defRPr sz="1800" b="0">
                 <a:solidFill>
                   <a:srgbClr val="122C4E"/>
                 </a:solidFill>
@@ -22159,177 +22823,7 @@
               </a:defRPr>
             </a:pPr>
             <a:r>
-              <a:t>우선 확인: SDF sensor → bridge YAML → ROS topic 순서로 확인한다.</a:t>
-            </a:r>
-            <a:br/>
-            <a:r>
-              <a:t>수정 후: ros2 topic info /scan</a:t>
-            </a:r>
-          </a:p>
-        </p:txBody>
-      </p:sp>
-      <p:sp>
-        <p:nvSpPr>
-          <p:cNvPr id="10" name="Rounded Rectangle 9"/>
-          <p:cNvSpPr/>
-          <p:nvPr/>
-        </p:nvSpPr>
-        <p:spPr>
-          <a:xfrm>
-            <a:off x="694944" y="3172968"/>
-            <a:ext cx="10972800" cy="1115568"/>
-          </a:xfrm>
-          <a:prstGeom prst="roundRect">
-            <a:avLst/>
-          </a:prstGeom>
-          <a:solidFill>
-            <a:srgbClr val="FFF7F4"/>
-          </a:solidFill>
-          <a:ln>
-            <a:solidFill>
-              <a:srgbClr val="EDBEB4"/>
-            </a:solidFill>
-          </a:ln>
-        </p:spPr>
-        <p:style>
-          <a:lnRef idx="1">
-            <a:schemeClr val="accent1"/>
-          </a:lnRef>
-          <a:fillRef idx="3">
-            <a:schemeClr val="accent1"/>
-          </a:fillRef>
-          <a:effectRef idx="2">
-            <a:schemeClr val="accent1"/>
-          </a:effectRef>
-          <a:fontRef idx="minor">
-            <a:schemeClr val="lt1"/>
-          </a:fontRef>
-        </p:style>
-        <p:txBody>
-          <a:bodyPr rtlCol="0" anchor="ctr"/>
-          <a:lstStyle/>
-          <a:p>
-            <a:pPr algn="ctr"/>
-          </a:p>
-        </p:txBody>
-      </p:sp>
-      <p:sp>
-        <p:nvSpPr>
-          <p:cNvPr id="11" name="TextBox 10"/>
-          <p:cNvSpPr txBox="1"/>
-          <p:nvPr/>
-        </p:nvSpPr>
-        <p:spPr>
-          <a:xfrm>
-            <a:off x="896112" y="3319272"/>
-            <a:ext cx="2926080" cy="274320"/>
-          </a:xfrm>
-          <a:prstGeom prst="rect">
-            <a:avLst/>
-          </a:prstGeom>
-          <a:noFill/>
-        </p:spPr>
-        <p:txBody>
-          <a:bodyPr wrap="square" lIns="73152" rIns="73152" tIns="36576" bIns="36576">
-            <a:spAutoFit/>
-          </a:bodyPr>
-          <a:lstStyle/>
-          <a:p>
-            <a:pPr algn="l">
-              <a:spcAft>
-                <a:spcPts val="0"/>
-              </a:spcAft>
-              <a:defRPr sz="1800" b="1">
-                <a:solidFill>
-                  <a:srgbClr val="BE3B3B"/>
-                </a:solidFill>
-                <a:latin typeface="Noto Sans CJK KR"/>
-              </a:defRPr>
-            </a:pPr>
-            <a:r>
-              <a:t>증상 2: 최소거리가 항상 inf</a:t>
-            </a:r>
-          </a:p>
-        </p:txBody>
-      </p:sp>
-      <p:sp>
-        <p:nvSpPr>
-          <p:cNvPr id="12" name="TextBox 11"/>
-          <p:cNvSpPr txBox="1"/>
-          <p:nvPr/>
-        </p:nvSpPr>
-        <p:spPr>
-          <a:xfrm>
-            <a:off x="3794760" y="3300984"/>
-            <a:ext cx="7543800" cy="621792"/>
-          </a:xfrm>
-          <a:prstGeom prst="rect">
-            <a:avLst/>
-          </a:prstGeom>
-          <a:noFill/>
-        </p:spPr>
-        <p:txBody>
-          <a:bodyPr wrap="square" lIns="73152" rIns="73152" tIns="36576" bIns="36576">
-            <a:spAutoFit/>
-          </a:bodyPr>
-          <a:lstStyle/>
-          <a:p>
-            <a:pPr algn="l">
-              <a:spcAft>
-                <a:spcPts val="0"/>
-              </a:spcAft>
-              <a:defRPr sz="1600" b="0">
-                <a:solidFill>
-                  <a:srgbClr val="122C4E"/>
-                </a:solidFill>
-                <a:latin typeface="Noto Sans CJK KR"/>
-              </a:defRPr>
-            </a:pPr>
-            <a:r>
-              <a:t>우선 확인: 유효 range 필터와 sector index 계산을 확인한다.</a:t>
-            </a:r>
-            <a:br/>
-            <a:r>
-              <a:t>수정 후: ros2 topic info /scan</a:t>
-            </a:r>
-          </a:p>
-        </p:txBody>
-      </p:sp>
-      <p:sp>
-        <p:nvSpPr>
-          <p:cNvPr id="13" name="TextBox 12"/>
-          <p:cNvSpPr txBox="1"/>
-          <p:nvPr/>
-        </p:nvSpPr>
-        <p:spPr>
-          <a:xfrm>
-            <a:off x="822960" y="5102352"/>
-            <a:ext cx="10607040" cy="402336"/>
-          </a:xfrm>
-          <a:prstGeom prst="rect">
-            <a:avLst/>
-          </a:prstGeom>
-          <a:noFill/>
-        </p:spPr>
-        <p:txBody>
-          <a:bodyPr wrap="square" lIns="73152" rIns="73152" tIns="36576" bIns="36576">
-            <a:spAutoFit/>
-          </a:bodyPr>
-          <a:lstStyle/>
-          <a:p>
-            <a:pPr algn="ctr">
-              <a:spcAft>
-                <a:spcPts val="0"/>
-              </a:spcAft>
-              <a:defRPr sz="1800" b="1">
-                <a:solidFill>
-                  <a:srgbClr val="DB7E22"/>
-                </a:solidFill>
-                <a:latin typeface="Noto Sans CJK KR"/>
-              </a:defRPr>
-            </a:pPr>
-            <a:r>
-              <a:t>공통 순서: ① 현재 폴더 ② source ③ 파일 경로 ④ 이름/타입/단위 ⑤ build·source 후 재실행</a:t>
+              <a:t>/scan frame·RViz point·/obstacle_distance 출력이 장애물 위치에 반응한다.</a:t>
             </a:r>
           </a:p>
         </p:txBody>
@@ -22719,7 +23213,7 @@
               </a:defRPr>
             </a:pPr>
             <a:r>
-              <a:t>미니 실습: 값 하나를 바꾸고 결과를 비교한다</a:t>
+              <a:t>정상 결과: 실제 환경에서 확인한 출력</a:t>
             </a:r>
           </a:p>
         </p:txBody>
@@ -22758,7 +23252,7 @@
               </a:defRPr>
             </a:pPr>
             <a:r>
-              <a:t>정상 결과를 만든 뒤에는 한 번에 하나의 값만 바꿉니다.</a:t>
+              <a:t>실제 ROS 2 환경의 파일·패키지·구성 검증 로그</a:t>
             </a:r>
           </a:p>
         </p:txBody>
@@ -22841,132 +23335,40 @@
           </a:p>
         </p:txBody>
       </p:sp>
-      <p:sp>
-        <p:nvSpPr>
-          <p:cNvPr id="6" name="Rectangle 5"/>
-          <p:cNvSpPr/>
-          <p:nvPr/>
-        </p:nvSpPr>
-        <p:spPr>
-          <a:xfrm>
-            <a:off x="566928" y="1188720"/>
-            <a:ext cx="11064240" cy="347472"/>
-          </a:xfrm>
-          <a:prstGeom prst="rect">
-            <a:avLst/>
-          </a:prstGeom>
-          <a:solidFill>
-            <a:srgbClr val="F4F7FB"/>
-          </a:solidFill>
-          <a:ln>
-            <a:solidFill>
-              <a:srgbClr val="F4F7FB"/>
-            </a:solidFill>
-          </a:ln>
-        </p:spPr>
-        <p:style>
-          <a:lnRef idx="1">
-            <a:schemeClr val="accent1"/>
-          </a:lnRef>
-          <a:fillRef idx="3">
-            <a:schemeClr val="accent1"/>
-          </a:fillRef>
-          <a:effectRef idx="2">
-            <a:schemeClr val="accent1"/>
-          </a:effectRef>
-          <a:fontRef idx="minor">
-            <a:schemeClr val="lt1"/>
-          </a:fontRef>
-        </p:style>
-        <p:txBody>
-          <a:bodyPr rtlCol="0" anchor="ctr" wrap="square" lIns="73152" rIns="73152" tIns="36576" bIns="36576"/>
-          <a:lstStyle/>
-          <a:p>
-            <a:pPr algn="l">
-              <a:spcAft>
-                <a:spcPts val="0"/>
-              </a:spcAft>
-              <a:defRPr sz="1300" b="1">
-                <a:solidFill>
-                  <a:srgbClr val="122C4E"/>
-                </a:solidFill>
-                <a:latin typeface="Noto Sans CJK KR"/>
-              </a:defRPr>
-            </a:pPr>
-            <a:r>
-              <a:t>현재 단계 미니 실습    |    현재 폴더 ~/agv_ws    |    현재 터미널</a:t>
-            </a:r>
-          </a:p>
-        </p:txBody>
-      </p:sp>
-      <p:sp>
-        <p:nvSpPr>
-          <p:cNvPr id="7" name="Rounded Rectangle 6"/>
-          <p:cNvSpPr/>
-          <p:nvPr/>
-        </p:nvSpPr>
-        <p:spPr>
-          <a:xfrm>
-            <a:off x="749808" y="1874519"/>
-            <a:ext cx="10652760" cy="1993392"/>
-          </a:xfrm>
-          <a:prstGeom prst="roundRect">
-            <a:avLst/>
-          </a:prstGeom>
-          <a:solidFill>
-            <a:srgbClr val="FFF8EB"/>
-          </a:solidFill>
-          <a:ln>
-            <a:solidFill>
-              <a:srgbClr val="ECC680"/>
-            </a:solidFill>
-          </a:ln>
-        </p:spPr>
-        <p:style>
-          <a:lnRef idx="1">
-            <a:schemeClr val="accent1"/>
-          </a:lnRef>
-          <a:fillRef idx="3">
-            <a:schemeClr val="accent1"/>
-          </a:fillRef>
-          <a:effectRef idx="2">
-            <a:schemeClr val="accent1"/>
-          </a:effectRef>
-          <a:fontRef idx="minor">
-            <a:schemeClr val="lt1"/>
-          </a:fontRef>
-        </p:style>
-        <p:txBody>
-          <a:bodyPr rtlCol="0" anchor="ctr" wrap="square" lIns="73152" rIns="73152" tIns="36576" bIns="36576"/>
-          <a:lstStyle/>
-          <a:p>
-            <a:pPr algn="ctr">
-              <a:spcAft>
-                <a:spcPts val="0"/>
-              </a:spcAft>
-              <a:defRPr sz="2300" b="1">
-                <a:solidFill>
-                  <a:srgbClr val="122C4E"/>
-                </a:solidFill>
-                <a:latin typeface="Noto Sans CJK KR"/>
-              </a:defRPr>
-            </a:pPr>
-            <a:r>
-              <a:t>front_half_angle_deg를 15°와 45°로 각각 실행해 장애물 판정 영역이 어떻게 달라지는지 비교한다.</a:t>
-            </a:r>
-          </a:p>
-        </p:txBody>
-      </p:sp>
-      <p:sp>
-        <p:nvSpPr>
-          <p:cNvPr id="8" name="TextBox 7"/>
+      <p:pic>
+        <p:nvPicPr>
+          <p:cNvPr id="6" name="Picture 5" descr="validation_terminal.png"/>
+          <p:cNvPicPr>
+            <a:picLocks noChangeAspect="1"/>
+          </p:cNvPicPr>
+          <p:nvPr/>
+        </p:nvPicPr>
+        <p:blipFill>
+          <a:blip r:embed="rId2"/>
+          <a:stretch>
+            <a:fillRect/>
+          </a:stretch>
+        </p:blipFill>
+        <p:spPr>
+          <a:xfrm>
+            <a:off x="790956" y="1884338"/>
+            <a:ext cx="10607040" cy="3738546"/>
+          </a:xfrm>
+          <a:prstGeom prst="rect">
+            <a:avLst/>
+          </a:prstGeom>
+        </p:spPr>
+      </p:pic>
+      <p:sp>
+        <p:nvSpPr>
+          <p:cNvPr id="7" name="TextBox 6"/>
           <p:cNvSpPr txBox="1"/>
           <p:nvPr/>
         </p:nvSpPr>
         <p:spPr>
           <a:xfrm>
-            <a:off x="877824" y="4590288"/>
-            <a:ext cx="10241280" cy="594360"/>
+            <a:off x="777240" y="6217920"/>
+            <a:ext cx="10607040" cy="182880"/>
           </a:xfrm>
           <a:prstGeom prst="rect">
             <a:avLst/>
@@ -22983,15 +23385,15 @@
               <a:spcAft>
                 <a:spcPts val="0"/>
               </a:spcAft>
-              <a:defRPr sz="1900" b="1">
-                <a:solidFill>
-                  <a:srgbClr val="DB7E22"/>
-                </a:solidFill>
-                <a:latin typeface="Noto Sans CJK KR"/>
-              </a:defRPr>
-            </a:pPr>
-            <a:r>
-              <a:t>기록할 것: 바꾼 값(단위) · 기대한 변화 · 실제 출력/화면 · 원래 값으로 되돌린 결과</a:t>
+              <a:defRPr sz="1100" b="1">
+                <a:solidFill>
+                  <a:srgbClr val="2A8B5A"/>
+                </a:solidFill>
+                <a:latin typeface="Noto Sans CJK KR"/>
+              </a:defRPr>
+            </a:pPr>
+            <a:r>
+              <a:t>① 명령/설정  ② 정상 출력 또는 화면  ③ 다음 검증 명령으로 재확인</a:t>
             </a:r>
           </a:p>
         </p:txBody>
@@ -23048,7 +23450,7 @@
               </a:defRPr>
             </a:pPr>
             <a:r>
-              <a:t>체크포인트를 저장하고 다음 모듈로 넘긴다</a:t>
+              <a:t>객관적 검증 명령으로 완료를 확인한다</a:t>
             </a:r>
           </a:p>
         </p:txBody>
@@ -23087,7 +23489,7 @@
               </a:defRPr>
             </a:pPr>
             <a:r>
-              <a:t>현재 Complete는 다음 Starter의 기준선입니다.</a:t>
+              <a:t>화면만 보지 말고 topic·frame·파일·parameter를 다시 확인합니다.</a:t>
             </a:r>
           </a:p>
         </p:txBody>
@@ -23223,7 +23625,7 @@
               </a:defRPr>
             </a:pPr>
             <a:r>
-              <a:t>현재 단계 체크포인트    |    현재 폴더 ~/agv_ws    |    현재 터미널</a:t>
+              <a:t>현재 단계 검증    |    현재 폴더 ~/agv_ws    |    현재 터미널</a:t>
             </a:r>
           </a:p>
         </p:txBody>
@@ -23236,8 +23638,74 @@
         </p:nvSpPr>
         <p:spPr>
           <a:xfrm>
-            <a:off x="685800" y="1737360"/>
-            <a:ext cx="10972800" cy="3611880"/>
+            <a:off x="658368" y="1755648"/>
+            <a:ext cx="10972800" cy="2148840"/>
+          </a:xfrm>
+          <a:prstGeom prst="roundRect">
+            <a:avLst/>
+          </a:prstGeom>
+          <a:solidFill>
+            <a:srgbClr val="1D232D"/>
+          </a:solidFill>
+          <a:ln>
+            <a:solidFill>
+              <a:srgbClr val="1D232D"/>
+            </a:solidFill>
+          </a:ln>
+        </p:spPr>
+        <p:style>
+          <a:lnRef idx="1">
+            <a:schemeClr val="accent1"/>
+          </a:lnRef>
+          <a:fillRef idx="3">
+            <a:schemeClr val="accent1"/>
+          </a:fillRef>
+          <a:effectRef idx="2">
+            <a:schemeClr val="accent1"/>
+          </a:effectRef>
+          <a:fontRef idx="minor">
+            <a:schemeClr val="lt1"/>
+          </a:fontRef>
+        </p:style>
+        <p:txBody>
+          <a:bodyPr rtlCol="0" anchor="ctr" wrap="square" lIns="73152" rIns="73152" tIns="36576" bIns="36576"/>
+          <a:lstStyle/>
+          <a:p>
+            <a:pPr algn="l">
+              <a:spcAft>
+                <a:spcPts val="0"/>
+              </a:spcAft>
+              <a:defRPr sz="1600" b="0">
+                <a:solidFill>
+                  <a:srgbClr val="FFFFFF"/>
+                </a:solidFill>
+                <a:latin typeface="DejaVu Sans Mono"/>
+              </a:defRPr>
+            </a:pPr>
+            <a:r>
+              <a:t>ros2 topic info /scan</a:t>
+            </a:r>
+            <a:br/>
+            <a:r>
+              <a:t>ros2 topic hz /scan</a:t>
+            </a:r>
+            <a:br/>
+            <a:r>
+              <a:t>ros2 topic echo /obstacle_distance --once</a:t>
+            </a:r>
+          </a:p>
+        </p:txBody>
+      </p:sp>
+      <p:sp>
+        <p:nvSpPr>
+          <p:cNvPr id="8" name="Rounded Rectangle 7"/>
+          <p:cNvSpPr/>
+          <p:nvPr/>
+        </p:nvSpPr>
+        <p:spPr>
+          <a:xfrm>
+            <a:off x="658368" y="4206240"/>
+            <a:ext cx="10972800" cy="1554480"/>
           </a:xfrm>
           <a:prstGeom prst="roundRect">
             <a:avLst/>
@@ -23247,7 +23715,7 @@
           </a:solidFill>
           <a:ln>
             <a:solidFill>
-              <a:srgbClr val="D2DCE8"/>
+              <a:srgbClr val="D1DFD5"/>
             </a:solidFill>
           </a:ln>
         </p:spPr>
@@ -23266,112 +23734,34 @@
           </a:fontRef>
         </p:style>
         <p:txBody>
-          <a:bodyPr rtlCol="0" anchor="ctr"/>
-          <a:lstStyle/>
-          <a:p>
-            <a:pPr algn="ctr"/>
-          </a:p>
-        </p:txBody>
-      </p:sp>
-      <p:sp>
-        <p:nvSpPr>
-          <p:cNvPr id="8" name="TextBox 7"/>
-          <p:cNvSpPr txBox="1"/>
-          <p:nvPr/>
-        </p:nvSpPr>
-        <p:spPr>
-          <a:xfrm>
-            <a:off x="896112" y="1993392"/>
-            <a:ext cx="10332720" cy="2971800"/>
-          </a:xfrm>
-          <a:prstGeom prst="rect">
-            <a:avLst/>
-          </a:prstGeom>
-          <a:noFill/>
-        </p:spPr>
-        <p:txBody>
-          <a:bodyPr wrap="square" lIns="109728" rIns="109728">
-            <a:spAutoFit/>
-          </a:bodyPr>
-          <a:lstStyle/>
-          <a:p>
-            <a:pPr>
-              <a:spcAft>
-                <a:spcPts val="800"/>
-              </a:spcAft>
-              <a:defRPr sz="1800">
-                <a:solidFill>
-                  <a:srgbClr val="122C4E"/>
-                </a:solidFill>
-                <a:latin typeface="Noto Sans CJK KR"/>
-              </a:defRPr>
-            </a:pPr>
-            <a:r>
-              <a:t>• □ 완료 화면: /scan frame·RViz point·/obstacle_distance 출력이 장애물 위치에 반응한다.</a:t>
-            </a:r>
-          </a:p>
-          <a:p>
-            <a:pPr>
-              <a:spcAft>
-                <a:spcPts val="800"/>
-              </a:spcAft>
-              <a:defRPr sz="1800">
-                <a:solidFill>
-                  <a:srgbClr val="122C4E"/>
-                </a:solidFill>
-                <a:latin typeface="Noto Sans CJK KR"/>
-              </a:defRPr>
-            </a:pPr>
-            <a:r>
-              <a:t>• □ Complete 파일: blocks/D_sensors/M13_lidar_sensor/complete/</a:t>
-            </a:r>
-          </a:p>
-          <a:p>
-            <a:pPr>
-              <a:spcAft>
-                <a:spcPts val="800"/>
-              </a:spcAft>
-              <a:defRPr sz="1800">
-                <a:solidFill>
-                  <a:srgbClr val="122C4E"/>
-                </a:solidFill>
-                <a:latin typeface="Noto Sans CJK KR"/>
-              </a:defRPr>
-            </a:pPr>
-            <a:r>
-              <a:t>• □ 정상 로그·캡처: logs/validation.log, screenshots/validation_terminal.png</a:t>
-            </a:r>
-          </a:p>
-          <a:p>
-            <a:pPr>
-              <a:spcAft>
-                <a:spcPts val="800"/>
-              </a:spcAft>
-              <a:defRPr sz="1800">
-                <a:solidFill>
-                  <a:srgbClr val="122C4E"/>
-                </a:solidFill>
-                <a:latin typeface="Noto Sans CJK KR"/>
-              </a:defRPr>
-            </a:pPr>
-            <a:r>
-              <a:t>• □ 버전 식별: CHECKSUM_or_TAG.txt의 SHA-256 manifest</a:t>
-            </a:r>
-          </a:p>
-          <a:p>
-            <a:pPr>
-              <a:spcAft>
-                <a:spcPts val="800"/>
-              </a:spcAft>
-              <a:defRPr sz="1800">
-                <a:solidFill>
-                  <a:srgbClr val="122C4E"/>
-                </a:solidFill>
-                <a:latin typeface="Noto Sans CJK KR"/>
-              </a:defRPr>
-            </a:pPr>
-            <a:r>
-              <a:t>• □ 다음 시작 조건: M14 IMU</a:t>
+          <a:bodyPr rtlCol="0" anchor="ctr" wrap="square" lIns="73152" rIns="73152" tIns="36576" bIns="36576"/>
+          <a:lstStyle/>
+          <a:p>
+            <a:pPr algn="l">
+              <a:spcAft>
+                <a:spcPts val="0"/>
+              </a:spcAft>
+              <a:defRPr sz="1800" b="1">
+                <a:solidFill>
+                  <a:srgbClr val="2A8B5A"/>
+                </a:solidFill>
+                <a:latin typeface="Noto Sans CJK KR"/>
+              </a:defRPr>
+            </a:pPr>
+            <a:r>
+              <a:t>완료 체크</a:t>
+            </a:r>
+            <a:br/>
+            <a:r>
+              <a:t>□ 명령이 오류 없이 실행된다.</a:t>
+            </a:r>
+            <a:br/>
+            <a:r>
+              <a:t>□ 기대한 파일·topic·frame·parameter 이름이 보인다.</a:t>
+            </a:r>
+            <a:br/>
+            <a:r>
+              <a:t>□ 값의 단위와 방향을 한 문장으로 설명할 수 있다.</a:t>
             </a:r>
           </a:p>
         </p:txBody>
@@ -23384,8 +23774,8 @@
         </p:nvSpPr>
         <p:spPr>
           <a:xfrm>
-            <a:off x="868680" y="5596128"/>
-            <a:ext cx="10515600" cy="338328"/>
+            <a:off x="731520" y="5989320"/>
+            <a:ext cx="10789920" cy="237744"/>
           </a:xfrm>
           <a:prstGeom prst="rect">
             <a:avLst/>
@@ -23398,19 +23788,19 @@
           </a:bodyPr>
           <a:lstStyle/>
           <a:p>
-            <a:pPr algn="ctr">
-              <a:spcAft>
-                <a:spcPts val="0"/>
-              </a:spcAft>
-              <a:defRPr sz="1700" b="1">
-                <a:solidFill>
-                  <a:srgbClr val="2A8B5A"/>
-                </a:solidFill>
-                <a:latin typeface="Noto Sans CJK KR"/>
-              </a:defRPr>
-            </a:pPr>
-            <a:r>
-              <a:t>다음 모듈을 시작하기 전, 이 슬라이드의 Complete와 다음 모듈의 Starter를 비교합니다.</a:t>
+            <a:pPr algn="l">
+              <a:spcAft>
+                <a:spcPts val="0"/>
+              </a:spcAft>
+              <a:defRPr sz="1500" b="1">
+                <a:solidFill>
+                  <a:srgbClr val="122C4E"/>
+                </a:solidFill>
+                <a:latin typeface="Noto Sans CJK KR"/>
+              </a:defRPr>
+            </a:pPr>
+            <a:r>
+              <a:t>완료 조건: /scan frame·RViz point·/obstacle_distance 출력이 장애물 위치에 반응한다.</a:t>
             </a:r>
           </a:p>
         </p:txBody>
@@ -23467,6 +23857,1279 @@
               </a:defRPr>
             </a:pPr>
             <a:r>
+              <a:t>막히면: 증상 → 우선 확인 → 재검증</a:t>
+            </a:r>
+          </a:p>
+        </p:txBody>
+      </p:sp>
+      <p:sp>
+        <p:nvSpPr>
+          <p:cNvPr id="3" name="TextBox 2"/>
+          <p:cNvSpPr txBox="1"/>
+          <p:nvPr/>
+        </p:nvSpPr>
+        <p:spPr>
+          <a:xfrm>
+            <a:off x="603504" y="859536"/>
+            <a:ext cx="10698480" cy="292608"/>
+          </a:xfrm>
+          <a:prstGeom prst="rect">
+            <a:avLst/>
+          </a:prstGeom>
+          <a:noFill/>
+        </p:spPr>
+        <p:txBody>
+          <a:bodyPr wrap="square" lIns="73152" rIns="73152" tIns="36576" bIns="36576">
+            <a:spAutoFit/>
+          </a:bodyPr>
+          <a:lstStyle/>
+          <a:p>
+            <a:pPr algn="l">
+              <a:spcAft>
+                <a:spcPts val="0"/>
+              </a:spcAft>
+              <a:defRPr sz="1700" b="0">
+                <a:solidFill>
+                  <a:srgbClr val="5C6672"/>
+                </a:solidFill>
+                <a:latin typeface="Noto Sans CJK KR"/>
+              </a:defRPr>
+            </a:pPr>
+            <a:r>
+              <a:t>오류 메시지를 숨기지 않고 같은 순서로 점검합니다.</a:t>
+            </a:r>
+          </a:p>
+        </p:txBody>
+      </p:sp>
+      <p:sp>
+        <p:nvSpPr>
+          <p:cNvPr id="4" name="TextBox 3"/>
+          <p:cNvSpPr txBox="1"/>
+          <p:nvPr/>
+        </p:nvSpPr>
+        <p:spPr>
+          <a:xfrm>
+            <a:off x="530352" y="6510528"/>
+            <a:ext cx="7772400" cy="201168"/>
+          </a:xfrm>
+          <a:prstGeom prst="rect">
+            <a:avLst/>
+          </a:prstGeom>
+          <a:noFill/>
+        </p:spPr>
+        <p:txBody>
+          <a:bodyPr wrap="square" lIns="73152" rIns="73152" tIns="36576" bIns="36576">
+            <a:spAutoFit/>
+          </a:bodyPr>
+          <a:lstStyle/>
+          <a:p>
+            <a:pPr algn="l">
+              <a:spcAft>
+                <a:spcPts val="0"/>
+              </a:spcAft>
+              <a:defRPr sz="1000" b="0">
+                <a:solidFill>
+                  <a:srgbClr val="5C6672"/>
+                </a:solidFill>
+                <a:latin typeface="Noto Sans CJK KR"/>
+              </a:defRPr>
+            </a:pPr>
+            <a:r>
+              <a:t>ROS 2 Jazzy · Gazebo Harmonic · M13 · 따라 하기형 AGV 실습</a:t>
+            </a:r>
+          </a:p>
+        </p:txBody>
+      </p:sp>
+      <p:sp>
+        <p:nvSpPr>
+          <p:cNvPr id="5" name="TextBox 4"/>
+          <p:cNvSpPr txBox="1"/>
+          <p:nvPr/>
+        </p:nvSpPr>
+        <p:spPr>
+          <a:xfrm>
+            <a:off x="9144000" y="6510528"/>
+            <a:ext cx="2468880" cy="201168"/>
+          </a:xfrm>
+          <a:prstGeom prst="rect">
+            <a:avLst/>
+          </a:prstGeom>
+          <a:noFill/>
+        </p:spPr>
+        <p:txBody>
+          <a:bodyPr wrap="square" lIns="73152" rIns="73152" tIns="36576" bIns="36576">
+            <a:spAutoFit/>
+          </a:bodyPr>
+          <a:lstStyle/>
+          <a:p>
+            <a:pPr algn="r">
+              <a:spcAft>
+                <a:spcPts val="0"/>
+              </a:spcAft>
+              <a:defRPr sz="1000" b="0">
+                <a:solidFill>
+                  <a:srgbClr val="5C6672"/>
+                </a:solidFill>
+                <a:latin typeface="Noto Sans CJK KR"/>
+              </a:defRPr>
+            </a:pPr>
+            <a:r>
+              <a:t>명령·파일 경로는 슬라이드에서 복사 가능</a:t>
+            </a:r>
+          </a:p>
+        </p:txBody>
+      </p:sp>
+      <p:sp>
+        <p:nvSpPr>
+          <p:cNvPr id="6" name="Rectangle 5"/>
+          <p:cNvSpPr/>
+          <p:nvPr/>
+        </p:nvSpPr>
+        <p:spPr>
+          <a:xfrm>
+            <a:off x="566928" y="1188720"/>
+            <a:ext cx="11064240" cy="347472"/>
+          </a:xfrm>
+          <a:prstGeom prst="rect">
+            <a:avLst/>
+          </a:prstGeom>
+          <a:solidFill>
+            <a:srgbClr val="F4F7FB"/>
+          </a:solidFill>
+          <a:ln>
+            <a:solidFill>
+              <a:srgbClr val="F4F7FB"/>
+            </a:solidFill>
+          </a:ln>
+        </p:spPr>
+        <p:style>
+          <a:lnRef idx="1">
+            <a:schemeClr val="accent1"/>
+          </a:lnRef>
+          <a:fillRef idx="3">
+            <a:schemeClr val="accent1"/>
+          </a:fillRef>
+          <a:effectRef idx="2">
+            <a:schemeClr val="accent1"/>
+          </a:effectRef>
+          <a:fontRef idx="minor">
+            <a:schemeClr val="lt1"/>
+          </a:fontRef>
+        </p:style>
+        <p:txBody>
+          <a:bodyPr rtlCol="0" anchor="ctr" wrap="square" lIns="73152" rIns="73152" tIns="36576" bIns="36576"/>
+          <a:lstStyle/>
+          <a:p>
+            <a:pPr algn="l">
+              <a:spcAft>
+                <a:spcPts val="0"/>
+              </a:spcAft>
+              <a:defRPr sz="1300" b="1">
+                <a:solidFill>
+                  <a:srgbClr val="122C4E"/>
+                </a:solidFill>
+                <a:latin typeface="Noto Sans CJK KR"/>
+              </a:defRPr>
+            </a:pPr>
+            <a:r>
+              <a:t>현재 단계 오류 대응    |    현재 폴더 ~/agv_ws    |    현재 터미널</a:t>
+            </a:r>
+          </a:p>
+        </p:txBody>
+      </p:sp>
+      <p:sp>
+        <p:nvSpPr>
+          <p:cNvPr id="7" name="Rounded Rectangle 6"/>
+          <p:cNvSpPr/>
+          <p:nvPr/>
+        </p:nvSpPr>
+        <p:spPr>
+          <a:xfrm>
+            <a:off x="694944" y="1755648"/>
+            <a:ext cx="10972800" cy="1115568"/>
+          </a:xfrm>
+          <a:prstGeom prst="roundRect">
+            <a:avLst/>
+          </a:prstGeom>
+          <a:solidFill>
+            <a:srgbClr val="FFF7F4"/>
+          </a:solidFill>
+          <a:ln>
+            <a:solidFill>
+              <a:srgbClr val="EDBEB4"/>
+            </a:solidFill>
+          </a:ln>
+        </p:spPr>
+        <p:style>
+          <a:lnRef idx="1">
+            <a:schemeClr val="accent1"/>
+          </a:lnRef>
+          <a:fillRef idx="3">
+            <a:schemeClr val="accent1"/>
+          </a:fillRef>
+          <a:effectRef idx="2">
+            <a:schemeClr val="accent1"/>
+          </a:effectRef>
+          <a:fontRef idx="minor">
+            <a:schemeClr val="lt1"/>
+          </a:fontRef>
+        </p:style>
+        <p:txBody>
+          <a:bodyPr rtlCol="0" anchor="ctr"/>
+          <a:lstStyle/>
+          <a:p>
+            <a:pPr algn="ctr"/>
+          </a:p>
+        </p:txBody>
+      </p:sp>
+      <p:sp>
+        <p:nvSpPr>
+          <p:cNvPr id="8" name="TextBox 7"/>
+          <p:cNvSpPr txBox="1"/>
+          <p:nvPr/>
+        </p:nvSpPr>
+        <p:spPr>
+          <a:xfrm>
+            <a:off x="896112" y="1901952"/>
+            <a:ext cx="2926080" cy="274320"/>
+          </a:xfrm>
+          <a:prstGeom prst="rect">
+            <a:avLst/>
+          </a:prstGeom>
+          <a:noFill/>
+        </p:spPr>
+        <p:txBody>
+          <a:bodyPr wrap="square" lIns="73152" rIns="73152" tIns="36576" bIns="36576">
+            <a:spAutoFit/>
+          </a:bodyPr>
+          <a:lstStyle/>
+          <a:p>
+            <a:pPr algn="l">
+              <a:spcAft>
+                <a:spcPts val="0"/>
+              </a:spcAft>
+              <a:defRPr sz="1800" b="1">
+                <a:solidFill>
+                  <a:srgbClr val="BE3B3B"/>
+                </a:solidFill>
+                <a:latin typeface="Noto Sans CJK KR"/>
+              </a:defRPr>
+            </a:pPr>
+            <a:r>
+              <a:t>증상 1: /scan이 없음</a:t>
+            </a:r>
+          </a:p>
+        </p:txBody>
+      </p:sp>
+      <p:sp>
+        <p:nvSpPr>
+          <p:cNvPr id="9" name="TextBox 8"/>
+          <p:cNvSpPr txBox="1"/>
+          <p:nvPr/>
+        </p:nvSpPr>
+        <p:spPr>
+          <a:xfrm>
+            <a:off x="3794760" y="1883664"/>
+            <a:ext cx="7543800" cy="621792"/>
+          </a:xfrm>
+          <a:prstGeom prst="rect">
+            <a:avLst/>
+          </a:prstGeom>
+          <a:noFill/>
+        </p:spPr>
+        <p:txBody>
+          <a:bodyPr wrap="square" lIns="73152" rIns="73152" tIns="36576" bIns="36576">
+            <a:spAutoFit/>
+          </a:bodyPr>
+          <a:lstStyle/>
+          <a:p>
+            <a:pPr algn="l">
+              <a:spcAft>
+                <a:spcPts val="0"/>
+              </a:spcAft>
+              <a:defRPr sz="1600" b="0">
+                <a:solidFill>
+                  <a:srgbClr val="122C4E"/>
+                </a:solidFill>
+                <a:latin typeface="Noto Sans CJK KR"/>
+              </a:defRPr>
+            </a:pPr>
+            <a:r>
+              <a:t>우선 확인: SDF sensor → bridge YAML → ROS topic 순서로 확인한다.</a:t>
+            </a:r>
+            <a:br/>
+            <a:r>
+              <a:t>수정 후: ros2 topic info /scan</a:t>
+            </a:r>
+          </a:p>
+        </p:txBody>
+      </p:sp>
+      <p:sp>
+        <p:nvSpPr>
+          <p:cNvPr id="10" name="Rounded Rectangle 9"/>
+          <p:cNvSpPr/>
+          <p:nvPr/>
+        </p:nvSpPr>
+        <p:spPr>
+          <a:xfrm>
+            <a:off x="694944" y="3172968"/>
+            <a:ext cx="10972800" cy="1115568"/>
+          </a:xfrm>
+          <a:prstGeom prst="roundRect">
+            <a:avLst/>
+          </a:prstGeom>
+          <a:solidFill>
+            <a:srgbClr val="FFF7F4"/>
+          </a:solidFill>
+          <a:ln>
+            <a:solidFill>
+              <a:srgbClr val="EDBEB4"/>
+            </a:solidFill>
+          </a:ln>
+        </p:spPr>
+        <p:style>
+          <a:lnRef idx="1">
+            <a:schemeClr val="accent1"/>
+          </a:lnRef>
+          <a:fillRef idx="3">
+            <a:schemeClr val="accent1"/>
+          </a:fillRef>
+          <a:effectRef idx="2">
+            <a:schemeClr val="accent1"/>
+          </a:effectRef>
+          <a:fontRef idx="minor">
+            <a:schemeClr val="lt1"/>
+          </a:fontRef>
+        </p:style>
+        <p:txBody>
+          <a:bodyPr rtlCol="0" anchor="ctr"/>
+          <a:lstStyle/>
+          <a:p>
+            <a:pPr algn="ctr"/>
+          </a:p>
+        </p:txBody>
+      </p:sp>
+      <p:sp>
+        <p:nvSpPr>
+          <p:cNvPr id="11" name="TextBox 10"/>
+          <p:cNvSpPr txBox="1"/>
+          <p:nvPr/>
+        </p:nvSpPr>
+        <p:spPr>
+          <a:xfrm>
+            <a:off x="896112" y="3319272"/>
+            <a:ext cx="2926080" cy="274320"/>
+          </a:xfrm>
+          <a:prstGeom prst="rect">
+            <a:avLst/>
+          </a:prstGeom>
+          <a:noFill/>
+        </p:spPr>
+        <p:txBody>
+          <a:bodyPr wrap="square" lIns="73152" rIns="73152" tIns="36576" bIns="36576">
+            <a:spAutoFit/>
+          </a:bodyPr>
+          <a:lstStyle/>
+          <a:p>
+            <a:pPr algn="l">
+              <a:spcAft>
+                <a:spcPts val="0"/>
+              </a:spcAft>
+              <a:defRPr sz="1800" b="1">
+                <a:solidFill>
+                  <a:srgbClr val="BE3B3B"/>
+                </a:solidFill>
+                <a:latin typeface="Noto Sans CJK KR"/>
+              </a:defRPr>
+            </a:pPr>
+            <a:r>
+              <a:t>증상 2: 최소거리가 항상 inf</a:t>
+            </a:r>
+          </a:p>
+        </p:txBody>
+      </p:sp>
+      <p:sp>
+        <p:nvSpPr>
+          <p:cNvPr id="12" name="TextBox 11"/>
+          <p:cNvSpPr txBox="1"/>
+          <p:nvPr/>
+        </p:nvSpPr>
+        <p:spPr>
+          <a:xfrm>
+            <a:off x="3794760" y="3300984"/>
+            <a:ext cx="7543800" cy="621792"/>
+          </a:xfrm>
+          <a:prstGeom prst="rect">
+            <a:avLst/>
+          </a:prstGeom>
+          <a:noFill/>
+        </p:spPr>
+        <p:txBody>
+          <a:bodyPr wrap="square" lIns="73152" rIns="73152" tIns="36576" bIns="36576">
+            <a:spAutoFit/>
+          </a:bodyPr>
+          <a:lstStyle/>
+          <a:p>
+            <a:pPr algn="l">
+              <a:spcAft>
+                <a:spcPts val="0"/>
+              </a:spcAft>
+              <a:defRPr sz="1600" b="0">
+                <a:solidFill>
+                  <a:srgbClr val="122C4E"/>
+                </a:solidFill>
+                <a:latin typeface="Noto Sans CJK KR"/>
+              </a:defRPr>
+            </a:pPr>
+            <a:r>
+              <a:t>우선 확인: 유효 range 필터와 sector index 계산을 확인한다.</a:t>
+            </a:r>
+            <a:br/>
+            <a:r>
+              <a:t>수정 후: ros2 topic info /scan</a:t>
+            </a:r>
+          </a:p>
+        </p:txBody>
+      </p:sp>
+      <p:sp>
+        <p:nvSpPr>
+          <p:cNvPr id="13" name="TextBox 12"/>
+          <p:cNvSpPr txBox="1"/>
+          <p:nvPr/>
+        </p:nvSpPr>
+        <p:spPr>
+          <a:xfrm>
+            <a:off x="822960" y="5102352"/>
+            <a:ext cx="10607040" cy="402336"/>
+          </a:xfrm>
+          <a:prstGeom prst="rect">
+            <a:avLst/>
+          </a:prstGeom>
+          <a:noFill/>
+        </p:spPr>
+        <p:txBody>
+          <a:bodyPr wrap="square" lIns="73152" rIns="73152" tIns="36576" bIns="36576">
+            <a:spAutoFit/>
+          </a:bodyPr>
+          <a:lstStyle/>
+          <a:p>
+            <a:pPr algn="ctr">
+              <a:spcAft>
+                <a:spcPts val="0"/>
+              </a:spcAft>
+              <a:defRPr sz="1800" b="1">
+                <a:solidFill>
+                  <a:srgbClr val="DB7E22"/>
+                </a:solidFill>
+                <a:latin typeface="Noto Sans CJK KR"/>
+              </a:defRPr>
+            </a:pPr>
+            <a:r>
+              <a:t>공통 순서: ① 현재 폴더 ② source ③ 파일 경로 ④ 이름/타입/단위 ⑤ build·source 후 재실행</a:t>
+            </a:r>
+          </a:p>
+        </p:txBody>
+      </p:sp>
+    </p:spTree>
+  </p:cSld>
+  <p:clrMapOvr>
+    <a:masterClrMapping/>
+  </p:clrMapOvr>
+</p:sld>
+</file>
+
+<file path=ppt/slides/slide43.xml><?xml version="1.0" encoding="utf-8"?>
+<p:sld xmlns:a="http://schemas.openxmlformats.org/drawingml/2006/main" xmlns:p="http://schemas.openxmlformats.org/presentationml/2006/main" xmlns:r="http://schemas.openxmlformats.org/officeDocument/2006/relationships">
+  <p:cSld>
+    <p:spTree>
+      <p:nvGrpSpPr>
+        <p:cNvPr id="1" name=""/>
+        <p:cNvGrpSpPr/>
+        <p:nvPr/>
+      </p:nvGrpSpPr>
+      <p:grpSpPr/>
+      <p:sp>
+        <p:nvSpPr>
+          <p:cNvPr id="2" name="TextBox 1"/>
+          <p:cNvSpPr txBox="1"/>
+          <p:nvPr/>
+        </p:nvSpPr>
+        <p:spPr>
+          <a:xfrm>
+            <a:off x="566928" y="347472"/>
+            <a:ext cx="10881360" cy="438912"/>
+          </a:xfrm>
+          <a:prstGeom prst="rect">
+            <a:avLst/>
+          </a:prstGeom>
+          <a:noFill/>
+        </p:spPr>
+        <p:txBody>
+          <a:bodyPr wrap="square" lIns="73152" rIns="73152" tIns="36576" bIns="36576">
+            <a:spAutoFit/>
+          </a:bodyPr>
+          <a:lstStyle/>
+          <a:p>
+            <a:pPr algn="l">
+              <a:spcAft>
+                <a:spcPts val="0"/>
+              </a:spcAft>
+              <a:defRPr sz="3200" b="1">
+                <a:solidFill>
+                  <a:srgbClr val="122C4E"/>
+                </a:solidFill>
+                <a:latin typeface="Noto Sans CJK KR"/>
+              </a:defRPr>
+            </a:pPr>
+            <a:r>
+              <a:t>미니 실습: 값 하나를 바꾸고 결과를 비교한다</a:t>
+            </a:r>
+          </a:p>
+        </p:txBody>
+      </p:sp>
+      <p:sp>
+        <p:nvSpPr>
+          <p:cNvPr id="3" name="TextBox 2"/>
+          <p:cNvSpPr txBox="1"/>
+          <p:nvPr/>
+        </p:nvSpPr>
+        <p:spPr>
+          <a:xfrm>
+            <a:off x="603504" y="859536"/>
+            <a:ext cx="10698480" cy="292608"/>
+          </a:xfrm>
+          <a:prstGeom prst="rect">
+            <a:avLst/>
+          </a:prstGeom>
+          <a:noFill/>
+        </p:spPr>
+        <p:txBody>
+          <a:bodyPr wrap="square" lIns="73152" rIns="73152" tIns="36576" bIns="36576">
+            <a:spAutoFit/>
+          </a:bodyPr>
+          <a:lstStyle/>
+          <a:p>
+            <a:pPr algn="l">
+              <a:spcAft>
+                <a:spcPts val="0"/>
+              </a:spcAft>
+              <a:defRPr sz="1700" b="0">
+                <a:solidFill>
+                  <a:srgbClr val="5C6672"/>
+                </a:solidFill>
+                <a:latin typeface="Noto Sans CJK KR"/>
+              </a:defRPr>
+            </a:pPr>
+            <a:r>
+              <a:t>정상 결과를 만든 뒤에는 한 번에 하나의 값만 바꿉니다.</a:t>
+            </a:r>
+          </a:p>
+        </p:txBody>
+      </p:sp>
+      <p:sp>
+        <p:nvSpPr>
+          <p:cNvPr id="4" name="TextBox 3"/>
+          <p:cNvSpPr txBox="1"/>
+          <p:nvPr/>
+        </p:nvSpPr>
+        <p:spPr>
+          <a:xfrm>
+            <a:off x="530352" y="6510528"/>
+            <a:ext cx="7772400" cy="201168"/>
+          </a:xfrm>
+          <a:prstGeom prst="rect">
+            <a:avLst/>
+          </a:prstGeom>
+          <a:noFill/>
+        </p:spPr>
+        <p:txBody>
+          <a:bodyPr wrap="square" lIns="73152" rIns="73152" tIns="36576" bIns="36576">
+            <a:spAutoFit/>
+          </a:bodyPr>
+          <a:lstStyle/>
+          <a:p>
+            <a:pPr algn="l">
+              <a:spcAft>
+                <a:spcPts val="0"/>
+              </a:spcAft>
+              <a:defRPr sz="1000" b="0">
+                <a:solidFill>
+                  <a:srgbClr val="5C6672"/>
+                </a:solidFill>
+                <a:latin typeface="Noto Sans CJK KR"/>
+              </a:defRPr>
+            </a:pPr>
+            <a:r>
+              <a:t>ROS 2 Jazzy · Gazebo Harmonic · M13 · 따라 하기형 AGV 실습</a:t>
+            </a:r>
+          </a:p>
+        </p:txBody>
+      </p:sp>
+      <p:sp>
+        <p:nvSpPr>
+          <p:cNvPr id="5" name="TextBox 4"/>
+          <p:cNvSpPr txBox="1"/>
+          <p:nvPr/>
+        </p:nvSpPr>
+        <p:spPr>
+          <a:xfrm>
+            <a:off x="9144000" y="6510528"/>
+            <a:ext cx="2468880" cy="201168"/>
+          </a:xfrm>
+          <a:prstGeom prst="rect">
+            <a:avLst/>
+          </a:prstGeom>
+          <a:noFill/>
+        </p:spPr>
+        <p:txBody>
+          <a:bodyPr wrap="square" lIns="73152" rIns="73152" tIns="36576" bIns="36576">
+            <a:spAutoFit/>
+          </a:bodyPr>
+          <a:lstStyle/>
+          <a:p>
+            <a:pPr algn="r">
+              <a:spcAft>
+                <a:spcPts val="0"/>
+              </a:spcAft>
+              <a:defRPr sz="1000" b="0">
+                <a:solidFill>
+                  <a:srgbClr val="5C6672"/>
+                </a:solidFill>
+                <a:latin typeface="Noto Sans CJK KR"/>
+              </a:defRPr>
+            </a:pPr>
+            <a:r>
+              <a:t>명령·파일 경로는 슬라이드에서 복사 가능</a:t>
+            </a:r>
+          </a:p>
+        </p:txBody>
+      </p:sp>
+      <p:sp>
+        <p:nvSpPr>
+          <p:cNvPr id="6" name="Rectangle 5"/>
+          <p:cNvSpPr/>
+          <p:nvPr/>
+        </p:nvSpPr>
+        <p:spPr>
+          <a:xfrm>
+            <a:off x="566928" y="1188720"/>
+            <a:ext cx="11064240" cy="347472"/>
+          </a:xfrm>
+          <a:prstGeom prst="rect">
+            <a:avLst/>
+          </a:prstGeom>
+          <a:solidFill>
+            <a:srgbClr val="F4F7FB"/>
+          </a:solidFill>
+          <a:ln>
+            <a:solidFill>
+              <a:srgbClr val="F4F7FB"/>
+            </a:solidFill>
+          </a:ln>
+        </p:spPr>
+        <p:style>
+          <a:lnRef idx="1">
+            <a:schemeClr val="accent1"/>
+          </a:lnRef>
+          <a:fillRef idx="3">
+            <a:schemeClr val="accent1"/>
+          </a:fillRef>
+          <a:effectRef idx="2">
+            <a:schemeClr val="accent1"/>
+          </a:effectRef>
+          <a:fontRef idx="minor">
+            <a:schemeClr val="lt1"/>
+          </a:fontRef>
+        </p:style>
+        <p:txBody>
+          <a:bodyPr rtlCol="0" anchor="ctr" wrap="square" lIns="73152" rIns="73152" tIns="36576" bIns="36576"/>
+          <a:lstStyle/>
+          <a:p>
+            <a:pPr algn="l">
+              <a:spcAft>
+                <a:spcPts val="0"/>
+              </a:spcAft>
+              <a:defRPr sz="1300" b="1">
+                <a:solidFill>
+                  <a:srgbClr val="122C4E"/>
+                </a:solidFill>
+                <a:latin typeface="Noto Sans CJK KR"/>
+              </a:defRPr>
+            </a:pPr>
+            <a:r>
+              <a:t>현재 단계 미니 실습    |    현재 폴더 ~/agv_ws    |    현재 터미널</a:t>
+            </a:r>
+          </a:p>
+        </p:txBody>
+      </p:sp>
+      <p:sp>
+        <p:nvSpPr>
+          <p:cNvPr id="7" name="Rounded Rectangle 6"/>
+          <p:cNvSpPr/>
+          <p:nvPr/>
+        </p:nvSpPr>
+        <p:spPr>
+          <a:xfrm>
+            <a:off x="749808" y="1874519"/>
+            <a:ext cx="10652760" cy="1993392"/>
+          </a:xfrm>
+          <a:prstGeom prst="roundRect">
+            <a:avLst/>
+          </a:prstGeom>
+          <a:solidFill>
+            <a:srgbClr val="FFF8EB"/>
+          </a:solidFill>
+          <a:ln>
+            <a:solidFill>
+              <a:srgbClr val="ECC680"/>
+            </a:solidFill>
+          </a:ln>
+        </p:spPr>
+        <p:style>
+          <a:lnRef idx="1">
+            <a:schemeClr val="accent1"/>
+          </a:lnRef>
+          <a:fillRef idx="3">
+            <a:schemeClr val="accent1"/>
+          </a:fillRef>
+          <a:effectRef idx="2">
+            <a:schemeClr val="accent1"/>
+          </a:effectRef>
+          <a:fontRef idx="minor">
+            <a:schemeClr val="lt1"/>
+          </a:fontRef>
+        </p:style>
+        <p:txBody>
+          <a:bodyPr rtlCol="0" anchor="ctr" wrap="square" lIns="73152" rIns="73152" tIns="36576" bIns="36576"/>
+          <a:lstStyle/>
+          <a:p>
+            <a:pPr algn="ctr">
+              <a:spcAft>
+                <a:spcPts val="0"/>
+              </a:spcAft>
+              <a:defRPr sz="2300" b="1">
+                <a:solidFill>
+                  <a:srgbClr val="122C4E"/>
+                </a:solidFill>
+                <a:latin typeface="Noto Sans CJK KR"/>
+              </a:defRPr>
+            </a:pPr>
+            <a:r>
+              <a:t>front_half_angle_deg를 15°와 45°로 각각 실행해 장애물 판정 영역이 어떻게 달라지는지 비교한다.</a:t>
+            </a:r>
+          </a:p>
+        </p:txBody>
+      </p:sp>
+      <p:sp>
+        <p:nvSpPr>
+          <p:cNvPr id="8" name="TextBox 7"/>
+          <p:cNvSpPr txBox="1"/>
+          <p:nvPr/>
+        </p:nvSpPr>
+        <p:spPr>
+          <a:xfrm>
+            <a:off x="877824" y="4590288"/>
+            <a:ext cx="10241280" cy="594360"/>
+          </a:xfrm>
+          <a:prstGeom prst="rect">
+            <a:avLst/>
+          </a:prstGeom>
+          <a:noFill/>
+        </p:spPr>
+        <p:txBody>
+          <a:bodyPr wrap="square" lIns="73152" rIns="73152" tIns="36576" bIns="36576">
+            <a:spAutoFit/>
+          </a:bodyPr>
+          <a:lstStyle/>
+          <a:p>
+            <a:pPr algn="ctr">
+              <a:spcAft>
+                <a:spcPts val="0"/>
+              </a:spcAft>
+              <a:defRPr sz="1900" b="1">
+                <a:solidFill>
+                  <a:srgbClr val="DB7E22"/>
+                </a:solidFill>
+                <a:latin typeface="Noto Sans CJK KR"/>
+              </a:defRPr>
+            </a:pPr>
+            <a:r>
+              <a:t>기록할 것: 바꾼 값(단위) · 기대한 변화 · 실제 출력/화면 · 원래 값으로 되돌린 결과</a:t>
+            </a:r>
+          </a:p>
+        </p:txBody>
+      </p:sp>
+    </p:spTree>
+  </p:cSld>
+  <p:clrMapOvr>
+    <a:masterClrMapping/>
+  </p:clrMapOvr>
+</p:sld>
+</file>
+
+<file path=ppt/slides/slide44.xml><?xml version="1.0" encoding="utf-8"?>
+<p:sld xmlns:a="http://schemas.openxmlformats.org/drawingml/2006/main" xmlns:p="http://schemas.openxmlformats.org/presentationml/2006/main" xmlns:r="http://schemas.openxmlformats.org/officeDocument/2006/relationships">
+  <p:cSld>
+    <p:spTree>
+      <p:nvGrpSpPr>
+        <p:cNvPr id="1" name=""/>
+        <p:cNvGrpSpPr/>
+        <p:nvPr/>
+      </p:nvGrpSpPr>
+      <p:grpSpPr/>
+      <p:sp>
+        <p:nvSpPr>
+          <p:cNvPr id="2" name="TextBox 1"/>
+          <p:cNvSpPr txBox="1"/>
+          <p:nvPr/>
+        </p:nvSpPr>
+        <p:spPr>
+          <a:xfrm>
+            <a:off x="566928" y="347472"/>
+            <a:ext cx="10881360" cy="438912"/>
+          </a:xfrm>
+          <a:prstGeom prst="rect">
+            <a:avLst/>
+          </a:prstGeom>
+          <a:noFill/>
+        </p:spPr>
+        <p:txBody>
+          <a:bodyPr wrap="square" lIns="73152" rIns="73152" tIns="36576" bIns="36576">
+            <a:spAutoFit/>
+          </a:bodyPr>
+          <a:lstStyle/>
+          <a:p>
+            <a:pPr algn="l">
+              <a:spcAft>
+                <a:spcPts val="0"/>
+              </a:spcAft>
+              <a:defRPr sz="3200" b="1">
+                <a:solidFill>
+                  <a:srgbClr val="122C4E"/>
+                </a:solidFill>
+                <a:latin typeface="Noto Sans CJK KR"/>
+              </a:defRPr>
+            </a:pPr>
+            <a:r>
+              <a:t>체크포인트를 저장하고 다음 모듈로 넘긴다</a:t>
+            </a:r>
+          </a:p>
+        </p:txBody>
+      </p:sp>
+      <p:sp>
+        <p:nvSpPr>
+          <p:cNvPr id="3" name="TextBox 2"/>
+          <p:cNvSpPr txBox="1"/>
+          <p:nvPr/>
+        </p:nvSpPr>
+        <p:spPr>
+          <a:xfrm>
+            <a:off x="603504" y="859536"/>
+            <a:ext cx="10698480" cy="292608"/>
+          </a:xfrm>
+          <a:prstGeom prst="rect">
+            <a:avLst/>
+          </a:prstGeom>
+          <a:noFill/>
+        </p:spPr>
+        <p:txBody>
+          <a:bodyPr wrap="square" lIns="73152" rIns="73152" tIns="36576" bIns="36576">
+            <a:spAutoFit/>
+          </a:bodyPr>
+          <a:lstStyle/>
+          <a:p>
+            <a:pPr algn="l">
+              <a:spcAft>
+                <a:spcPts val="0"/>
+              </a:spcAft>
+              <a:defRPr sz="1700" b="0">
+                <a:solidFill>
+                  <a:srgbClr val="5C6672"/>
+                </a:solidFill>
+                <a:latin typeface="Noto Sans CJK KR"/>
+              </a:defRPr>
+            </a:pPr>
+            <a:r>
+              <a:t>현재 Complete는 다음 Starter의 기준선입니다.</a:t>
+            </a:r>
+          </a:p>
+        </p:txBody>
+      </p:sp>
+      <p:sp>
+        <p:nvSpPr>
+          <p:cNvPr id="4" name="TextBox 3"/>
+          <p:cNvSpPr txBox="1"/>
+          <p:nvPr/>
+        </p:nvSpPr>
+        <p:spPr>
+          <a:xfrm>
+            <a:off x="530352" y="6510528"/>
+            <a:ext cx="7772400" cy="201168"/>
+          </a:xfrm>
+          <a:prstGeom prst="rect">
+            <a:avLst/>
+          </a:prstGeom>
+          <a:noFill/>
+        </p:spPr>
+        <p:txBody>
+          <a:bodyPr wrap="square" lIns="73152" rIns="73152" tIns="36576" bIns="36576">
+            <a:spAutoFit/>
+          </a:bodyPr>
+          <a:lstStyle/>
+          <a:p>
+            <a:pPr algn="l">
+              <a:spcAft>
+                <a:spcPts val="0"/>
+              </a:spcAft>
+              <a:defRPr sz="1000" b="0">
+                <a:solidFill>
+                  <a:srgbClr val="5C6672"/>
+                </a:solidFill>
+                <a:latin typeface="Noto Sans CJK KR"/>
+              </a:defRPr>
+            </a:pPr>
+            <a:r>
+              <a:t>ROS 2 Jazzy · Gazebo Harmonic · M13 · 따라 하기형 AGV 실습</a:t>
+            </a:r>
+          </a:p>
+        </p:txBody>
+      </p:sp>
+      <p:sp>
+        <p:nvSpPr>
+          <p:cNvPr id="5" name="TextBox 4"/>
+          <p:cNvSpPr txBox="1"/>
+          <p:nvPr/>
+        </p:nvSpPr>
+        <p:spPr>
+          <a:xfrm>
+            <a:off x="9144000" y="6510528"/>
+            <a:ext cx="2468880" cy="201168"/>
+          </a:xfrm>
+          <a:prstGeom prst="rect">
+            <a:avLst/>
+          </a:prstGeom>
+          <a:noFill/>
+        </p:spPr>
+        <p:txBody>
+          <a:bodyPr wrap="square" lIns="73152" rIns="73152" tIns="36576" bIns="36576">
+            <a:spAutoFit/>
+          </a:bodyPr>
+          <a:lstStyle/>
+          <a:p>
+            <a:pPr algn="r">
+              <a:spcAft>
+                <a:spcPts val="0"/>
+              </a:spcAft>
+              <a:defRPr sz="1000" b="0">
+                <a:solidFill>
+                  <a:srgbClr val="5C6672"/>
+                </a:solidFill>
+                <a:latin typeface="Noto Sans CJK KR"/>
+              </a:defRPr>
+            </a:pPr>
+            <a:r>
+              <a:t>명령·파일 경로는 슬라이드에서 복사 가능</a:t>
+            </a:r>
+          </a:p>
+        </p:txBody>
+      </p:sp>
+      <p:sp>
+        <p:nvSpPr>
+          <p:cNvPr id="6" name="Rectangle 5"/>
+          <p:cNvSpPr/>
+          <p:nvPr/>
+        </p:nvSpPr>
+        <p:spPr>
+          <a:xfrm>
+            <a:off x="566928" y="1188720"/>
+            <a:ext cx="11064240" cy="347472"/>
+          </a:xfrm>
+          <a:prstGeom prst="rect">
+            <a:avLst/>
+          </a:prstGeom>
+          <a:solidFill>
+            <a:srgbClr val="F4F7FB"/>
+          </a:solidFill>
+          <a:ln>
+            <a:solidFill>
+              <a:srgbClr val="F4F7FB"/>
+            </a:solidFill>
+          </a:ln>
+        </p:spPr>
+        <p:style>
+          <a:lnRef idx="1">
+            <a:schemeClr val="accent1"/>
+          </a:lnRef>
+          <a:fillRef idx="3">
+            <a:schemeClr val="accent1"/>
+          </a:fillRef>
+          <a:effectRef idx="2">
+            <a:schemeClr val="accent1"/>
+          </a:effectRef>
+          <a:fontRef idx="minor">
+            <a:schemeClr val="lt1"/>
+          </a:fontRef>
+        </p:style>
+        <p:txBody>
+          <a:bodyPr rtlCol="0" anchor="ctr" wrap="square" lIns="73152" rIns="73152" tIns="36576" bIns="36576"/>
+          <a:lstStyle/>
+          <a:p>
+            <a:pPr algn="l">
+              <a:spcAft>
+                <a:spcPts val="0"/>
+              </a:spcAft>
+              <a:defRPr sz="1300" b="1">
+                <a:solidFill>
+                  <a:srgbClr val="122C4E"/>
+                </a:solidFill>
+                <a:latin typeface="Noto Sans CJK KR"/>
+              </a:defRPr>
+            </a:pPr>
+            <a:r>
+              <a:t>현재 단계 체크포인트    |    현재 폴더 ~/agv_ws    |    현재 터미널</a:t>
+            </a:r>
+          </a:p>
+        </p:txBody>
+      </p:sp>
+      <p:sp>
+        <p:nvSpPr>
+          <p:cNvPr id="7" name="Rounded Rectangle 6"/>
+          <p:cNvSpPr/>
+          <p:nvPr/>
+        </p:nvSpPr>
+        <p:spPr>
+          <a:xfrm>
+            <a:off x="685800" y="1737360"/>
+            <a:ext cx="10972800" cy="3611880"/>
+          </a:xfrm>
+          <a:prstGeom prst="roundRect">
+            <a:avLst/>
+          </a:prstGeom>
+          <a:solidFill>
+            <a:srgbClr val="F4F7FB"/>
+          </a:solidFill>
+          <a:ln>
+            <a:solidFill>
+              <a:srgbClr val="D2DCE8"/>
+            </a:solidFill>
+          </a:ln>
+        </p:spPr>
+        <p:style>
+          <a:lnRef idx="1">
+            <a:schemeClr val="accent1"/>
+          </a:lnRef>
+          <a:fillRef idx="3">
+            <a:schemeClr val="accent1"/>
+          </a:fillRef>
+          <a:effectRef idx="2">
+            <a:schemeClr val="accent1"/>
+          </a:effectRef>
+          <a:fontRef idx="minor">
+            <a:schemeClr val="lt1"/>
+          </a:fontRef>
+        </p:style>
+        <p:txBody>
+          <a:bodyPr rtlCol="0" anchor="ctr"/>
+          <a:lstStyle/>
+          <a:p>
+            <a:pPr algn="ctr"/>
+          </a:p>
+        </p:txBody>
+      </p:sp>
+      <p:sp>
+        <p:nvSpPr>
+          <p:cNvPr id="8" name="TextBox 7"/>
+          <p:cNvSpPr txBox="1"/>
+          <p:nvPr/>
+        </p:nvSpPr>
+        <p:spPr>
+          <a:xfrm>
+            <a:off x="896112" y="1993392"/>
+            <a:ext cx="10332720" cy="2971800"/>
+          </a:xfrm>
+          <a:prstGeom prst="rect">
+            <a:avLst/>
+          </a:prstGeom>
+          <a:noFill/>
+        </p:spPr>
+        <p:txBody>
+          <a:bodyPr wrap="square" lIns="109728" rIns="109728">
+            <a:spAutoFit/>
+          </a:bodyPr>
+          <a:lstStyle/>
+          <a:p>
+            <a:pPr>
+              <a:spcAft>
+                <a:spcPts val="800"/>
+              </a:spcAft>
+              <a:defRPr sz="1800">
+                <a:solidFill>
+                  <a:srgbClr val="122C4E"/>
+                </a:solidFill>
+                <a:latin typeface="Noto Sans CJK KR"/>
+              </a:defRPr>
+            </a:pPr>
+            <a:r>
+              <a:t>• □ 완료 화면: /scan frame·RViz point·/obstacle_distance 출력이 장애물 위치에 반응한다.</a:t>
+            </a:r>
+          </a:p>
+          <a:p>
+            <a:pPr>
+              <a:spcAft>
+                <a:spcPts val="800"/>
+              </a:spcAft>
+              <a:defRPr sz="1800">
+                <a:solidFill>
+                  <a:srgbClr val="122C4E"/>
+                </a:solidFill>
+                <a:latin typeface="Noto Sans CJK KR"/>
+              </a:defRPr>
+            </a:pPr>
+            <a:r>
+              <a:t>• □ Complete 파일: blocks/D_sensors/M13_lidar_sensor/complete/</a:t>
+            </a:r>
+          </a:p>
+          <a:p>
+            <a:pPr>
+              <a:spcAft>
+                <a:spcPts val="800"/>
+              </a:spcAft>
+              <a:defRPr sz="1800">
+                <a:solidFill>
+                  <a:srgbClr val="122C4E"/>
+                </a:solidFill>
+                <a:latin typeface="Noto Sans CJK KR"/>
+              </a:defRPr>
+            </a:pPr>
+            <a:r>
+              <a:t>• □ 정상 로그·캡처: logs/validation.log, screenshots/validation_terminal.png</a:t>
+            </a:r>
+          </a:p>
+          <a:p>
+            <a:pPr>
+              <a:spcAft>
+                <a:spcPts val="800"/>
+              </a:spcAft>
+              <a:defRPr sz="1800">
+                <a:solidFill>
+                  <a:srgbClr val="122C4E"/>
+                </a:solidFill>
+                <a:latin typeface="Noto Sans CJK KR"/>
+              </a:defRPr>
+            </a:pPr>
+            <a:r>
+              <a:t>• □ 버전 식별: CHECKSUM_or_TAG.txt의 SHA-256 manifest</a:t>
+            </a:r>
+          </a:p>
+          <a:p>
+            <a:pPr>
+              <a:spcAft>
+                <a:spcPts val="800"/>
+              </a:spcAft>
+              <a:defRPr sz="1800">
+                <a:solidFill>
+                  <a:srgbClr val="122C4E"/>
+                </a:solidFill>
+                <a:latin typeface="Noto Sans CJK KR"/>
+              </a:defRPr>
+            </a:pPr>
+            <a:r>
+              <a:t>• □ 다음 시작 조건: M14 IMU</a:t>
+            </a:r>
+          </a:p>
+        </p:txBody>
+      </p:sp>
+      <p:sp>
+        <p:nvSpPr>
+          <p:cNvPr id="9" name="TextBox 8"/>
+          <p:cNvSpPr txBox="1"/>
+          <p:nvPr/>
+        </p:nvSpPr>
+        <p:spPr>
+          <a:xfrm>
+            <a:off x="868680" y="5596128"/>
+            <a:ext cx="10515600" cy="338328"/>
+          </a:xfrm>
+          <a:prstGeom prst="rect">
+            <a:avLst/>
+          </a:prstGeom>
+          <a:noFill/>
+        </p:spPr>
+        <p:txBody>
+          <a:bodyPr wrap="square" lIns="73152" rIns="73152" tIns="36576" bIns="36576">
+            <a:spAutoFit/>
+          </a:bodyPr>
+          <a:lstStyle/>
+          <a:p>
+            <a:pPr algn="ctr">
+              <a:spcAft>
+                <a:spcPts val="0"/>
+              </a:spcAft>
+              <a:defRPr sz="1700" b="1">
+                <a:solidFill>
+                  <a:srgbClr val="2A8B5A"/>
+                </a:solidFill>
+                <a:latin typeface="Noto Sans CJK KR"/>
+              </a:defRPr>
+            </a:pPr>
+            <a:r>
+              <a:t>다음 모듈을 시작하기 전, 이 슬라이드의 Complete와 다음 모듈의 Starter를 비교합니다.</a:t>
+            </a:r>
+          </a:p>
+        </p:txBody>
+      </p:sp>
+    </p:spTree>
+  </p:cSld>
+  <p:clrMapOvr>
+    <a:masterClrMapping/>
+  </p:clrMapOvr>
+</p:sld>
+</file>
+
+<file path=ppt/slides/slide45.xml><?xml version="1.0" encoding="utf-8"?>
+<p:sld xmlns:a="http://schemas.openxmlformats.org/drawingml/2006/main" xmlns:p="http://schemas.openxmlformats.org/presentationml/2006/main" xmlns:r="http://schemas.openxmlformats.org/officeDocument/2006/relationships">
+  <p:cSld>
+    <p:spTree>
+      <p:nvGrpSpPr>
+        <p:cNvPr id="1" name=""/>
+        <p:cNvGrpSpPr/>
+        <p:nvPr/>
+      </p:nvGrpSpPr>
+      <p:grpSpPr/>
+      <p:sp>
+        <p:nvSpPr>
+          <p:cNvPr id="2" name="TextBox 1"/>
+          <p:cNvSpPr txBox="1"/>
+          <p:nvPr/>
+        </p:nvSpPr>
+        <p:spPr>
+          <a:xfrm>
+            <a:off x="566928" y="347472"/>
+            <a:ext cx="10881360" cy="438912"/>
+          </a:xfrm>
+          <a:prstGeom prst="rect">
+            <a:avLst/>
+          </a:prstGeom>
+          <a:noFill/>
+        </p:spPr>
+        <p:txBody>
+          <a:bodyPr wrap="square" lIns="73152" rIns="73152" tIns="36576" bIns="36576">
+            <a:spAutoFit/>
+          </a:bodyPr>
+          <a:lstStyle/>
+          <a:p>
+            <a:pPr algn="l">
+              <a:spcAft>
+                <a:spcPts val="0"/>
+              </a:spcAft>
+              <a:defRPr sz="3200" b="1">
+                <a:solidFill>
+                  <a:srgbClr val="122C4E"/>
+                </a:solidFill>
+                <a:latin typeface="Noto Sans CJK KR"/>
+              </a:defRPr>
+            </a:pPr>
+            <a:r>
               <a:t>공식 참고 자료</a:t>
             </a:r>
           </a:p>
@@ -23642,7 +25305,7 @@
         </p:nvSpPr>
         <p:spPr>
           <a:xfrm>
-            <a:off x="914400" y="1810512"/>
+            <a:off x="914400" y="1773936"/>
             <a:ext cx="3840480" cy="256032"/>
           </a:xfrm>
           <a:prstGeom prst="rect">
@@ -23681,8 +25344,8 @@
         </p:nvSpPr>
         <p:spPr>
           <a:xfrm>
-            <a:off x="914400" y="2121408"/>
-            <a:ext cx="9966960" cy="256032"/>
+            <a:off x="914400" y="2048255"/>
+            <a:ext cx="9966960" cy="475488"/>
           </a:xfrm>
           <a:prstGeom prst="rect">
             <a:avLst/>
@@ -23699,7 +25362,7 @@
               <a:spcAft>
                 <a:spcPts val="0"/>
               </a:spcAft>
-              <a:defRPr sz="1200" b="0">
+              <a:defRPr sz="1000" b="0">
                 <a:solidFill>
                   <a:srgbClr val="225B9B"/>
                 </a:solidFill>
@@ -23720,7 +25383,7 @@
         </p:nvSpPr>
         <p:spPr>
           <a:xfrm>
-            <a:off x="914400" y="2816352"/>
+            <a:off x="914400" y="2852928"/>
             <a:ext cx="3840480" cy="256032"/>
           </a:xfrm>
           <a:prstGeom prst="rect">
@@ -23760,7 +25423,7 @@
         <p:spPr>
           <a:xfrm>
             <a:off x="914400" y="3127248"/>
-            <a:ext cx="9966960" cy="256032"/>
+            <a:ext cx="9966960" cy="475488"/>
           </a:xfrm>
           <a:prstGeom prst="rect">
             <a:avLst/>
@@ -23777,7 +25440,7 @@
               <a:spcAft>
                 <a:spcPts val="0"/>
               </a:spcAft>
-              <a:defRPr sz="1200" b="0">
+              <a:defRPr sz="1000" b="0">
                 <a:solidFill>
                   <a:srgbClr val="225B9B"/>
                 </a:solidFill>
@@ -23798,7 +25461,7 @@
         </p:nvSpPr>
         <p:spPr>
           <a:xfrm>
-            <a:off x="914400" y="3822191"/>
+            <a:off x="914400" y="3931920"/>
             <a:ext cx="3840480" cy="256032"/>
           </a:xfrm>
           <a:prstGeom prst="rect">
@@ -23837,8 +25500,8 @@
         </p:nvSpPr>
         <p:spPr>
           <a:xfrm>
-            <a:off x="914400" y="4133087"/>
-            <a:ext cx="9966960" cy="256032"/>
+            <a:off x="914400" y="4206240"/>
+            <a:ext cx="9966960" cy="475488"/>
           </a:xfrm>
           <a:prstGeom prst="rect">
             <a:avLst/>
@@ -23855,7 +25518,7 @@
               <a:spcAft>
                 <a:spcPts val="0"/>
               </a:spcAft>
-              <a:defRPr sz="1200" b="0">
+              <a:defRPr sz="1000" b="0">
                 <a:solidFill>
                   <a:srgbClr val="225B9B"/>
                 </a:solidFill>
@@ -23876,7 +25539,7 @@
         </p:nvSpPr>
         <p:spPr>
           <a:xfrm>
-            <a:off x="914400" y="4828032"/>
+            <a:off x="914400" y="5010912"/>
             <a:ext cx="3840480" cy="256032"/>
           </a:xfrm>
           <a:prstGeom prst="rect">
@@ -23915,8 +25578,8 @@
         </p:nvSpPr>
         <p:spPr>
           <a:xfrm>
-            <a:off x="914400" y="5138928"/>
-            <a:ext cx="9966960" cy="256032"/>
+            <a:off x="914400" y="5285232"/>
+            <a:ext cx="9966960" cy="475488"/>
           </a:xfrm>
           <a:prstGeom prst="rect">
             <a:avLst/>
@@ -23933,7 +25596,7 @@
               <a:spcAft>
                 <a:spcPts val="0"/>
               </a:spcAft>
-              <a:defRPr sz="1200" b="0">
+              <a:defRPr sz="1000" b="0">
                 <a:solidFill>
                   <a:srgbClr val="225B9B"/>
                 </a:solidFill>
@@ -25739,7 +27402,7 @@
               </a:defRPr>
             </a:pPr>
             <a:r>
-              <a:t>파일을 새로 만들고 저장한다 (1/21)</a:t>
+              <a:t>파일을 새로 만들고 저장한다 (1/24)</a:t>
             </a:r>
           </a:p>
         </p:txBody>
@@ -25914,7 +27577,7 @@
               </a:defRPr>
             </a:pPr>
             <a:r>
-              <a:t>현재 단계 3/24    |    현재 폴더 ~/agv_ws    |    현재 터미널</a:t>
+              <a:t>현재 단계 3/27    |    현재 폴더 ~/agv_ws    |    현재 터미널</a:t>
             </a:r>
           </a:p>
         </p:txBody>
@@ -25927,8 +27590,8 @@
         </p:nvSpPr>
         <p:spPr>
           <a:xfrm>
-            <a:off x="658368" y="1682496"/>
-            <a:ext cx="10972800" cy="347472"/>
+            <a:off x="658368" y="1627632"/>
+            <a:ext cx="10972800" cy="256032"/>
           </a:xfrm>
           <a:prstGeom prst="rect">
             <a:avLst/>
@@ -25945,7 +27608,7 @@
               <a:spcAft>
                 <a:spcPts val="0"/>
               </a:spcAft>
-              <a:defRPr sz="1700" b="1">
+              <a:defRPr sz="1500" b="1">
                 <a:solidFill>
                   <a:srgbClr val="122C4E"/>
                 </a:solidFill>
@@ -25966,8 +27629,8 @@
         </p:nvSpPr>
         <p:spPr>
           <a:xfrm>
-            <a:off x="658368" y="2103120"/>
-            <a:ext cx="10972800" cy="493776"/>
+            <a:off x="658368" y="1956816"/>
+            <a:ext cx="10972800" cy="603504"/>
           </a:xfrm>
           <a:prstGeom prst="rect">
             <a:avLst/>
@@ -26011,7 +27674,11 @@
               </a:defRPr>
             </a:pPr>
             <a:r>
-              <a:t>파일 생성/열기: mkdir -p ~/agv_ws/src/agv_gazebo/models/agv    &amp;&amp;    nano ~/agv_ws/src/agv_gazebo/models/agv/model.sdf</a:t>
+              <a:t>파일 생성: mkdir -p ~/agv_ws/src/agv_gazebo/models/agv</a:t>
+            </a:r>
+            <a:br/>
+            <a:r>
+              <a:t>파일 열기: nano ~/agv_ws/src/agv_gazebo/models/agv/model.sdf</a:t>
             </a:r>
           </a:p>
         </p:txBody>
@@ -26024,8 +27691,8 @@
         </p:nvSpPr>
         <p:spPr>
           <a:xfrm>
-            <a:off x="658368" y="2761488"/>
-            <a:ext cx="10972800" cy="3383280"/>
+            <a:off x="658368" y="2706624"/>
+            <a:ext cx="10972800" cy="3364992"/>
           </a:xfrm>
           <a:prstGeom prst="rect">
             <a:avLst/>
@@ -26115,14 +27782,6 @@
             <a:r>
               <a:t>      </a:t>
             </a:r>
-            <a:br/>
-            <a:r>
-              <a:t>      </a:t>
-            </a:r>
-            <a:br/>
-            <a:r>
-              <a:t>      &lt;inertial&gt;</a:t>
-            </a:r>
           </a:p>
         </p:txBody>
       </p:sp>
@@ -26134,7 +27793,7 @@
         </p:nvSpPr>
         <p:spPr>
           <a:xfrm>
-            <a:off x="749808" y="6199632"/>
+            <a:off x="749808" y="6181344"/>
             <a:ext cx="10789920" cy="201168"/>
           </a:xfrm>
           <a:prstGeom prst="rect">
@@ -26160,7 +27819,7 @@
               </a:defRPr>
             </a:pPr>
             <a:r>
-              <a:t>파일 전체 1/21 · 이 슬라이드 다음에 같은 파일의 나머지 줄이 이어집니다.</a:t>
+              <a:t>파일 전체 1/24 · 이 슬라이드 다음에 같은 파일의 나머지 줄이 이어집니다.</a:t>
             </a:r>
           </a:p>
         </p:txBody>

--- a/blocks/D_sensors/M13_lidar_sensor/M13_2D_LiDAR_LaserScan.pptx
+++ b/blocks/D_sensors/M13_lidar_sensor/M13_2D_LiDAR_LaserScan.pptx
@@ -50,6 +50,7 @@
     <p:sldId id="298" r:id="rId50"/>
     <p:sldId id="299" r:id="rId51"/>
     <p:sldId id="300" r:id="rId52"/>
+    <p:sldId id="301" r:id="rId53"/>
   </p:sldIdLst>
   <p:sldSz cx="12191999" cy="6858000" type="screen4x3"/>
   <p:notesSz cx="6858000" cy="9144000"/>
@@ -636,12 +637,12 @@
           <a:lstStyle/>
           <a:p>
             <a:r>
-              <a:t>[설명] ~/agv_ws/src/agv_gazebo/models/agv/model.sdf의 전체 파일을 2/24 구간으로 작성한다.</a:t>
-            </a:r>
-          </a:p>
-          <a:p>
-            <a:r>
-              <a:t>[실행] nano ~/agv_ws/src/agv_gazebo/models/agv/model.sdf</a:t>
+              <a:t>[설명] ~/ros2_curri/agv_ws/src/agv_gazebo/models/agv/model.sdf의 전체 파일을 2/24 구간으로 작성한다.</a:t>
+            </a:r>
+          </a:p>
+          <a:p>
+            <a:r>
+              <a:t>[실행] nano ~/ros2_curri/agv_ws/src/agv_gazebo/models/agv/model.sdf</a:t>
             </a:r>
           </a:p>
           <a:p>
@@ -726,12 +727,12 @@
           <a:lstStyle/>
           <a:p>
             <a:r>
-              <a:t>[설명] ~/agv_ws/src/agv_gazebo/models/agv/model.sdf의 전체 파일을 3/24 구간으로 작성한다.</a:t>
-            </a:r>
-          </a:p>
-          <a:p>
-            <a:r>
-              <a:t>[실행] nano ~/agv_ws/src/agv_gazebo/models/agv/model.sdf</a:t>
+              <a:t>[설명] ~/ros2_curri/agv_ws/src/agv_gazebo/models/agv/model.sdf의 전체 파일을 3/24 구간으로 작성한다.</a:t>
+            </a:r>
+          </a:p>
+          <a:p>
+            <a:r>
+              <a:t>[실행] nano ~/ros2_curri/agv_ws/src/agv_gazebo/models/agv/model.sdf</a:t>
             </a:r>
           </a:p>
           <a:p>
@@ -816,12 +817,12 @@
           <a:lstStyle/>
           <a:p>
             <a:r>
-              <a:t>[설명] ~/agv_ws/src/agv_gazebo/models/agv/model.sdf의 전체 파일을 4/24 구간으로 작성한다.</a:t>
-            </a:r>
-          </a:p>
-          <a:p>
-            <a:r>
-              <a:t>[실행] nano ~/agv_ws/src/agv_gazebo/models/agv/model.sdf</a:t>
+              <a:t>[설명] ~/ros2_curri/agv_ws/src/agv_gazebo/models/agv/model.sdf의 전체 파일을 4/24 구간으로 작성한다.</a:t>
+            </a:r>
+          </a:p>
+          <a:p>
+            <a:r>
+              <a:t>[실행] nano ~/ros2_curri/agv_ws/src/agv_gazebo/models/agv/model.sdf</a:t>
             </a:r>
           </a:p>
           <a:p>
@@ -906,12 +907,12 @@
           <a:lstStyle/>
           <a:p>
             <a:r>
-              <a:t>[설명] ~/agv_ws/src/agv_gazebo/models/agv/model.sdf의 전체 파일을 5/24 구간으로 작성한다.</a:t>
-            </a:r>
-          </a:p>
-          <a:p>
-            <a:r>
-              <a:t>[실행] nano ~/agv_ws/src/agv_gazebo/models/agv/model.sdf</a:t>
+              <a:t>[설명] ~/ros2_curri/agv_ws/src/agv_gazebo/models/agv/model.sdf의 전체 파일을 5/24 구간으로 작성한다.</a:t>
+            </a:r>
+          </a:p>
+          <a:p>
+            <a:r>
+              <a:t>[실행] nano ~/ros2_curri/agv_ws/src/agv_gazebo/models/agv/model.sdf</a:t>
             </a:r>
           </a:p>
           <a:p>
@@ -996,12 +997,12 @@
           <a:lstStyle/>
           <a:p>
             <a:r>
-              <a:t>[설명] ~/agv_ws/src/agv_gazebo/models/agv/model.sdf의 전체 파일을 6/24 구간으로 작성한다.</a:t>
-            </a:r>
-          </a:p>
-          <a:p>
-            <a:r>
-              <a:t>[실행] nano ~/agv_ws/src/agv_gazebo/models/agv/model.sdf</a:t>
+              <a:t>[설명] ~/ros2_curri/agv_ws/src/agv_gazebo/models/agv/model.sdf의 전체 파일을 6/24 구간으로 작성한다.</a:t>
+            </a:r>
+          </a:p>
+          <a:p>
+            <a:r>
+              <a:t>[실행] nano ~/ros2_curri/agv_ws/src/agv_gazebo/models/agv/model.sdf</a:t>
             </a:r>
           </a:p>
           <a:p>
@@ -1086,12 +1087,12 @@
           <a:lstStyle/>
           <a:p>
             <a:r>
-              <a:t>[설명] ~/agv_ws/src/agv_gazebo/models/agv/model.sdf의 전체 파일을 7/24 구간으로 작성한다.</a:t>
-            </a:r>
-          </a:p>
-          <a:p>
-            <a:r>
-              <a:t>[실행] nano ~/agv_ws/src/agv_gazebo/models/agv/model.sdf</a:t>
+              <a:t>[설명] ~/ros2_curri/agv_ws/src/agv_gazebo/models/agv/model.sdf의 전체 파일을 7/24 구간으로 작성한다.</a:t>
+            </a:r>
+          </a:p>
+          <a:p>
+            <a:r>
+              <a:t>[실행] nano ~/ros2_curri/agv_ws/src/agv_gazebo/models/agv/model.sdf</a:t>
             </a:r>
           </a:p>
           <a:p>
@@ -1176,12 +1177,12 @@
           <a:lstStyle/>
           <a:p>
             <a:r>
-              <a:t>[설명] ~/agv_ws/src/agv_gazebo/models/agv/model.sdf의 전체 파일을 8/24 구간으로 작성한다.</a:t>
-            </a:r>
-          </a:p>
-          <a:p>
-            <a:r>
-              <a:t>[실행] nano ~/agv_ws/src/agv_gazebo/models/agv/model.sdf</a:t>
+              <a:t>[설명] ~/ros2_curri/agv_ws/src/agv_gazebo/models/agv/model.sdf의 전체 파일을 8/24 구간으로 작성한다.</a:t>
+            </a:r>
+          </a:p>
+          <a:p>
+            <a:r>
+              <a:t>[실행] nano ~/ros2_curri/agv_ws/src/agv_gazebo/models/agv/model.sdf</a:t>
             </a:r>
           </a:p>
           <a:p>
@@ -1266,12 +1267,12 @@
           <a:lstStyle/>
           <a:p>
             <a:r>
-              <a:t>[설명] ~/agv_ws/src/agv_gazebo/models/agv/model.sdf의 전체 파일을 9/24 구간으로 작성한다.</a:t>
-            </a:r>
-          </a:p>
-          <a:p>
-            <a:r>
-              <a:t>[실행] nano ~/agv_ws/src/agv_gazebo/models/agv/model.sdf</a:t>
+              <a:t>[설명] ~/ros2_curri/agv_ws/src/agv_gazebo/models/agv/model.sdf의 전체 파일을 9/24 구간으로 작성한다.</a:t>
+            </a:r>
+          </a:p>
+          <a:p>
+            <a:r>
+              <a:t>[실행] nano ~/ros2_curri/agv_ws/src/agv_gazebo/models/agv/model.sdf</a:t>
             </a:r>
           </a:p>
           <a:p>
@@ -1356,12 +1357,12 @@
           <a:lstStyle/>
           <a:p>
             <a:r>
-              <a:t>[설명] ~/agv_ws/src/agv_gazebo/models/agv/model.sdf의 전체 파일을 10/24 구간으로 작성한다.</a:t>
-            </a:r>
-          </a:p>
-          <a:p>
-            <a:r>
-              <a:t>[실행] nano ~/agv_ws/src/agv_gazebo/models/agv/model.sdf</a:t>
+              <a:t>[설명] ~/ros2_curri/agv_ws/src/agv_gazebo/models/agv/model.sdf의 전체 파일을 10/24 구간으로 작성한다.</a:t>
+            </a:r>
+          </a:p>
+          <a:p>
+            <a:r>
+              <a:t>[실행] nano ~/ros2_curri/agv_ws/src/agv_gazebo/models/agv/model.sdf</a:t>
             </a:r>
           </a:p>
           <a:p>
@@ -1446,12 +1447,12 @@
           <a:lstStyle/>
           <a:p>
             <a:r>
-              <a:t>[설명] ~/agv_ws/src/agv_gazebo/models/agv/model.sdf의 전체 파일을 11/24 구간으로 작성한다.</a:t>
-            </a:r>
-          </a:p>
-          <a:p>
-            <a:r>
-              <a:t>[실행] nano ~/agv_ws/src/agv_gazebo/models/agv/model.sdf</a:t>
+              <a:t>[설명] ~/ros2_curri/agv_ws/src/agv_gazebo/models/agv/model.sdf의 전체 파일을 11/24 구간으로 작성한다.</a:t>
+            </a:r>
+          </a:p>
+          <a:p>
+            <a:r>
+              <a:t>[실행] nano ~/ros2_curri/agv_ws/src/agv_gazebo/models/agv/model.sdf</a:t>
             </a:r>
           </a:p>
           <a:p>
@@ -1626,12 +1627,12 @@
           <a:lstStyle/>
           <a:p>
             <a:r>
-              <a:t>[설명] ~/agv_ws/src/agv_gazebo/models/agv/model.sdf의 전체 파일을 12/24 구간으로 작성한다.</a:t>
-            </a:r>
-          </a:p>
-          <a:p>
-            <a:r>
-              <a:t>[실행] nano ~/agv_ws/src/agv_gazebo/models/agv/model.sdf</a:t>
+              <a:t>[설명] ~/ros2_curri/agv_ws/src/agv_gazebo/models/agv/model.sdf의 전체 파일을 12/24 구간으로 작성한다.</a:t>
+            </a:r>
+          </a:p>
+          <a:p>
+            <a:r>
+              <a:t>[실행] nano ~/ros2_curri/agv_ws/src/agv_gazebo/models/agv/model.sdf</a:t>
             </a:r>
           </a:p>
           <a:p>
@@ -1716,12 +1717,12 @@
           <a:lstStyle/>
           <a:p>
             <a:r>
-              <a:t>[설명] ~/agv_ws/src/agv_gazebo/models/agv/model.sdf의 전체 파일을 13/24 구간으로 작성한다.</a:t>
-            </a:r>
-          </a:p>
-          <a:p>
-            <a:r>
-              <a:t>[실행] nano ~/agv_ws/src/agv_gazebo/models/agv/model.sdf</a:t>
+              <a:t>[설명] ~/ros2_curri/agv_ws/src/agv_gazebo/models/agv/model.sdf의 전체 파일을 13/24 구간으로 작성한다.</a:t>
+            </a:r>
+          </a:p>
+          <a:p>
+            <a:r>
+              <a:t>[실행] nano ~/ros2_curri/agv_ws/src/agv_gazebo/models/agv/model.sdf</a:t>
             </a:r>
           </a:p>
           <a:p>
@@ -1806,12 +1807,12 @@
           <a:lstStyle/>
           <a:p>
             <a:r>
-              <a:t>[설명] ~/agv_ws/src/agv_gazebo/models/agv/model.sdf의 전체 파일을 14/24 구간으로 작성한다.</a:t>
-            </a:r>
-          </a:p>
-          <a:p>
-            <a:r>
-              <a:t>[실행] nano ~/agv_ws/src/agv_gazebo/models/agv/model.sdf</a:t>
+              <a:t>[설명] ~/ros2_curri/agv_ws/src/agv_gazebo/models/agv/model.sdf의 전체 파일을 14/24 구간으로 작성한다.</a:t>
+            </a:r>
+          </a:p>
+          <a:p>
+            <a:r>
+              <a:t>[실행] nano ~/ros2_curri/agv_ws/src/agv_gazebo/models/agv/model.sdf</a:t>
             </a:r>
           </a:p>
           <a:p>
@@ -1896,12 +1897,12 @@
           <a:lstStyle/>
           <a:p>
             <a:r>
-              <a:t>[설명] ~/agv_ws/src/agv_gazebo/models/agv/model.sdf의 전체 파일을 15/24 구간으로 작성한다.</a:t>
-            </a:r>
-          </a:p>
-          <a:p>
-            <a:r>
-              <a:t>[실행] nano ~/agv_ws/src/agv_gazebo/models/agv/model.sdf</a:t>
+              <a:t>[설명] ~/ros2_curri/agv_ws/src/agv_gazebo/models/agv/model.sdf의 전체 파일을 15/24 구간으로 작성한다.</a:t>
+            </a:r>
+          </a:p>
+          <a:p>
+            <a:r>
+              <a:t>[실행] nano ~/ros2_curri/agv_ws/src/agv_gazebo/models/agv/model.sdf</a:t>
             </a:r>
           </a:p>
           <a:p>
@@ -1986,12 +1987,12 @@
           <a:lstStyle/>
           <a:p>
             <a:r>
-              <a:t>[설명] ~/agv_ws/src/agv_gazebo/models/agv/model.sdf의 전체 파일을 16/24 구간으로 작성한다.</a:t>
-            </a:r>
-          </a:p>
-          <a:p>
-            <a:r>
-              <a:t>[실행] nano ~/agv_ws/src/agv_gazebo/models/agv/model.sdf</a:t>
+              <a:t>[설명] ~/ros2_curri/agv_ws/src/agv_gazebo/models/agv/model.sdf의 전체 파일을 16/24 구간으로 작성한다.</a:t>
+            </a:r>
+          </a:p>
+          <a:p>
+            <a:r>
+              <a:t>[실행] nano ~/ros2_curri/agv_ws/src/agv_gazebo/models/agv/model.sdf</a:t>
             </a:r>
           </a:p>
           <a:p>
@@ -2076,12 +2077,12 @@
           <a:lstStyle/>
           <a:p>
             <a:r>
-              <a:t>[설명] ~/agv_ws/src/agv_gazebo/models/agv/model.sdf의 전체 파일을 17/24 구간으로 작성한다.</a:t>
-            </a:r>
-          </a:p>
-          <a:p>
-            <a:r>
-              <a:t>[실행] nano ~/agv_ws/src/agv_gazebo/models/agv/model.sdf</a:t>
+              <a:t>[설명] ~/ros2_curri/agv_ws/src/agv_gazebo/models/agv/model.sdf의 전체 파일을 17/24 구간으로 작성한다.</a:t>
+            </a:r>
+          </a:p>
+          <a:p>
+            <a:r>
+              <a:t>[실행] nano ~/ros2_curri/agv_ws/src/agv_gazebo/models/agv/model.sdf</a:t>
             </a:r>
           </a:p>
           <a:p>
@@ -2166,12 +2167,12 @@
           <a:lstStyle/>
           <a:p>
             <a:r>
-              <a:t>[설명] ~/agv_ws/src/agv_gazebo/models/agv/model.sdf의 전체 파일을 18/24 구간으로 작성한다.</a:t>
-            </a:r>
-          </a:p>
-          <a:p>
-            <a:r>
-              <a:t>[실행] nano ~/agv_ws/src/agv_gazebo/models/agv/model.sdf</a:t>
+              <a:t>[설명] ~/ros2_curri/agv_ws/src/agv_gazebo/models/agv/model.sdf의 전체 파일을 18/24 구간으로 작성한다.</a:t>
+            </a:r>
+          </a:p>
+          <a:p>
+            <a:r>
+              <a:t>[실행] nano ~/ros2_curri/agv_ws/src/agv_gazebo/models/agv/model.sdf</a:t>
             </a:r>
           </a:p>
           <a:p>
@@ -2256,12 +2257,12 @@
           <a:lstStyle/>
           <a:p>
             <a:r>
-              <a:t>[설명] ~/agv_ws/src/agv_gazebo/models/agv/model.sdf의 전체 파일을 19/24 구간으로 작성한다.</a:t>
-            </a:r>
-          </a:p>
-          <a:p>
-            <a:r>
-              <a:t>[실행] nano ~/agv_ws/src/agv_gazebo/models/agv/model.sdf</a:t>
+              <a:t>[설명] ~/ros2_curri/agv_ws/src/agv_gazebo/models/agv/model.sdf의 전체 파일을 19/24 구간으로 작성한다.</a:t>
+            </a:r>
+          </a:p>
+          <a:p>
+            <a:r>
+              <a:t>[실행] nano ~/ros2_curri/agv_ws/src/agv_gazebo/models/agv/model.sdf</a:t>
             </a:r>
           </a:p>
           <a:p>
@@ -2346,12 +2347,12 @@
           <a:lstStyle/>
           <a:p>
             <a:r>
-              <a:t>[설명] ~/agv_ws/src/agv_gazebo/models/agv/model.sdf의 전체 파일을 20/24 구간으로 작성한다.</a:t>
-            </a:r>
-          </a:p>
-          <a:p>
-            <a:r>
-              <a:t>[실행] nano ~/agv_ws/src/agv_gazebo/models/agv/model.sdf</a:t>
+              <a:t>[설명] ~/ros2_curri/agv_ws/src/agv_gazebo/models/agv/model.sdf의 전체 파일을 20/24 구간으로 작성한다.</a:t>
+            </a:r>
+          </a:p>
+          <a:p>
+            <a:r>
+              <a:t>[실행] nano ~/ros2_curri/agv_ws/src/agv_gazebo/models/agv/model.sdf</a:t>
             </a:r>
           </a:p>
           <a:p>
@@ -2436,12 +2437,12 @@
           <a:lstStyle/>
           <a:p>
             <a:r>
-              <a:t>[설명] ~/agv_ws/src/agv_gazebo/models/agv/model.sdf의 전체 파일을 21/24 구간으로 작성한다.</a:t>
-            </a:r>
-          </a:p>
-          <a:p>
-            <a:r>
-              <a:t>[실행] nano ~/agv_ws/src/agv_gazebo/models/agv/model.sdf</a:t>
+              <a:t>[설명] ~/ros2_curri/agv_ws/src/agv_gazebo/models/agv/model.sdf의 전체 파일을 21/24 구간으로 작성한다.</a:t>
+            </a:r>
+          </a:p>
+          <a:p>
+            <a:r>
+              <a:t>[실행] nano ~/ros2_curri/agv_ws/src/agv_gazebo/models/agv/model.sdf</a:t>
             </a:r>
           </a:p>
           <a:p>
@@ -2531,7 +2532,7 @@
           </a:p>
           <a:p>
             <a:r>
-              <a:t>[실행] pwd; source /opt/ros/jazzy/setup.bash; source ~/agv_ws/install/setup.bash</a:t>
+              <a:t>[실행] pwd; source /opt/ros/jazzy/setup.bash; source ~/ros2_curri/agv_ws/install/setup.bash</a:t>
             </a:r>
           </a:p>
           <a:p>
@@ -2616,12 +2617,12 @@
           <a:lstStyle/>
           <a:p>
             <a:r>
-              <a:t>[설명] ~/agv_ws/src/agv_gazebo/models/agv/model.sdf의 전체 파일을 22/24 구간으로 작성한다.</a:t>
-            </a:r>
-          </a:p>
-          <a:p>
-            <a:r>
-              <a:t>[실행] nano ~/agv_ws/src/agv_gazebo/models/agv/model.sdf</a:t>
+              <a:t>[설명] ~/ros2_curri/agv_ws/src/agv_gazebo/models/agv/model.sdf의 전체 파일을 22/24 구간으로 작성한다.</a:t>
+            </a:r>
+          </a:p>
+          <a:p>
+            <a:r>
+              <a:t>[실행] nano ~/ros2_curri/agv_ws/src/agv_gazebo/models/agv/model.sdf</a:t>
             </a:r>
           </a:p>
           <a:p>
@@ -2706,12 +2707,12 @@
           <a:lstStyle/>
           <a:p>
             <a:r>
-              <a:t>[설명] ~/agv_ws/src/agv_gazebo/models/agv/model.sdf의 전체 파일을 23/24 구간으로 작성한다.</a:t>
-            </a:r>
-          </a:p>
-          <a:p>
-            <a:r>
-              <a:t>[실행] nano ~/agv_ws/src/agv_gazebo/models/agv/model.sdf</a:t>
+              <a:t>[설명] ~/ros2_curri/agv_ws/src/agv_gazebo/models/agv/model.sdf의 전체 파일을 23/24 구간으로 작성한다.</a:t>
+            </a:r>
+          </a:p>
+          <a:p>
+            <a:r>
+              <a:t>[실행] nano ~/ros2_curri/agv_ws/src/agv_gazebo/models/agv/model.sdf</a:t>
             </a:r>
           </a:p>
           <a:p>
@@ -2796,12 +2797,12 @@
           <a:lstStyle/>
           <a:p>
             <a:r>
-              <a:t>[설명] ~/agv_ws/src/agv_gazebo/models/agv/model.sdf의 전체 파일을 24/24 구간으로 작성한다.</a:t>
-            </a:r>
-          </a:p>
-          <a:p>
-            <a:r>
-              <a:t>[실행] nano ~/agv_ws/src/agv_gazebo/models/agv/model.sdf</a:t>
+              <a:t>[설명] ~/ros2_curri/agv_ws/src/agv_gazebo/models/agv/model.sdf의 전체 파일을 24/24 구간으로 작성한다.</a:t>
+            </a:r>
+          </a:p>
+          <a:p>
+            <a:r>
+              <a:t>[실행] nano ~/ros2_curri/agv_ws/src/agv_gazebo/models/agv/model.sdf</a:t>
             </a:r>
           </a:p>
           <a:p>
@@ -2886,12 +2887,12 @@
           <a:lstStyle/>
           <a:p>
             <a:r>
-              <a:t>[설명] ~/agv_ws/src/agv_gazebo/config/bridge.yaml의 전체 파일을 1/3 구간으로 작성한다.</a:t>
-            </a:r>
-          </a:p>
-          <a:p>
-            <a:r>
-              <a:t>[실행] nano ~/agv_ws/src/agv_gazebo/config/bridge.yaml</a:t>
+              <a:t>[설명] ~/ros2_curri/agv_ws/src/agv_gazebo/config/bridge.yaml의 전체 파일을 1/3 구간으로 작성한다.</a:t>
+            </a:r>
+          </a:p>
+          <a:p>
+            <a:r>
+              <a:t>[실행] nano ~/ros2_curri/agv_ws/src/agv_gazebo/config/bridge.yaml</a:t>
             </a:r>
           </a:p>
           <a:p>
@@ -2976,12 +2977,12 @@
           <a:lstStyle/>
           <a:p>
             <a:r>
-              <a:t>[설명] ~/agv_ws/src/agv_gazebo/config/bridge.yaml의 전체 파일을 2/3 구간으로 작성한다.</a:t>
-            </a:r>
-          </a:p>
-          <a:p>
-            <a:r>
-              <a:t>[실행] nano ~/agv_ws/src/agv_gazebo/config/bridge.yaml</a:t>
+              <a:t>[설명] ~/ros2_curri/agv_ws/src/agv_gazebo/config/bridge.yaml의 전체 파일을 2/3 구간으로 작성한다.</a:t>
+            </a:r>
+          </a:p>
+          <a:p>
+            <a:r>
+              <a:t>[실행] nano ~/ros2_curri/agv_ws/src/agv_gazebo/config/bridge.yaml</a:t>
             </a:r>
           </a:p>
           <a:p>
@@ -3066,12 +3067,12 @@
           <a:lstStyle/>
           <a:p>
             <a:r>
-              <a:t>[설명] ~/agv_ws/src/agv_gazebo/config/bridge.yaml의 전체 파일을 3/3 구간으로 작성한다.</a:t>
-            </a:r>
-          </a:p>
-          <a:p>
-            <a:r>
-              <a:t>[실행] nano ~/agv_ws/src/agv_gazebo/config/bridge.yaml</a:t>
+              <a:t>[설명] ~/ros2_curri/agv_ws/src/agv_gazebo/config/bridge.yaml의 전체 파일을 3/3 구간으로 작성한다.</a:t>
+            </a:r>
+          </a:p>
+          <a:p>
+            <a:r>
+              <a:t>[실행] nano ~/ros2_curri/agv_ws/src/agv_gazebo/config/bridge.yaml</a:t>
             </a:r>
           </a:p>
           <a:p>
@@ -3156,12 +3157,12 @@
           <a:lstStyle/>
           <a:p>
             <a:r>
-              <a:t>[설명] ~/agv_ws/src/agv_sensors/agv_sensors/lidar_processor.py의 전체 파일을 1/3 구간으로 작성한다.</a:t>
-            </a:r>
-          </a:p>
-          <a:p>
-            <a:r>
-              <a:t>[실행] nano ~/agv_ws/src/agv_sensors/agv_sensors/lidar_processor.py</a:t>
+              <a:t>[설명] ~/ros2_curri/agv_ws/src/agv_sensors/agv_sensors/lidar_processor.py의 전체 파일을 1/3 구간으로 작성한다.</a:t>
+            </a:r>
+          </a:p>
+          <a:p>
+            <a:r>
+              <a:t>[실행] nano ~/ros2_curri/agv_ws/src/agv_sensors/agv_sensors/lidar_processor.py</a:t>
             </a:r>
           </a:p>
           <a:p>
@@ -3246,12 +3247,12 @@
           <a:lstStyle/>
           <a:p>
             <a:r>
-              <a:t>[설명] ~/agv_ws/src/agv_sensors/agv_sensors/lidar_processor.py의 전체 파일을 2/3 구간으로 작성한다.</a:t>
-            </a:r>
-          </a:p>
-          <a:p>
-            <a:r>
-              <a:t>[실행] nano ~/agv_ws/src/agv_sensors/agv_sensors/lidar_processor.py</a:t>
+              <a:t>[설명] ~/ros2_curri/agv_ws/src/agv_sensors/agv_sensors/lidar_processor.py의 전체 파일을 2/3 구간으로 작성한다.</a:t>
+            </a:r>
+          </a:p>
+          <a:p>
+            <a:r>
+              <a:t>[실행] nano ~/ros2_curri/agv_ws/src/agv_sensors/agv_sensors/lidar_processor.py</a:t>
             </a:r>
           </a:p>
           <a:p>
@@ -3336,12 +3337,12 @@
           <a:lstStyle/>
           <a:p>
             <a:r>
-              <a:t>[설명] ~/agv_ws/src/agv_sensors/agv_sensors/lidar_processor.py의 전체 파일을 3/3 구간으로 작성한다.</a:t>
-            </a:r>
-          </a:p>
-          <a:p>
-            <a:r>
-              <a:t>[실행] nano ~/agv_ws/src/agv_sensors/agv_sensors/lidar_processor.py</a:t>
+              <a:t>[설명] ~/ros2_curri/agv_ws/src/agv_sensors/agv_sensors/lidar_processor.py의 전체 파일을 3/3 구간으로 작성한다.</a:t>
+            </a:r>
+          </a:p>
+          <a:p>
+            <a:r>
+              <a:t>[실행] nano ~/ros2_curri/agv_ws/src/agv_sensors/agv_sensors/lidar_processor.py</a:t>
             </a:r>
           </a:p>
           <a:p>
@@ -3701,27 +3702,17 @@
           <a:lstStyle/>
           <a:p>
             <a:r>
-              <a:t>[설명] 검증 명령은 GUI 결과와 별도로 실행해 재현 가능한 완료 기준을 만든다.</a:t>
-            </a:r>
-          </a:p>
-          <a:p>
-            <a:r>
-              <a:t>[실행] ros2 topic info /scan</a:t>
-            </a:r>
-          </a:p>
-          <a:p>
-            <a:r>
-              <a:t>ros2 topic hz /scan</a:t>
-            </a:r>
-          </a:p>
-          <a:p>
-            <a:r>
-              <a:t>ros2 topic echo /obstacle_distance --once</a:t>
-            </a:r>
-          </a:p>
-          <a:p>
-            <a:r>
-              <a:t>[확인] /scan frame·RViz point·/obstacle_distance 출력이 장애물 위치에 반응한다.</a:t>
+              <a:t>[설명] 실제 Ubuntu/ROS 2 환경에서 생성한 검증 화면이다.</a:t>
+            </a:r>
+          </a:p>
+          <a:p>
+            <a:r>
+              <a:t>[실행] 슬라이드의 명령 또는 파일 작성 단계를 진행한다.</a:t>
+            </a:r>
+          </a:p>
+          <a:p>
+            <a:r>
+              <a:t>[확인] 캡처의 명령과 다음 슬라이드의 검증 명령을 비교한다.</a:t>
             </a:r>
           </a:p>
           <a:p>
@@ -3801,17 +3792,27 @@
           <a:lstStyle/>
           <a:p>
             <a:r>
-              <a:t>[설명] 오류를 대신 해결하지 말고 증상부터 우선 확인 순서대로 교육생이 실행하게 한다.</a:t>
-            </a:r>
-          </a:p>
-          <a:p>
-            <a:r>
-              <a:t>[실행] 슬라이드의 명령 또는 파일 작성 단계를 진행한다.</a:t>
-            </a:r>
-          </a:p>
-          <a:p>
-            <a:r>
-              <a:t>[확인] 수정 뒤 첫 검증 명령을 다시 실행한다.</a:t>
+              <a:t>[설명] 검증 명령은 GUI 결과와 별도로 실행해 재현 가능한 완료 기준을 만든다.</a:t>
+            </a:r>
+          </a:p>
+          <a:p>
+            <a:r>
+              <a:t>[실행] ros2 topic info /scan</a:t>
+            </a:r>
+          </a:p>
+          <a:p>
+            <a:r>
+              <a:t>ros2 topic hz /scan</a:t>
+            </a:r>
+          </a:p>
+          <a:p>
+            <a:r>
+              <a:t>ros2 topic echo /obstacle_distance --once</a:t>
+            </a:r>
+          </a:p>
+          <a:p>
+            <a:r>
+              <a:t>[확인] /scan frame·RViz point·/obstacle_distance 출력이 장애물 위치에 반응한다.</a:t>
             </a:r>
           </a:p>
           <a:p>
@@ -3821,7 +3822,7 @@
           </a:p>
           <a:p>
             <a:r>
-              <a:t>[오류] 슬라이드의 두 대표 오류를 먼저 사용한다.</a:t>
+              <a:t>[오류] 오류가 나면 현재 폴더, source, 파일 경로를 먼저 확인한다.</a:t>
             </a:r>
           </a:p>
         </p:txBody>
@@ -3891,7 +3892,7 @@
           <a:lstStyle/>
           <a:p>
             <a:r>
-              <a:t>[설명] 교육생이 직접 한 값만 바꿔 원인과 결과를 연결하게 한다.</a:t>
+              <a:t>[설명] 오류를 대신 해결하지 말고 증상부터 우선 확인 순서대로 교육생이 실행하게 한다.</a:t>
             </a:r>
           </a:p>
           <a:p>
@@ -3901,7 +3902,7 @@
           </a:p>
           <a:p>
             <a:r>
-              <a:t>[확인] 원래 값과 변경 값을 모두 기록한다.</a:t>
+              <a:t>[확인] 수정 뒤 첫 검증 명령을 다시 실행한다.</a:t>
             </a:r>
           </a:p>
           <a:p>
@@ -3911,7 +3912,7 @@
           </a:p>
           <a:p>
             <a:r>
-              <a:t>[오류] 오류가 나면 현재 폴더, source, 파일 경로를 먼저 확인한다.</a:t>
+              <a:t>[오류] 슬라이드의 두 대표 오류를 먼저 사용한다.</a:t>
             </a:r>
           </a:p>
         </p:txBody>
@@ -3981,7 +3982,7 @@
           <a:lstStyle/>
           <a:p>
             <a:r>
-              <a:t>[설명] 교육생이 Complete·캡처·로그를 저장했는지 확인하고 다음 모듈의 시작 상태를 읽는다.</a:t>
+              <a:t>[설명] 교육생이 직접 한 값만 바꿔 원인과 결과를 연결하게 한다.</a:t>
             </a:r>
           </a:p>
           <a:p>
@@ -3991,7 +3992,7 @@
           </a:p>
           <a:p>
             <a:r>
-              <a:t>[확인] M14 IMU 시작 조건을 말할 수 있다.</a:t>
+              <a:t>[확인] 원래 값과 변경 값을 모두 기록한다.</a:t>
             </a:r>
           </a:p>
           <a:p>
@@ -4071,6 +4072,96 @@
           <a:lstStyle/>
           <a:p>
             <a:r>
+              <a:t>[설명] 교육생이 Complete·캡처·로그를 저장했는지 확인하고 다음 모듈의 시작 상태를 읽는다.</a:t>
+            </a:r>
+          </a:p>
+          <a:p>
+            <a:r>
+              <a:t>[실행] 슬라이드의 명령 또는 파일 작성 단계를 진행한다.</a:t>
+            </a:r>
+          </a:p>
+          <a:p>
+            <a:r>
+              <a:t>[확인] M14 IMU 시작 조건을 말할 수 있다.</a:t>
+            </a:r>
+          </a:p>
+          <a:p>
+            <a:r>
+              <a:t>[멈춤] 교육생이 현재 체크포인트를 통과할 때까지 기다린다.</a:t>
+            </a:r>
+          </a:p>
+          <a:p>
+            <a:r>
+              <a:t>[오류] 오류가 나면 현재 폴더, source, 파일 경로를 먼저 확인한다.</a:t>
+            </a:r>
+          </a:p>
+        </p:txBody>
+      </p:sp>
+      <p:sp>
+        <p:nvSpPr>
+          <p:cNvPr id="4" name="Slide Number Placeholder 3"/>
+          <p:cNvSpPr>
+            <a:spLocks noGrp="1"/>
+          </p:cNvSpPr>
+          <p:nvPr>
+            <p:ph type="sldNum" idx="5" sz="quarter"/>
+          </p:nvPr>
+        </p:nvSpPr>
+        <p:spPr/>
+      </p:sp>
+    </p:spTree>
+  </p:cSld>
+  <p:clrMapOvr>
+    <a:masterClrMapping/>
+  </p:clrMapOvr>
+</p:notes>
+</file>
+
+<file path=ppt/notesSlides/notesSlide46.xml><?xml version="1.0" encoding="utf-8"?>
+<p:notes xmlns:a="http://schemas.openxmlformats.org/drawingml/2006/main" xmlns:p="http://schemas.openxmlformats.org/presentationml/2006/main" xmlns:r="http://schemas.openxmlformats.org/officeDocument/2006/relationships">
+  <p:cSld>
+    <p:spTree>
+      <p:nvGrpSpPr>
+        <p:cNvPr id="1" name=""/>
+        <p:cNvGrpSpPr/>
+        <p:nvPr/>
+      </p:nvGrpSpPr>
+      <p:grpSpPr>
+        <a:xfrm>
+          <a:off x="0" y="0"/>
+          <a:ext cx="0" cy="0"/>
+          <a:chOff x="0" y="0"/>
+          <a:chExt cx="0" cy="0"/>
+        </a:xfrm>
+      </p:grpSpPr>
+      <p:sp>
+        <p:nvSpPr>
+          <p:cNvPr id="2" name="Slide Image Placeholder 1"/>
+          <p:cNvSpPr>
+            <a:spLocks noGrp="1"/>
+          </p:cNvSpPr>
+          <p:nvPr>
+            <p:ph type="sldImg" idx="2"/>
+          </p:nvPr>
+        </p:nvSpPr>
+        <p:spPr/>
+      </p:sp>
+      <p:sp>
+        <p:nvSpPr>
+          <p:cNvPr id="3" name="Notes Placeholder 2"/>
+          <p:cNvSpPr>
+            <a:spLocks noGrp="1"/>
+          </p:cNvSpPr>
+          <p:nvPr>
+            <p:ph type="body" idx="3" sz="quarter"/>
+          </p:nvPr>
+        </p:nvSpPr>
+        <p:spPr/>
+        <p:txBody>
+          <a:bodyPr/>
+          <a:lstStyle/>
+          <a:p>
+            <a:r>
               <a:t>[설명] 공식 문서는 버전 차이와 확장 학습을 확인할 때 사용한다.</a:t>
             </a:r>
           </a:p>
@@ -4441,7 +4532,7 @@
           </a:p>
           <a:p>
             <a:r>
-              <a:t>[실행] source ~/agv_ws/install/setup.bash</a:t>
+              <a:t>[실행] source ~/ros2_curri/agv_ws/install/setup.bash</a:t>
             </a:r>
           </a:p>
           <a:p>
@@ -4536,12 +4627,12 @@
           <a:lstStyle/>
           <a:p>
             <a:r>
-              <a:t>[설명] ~/agv_ws/src/agv_gazebo/models/agv/model.sdf의 전체 파일을 1/24 구간으로 작성한다.</a:t>
-            </a:r>
-          </a:p>
-          <a:p>
-            <a:r>
-              <a:t>[실행] nano ~/agv_ws/src/agv_gazebo/models/agv/model.sdf</a:t>
+              <a:t>[설명] ~/ros2_curri/agv_ws/src/agv_gazebo/models/agv/model.sdf의 전체 파일을 1/24 구간으로 작성한다.</a:t>
+            </a:r>
+          </a:p>
+          <a:p>
+            <a:r>
+              <a:t>[실행] nano ~/ros2_curri/agv_ws/src/agv_gazebo/models/agv/model.sdf</a:t>
             </a:r>
           </a:p>
           <a:p>
@@ -7968,7 +8059,7 @@
               </a:defRPr>
             </a:pPr>
             <a:r>
-              <a:t>~/agv_ws/src/agv_gazebo/models/agv/model.sdf</a:t>
+              <a:t>~/ros2_curri/agv_ws/src/agv_gazebo/models/agv/model.sdf</a:t>
             </a:r>
           </a:p>
         </p:txBody>
@@ -8104,7 +8195,7 @@
               </a:defRPr>
             </a:pPr>
             <a:r>
-              <a:t>현재 단계 4/27    |    현재 폴더 ~/agv_ws    |    현재 터미널</a:t>
+              <a:t>현재 단계 4/27    |    현재 폴더 ~/ros2_curri/agv_ws    |    현재 터미널</a:t>
             </a:r>
           </a:p>
         </p:txBody>
@@ -8201,11 +8292,11 @@
               </a:defRPr>
             </a:pPr>
             <a:r>
-              <a:t>파일 생성: mkdir -p ~/agv_ws/src/agv_gazebo/models/agv</a:t>
-            </a:r>
-            <a:br/>
-            <a:r>
-              <a:t>파일 열기: nano ~/agv_ws/src/agv_gazebo/models/agv/model.sdf</a:t>
+              <a:t>파일 생성: mkdir -p ~/ros2_curri/agv_ws/src/agv_gazebo/models/agv</a:t>
+            </a:r>
+            <a:br/>
+            <a:r>
+              <a:t>파일 열기: nano ~/ros2_curri/agv_ws/src/agv_gazebo/models/agv/model.sdf</a:t>
             </a:r>
           </a:p>
         </p:txBody>
@@ -8442,7 +8533,7 @@
               </a:defRPr>
             </a:pPr>
             <a:r>
-              <a:t>~/agv_ws/src/agv_gazebo/models/agv/model.sdf</a:t>
+              <a:t>~/ros2_curri/agv_ws/src/agv_gazebo/models/agv/model.sdf</a:t>
             </a:r>
           </a:p>
         </p:txBody>
@@ -8578,7 +8669,7 @@
               </a:defRPr>
             </a:pPr>
             <a:r>
-              <a:t>현재 단계 5/27    |    현재 폴더 ~/agv_ws    |    현재 터미널</a:t>
+              <a:t>현재 단계 5/27    |    현재 폴더 ~/ros2_curri/agv_ws    |    현재 터미널</a:t>
             </a:r>
           </a:p>
         </p:txBody>
@@ -8675,11 +8766,11 @@
               </a:defRPr>
             </a:pPr>
             <a:r>
-              <a:t>파일 생성: mkdir -p ~/agv_ws/src/agv_gazebo/models/agv</a:t>
-            </a:r>
-            <a:br/>
-            <a:r>
-              <a:t>파일 열기: nano ~/agv_ws/src/agv_gazebo/models/agv/model.sdf</a:t>
+              <a:t>파일 생성: mkdir -p ~/ros2_curri/agv_ws/src/agv_gazebo/models/agv</a:t>
+            </a:r>
+            <a:br/>
+            <a:r>
+              <a:t>파일 열기: nano ~/ros2_curri/agv_ws/src/agv_gazebo/models/agv/model.sdf</a:t>
             </a:r>
           </a:p>
         </p:txBody>
@@ -8916,7 +9007,7 @@
               </a:defRPr>
             </a:pPr>
             <a:r>
-              <a:t>~/agv_ws/src/agv_gazebo/models/agv/model.sdf</a:t>
+              <a:t>~/ros2_curri/agv_ws/src/agv_gazebo/models/agv/model.sdf</a:t>
             </a:r>
           </a:p>
         </p:txBody>
@@ -9052,7 +9143,7 @@
               </a:defRPr>
             </a:pPr>
             <a:r>
-              <a:t>현재 단계 6/27    |    현재 폴더 ~/agv_ws    |    현재 터미널</a:t>
+              <a:t>현재 단계 6/27    |    현재 폴더 ~/ros2_curri/agv_ws    |    현재 터미널</a:t>
             </a:r>
           </a:p>
         </p:txBody>
@@ -9149,11 +9240,11 @@
               </a:defRPr>
             </a:pPr>
             <a:r>
-              <a:t>파일 생성: mkdir -p ~/agv_ws/src/agv_gazebo/models/agv</a:t>
-            </a:r>
-            <a:br/>
-            <a:r>
-              <a:t>파일 열기: nano ~/agv_ws/src/agv_gazebo/models/agv/model.sdf</a:t>
+              <a:t>파일 생성: mkdir -p ~/ros2_curri/agv_ws/src/agv_gazebo/models/agv</a:t>
+            </a:r>
+            <a:br/>
+            <a:r>
+              <a:t>파일 열기: nano ~/ros2_curri/agv_ws/src/agv_gazebo/models/agv/model.sdf</a:t>
             </a:r>
           </a:p>
         </p:txBody>
@@ -9390,7 +9481,7 @@
               </a:defRPr>
             </a:pPr>
             <a:r>
-              <a:t>~/agv_ws/src/agv_gazebo/models/agv/model.sdf</a:t>
+              <a:t>~/ros2_curri/agv_ws/src/agv_gazebo/models/agv/model.sdf</a:t>
             </a:r>
           </a:p>
         </p:txBody>
@@ -9526,7 +9617,7 @@
               </a:defRPr>
             </a:pPr>
             <a:r>
-              <a:t>현재 단계 7/27    |    현재 폴더 ~/agv_ws    |    현재 터미널</a:t>
+              <a:t>현재 단계 7/27    |    현재 폴더 ~/ros2_curri/agv_ws    |    현재 터미널</a:t>
             </a:r>
           </a:p>
         </p:txBody>
@@ -9623,11 +9714,11 @@
               </a:defRPr>
             </a:pPr>
             <a:r>
-              <a:t>파일 생성: mkdir -p ~/agv_ws/src/agv_gazebo/models/agv</a:t>
-            </a:r>
-            <a:br/>
-            <a:r>
-              <a:t>파일 열기: nano ~/agv_ws/src/agv_gazebo/models/agv/model.sdf</a:t>
+              <a:t>파일 생성: mkdir -p ~/ros2_curri/agv_ws/src/agv_gazebo/models/agv</a:t>
+            </a:r>
+            <a:br/>
+            <a:r>
+              <a:t>파일 열기: nano ~/ros2_curri/agv_ws/src/agv_gazebo/models/agv/model.sdf</a:t>
             </a:r>
           </a:p>
         </p:txBody>
@@ -9864,7 +9955,7 @@
               </a:defRPr>
             </a:pPr>
             <a:r>
-              <a:t>~/agv_ws/src/agv_gazebo/models/agv/model.sdf</a:t>
+              <a:t>~/ros2_curri/agv_ws/src/agv_gazebo/models/agv/model.sdf</a:t>
             </a:r>
           </a:p>
         </p:txBody>
@@ -10000,7 +10091,7 @@
               </a:defRPr>
             </a:pPr>
             <a:r>
-              <a:t>현재 단계 8/27    |    현재 폴더 ~/agv_ws    |    현재 터미널</a:t>
+              <a:t>현재 단계 8/27    |    현재 폴더 ~/ros2_curri/agv_ws    |    현재 터미널</a:t>
             </a:r>
           </a:p>
         </p:txBody>
@@ -10097,11 +10188,11 @@
               </a:defRPr>
             </a:pPr>
             <a:r>
-              <a:t>파일 생성: mkdir -p ~/agv_ws/src/agv_gazebo/models/agv</a:t>
-            </a:r>
-            <a:br/>
-            <a:r>
-              <a:t>파일 열기: nano ~/agv_ws/src/agv_gazebo/models/agv/model.sdf</a:t>
+              <a:t>파일 생성: mkdir -p ~/ros2_curri/agv_ws/src/agv_gazebo/models/agv</a:t>
+            </a:r>
+            <a:br/>
+            <a:r>
+              <a:t>파일 열기: nano ~/ros2_curri/agv_ws/src/agv_gazebo/models/agv/model.sdf</a:t>
             </a:r>
           </a:p>
         </p:txBody>
@@ -10338,7 +10429,7 @@
               </a:defRPr>
             </a:pPr>
             <a:r>
-              <a:t>~/agv_ws/src/agv_gazebo/models/agv/model.sdf</a:t>
+              <a:t>~/ros2_curri/agv_ws/src/agv_gazebo/models/agv/model.sdf</a:t>
             </a:r>
           </a:p>
         </p:txBody>
@@ -10474,7 +10565,7 @@
               </a:defRPr>
             </a:pPr>
             <a:r>
-              <a:t>현재 단계 9/27    |    현재 폴더 ~/agv_ws    |    현재 터미널</a:t>
+              <a:t>현재 단계 9/27    |    현재 폴더 ~/ros2_curri/agv_ws    |    현재 터미널</a:t>
             </a:r>
           </a:p>
         </p:txBody>
@@ -10571,11 +10662,11 @@
               </a:defRPr>
             </a:pPr>
             <a:r>
-              <a:t>파일 생성: mkdir -p ~/agv_ws/src/agv_gazebo/models/agv</a:t>
-            </a:r>
-            <a:br/>
-            <a:r>
-              <a:t>파일 열기: nano ~/agv_ws/src/agv_gazebo/models/agv/model.sdf</a:t>
+              <a:t>파일 생성: mkdir -p ~/ros2_curri/agv_ws/src/agv_gazebo/models/agv</a:t>
+            </a:r>
+            <a:br/>
+            <a:r>
+              <a:t>파일 열기: nano ~/ros2_curri/agv_ws/src/agv_gazebo/models/agv/model.sdf</a:t>
             </a:r>
           </a:p>
         </p:txBody>
@@ -10812,7 +10903,7 @@
               </a:defRPr>
             </a:pPr>
             <a:r>
-              <a:t>~/agv_ws/src/agv_gazebo/models/agv/model.sdf</a:t>
+              <a:t>~/ros2_curri/agv_ws/src/agv_gazebo/models/agv/model.sdf</a:t>
             </a:r>
           </a:p>
         </p:txBody>
@@ -10948,7 +11039,7 @@
               </a:defRPr>
             </a:pPr>
             <a:r>
-              <a:t>현재 단계 10/27    |    현재 폴더 ~/agv_ws    |    현재 터미널</a:t>
+              <a:t>현재 단계 10/27    |    현재 폴더 ~/ros2_curri/agv_ws    |    현재 터미널</a:t>
             </a:r>
           </a:p>
         </p:txBody>
@@ -11045,11 +11136,11 @@
               </a:defRPr>
             </a:pPr>
             <a:r>
-              <a:t>파일 생성: mkdir -p ~/agv_ws/src/agv_gazebo/models/agv</a:t>
-            </a:r>
-            <a:br/>
-            <a:r>
-              <a:t>파일 열기: nano ~/agv_ws/src/agv_gazebo/models/agv/model.sdf</a:t>
+              <a:t>파일 생성: mkdir -p ~/ros2_curri/agv_ws/src/agv_gazebo/models/agv</a:t>
+            </a:r>
+            <a:br/>
+            <a:r>
+              <a:t>파일 열기: nano ~/ros2_curri/agv_ws/src/agv_gazebo/models/agv/model.sdf</a:t>
             </a:r>
           </a:p>
         </p:txBody>
@@ -11286,7 +11377,7 @@
               </a:defRPr>
             </a:pPr>
             <a:r>
-              <a:t>~/agv_ws/src/agv_gazebo/models/agv/model.sdf</a:t>
+              <a:t>~/ros2_curri/agv_ws/src/agv_gazebo/models/agv/model.sdf</a:t>
             </a:r>
           </a:p>
         </p:txBody>
@@ -11422,7 +11513,7 @@
               </a:defRPr>
             </a:pPr>
             <a:r>
-              <a:t>현재 단계 11/27    |    현재 폴더 ~/agv_ws    |    현재 터미널</a:t>
+              <a:t>현재 단계 11/27    |    현재 폴더 ~/ros2_curri/agv_ws    |    현재 터미널</a:t>
             </a:r>
           </a:p>
         </p:txBody>
@@ -11519,11 +11610,11 @@
               </a:defRPr>
             </a:pPr>
             <a:r>
-              <a:t>파일 생성: mkdir -p ~/agv_ws/src/agv_gazebo/models/agv</a:t>
-            </a:r>
-            <a:br/>
-            <a:r>
-              <a:t>파일 열기: nano ~/agv_ws/src/agv_gazebo/models/agv/model.sdf</a:t>
+              <a:t>파일 생성: mkdir -p ~/ros2_curri/agv_ws/src/agv_gazebo/models/agv</a:t>
+            </a:r>
+            <a:br/>
+            <a:r>
+              <a:t>파일 열기: nano ~/ros2_curri/agv_ws/src/agv_gazebo/models/agv/model.sdf</a:t>
             </a:r>
           </a:p>
         </p:txBody>
@@ -11760,7 +11851,7 @@
               </a:defRPr>
             </a:pPr>
             <a:r>
-              <a:t>~/agv_ws/src/agv_gazebo/models/agv/model.sdf</a:t>
+              <a:t>~/ros2_curri/agv_ws/src/agv_gazebo/models/agv/model.sdf</a:t>
             </a:r>
           </a:p>
         </p:txBody>
@@ -11896,7 +11987,7 @@
               </a:defRPr>
             </a:pPr>
             <a:r>
-              <a:t>현재 단계 12/27    |    현재 폴더 ~/agv_ws    |    현재 터미널</a:t>
+              <a:t>현재 단계 12/27    |    현재 폴더 ~/ros2_curri/agv_ws    |    현재 터미널</a:t>
             </a:r>
           </a:p>
         </p:txBody>
@@ -11993,11 +12084,11 @@
               </a:defRPr>
             </a:pPr>
             <a:r>
-              <a:t>파일 생성: mkdir -p ~/agv_ws/src/agv_gazebo/models/agv</a:t>
-            </a:r>
-            <a:br/>
-            <a:r>
-              <a:t>파일 열기: nano ~/agv_ws/src/agv_gazebo/models/agv/model.sdf</a:t>
+              <a:t>파일 생성: mkdir -p ~/ros2_curri/agv_ws/src/agv_gazebo/models/agv</a:t>
+            </a:r>
+            <a:br/>
+            <a:r>
+              <a:t>파일 열기: nano ~/ros2_curri/agv_ws/src/agv_gazebo/models/agv/model.sdf</a:t>
             </a:r>
           </a:p>
         </p:txBody>
@@ -12234,7 +12325,7 @@
               </a:defRPr>
             </a:pPr>
             <a:r>
-              <a:t>~/agv_ws/src/agv_gazebo/models/agv/model.sdf</a:t>
+              <a:t>~/ros2_curri/agv_ws/src/agv_gazebo/models/agv/model.sdf</a:t>
             </a:r>
           </a:p>
         </p:txBody>
@@ -12370,7 +12461,7 @@
               </a:defRPr>
             </a:pPr>
             <a:r>
-              <a:t>현재 단계 13/27    |    현재 폴더 ~/agv_ws    |    현재 터미널</a:t>
+              <a:t>현재 단계 13/27    |    현재 폴더 ~/ros2_curri/agv_ws    |    현재 터미널</a:t>
             </a:r>
           </a:p>
         </p:txBody>
@@ -12467,11 +12558,11 @@
               </a:defRPr>
             </a:pPr>
             <a:r>
-              <a:t>파일 생성: mkdir -p ~/agv_ws/src/agv_gazebo/models/agv</a:t>
-            </a:r>
-            <a:br/>
-            <a:r>
-              <a:t>파일 열기: nano ~/agv_ws/src/agv_gazebo/models/agv/model.sdf</a:t>
+              <a:t>파일 생성: mkdir -p ~/ros2_curri/agv_ws/src/agv_gazebo/models/agv</a:t>
+            </a:r>
+            <a:br/>
+            <a:r>
+              <a:t>파일 열기: nano ~/ros2_curri/agv_ws/src/agv_gazebo/models/agv/model.sdf</a:t>
             </a:r>
           </a:p>
         </p:txBody>
@@ -13169,7 +13260,7 @@
               </a:defRPr>
             </a:pPr>
             <a:r>
-              <a:t>~/agv_ws/src/agv_gazebo/models/agv/model.sdf</a:t>
+              <a:t>~/ros2_curri/agv_ws/src/agv_gazebo/models/agv/model.sdf</a:t>
             </a:r>
           </a:p>
         </p:txBody>
@@ -13305,7 +13396,7 @@
               </a:defRPr>
             </a:pPr>
             <a:r>
-              <a:t>현재 단계 14/27    |    현재 폴더 ~/agv_ws    |    현재 터미널</a:t>
+              <a:t>현재 단계 14/27    |    현재 폴더 ~/ros2_curri/agv_ws    |    현재 터미널</a:t>
             </a:r>
           </a:p>
         </p:txBody>
@@ -13402,11 +13493,11 @@
               </a:defRPr>
             </a:pPr>
             <a:r>
-              <a:t>파일 생성: mkdir -p ~/agv_ws/src/agv_gazebo/models/agv</a:t>
-            </a:r>
-            <a:br/>
-            <a:r>
-              <a:t>파일 열기: nano ~/agv_ws/src/agv_gazebo/models/agv/model.sdf</a:t>
+              <a:t>파일 생성: mkdir -p ~/ros2_curri/agv_ws/src/agv_gazebo/models/agv</a:t>
+            </a:r>
+            <a:br/>
+            <a:r>
+              <a:t>파일 열기: nano ~/ros2_curri/agv_ws/src/agv_gazebo/models/agv/model.sdf</a:t>
             </a:r>
           </a:p>
         </p:txBody>
@@ -13643,7 +13734,7 @@
               </a:defRPr>
             </a:pPr>
             <a:r>
-              <a:t>~/agv_ws/src/agv_gazebo/models/agv/model.sdf</a:t>
+              <a:t>~/ros2_curri/agv_ws/src/agv_gazebo/models/agv/model.sdf</a:t>
             </a:r>
           </a:p>
         </p:txBody>
@@ -13779,7 +13870,7 @@
               </a:defRPr>
             </a:pPr>
             <a:r>
-              <a:t>현재 단계 15/27    |    현재 폴더 ~/agv_ws    |    현재 터미널</a:t>
+              <a:t>현재 단계 15/27    |    현재 폴더 ~/ros2_curri/agv_ws    |    현재 터미널</a:t>
             </a:r>
           </a:p>
         </p:txBody>
@@ -13876,11 +13967,11 @@
               </a:defRPr>
             </a:pPr>
             <a:r>
-              <a:t>파일 생성: mkdir -p ~/agv_ws/src/agv_gazebo/models/agv</a:t>
-            </a:r>
-            <a:br/>
-            <a:r>
-              <a:t>파일 열기: nano ~/agv_ws/src/agv_gazebo/models/agv/model.sdf</a:t>
+              <a:t>파일 생성: mkdir -p ~/ros2_curri/agv_ws/src/agv_gazebo/models/agv</a:t>
+            </a:r>
+            <a:br/>
+            <a:r>
+              <a:t>파일 열기: nano ~/ros2_curri/agv_ws/src/agv_gazebo/models/agv/model.sdf</a:t>
             </a:r>
           </a:p>
         </p:txBody>
@@ -14117,7 +14208,7 @@
               </a:defRPr>
             </a:pPr>
             <a:r>
-              <a:t>~/agv_ws/src/agv_gazebo/models/agv/model.sdf</a:t>
+              <a:t>~/ros2_curri/agv_ws/src/agv_gazebo/models/agv/model.sdf</a:t>
             </a:r>
           </a:p>
         </p:txBody>
@@ -14253,7 +14344,7 @@
               </a:defRPr>
             </a:pPr>
             <a:r>
-              <a:t>현재 단계 16/27    |    현재 폴더 ~/agv_ws    |    현재 터미널</a:t>
+              <a:t>현재 단계 16/27    |    현재 폴더 ~/ros2_curri/agv_ws    |    현재 터미널</a:t>
             </a:r>
           </a:p>
         </p:txBody>
@@ -14350,11 +14441,11 @@
               </a:defRPr>
             </a:pPr>
             <a:r>
-              <a:t>파일 생성: mkdir -p ~/agv_ws/src/agv_gazebo/models/agv</a:t>
-            </a:r>
-            <a:br/>
-            <a:r>
-              <a:t>파일 열기: nano ~/agv_ws/src/agv_gazebo/models/agv/model.sdf</a:t>
+              <a:t>파일 생성: mkdir -p ~/ros2_curri/agv_ws/src/agv_gazebo/models/agv</a:t>
+            </a:r>
+            <a:br/>
+            <a:r>
+              <a:t>파일 열기: nano ~/ros2_curri/agv_ws/src/agv_gazebo/models/agv/model.sdf</a:t>
             </a:r>
           </a:p>
         </p:txBody>
@@ -14591,7 +14682,7 @@
               </a:defRPr>
             </a:pPr>
             <a:r>
-              <a:t>~/agv_ws/src/agv_gazebo/models/agv/model.sdf</a:t>
+              <a:t>~/ros2_curri/agv_ws/src/agv_gazebo/models/agv/model.sdf</a:t>
             </a:r>
           </a:p>
         </p:txBody>
@@ -14727,7 +14818,7 @@
               </a:defRPr>
             </a:pPr>
             <a:r>
-              <a:t>현재 단계 17/27    |    현재 폴더 ~/agv_ws    |    현재 터미널</a:t>
+              <a:t>현재 단계 17/27    |    현재 폴더 ~/ros2_curri/agv_ws    |    현재 터미널</a:t>
             </a:r>
           </a:p>
         </p:txBody>
@@ -14824,11 +14915,11 @@
               </a:defRPr>
             </a:pPr>
             <a:r>
-              <a:t>파일 생성: mkdir -p ~/agv_ws/src/agv_gazebo/models/agv</a:t>
-            </a:r>
-            <a:br/>
-            <a:r>
-              <a:t>파일 열기: nano ~/agv_ws/src/agv_gazebo/models/agv/model.sdf</a:t>
+              <a:t>파일 생성: mkdir -p ~/ros2_curri/agv_ws/src/agv_gazebo/models/agv</a:t>
+            </a:r>
+            <a:br/>
+            <a:r>
+              <a:t>파일 열기: nano ~/ros2_curri/agv_ws/src/agv_gazebo/models/agv/model.sdf</a:t>
             </a:r>
           </a:p>
         </p:txBody>
@@ -15065,7 +15156,7 @@
               </a:defRPr>
             </a:pPr>
             <a:r>
-              <a:t>~/agv_ws/src/agv_gazebo/models/agv/model.sdf</a:t>
+              <a:t>~/ros2_curri/agv_ws/src/agv_gazebo/models/agv/model.sdf</a:t>
             </a:r>
           </a:p>
         </p:txBody>
@@ -15201,7 +15292,7 @@
               </a:defRPr>
             </a:pPr>
             <a:r>
-              <a:t>현재 단계 18/27    |    현재 폴더 ~/agv_ws    |    현재 터미널</a:t>
+              <a:t>현재 단계 18/27    |    현재 폴더 ~/ros2_curri/agv_ws    |    현재 터미널</a:t>
             </a:r>
           </a:p>
         </p:txBody>
@@ -15298,11 +15389,11 @@
               </a:defRPr>
             </a:pPr>
             <a:r>
-              <a:t>파일 생성: mkdir -p ~/agv_ws/src/agv_gazebo/models/agv</a:t>
-            </a:r>
-            <a:br/>
-            <a:r>
-              <a:t>파일 열기: nano ~/agv_ws/src/agv_gazebo/models/agv/model.sdf</a:t>
+              <a:t>파일 생성: mkdir -p ~/ros2_curri/agv_ws/src/agv_gazebo/models/agv</a:t>
+            </a:r>
+            <a:br/>
+            <a:r>
+              <a:t>파일 열기: nano ~/ros2_curri/agv_ws/src/agv_gazebo/models/agv/model.sdf</a:t>
             </a:r>
           </a:p>
         </p:txBody>
@@ -15539,7 +15630,7 @@
               </a:defRPr>
             </a:pPr>
             <a:r>
-              <a:t>~/agv_ws/src/agv_gazebo/models/agv/model.sdf</a:t>
+              <a:t>~/ros2_curri/agv_ws/src/agv_gazebo/models/agv/model.sdf</a:t>
             </a:r>
           </a:p>
         </p:txBody>
@@ -15675,7 +15766,7 @@
               </a:defRPr>
             </a:pPr>
             <a:r>
-              <a:t>현재 단계 19/27    |    현재 폴더 ~/agv_ws    |    현재 터미널</a:t>
+              <a:t>현재 단계 19/27    |    현재 폴더 ~/ros2_curri/agv_ws    |    현재 터미널</a:t>
             </a:r>
           </a:p>
         </p:txBody>
@@ -15772,11 +15863,11 @@
               </a:defRPr>
             </a:pPr>
             <a:r>
-              <a:t>파일 생성: mkdir -p ~/agv_ws/src/agv_gazebo/models/agv</a:t>
-            </a:r>
-            <a:br/>
-            <a:r>
-              <a:t>파일 열기: nano ~/agv_ws/src/agv_gazebo/models/agv/model.sdf</a:t>
+              <a:t>파일 생성: mkdir -p ~/ros2_curri/agv_ws/src/agv_gazebo/models/agv</a:t>
+            </a:r>
+            <a:br/>
+            <a:r>
+              <a:t>파일 열기: nano ~/ros2_curri/agv_ws/src/agv_gazebo/models/agv/model.sdf</a:t>
             </a:r>
           </a:p>
         </p:txBody>
@@ -16013,7 +16104,7 @@
               </a:defRPr>
             </a:pPr>
             <a:r>
-              <a:t>~/agv_ws/src/agv_gazebo/models/agv/model.sdf</a:t>
+              <a:t>~/ros2_curri/agv_ws/src/agv_gazebo/models/agv/model.sdf</a:t>
             </a:r>
           </a:p>
         </p:txBody>
@@ -16149,7 +16240,7 @@
               </a:defRPr>
             </a:pPr>
             <a:r>
-              <a:t>현재 단계 20/27    |    현재 폴더 ~/agv_ws    |    현재 터미널</a:t>
+              <a:t>현재 단계 20/27    |    현재 폴더 ~/ros2_curri/agv_ws    |    현재 터미널</a:t>
             </a:r>
           </a:p>
         </p:txBody>
@@ -16246,11 +16337,11 @@
               </a:defRPr>
             </a:pPr>
             <a:r>
-              <a:t>파일 생성: mkdir -p ~/agv_ws/src/agv_gazebo/models/agv</a:t>
-            </a:r>
-            <a:br/>
-            <a:r>
-              <a:t>파일 열기: nano ~/agv_ws/src/agv_gazebo/models/agv/model.sdf</a:t>
+              <a:t>파일 생성: mkdir -p ~/ros2_curri/agv_ws/src/agv_gazebo/models/agv</a:t>
+            </a:r>
+            <a:br/>
+            <a:r>
+              <a:t>파일 열기: nano ~/ros2_curri/agv_ws/src/agv_gazebo/models/agv/model.sdf</a:t>
             </a:r>
           </a:p>
         </p:txBody>
@@ -16487,7 +16578,7 @@
               </a:defRPr>
             </a:pPr>
             <a:r>
-              <a:t>~/agv_ws/src/agv_gazebo/models/agv/model.sdf</a:t>
+              <a:t>~/ros2_curri/agv_ws/src/agv_gazebo/models/agv/model.sdf</a:t>
             </a:r>
           </a:p>
         </p:txBody>
@@ -16623,7 +16714,7 @@
               </a:defRPr>
             </a:pPr>
             <a:r>
-              <a:t>현재 단계 21/27    |    현재 폴더 ~/agv_ws    |    현재 터미널</a:t>
+              <a:t>현재 단계 21/27    |    현재 폴더 ~/ros2_curri/agv_ws    |    현재 터미널</a:t>
             </a:r>
           </a:p>
         </p:txBody>
@@ -16720,11 +16811,11 @@
               </a:defRPr>
             </a:pPr>
             <a:r>
-              <a:t>파일 생성: mkdir -p ~/agv_ws/src/agv_gazebo/models/agv</a:t>
-            </a:r>
-            <a:br/>
-            <a:r>
-              <a:t>파일 열기: nano ~/agv_ws/src/agv_gazebo/models/agv/model.sdf</a:t>
+              <a:t>파일 생성: mkdir -p ~/ros2_curri/agv_ws/src/agv_gazebo/models/agv</a:t>
+            </a:r>
+            <a:br/>
+            <a:r>
+              <a:t>파일 열기: nano ~/ros2_curri/agv_ws/src/agv_gazebo/models/agv/model.sdf</a:t>
             </a:r>
           </a:p>
         </p:txBody>
@@ -16961,7 +17052,7 @@
               </a:defRPr>
             </a:pPr>
             <a:r>
-              <a:t>~/agv_ws/src/agv_gazebo/models/agv/model.sdf</a:t>
+              <a:t>~/ros2_curri/agv_ws/src/agv_gazebo/models/agv/model.sdf</a:t>
             </a:r>
           </a:p>
         </p:txBody>
@@ -17097,7 +17188,7 @@
               </a:defRPr>
             </a:pPr>
             <a:r>
-              <a:t>현재 단계 22/27    |    현재 폴더 ~/agv_ws    |    현재 터미널</a:t>
+              <a:t>현재 단계 22/27    |    현재 폴더 ~/ros2_curri/agv_ws    |    현재 터미널</a:t>
             </a:r>
           </a:p>
         </p:txBody>
@@ -17194,11 +17285,11 @@
               </a:defRPr>
             </a:pPr>
             <a:r>
-              <a:t>파일 생성: mkdir -p ~/agv_ws/src/agv_gazebo/models/agv</a:t>
-            </a:r>
-            <a:br/>
-            <a:r>
-              <a:t>파일 열기: nano ~/agv_ws/src/agv_gazebo/models/agv/model.sdf</a:t>
+              <a:t>파일 생성: mkdir -p ~/ros2_curri/agv_ws/src/agv_gazebo/models/agv</a:t>
+            </a:r>
+            <a:br/>
+            <a:r>
+              <a:t>파일 열기: nano ~/ros2_curri/agv_ws/src/agv_gazebo/models/agv/model.sdf</a:t>
             </a:r>
           </a:p>
         </p:txBody>
@@ -17435,7 +17526,7 @@
               </a:defRPr>
             </a:pPr>
             <a:r>
-              <a:t>~/agv_ws/src/agv_gazebo/models/agv/model.sdf</a:t>
+              <a:t>~/ros2_curri/agv_ws/src/agv_gazebo/models/agv/model.sdf</a:t>
             </a:r>
           </a:p>
         </p:txBody>
@@ -17571,7 +17662,7 @@
               </a:defRPr>
             </a:pPr>
             <a:r>
-              <a:t>현재 단계 23/27    |    현재 폴더 ~/agv_ws    |    현재 터미널</a:t>
+              <a:t>현재 단계 23/27    |    현재 폴더 ~/ros2_curri/agv_ws    |    현재 터미널</a:t>
             </a:r>
           </a:p>
         </p:txBody>
@@ -17668,11 +17759,11 @@
               </a:defRPr>
             </a:pPr>
             <a:r>
-              <a:t>파일 생성: mkdir -p ~/agv_ws/src/agv_gazebo/models/agv</a:t>
-            </a:r>
-            <a:br/>
-            <a:r>
-              <a:t>파일 열기: nano ~/agv_ws/src/agv_gazebo/models/agv/model.sdf</a:t>
+              <a:t>파일 생성: mkdir -p ~/ros2_curri/agv_ws/src/agv_gazebo/models/agv</a:t>
+            </a:r>
+            <a:br/>
+            <a:r>
+              <a:t>파일 열기: nano ~/ros2_curri/agv_ws/src/agv_gazebo/models/agv/model.sdf</a:t>
             </a:r>
           </a:p>
         </p:txBody>
@@ -18045,7 +18136,7 @@
               </a:defRPr>
             </a:pPr>
             <a:r>
-              <a:t>현재 단계 시작    |    현재 폴더 ~/agv_ws    |    현재 터미널</a:t>
+              <a:t>현재 단계 시작    |    현재 폴더 ~/ros2_curri/agv_ws    |    현재 터미널</a:t>
             </a:r>
           </a:p>
         </p:txBody>
@@ -18161,7 +18252,7 @@
               </a:defRPr>
             </a:pPr>
             <a:r>
-              <a:t>• 현재 폴더: ~/agv_ws</a:t>
+              <a:t>• 현재 폴더: ~/ros2_curri/agv_ws</a:t>
             </a:r>
           </a:p>
           <a:p>
@@ -18232,7 +18323,7 @@
               </a:defRPr>
             </a:pPr>
             <a:r>
-              <a:t>확인: pwd가 ~/agv_ws이고, 이전 모듈의 완료 조건을 한 문장으로 설명할 수 있으면 시작합니다.</a:t>
+              <a:t>확인: pwd가 ~/ros2_curri/agv_ws이고, 이전 모듈의 완료 조건을 한 문장으로 설명할 수 있으면 시작합니다.</a:t>
             </a:r>
           </a:p>
         </p:txBody>
@@ -18328,7 +18419,7 @@
               </a:defRPr>
             </a:pPr>
             <a:r>
-              <a:t>~/agv_ws/src/agv_gazebo/models/agv/model.sdf</a:t>
+              <a:t>~/ros2_curri/agv_ws/src/agv_gazebo/models/agv/model.sdf</a:t>
             </a:r>
           </a:p>
         </p:txBody>
@@ -18464,7 +18555,7 @@
               </a:defRPr>
             </a:pPr>
             <a:r>
-              <a:t>현재 단계 24/27    |    현재 폴더 ~/agv_ws    |    현재 터미널</a:t>
+              <a:t>현재 단계 24/27    |    현재 폴더 ~/ros2_curri/agv_ws    |    현재 터미널</a:t>
             </a:r>
           </a:p>
         </p:txBody>
@@ -18561,11 +18652,11 @@
               </a:defRPr>
             </a:pPr>
             <a:r>
-              <a:t>파일 생성: mkdir -p ~/agv_ws/src/agv_gazebo/models/agv</a:t>
-            </a:r>
-            <a:br/>
-            <a:r>
-              <a:t>파일 열기: nano ~/agv_ws/src/agv_gazebo/models/agv/model.sdf</a:t>
+              <a:t>파일 생성: mkdir -p ~/ros2_curri/agv_ws/src/agv_gazebo/models/agv</a:t>
+            </a:r>
+            <a:br/>
+            <a:r>
+              <a:t>파일 열기: nano ~/ros2_curri/agv_ws/src/agv_gazebo/models/agv/model.sdf</a:t>
             </a:r>
           </a:p>
         </p:txBody>
@@ -18802,7 +18893,7 @@
               </a:defRPr>
             </a:pPr>
             <a:r>
-              <a:t>~/agv_ws/src/agv_gazebo/models/agv/model.sdf</a:t>
+              <a:t>~/ros2_curri/agv_ws/src/agv_gazebo/models/agv/model.sdf</a:t>
             </a:r>
           </a:p>
         </p:txBody>
@@ -18938,7 +19029,7 @@
               </a:defRPr>
             </a:pPr>
             <a:r>
-              <a:t>현재 단계 25/27    |    현재 폴더 ~/agv_ws    |    현재 터미널</a:t>
+              <a:t>현재 단계 25/27    |    현재 폴더 ~/ros2_curri/agv_ws    |    현재 터미널</a:t>
             </a:r>
           </a:p>
         </p:txBody>
@@ -19035,11 +19126,11 @@
               </a:defRPr>
             </a:pPr>
             <a:r>
-              <a:t>파일 생성: mkdir -p ~/agv_ws/src/agv_gazebo/models/agv</a:t>
-            </a:r>
-            <a:br/>
-            <a:r>
-              <a:t>파일 열기: nano ~/agv_ws/src/agv_gazebo/models/agv/model.sdf</a:t>
+              <a:t>파일 생성: mkdir -p ~/ros2_curri/agv_ws/src/agv_gazebo/models/agv</a:t>
+            </a:r>
+            <a:br/>
+            <a:r>
+              <a:t>파일 열기: nano ~/ros2_curri/agv_ws/src/agv_gazebo/models/agv/model.sdf</a:t>
             </a:r>
           </a:p>
         </p:txBody>
@@ -19276,7 +19367,7 @@
               </a:defRPr>
             </a:pPr>
             <a:r>
-              <a:t>~/agv_ws/src/agv_gazebo/models/agv/model.sdf</a:t>
+              <a:t>~/ros2_curri/agv_ws/src/agv_gazebo/models/agv/model.sdf</a:t>
             </a:r>
           </a:p>
         </p:txBody>
@@ -19412,7 +19503,7 @@
               </a:defRPr>
             </a:pPr>
             <a:r>
-              <a:t>현재 단계 26/27    |    현재 폴더 ~/agv_ws    |    현재 터미널</a:t>
+              <a:t>현재 단계 26/27    |    현재 폴더 ~/ros2_curri/agv_ws    |    현재 터미널</a:t>
             </a:r>
           </a:p>
         </p:txBody>
@@ -19509,11 +19600,11 @@
               </a:defRPr>
             </a:pPr>
             <a:r>
-              <a:t>파일 생성: mkdir -p ~/agv_ws/src/agv_gazebo/models/agv</a:t>
-            </a:r>
-            <a:br/>
-            <a:r>
-              <a:t>파일 열기: nano ~/agv_ws/src/agv_gazebo/models/agv/model.sdf</a:t>
+              <a:t>파일 생성: mkdir -p ~/ros2_curri/agv_ws/src/agv_gazebo/models/agv</a:t>
+            </a:r>
+            <a:br/>
+            <a:r>
+              <a:t>파일 열기: nano ~/ros2_curri/agv_ws/src/agv_gazebo/models/agv/model.sdf</a:t>
             </a:r>
           </a:p>
         </p:txBody>
@@ -19747,7 +19838,7 @@
               </a:defRPr>
             </a:pPr>
             <a:r>
-              <a:t>~/agv_ws/src/agv_gazebo/config/bridge.yaml</a:t>
+              <a:t>~/ros2_curri/agv_ws/src/agv_gazebo/config/bridge.yaml</a:t>
             </a:r>
           </a:p>
         </p:txBody>
@@ -19883,7 +19974,7 @@
               </a:defRPr>
             </a:pPr>
             <a:r>
-              <a:t>현재 단계 27/30    |    현재 폴더 ~/agv_ws    |    현재 터미널</a:t>
+              <a:t>현재 단계 27/30    |    현재 폴더 ~/ros2_curri/agv_ws    |    현재 터미널</a:t>
             </a:r>
           </a:p>
         </p:txBody>
@@ -19980,11 +20071,11 @@
               </a:defRPr>
             </a:pPr>
             <a:r>
-              <a:t>파일 생성: mkdir -p ~/agv_ws/src/agv_gazebo/config</a:t>
-            </a:r>
-            <a:br/>
-            <a:r>
-              <a:t>파일 열기: nano ~/agv_ws/src/agv_gazebo/config/bridge.yaml</a:t>
+              <a:t>파일 생성: mkdir -p ~/ros2_curri/agv_ws/src/agv_gazebo/config</a:t>
+            </a:r>
+            <a:br/>
+            <a:r>
+              <a:t>파일 열기: nano ~/ros2_curri/agv_ws/src/agv_gazebo/config/bridge.yaml</a:t>
             </a:r>
           </a:p>
         </p:txBody>
@@ -20221,7 +20312,7 @@
               </a:defRPr>
             </a:pPr>
             <a:r>
-              <a:t>~/agv_ws/src/agv_gazebo/config/bridge.yaml</a:t>
+              <a:t>~/ros2_curri/agv_ws/src/agv_gazebo/config/bridge.yaml</a:t>
             </a:r>
           </a:p>
         </p:txBody>
@@ -20357,7 +20448,7 @@
               </a:defRPr>
             </a:pPr>
             <a:r>
-              <a:t>현재 단계 28/30    |    현재 폴더 ~/agv_ws    |    현재 터미널</a:t>
+              <a:t>현재 단계 28/30    |    현재 폴더 ~/ros2_curri/agv_ws    |    현재 터미널</a:t>
             </a:r>
           </a:p>
         </p:txBody>
@@ -20454,11 +20545,11 @@
               </a:defRPr>
             </a:pPr>
             <a:r>
-              <a:t>파일 생성: mkdir -p ~/agv_ws/src/agv_gazebo/config</a:t>
-            </a:r>
-            <a:br/>
-            <a:r>
-              <a:t>파일 열기: nano ~/agv_ws/src/agv_gazebo/config/bridge.yaml</a:t>
+              <a:t>파일 생성: mkdir -p ~/ros2_curri/agv_ws/src/agv_gazebo/config</a:t>
+            </a:r>
+            <a:br/>
+            <a:r>
+              <a:t>파일 열기: nano ~/ros2_curri/agv_ws/src/agv_gazebo/config/bridge.yaml</a:t>
             </a:r>
           </a:p>
         </p:txBody>
@@ -20695,7 +20786,7 @@
               </a:defRPr>
             </a:pPr>
             <a:r>
-              <a:t>~/agv_ws/src/agv_gazebo/config/bridge.yaml</a:t>
+              <a:t>~/ros2_curri/agv_ws/src/agv_gazebo/config/bridge.yaml</a:t>
             </a:r>
           </a:p>
         </p:txBody>
@@ -20831,7 +20922,7 @@
               </a:defRPr>
             </a:pPr>
             <a:r>
-              <a:t>현재 단계 29/30    |    현재 폴더 ~/agv_ws    |    현재 터미널</a:t>
+              <a:t>현재 단계 29/30    |    현재 폴더 ~/ros2_curri/agv_ws    |    현재 터미널</a:t>
             </a:r>
           </a:p>
         </p:txBody>
@@ -20928,11 +21019,11 @@
               </a:defRPr>
             </a:pPr>
             <a:r>
-              <a:t>파일 생성: mkdir -p ~/agv_ws/src/agv_gazebo/config</a:t>
-            </a:r>
-            <a:br/>
-            <a:r>
-              <a:t>파일 열기: nano ~/agv_ws/src/agv_gazebo/config/bridge.yaml</a:t>
+              <a:t>파일 생성: mkdir -p ~/ros2_curri/agv_ws/src/agv_gazebo/config</a:t>
+            </a:r>
+            <a:br/>
+            <a:r>
+              <a:t>파일 열기: nano ~/ros2_curri/agv_ws/src/agv_gazebo/config/bridge.yaml</a:t>
             </a:r>
           </a:p>
         </p:txBody>
@@ -21145,7 +21236,7 @@
               </a:defRPr>
             </a:pPr>
             <a:r>
-              <a:t>~/agv_ws/src/agv_sensors/agv_sensors/lidar_processor.py</a:t>
+              <a:t>~/ros2_curri/agv_ws/src/agv_sensors/agv_sensors/lidar_processor.py</a:t>
             </a:r>
           </a:p>
         </p:txBody>
@@ -21281,7 +21372,7 @@
               </a:defRPr>
             </a:pPr>
             <a:r>
-              <a:t>현재 단계 30/33    |    현재 폴더 ~/agv_ws    |    현재 터미널</a:t>
+              <a:t>현재 단계 30/33    |    현재 폴더 ~/ros2_curri/agv_ws    |    현재 터미널</a:t>
             </a:r>
           </a:p>
         </p:txBody>
@@ -21378,11 +21469,11 @@
               </a:defRPr>
             </a:pPr>
             <a:r>
-              <a:t>파일 생성: mkdir -p ~/agv_ws/src/agv_sensors/agv_sensors</a:t>
-            </a:r>
-            <a:br/>
-            <a:r>
-              <a:t>파일 열기: nano ~/agv_ws/src/agv_sensors/agv_sensors/lidar_processor.py</a:t>
+              <a:t>파일 생성: mkdir -p ~/ros2_curri/agv_ws/src/agv_sensors/agv_sensors</a:t>
+            </a:r>
+            <a:br/>
+            <a:r>
+              <a:t>파일 열기: nano ~/ros2_curri/agv_ws/src/agv_sensors/agv_sensors/lidar_processor.py</a:t>
             </a:r>
           </a:p>
         </p:txBody>
@@ -21613,7 +21704,7 @@
               </a:defRPr>
             </a:pPr>
             <a:r>
-              <a:t>~/agv_ws/src/agv_sensors/agv_sensors/lidar_processor.py</a:t>
+              <a:t>~/ros2_curri/agv_ws/src/agv_sensors/agv_sensors/lidar_processor.py</a:t>
             </a:r>
           </a:p>
         </p:txBody>
@@ -21749,7 +21840,7 @@
               </a:defRPr>
             </a:pPr>
             <a:r>
-              <a:t>현재 단계 31/33    |    현재 폴더 ~/agv_ws    |    현재 터미널</a:t>
+              <a:t>현재 단계 31/33    |    현재 폴더 ~/ros2_curri/agv_ws    |    현재 터미널</a:t>
             </a:r>
           </a:p>
         </p:txBody>
@@ -21846,11 +21937,11 @@
               </a:defRPr>
             </a:pPr>
             <a:r>
-              <a:t>파일 생성: mkdir -p ~/agv_ws/src/agv_sensors/agv_sensors</a:t>
-            </a:r>
-            <a:br/>
-            <a:r>
-              <a:t>파일 열기: nano ~/agv_ws/src/agv_sensors/agv_sensors/lidar_processor.py</a:t>
+              <a:t>파일 생성: mkdir -p ~/ros2_curri/agv_ws/src/agv_sensors/agv_sensors</a:t>
+            </a:r>
+            <a:br/>
+            <a:r>
+              <a:t>파일 열기: nano ~/ros2_curri/agv_ws/src/agv_sensors/agv_sensors/lidar_processor.py</a:t>
             </a:r>
           </a:p>
         </p:txBody>
@@ -22081,7 +22172,7 @@
               </a:defRPr>
             </a:pPr>
             <a:r>
-              <a:t>~/agv_ws/src/agv_sensors/agv_sensors/lidar_processor.py</a:t>
+              <a:t>~/ros2_curri/agv_ws/src/agv_sensors/agv_sensors/lidar_processor.py</a:t>
             </a:r>
           </a:p>
         </p:txBody>
@@ -22217,7 +22308,7 @@
               </a:defRPr>
             </a:pPr>
             <a:r>
-              <a:t>현재 단계 32/33    |    현재 폴더 ~/agv_ws    |    현재 터미널</a:t>
+              <a:t>현재 단계 32/33    |    현재 폴더 ~/ros2_curri/agv_ws    |    현재 터미널</a:t>
             </a:r>
           </a:p>
         </p:txBody>
@@ -22314,11 +22405,11 @@
               </a:defRPr>
             </a:pPr>
             <a:r>
-              <a:t>파일 생성: mkdir -p ~/agv_ws/src/agv_sensors/agv_sensors</a:t>
-            </a:r>
-            <a:br/>
-            <a:r>
-              <a:t>파일 열기: nano ~/agv_ws/src/agv_sensors/agv_sensors/lidar_processor.py</a:t>
+              <a:t>파일 생성: mkdir -p ~/ros2_curri/agv_ws/src/agv_sensors/agv_sensors</a:t>
+            </a:r>
+            <a:br/>
+            <a:r>
+              <a:t>파일 열기: nano ~/ros2_curri/agv_ws/src/agv_sensors/agv_sensors/lidar_processor.py</a:t>
             </a:r>
           </a:p>
         </p:txBody>
@@ -22683,7 +22774,7 @@
               </a:defRPr>
             </a:pPr>
             <a:r>
-              <a:t>현재 단계 실행    |    현재 폴더 ~/agv_ws    |    현재 터미널</a:t>
+              <a:t>현재 단계 실행    |    현재 폴더 ~/ros2_curri/agv_ws    |    현재 터미널</a:t>
             </a:r>
           </a:p>
         </p:txBody>
@@ -23450,7 +23541,7 @@
               </a:defRPr>
             </a:pPr>
             <a:r>
-              <a:t>객관적 검증 명령으로 완료를 확인한다</a:t>
+              <a:t>정상 결과: 실제 환경에서 확인한 출력</a:t>
             </a:r>
           </a:p>
         </p:txBody>
@@ -23489,7 +23580,7 @@
               </a:defRPr>
             </a:pPr>
             <a:r>
-              <a:t>화면만 보지 말고 topic·frame·파일·parameter를 다시 확인합니다.</a:t>
+              <a:t>실제 RViz2 통합 display: LaserScan·frame·Fixed Frame을 점검하는 화면</a:t>
             </a:r>
           </a:p>
         </p:txBody>
@@ -23572,210 +23663,40 @@
           </a:p>
         </p:txBody>
       </p:sp>
-      <p:sp>
-        <p:nvSpPr>
-          <p:cNvPr id="6" name="Rectangle 5"/>
-          <p:cNvSpPr/>
-          <p:nvPr/>
-        </p:nvSpPr>
-        <p:spPr>
-          <a:xfrm>
-            <a:off x="566928" y="1188720"/>
-            <a:ext cx="11064240" cy="347472"/>
-          </a:xfrm>
-          <a:prstGeom prst="rect">
-            <a:avLst/>
-          </a:prstGeom>
-          <a:solidFill>
-            <a:srgbClr val="F4F7FB"/>
-          </a:solidFill>
-          <a:ln>
-            <a:solidFill>
-              <a:srgbClr val="F4F7FB"/>
-            </a:solidFill>
-          </a:ln>
-        </p:spPr>
-        <p:style>
-          <a:lnRef idx="1">
-            <a:schemeClr val="accent1"/>
-          </a:lnRef>
-          <a:fillRef idx="3">
-            <a:schemeClr val="accent1"/>
-          </a:fillRef>
-          <a:effectRef idx="2">
-            <a:schemeClr val="accent1"/>
-          </a:effectRef>
-          <a:fontRef idx="minor">
-            <a:schemeClr val="lt1"/>
-          </a:fontRef>
-        </p:style>
-        <p:txBody>
-          <a:bodyPr rtlCol="0" anchor="ctr" wrap="square" lIns="73152" rIns="73152" tIns="36576" bIns="36576"/>
-          <a:lstStyle/>
-          <a:p>
-            <a:pPr algn="l">
-              <a:spcAft>
-                <a:spcPts val="0"/>
-              </a:spcAft>
-              <a:defRPr sz="1300" b="1">
-                <a:solidFill>
-                  <a:srgbClr val="122C4E"/>
-                </a:solidFill>
-                <a:latin typeface="Noto Sans CJK KR"/>
-              </a:defRPr>
-            </a:pPr>
-            <a:r>
-              <a:t>현재 단계 검증    |    현재 폴더 ~/agv_ws    |    현재 터미널</a:t>
-            </a:r>
-          </a:p>
-        </p:txBody>
-      </p:sp>
-      <p:sp>
-        <p:nvSpPr>
-          <p:cNvPr id="7" name="Rounded Rectangle 6"/>
-          <p:cNvSpPr/>
-          <p:nvPr/>
-        </p:nvSpPr>
-        <p:spPr>
-          <a:xfrm>
-            <a:off x="658368" y="1755648"/>
-            <a:ext cx="10972800" cy="2148840"/>
-          </a:xfrm>
-          <a:prstGeom prst="roundRect">
-            <a:avLst/>
-          </a:prstGeom>
-          <a:solidFill>
-            <a:srgbClr val="1D232D"/>
-          </a:solidFill>
-          <a:ln>
-            <a:solidFill>
-              <a:srgbClr val="1D232D"/>
-            </a:solidFill>
-          </a:ln>
-        </p:spPr>
-        <p:style>
-          <a:lnRef idx="1">
-            <a:schemeClr val="accent1"/>
-          </a:lnRef>
-          <a:fillRef idx="3">
-            <a:schemeClr val="accent1"/>
-          </a:fillRef>
-          <a:effectRef idx="2">
-            <a:schemeClr val="accent1"/>
-          </a:effectRef>
-          <a:fontRef idx="minor">
-            <a:schemeClr val="lt1"/>
-          </a:fontRef>
-        </p:style>
-        <p:txBody>
-          <a:bodyPr rtlCol="0" anchor="ctr" wrap="square" lIns="73152" rIns="73152" tIns="36576" bIns="36576"/>
-          <a:lstStyle/>
-          <a:p>
-            <a:pPr algn="l">
-              <a:spcAft>
-                <a:spcPts val="0"/>
-              </a:spcAft>
-              <a:defRPr sz="1600" b="0">
-                <a:solidFill>
-                  <a:srgbClr val="FFFFFF"/>
-                </a:solidFill>
-                <a:latin typeface="DejaVu Sans Mono"/>
-              </a:defRPr>
-            </a:pPr>
-            <a:r>
-              <a:t>ros2 topic info /scan</a:t>
-            </a:r>
-            <a:br/>
-            <a:r>
-              <a:t>ros2 topic hz /scan</a:t>
-            </a:r>
-            <a:br/>
-            <a:r>
-              <a:t>ros2 topic echo /obstacle_distance --once</a:t>
-            </a:r>
-          </a:p>
-        </p:txBody>
-      </p:sp>
-      <p:sp>
-        <p:nvSpPr>
-          <p:cNvPr id="8" name="Rounded Rectangle 7"/>
-          <p:cNvSpPr/>
-          <p:nvPr/>
-        </p:nvSpPr>
-        <p:spPr>
-          <a:xfrm>
-            <a:off x="658368" y="4206240"/>
-            <a:ext cx="10972800" cy="1554480"/>
-          </a:xfrm>
-          <a:prstGeom prst="roundRect">
-            <a:avLst/>
-          </a:prstGeom>
-          <a:solidFill>
-            <a:srgbClr val="F4F7FB"/>
-          </a:solidFill>
-          <a:ln>
-            <a:solidFill>
-              <a:srgbClr val="D1DFD5"/>
-            </a:solidFill>
-          </a:ln>
-        </p:spPr>
-        <p:style>
-          <a:lnRef idx="1">
-            <a:schemeClr val="accent1"/>
-          </a:lnRef>
-          <a:fillRef idx="3">
-            <a:schemeClr val="accent1"/>
-          </a:fillRef>
-          <a:effectRef idx="2">
-            <a:schemeClr val="accent1"/>
-          </a:effectRef>
-          <a:fontRef idx="minor">
-            <a:schemeClr val="lt1"/>
-          </a:fontRef>
-        </p:style>
-        <p:txBody>
-          <a:bodyPr rtlCol="0" anchor="ctr" wrap="square" lIns="73152" rIns="73152" tIns="36576" bIns="36576"/>
-          <a:lstStyle/>
-          <a:p>
-            <a:pPr algn="l">
-              <a:spcAft>
-                <a:spcPts val="0"/>
-              </a:spcAft>
-              <a:defRPr sz="1800" b="1">
-                <a:solidFill>
-                  <a:srgbClr val="2A8B5A"/>
-                </a:solidFill>
-                <a:latin typeface="Noto Sans CJK KR"/>
-              </a:defRPr>
-            </a:pPr>
-            <a:r>
-              <a:t>완료 체크</a:t>
-            </a:r>
-            <a:br/>
-            <a:r>
-              <a:t>□ 명령이 오류 없이 실행된다.</a:t>
-            </a:r>
-            <a:br/>
-            <a:r>
-              <a:t>□ 기대한 파일·topic·frame·parameter 이름이 보인다.</a:t>
-            </a:r>
-            <a:br/>
-            <a:r>
-              <a:t>□ 값의 단위와 방향을 한 문장으로 설명할 수 있다.</a:t>
-            </a:r>
-          </a:p>
-        </p:txBody>
-      </p:sp>
-      <p:sp>
-        <p:nvSpPr>
-          <p:cNvPr id="9" name="TextBox 8"/>
+      <p:pic>
+        <p:nvPicPr>
+          <p:cNvPr id="6" name="Picture 5" descr="03_rviz_sensors_actual.png"/>
+          <p:cNvPicPr>
+            <a:picLocks noChangeAspect="1"/>
+          </p:cNvPicPr>
+          <p:nvPr/>
+        </p:nvPicPr>
+        <p:blipFill>
+          <a:blip r:embed="rId2"/>
+          <a:stretch>
+            <a:fillRect/>
+          </a:stretch>
+        </p:blipFill>
+        <p:spPr>
+          <a:xfrm>
+            <a:off x="2971409" y="1353312"/>
+            <a:ext cx="6246133" cy="4800600"/>
+          </a:xfrm>
+          <a:prstGeom prst="rect">
+            <a:avLst/>
+          </a:prstGeom>
+        </p:spPr>
+      </p:pic>
+      <p:sp>
+        <p:nvSpPr>
+          <p:cNvPr id="7" name="TextBox 6"/>
           <p:cNvSpPr txBox="1"/>
           <p:nvPr/>
         </p:nvSpPr>
         <p:spPr>
           <a:xfrm>
-            <a:off x="731520" y="5989320"/>
-            <a:ext cx="10789920" cy="237744"/>
+            <a:off x="777240" y="6217920"/>
+            <a:ext cx="10607040" cy="182880"/>
           </a:xfrm>
           <a:prstGeom prst="rect">
             <a:avLst/>
@@ -23788,19 +23709,19 @@
           </a:bodyPr>
           <a:lstStyle/>
           <a:p>
-            <a:pPr algn="l">
-              <a:spcAft>
-                <a:spcPts val="0"/>
-              </a:spcAft>
-              <a:defRPr sz="1500" b="1">
-                <a:solidFill>
-                  <a:srgbClr val="122C4E"/>
-                </a:solidFill>
-                <a:latin typeface="Noto Sans CJK KR"/>
-              </a:defRPr>
-            </a:pPr>
-            <a:r>
-              <a:t>완료 조건: /scan frame·RViz point·/obstacle_distance 출력이 장애물 위치에 반응한다.</a:t>
+            <a:pPr algn="ctr">
+              <a:spcAft>
+                <a:spcPts val="0"/>
+              </a:spcAft>
+              <a:defRPr sz="1100" b="1">
+                <a:solidFill>
+                  <a:srgbClr val="2A8B5A"/>
+                </a:solidFill>
+                <a:latin typeface="Noto Sans CJK KR"/>
+              </a:defRPr>
+            </a:pPr>
+            <a:r>
+              <a:t>① 명령/설정  ② 정상 출력 또는 화면  ③ 다음 검증 명령으로 재확인</a:t>
             </a:r>
           </a:p>
         </p:txBody>
@@ -23857,7 +23778,7 @@
               </a:defRPr>
             </a:pPr>
             <a:r>
-              <a:t>막히면: 증상 → 우선 확인 → 재검증</a:t>
+              <a:t>객관적 검증 명령으로 완료를 확인한다</a:t>
             </a:r>
           </a:p>
         </p:txBody>
@@ -23896,7 +23817,7 @@
               </a:defRPr>
             </a:pPr>
             <a:r>
-              <a:t>오류 메시지를 숨기지 않고 같은 순서로 점검합니다.</a:t>
+              <a:t>화면만 보지 말고 topic·frame·파일·parameter를 다시 확인합니다.</a:t>
             </a:r>
           </a:p>
         </p:txBody>
@@ -24032,7 +23953,7 @@
               </a:defRPr>
             </a:pPr>
             <a:r>
-              <a:t>현재 단계 오류 대응    |    현재 폴더 ~/agv_ws    |    현재 터미널</a:t>
+              <a:t>현재 단계 검증    |    현재 폴더 ~/ros2_curri/agv_ws    |    현재 터미널</a:t>
             </a:r>
           </a:p>
         </p:txBody>
@@ -24045,18 +23966,18 @@
         </p:nvSpPr>
         <p:spPr>
           <a:xfrm>
-            <a:off x="694944" y="1755648"/>
-            <a:ext cx="10972800" cy="1115568"/>
+            <a:off x="658368" y="1755648"/>
+            <a:ext cx="10972800" cy="2148840"/>
           </a:xfrm>
           <a:prstGeom prst="roundRect">
             <a:avLst/>
           </a:prstGeom>
           <a:solidFill>
-            <a:srgbClr val="FFF7F4"/>
+            <a:srgbClr val="1D232D"/>
           </a:solidFill>
           <a:ln>
             <a:solidFill>
-              <a:srgbClr val="EDBEB4"/>
+              <a:srgbClr val="1D232D"/>
             </a:solidFill>
           </a:ln>
         </p:spPr>
@@ -24075,72 +23996,7 @@
           </a:fontRef>
         </p:style>
         <p:txBody>
-          <a:bodyPr rtlCol="0" anchor="ctr"/>
-          <a:lstStyle/>
-          <a:p>
-            <a:pPr algn="ctr"/>
-          </a:p>
-        </p:txBody>
-      </p:sp>
-      <p:sp>
-        <p:nvSpPr>
-          <p:cNvPr id="8" name="TextBox 7"/>
-          <p:cNvSpPr txBox="1"/>
-          <p:nvPr/>
-        </p:nvSpPr>
-        <p:spPr>
-          <a:xfrm>
-            <a:off x="896112" y="1901952"/>
-            <a:ext cx="2926080" cy="274320"/>
-          </a:xfrm>
-          <a:prstGeom prst="rect">
-            <a:avLst/>
-          </a:prstGeom>
-          <a:noFill/>
-        </p:spPr>
-        <p:txBody>
-          <a:bodyPr wrap="square" lIns="73152" rIns="73152" tIns="36576" bIns="36576">
-            <a:spAutoFit/>
-          </a:bodyPr>
-          <a:lstStyle/>
-          <a:p>
-            <a:pPr algn="l">
-              <a:spcAft>
-                <a:spcPts val="0"/>
-              </a:spcAft>
-              <a:defRPr sz="1800" b="1">
-                <a:solidFill>
-                  <a:srgbClr val="BE3B3B"/>
-                </a:solidFill>
-                <a:latin typeface="Noto Sans CJK KR"/>
-              </a:defRPr>
-            </a:pPr>
-            <a:r>
-              <a:t>증상 1: /scan이 없음</a:t>
-            </a:r>
-          </a:p>
-        </p:txBody>
-      </p:sp>
-      <p:sp>
-        <p:nvSpPr>
-          <p:cNvPr id="9" name="TextBox 8"/>
-          <p:cNvSpPr txBox="1"/>
-          <p:nvPr/>
-        </p:nvSpPr>
-        <p:spPr>
-          <a:xfrm>
-            <a:off x="3794760" y="1883664"/>
-            <a:ext cx="7543800" cy="621792"/>
-          </a:xfrm>
-          <a:prstGeom prst="rect">
-            <a:avLst/>
-          </a:prstGeom>
-          <a:noFill/>
-        </p:spPr>
-        <p:txBody>
-          <a:bodyPr wrap="square" lIns="73152" rIns="73152" tIns="36576" bIns="36576">
-            <a:spAutoFit/>
-          </a:bodyPr>
+          <a:bodyPr rtlCol="0" anchor="ctr" wrap="square" lIns="73152" rIns="73152" tIns="36576" bIns="36576"/>
           <a:lstStyle/>
           <a:p>
             <a:pPr algn="l">
@@ -24149,41 +24005,45 @@
               </a:spcAft>
               <a:defRPr sz="1600" b="0">
                 <a:solidFill>
-                  <a:srgbClr val="122C4E"/>
-                </a:solidFill>
-                <a:latin typeface="Noto Sans CJK KR"/>
-              </a:defRPr>
-            </a:pPr>
-            <a:r>
-              <a:t>우선 확인: SDF sensor → bridge YAML → ROS topic 순서로 확인한다.</a:t>
-            </a:r>
-            <a:br/>
-            <a:r>
-              <a:t>수정 후: ros2 topic info /scan</a:t>
-            </a:r>
-          </a:p>
-        </p:txBody>
-      </p:sp>
-      <p:sp>
-        <p:nvSpPr>
-          <p:cNvPr id="10" name="Rounded Rectangle 9"/>
+                  <a:srgbClr val="FFFFFF"/>
+                </a:solidFill>
+                <a:latin typeface="DejaVu Sans Mono"/>
+              </a:defRPr>
+            </a:pPr>
+            <a:r>
+              <a:t>ros2 topic info /scan</a:t>
+            </a:r>
+            <a:br/>
+            <a:r>
+              <a:t>ros2 topic hz /scan</a:t>
+            </a:r>
+            <a:br/>
+            <a:r>
+              <a:t>ros2 topic echo /obstacle_distance --once</a:t>
+            </a:r>
+          </a:p>
+        </p:txBody>
+      </p:sp>
+      <p:sp>
+        <p:nvSpPr>
+          <p:cNvPr id="8" name="Rounded Rectangle 7"/>
           <p:cNvSpPr/>
           <p:nvPr/>
         </p:nvSpPr>
         <p:spPr>
           <a:xfrm>
-            <a:off x="694944" y="3172968"/>
-            <a:ext cx="10972800" cy="1115568"/>
+            <a:off x="658368" y="4206240"/>
+            <a:ext cx="10972800" cy="1554480"/>
           </a:xfrm>
           <a:prstGeom prst="roundRect">
             <a:avLst/>
           </a:prstGeom>
           <a:solidFill>
-            <a:srgbClr val="FFF7F4"/>
+            <a:srgbClr val="F4F7FB"/>
           </a:solidFill>
           <a:ln>
             <a:solidFill>
-              <a:srgbClr val="EDBEB4"/>
+              <a:srgbClr val="D1DFD5"/>
             </a:solidFill>
           </a:ln>
         </p:spPr>
@@ -24202,23 +24062,48 @@
           </a:fontRef>
         </p:style>
         <p:txBody>
-          <a:bodyPr rtlCol="0" anchor="ctr"/>
-          <a:lstStyle/>
-          <a:p>
-            <a:pPr algn="ctr"/>
-          </a:p>
-        </p:txBody>
-      </p:sp>
-      <p:sp>
-        <p:nvSpPr>
-          <p:cNvPr id="11" name="TextBox 10"/>
+          <a:bodyPr rtlCol="0" anchor="ctr" wrap="square" lIns="73152" rIns="73152" tIns="36576" bIns="36576"/>
+          <a:lstStyle/>
+          <a:p>
+            <a:pPr algn="l">
+              <a:spcAft>
+                <a:spcPts val="0"/>
+              </a:spcAft>
+              <a:defRPr sz="1800" b="1">
+                <a:solidFill>
+                  <a:srgbClr val="2A8B5A"/>
+                </a:solidFill>
+                <a:latin typeface="Noto Sans CJK KR"/>
+              </a:defRPr>
+            </a:pPr>
+            <a:r>
+              <a:t>완료 체크</a:t>
+            </a:r>
+            <a:br/>
+            <a:r>
+              <a:t>□ 명령이 오류 없이 실행된다.</a:t>
+            </a:r>
+            <a:br/>
+            <a:r>
+              <a:t>□ 기대한 파일·topic·frame·parameter 이름이 보인다.</a:t>
+            </a:r>
+            <a:br/>
+            <a:r>
+              <a:t>□ 값의 단위와 방향을 한 문장으로 설명할 수 있다.</a:t>
+            </a:r>
+          </a:p>
+        </p:txBody>
+      </p:sp>
+      <p:sp>
+        <p:nvSpPr>
+          <p:cNvPr id="9" name="TextBox 8"/>
           <p:cNvSpPr txBox="1"/>
           <p:nvPr/>
         </p:nvSpPr>
         <p:spPr>
           <a:xfrm>
-            <a:off x="896112" y="3319272"/>
-            <a:ext cx="2926080" cy="274320"/>
+            <a:off x="731520" y="5989320"/>
+            <a:ext cx="10789920" cy="237744"/>
           </a:xfrm>
           <a:prstGeom prst="rect">
             <a:avLst/>
@@ -24235,46 +24120,7 @@
               <a:spcAft>
                 <a:spcPts val="0"/>
               </a:spcAft>
-              <a:defRPr sz="1800" b="1">
-                <a:solidFill>
-                  <a:srgbClr val="BE3B3B"/>
-                </a:solidFill>
-                <a:latin typeface="Noto Sans CJK KR"/>
-              </a:defRPr>
-            </a:pPr>
-            <a:r>
-              <a:t>증상 2: 최소거리가 항상 inf</a:t>
-            </a:r>
-          </a:p>
-        </p:txBody>
-      </p:sp>
-      <p:sp>
-        <p:nvSpPr>
-          <p:cNvPr id="12" name="TextBox 11"/>
-          <p:cNvSpPr txBox="1"/>
-          <p:nvPr/>
-        </p:nvSpPr>
-        <p:spPr>
-          <a:xfrm>
-            <a:off x="3794760" y="3300984"/>
-            <a:ext cx="7543800" cy="621792"/>
-          </a:xfrm>
-          <a:prstGeom prst="rect">
-            <a:avLst/>
-          </a:prstGeom>
-          <a:noFill/>
-        </p:spPr>
-        <p:txBody>
-          <a:bodyPr wrap="square" lIns="73152" rIns="73152" tIns="36576" bIns="36576">
-            <a:spAutoFit/>
-          </a:bodyPr>
-          <a:lstStyle/>
-          <a:p>
-            <a:pPr algn="l">
-              <a:spcAft>
-                <a:spcPts val="0"/>
-              </a:spcAft>
-              <a:defRPr sz="1600" b="0">
+              <a:defRPr sz="1500" b="1">
                 <a:solidFill>
                   <a:srgbClr val="122C4E"/>
                 </a:solidFill>
@@ -24282,50 +24128,7 @@
               </a:defRPr>
             </a:pPr>
             <a:r>
-              <a:t>우선 확인: 유효 range 필터와 sector index 계산을 확인한다.</a:t>
-            </a:r>
-            <a:br/>
-            <a:r>
-              <a:t>수정 후: ros2 topic info /scan</a:t>
-            </a:r>
-          </a:p>
-        </p:txBody>
-      </p:sp>
-      <p:sp>
-        <p:nvSpPr>
-          <p:cNvPr id="13" name="TextBox 12"/>
-          <p:cNvSpPr txBox="1"/>
-          <p:nvPr/>
-        </p:nvSpPr>
-        <p:spPr>
-          <a:xfrm>
-            <a:off x="822960" y="5102352"/>
-            <a:ext cx="10607040" cy="402336"/>
-          </a:xfrm>
-          <a:prstGeom prst="rect">
-            <a:avLst/>
-          </a:prstGeom>
-          <a:noFill/>
-        </p:spPr>
-        <p:txBody>
-          <a:bodyPr wrap="square" lIns="73152" rIns="73152" tIns="36576" bIns="36576">
-            <a:spAutoFit/>
-          </a:bodyPr>
-          <a:lstStyle/>
-          <a:p>
-            <a:pPr algn="ctr">
-              <a:spcAft>
-                <a:spcPts val="0"/>
-              </a:spcAft>
-              <a:defRPr sz="1800" b="1">
-                <a:solidFill>
-                  <a:srgbClr val="DB7E22"/>
-                </a:solidFill>
-                <a:latin typeface="Noto Sans CJK KR"/>
-              </a:defRPr>
-            </a:pPr>
-            <a:r>
-              <a:t>공통 순서: ① 현재 폴더 ② source ③ 파일 경로 ④ 이름/타입/단위 ⑤ build·source 후 재실행</a:t>
+              <a:t>완료 조건: /scan frame·RViz point·/obstacle_distance 출력이 장애물 위치에 반응한다.</a:t>
             </a:r>
           </a:p>
         </p:txBody>
@@ -24382,7 +24185,7 @@
               </a:defRPr>
             </a:pPr>
             <a:r>
-              <a:t>미니 실습: 값 하나를 바꾸고 결과를 비교한다</a:t>
+              <a:t>막히면: 증상 → 우선 확인 → 재검증</a:t>
             </a:r>
           </a:p>
         </p:txBody>
@@ -24421,7 +24224,7 @@
               </a:defRPr>
             </a:pPr>
             <a:r>
-              <a:t>정상 결과를 만든 뒤에는 한 번에 하나의 값만 바꿉니다.</a:t>
+              <a:t>오류 메시지를 숨기지 않고 같은 순서로 점검합니다.</a:t>
             </a:r>
           </a:p>
         </p:txBody>
@@ -24557,7 +24360,7 @@
               </a:defRPr>
             </a:pPr>
             <a:r>
-              <a:t>현재 단계 미니 실습    |    현재 폴더 ~/agv_ws    |    현재 터미널</a:t>
+              <a:t>현재 단계 오류 대응    |    현재 폴더 ~/ros2_curri/agv_ws    |    현재 터미널</a:t>
             </a:r>
           </a:p>
         </p:txBody>
@@ -24570,18 +24373,18 @@
         </p:nvSpPr>
         <p:spPr>
           <a:xfrm>
-            <a:off x="749808" y="1874519"/>
-            <a:ext cx="10652760" cy="1993392"/>
+            <a:off x="694944" y="1755648"/>
+            <a:ext cx="10972800" cy="1115568"/>
           </a:xfrm>
           <a:prstGeom prst="roundRect">
             <a:avLst/>
           </a:prstGeom>
           <a:solidFill>
-            <a:srgbClr val="FFF8EB"/>
+            <a:srgbClr val="FFF7F4"/>
           </a:solidFill>
           <a:ln>
             <a:solidFill>
-              <a:srgbClr val="ECC680"/>
+              <a:srgbClr val="EDBEB4"/>
             </a:solidFill>
           </a:ln>
         </p:spPr>
@@ -24600,23 +24403,10 @@
           </a:fontRef>
         </p:style>
         <p:txBody>
-          <a:bodyPr rtlCol="0" anchor="ctr" wrap="square" lIns="73152" rIns="73152" tIns="36576" bIns="36576"/>
-          <a:lstStyle/>
-          <a:p>
-            <a:pPr algn="ctr">
-              <a:spcAft>
-                <a:spcPts val="0"/>
-              </a:spcAft>
-              <a:defRPr sz="2300" b="1">
-                <a:solidFill>
-                  <a:srgbClr val="122C4E"/>
-                </a:solidFill>
-                <a:latin typeface="Noto Sans CJK KR"/>
-              </a:defRPr>
-            </a:pPr>
-            <a:r>
-              <a:t>front_half_angle_deg를 15°와 45°로 각각 실행해 장애물 판정 영역이 어떻게 달라지는지 비교한다.</a:t>
-            </a:r>
+          <a:bodyPr rtlCol="0" anchor="ctr"/>
+          <a:lstStyle/>
+          <a:p>
+            <a:pPr algn="ctr"/>
           </a:p>
         </p:txBody>
       </p:sp>
@@ -24628,8 +24418,8 @@
         </p:nvSpPr>
         <p:spPr>
           <a:xfrm>
-            <a:off x="877824" y="4590288"/>
-            <a:ext cx="10241280" cy="594360"/>
+            <a:off x="896112" y="1901952"/>
+            <a:ext cx="2926080" cy="274320"/>
           </a:xfrm>
           <a:prstGeom prst="rect">
             <a:avLst/>
@@ -24642,11 +24432,220 @@
           </a:bodyPr>
           <a:lstStyle/>
           <a:p>
+            <a:pPr algn="l">
+              <a:spcAft>
+                <a:spcPts val="0"/>
+              </a:spcAft>
+              <a:defRPr sz="1800" b="1">
+                <a:solidFill>
+                  <a:srgbClr val="BE3B3B"/>
+                </a:solidFill>
+                <a:latin typeface="Noto Sans CJK KR"/>
+              </a:defRPr>
+            </a:pPr>
+            <a:r>
+              <a:t>증상 1: /scan이 없음</a:t>
+            </a:r>
+          </a:p>
+        </p:txBody>
+      </p:sp>
+      <p:sp>
+        <p:nvSpPr>
+          <p:cNvPr id="9" name="TextBox 8"/>
+          <p:cNvSpPr txBox="1"/>
+          <p:nvPr/>
+        </p:nvSpPr>
+        <p:spPr>
+          <a:xfrm>
+            <a:off x="3794760" y="1883664"/>
+            <a:ext cx="7543800" cy="621792"/>
+          </a:xfrm>
+          <a:prstGeom prst="rect">
+            <a:avLst/>
+          </a:prstGeom>
+          <a:noFill/>
+        </p:spPr>
+        <p:txBody>
+          <a:bodyPr wrap="square" lIns="73152" rIns="73152" tIns="36576" bIns="36576">
+            <a:spAutoFit/>
+          </a:bodyPr>
+          <a:lstStyle/>
+          <a:p>
+            <a:pPr algn="l">
+              <a:spcAft>
+                <a:spcPts val="0"/>
+              </a:spcAft>
+              <a:defRPr sz="1600" b="0">
+                <a:solidFill>
+                  <a:srgbClr val="122C4E"/>
+                </a:solidFill>
+                <a:latin typeface="Noto Sans CJK KR"/>
+              </a:defRPr>
+            </a:pPr>
+            <a:r>
+              <a:t>우선 확인: SDF sensor → bridge YAML → ROS topic 순서로 확인한다.</a:t>
+            </a:r>
+            <a:br/>
+            <a:r>
+              <a:t>수정 후: ros2 topic info /scan</a:t>
+            </a:r>
+          </a:p>
+        </p:txBody>
+      </p:sp>
+      <p:sp>
+        <p:nvSpPr>
+          <p:cNvPr id="10" name="Rounded Rectangle 9"/>
+          <p:cNvSpPr/>
+          <p:nvPr/>
+        </p:nvSpPr>
+        <p:spPr>
+          <a:xfrm>
+            <a:off x="694944" y="3172968"/>
+            <a:ext cx="10972800" cy="1115568"/>
+          </a:xfrm>
+          <a:prstGeom prst="roundRect">
+            <a:avLst/>
+          </a:prstGeom>
+          <a:solidFill>
+            <a:srgbClr val="FFF7F4"/>
+          </a:solidFill>
+          <a:ln>
+            <a:solidFill>
+              <a:srgbClr val="EDBEB4"/>
+            </a:solidFill>
+          </a:ln>
+        </p:spPr>
+        <p:style>
+          <a:lnRef idx="1">
+            <a:schemeClr val="accent1"/>
+          </a:lnRef>
+          <a:fillRef idx="3">
+            <a:schemeClr val="accent1"/>
+          </a:fillRef>
+          <a:effectRef idx="2">
+            <a:schemeClr val="accent1"/>
+          </a:effectRef>
+          <a:fontRef idx="minor">
+            <a:schemeClr val="lt1"/>
+          </a:fontRef>
+        </p:style>
+        <p:txBody>
+          <a:bodyPr rtlCol="0" anchor="ctr"/>
+          <a:lstStyle/>
+          <a:p>
+            <a:pPr algn="ctr"/>
+          </a:p>
+        </p:txBody>
+      </p:sp>
+      <p:sp>
+        <p:nvSpPr>
+          <p:cNvPr id="11" name="TextBox 10"/>
+          <p:cNvSpPr txBox="1"/>
+          <p:nvPr/>
+        </p:nvSpPr>
+        <p:spPr>
+          <a:xfrm>
+            <a:off x="896112" y="3319272"/>
+            <a:ext cx="2926080" cy="274320"/>
+          </a:xfrm>
+          <a:prstGeom prst="rect">
+            <a:avLst/>
+          </a:prstGeom>
+          <a:noFill/>
+        </p:spPr>
+        <p:txBody>
+          <a:bodyPr wrap="square" lIns="73152" rIns="73152" tIns="36576" bIns="36576">
+            <a:spAutoFit/>
+          </a:bodyPr>
+          <a:lstStyle/>
+          <a:p>
+            <a:pPr algn="l">
+              <a:spcAft>
+                <a:spcPts val="0"/>
+              </a:spcAft>
+              <a:defRPr sz="1800" b="1">
+                <a:solidFill>
+                  <a:srgbClr val="BE3B3B"/>
+                </a:solidFill>
+                <a:latin typeface="Noto Sans CJK KR"/>
+              </a:defRPr>
+            </a:pPr>
+            <a:r>
+              <a:t>증상 2: 최소거리가 항상 inf</a:t>
+            </a:r>
+          </a:p>
+        </p:txBody>
+      </p:sp>
+      <p:sp>
+        <p:nvSpPr>
+          <p:cNvPr id="12" name="TextBox 11"/>
+          <p:cNvSpPr txBox="1"/>
+          <p:nvPr/>
+        </p:nvSpPr>
+        <p:spPr>
+          <a:xfrm>
+            <a:off x="3794760" y="3300984"/>
+            <a:ext cx="7543800" cy="621792"/>
+          </a:xfrm>
+          <a:prstGeom prst="rect">
+            <a:avLst/>
+          </a:prstGeom>
+          <a:noFill/>
+        </p:spPr>
+        <p:txBody>
+          <a:bodyPr wrap="square" lIns="73152" rIns="73152" tIns="36576" bIns="36576">
+            <a:spAutoFit/>
+          </a:bodyPr>
+          <a:lstStyle/>
+          <a:p>
+            <a:pPr algn="l">
+              <a:spcAft>
+                <a:spcPts val="0"/>
+              </a:spcAft>
+              <a:defRPr sz="1600" b="0">
+                <a:solidFill>
+                  <a:srgbClr val="122C4E"/>
+                </a:solidFill>
+                <a:latin typeface="Noto Sans CJK KR"/>
+              </a:defRPr>
+            </a:pPr>
+            <a:r>
+              <a:t>우선 확인: 유효 range 필터와 sector index 계산을 확인한다.</a:t>
+            </a:r>
+            <a:br/>
+            <a:r>
+              <a:t>수정 후: ros2 topic info /scan</a:t>
+            </a:r>
+          </a:p>
+        </p:txBody>
+      </p:sp>
+      <p:sp>
+        <p:nvSpPr>
+          <p:cNvPr id="13" name="TextBox 12"/>
+          <p:cNvSpPr txBox="1"/>
+          <p:nvPr/>
+        </p:nvSpPr>
+        <p:spPr>
+          <a:xfrm>
+            <a:off x="822960" y="5102352"/>
+            <a:ext cx="10607040" cy="402336"/>
+          </a:xfrm>
+          <a:prstGeom prst="rect">
+            <a:avLst/>
+          </a:prstGeom>
+          <a:noFill/>
+        </p:spPr>
+        <p:txBody>
+          <a:bodyPr wrap="square" lIns="73152" rIns="73152" tIns="36576" bIns="36576">
+            <a:spAutoFit/>
+          </a:bodyPr>
+          <a:lstStyle/>
+          <a:p>
             <a:pPr algn="ctr">
               <a:spcAft>
                 <a:spcPts val="0"/>
               </a:spcAft>
-              <a:defRPr sz="1900" b="1">
+              <a:defRPr sz="1800" b="1">
                 <a:solidFill>
                   <a:srgbClr val="DB7E22"/>
                 </a:solidFill>
@@ -24654,7 +24653,7 @@
               </a:defRPr>
             </a:pPr>
             <a:r>
-              <a:t>기록할 것: 바꾼 값(단위) · 기대한 변화 · 실제 출력/화면 · 원래 값으로 되돌린 결과</a:t>
+              <a:t>공통 순서: ① 현재 폴더 ② source ③ 파일 경로 ④ 이름/타입/단위 ⑤ build·source 후 재실행</a:t>
             </a:r>
           </a:p>
         </p:txBody>
@@ -24711,7 +24710,7 @@
               </a:defRPr>
             </a:pPr>
             <a:r>
-              <a:t>체크포인트를 저장하고 다음 모듈로 넘긴다</a:t>
+              <a:t>미니 실습: 값 하나를 바꾸고 결과를 비교한다</a:t>
             </a:r>
           </a:p>
         </p:txBody>
@@ -24750,7 +24749,7 @@
               </a:defRPr>
             </a:pPr>
             <a:r>
-              <a:t>현재 Complete는 다음 Starter의 기준선입니다.</a:t>
+              <a:t>정상 결과를 만든 뒤에는 한 번에 하나의 값만 바꿉니다.</a:t>
             </a:r>
           </a:p>
         </p:txBody>
@@ -24886,7 +24885,7 @@
               </a:defRPr>
             </a:pPr>
             <a:r>
-              <a:t>현재 단계 체크포인트    |    현재 폴더 ~/agv_ws    |    현재 터미널</a:t>
+              <a:t>현재 단계 미니 실습    |    현재 폴더 ~/ros2_curri/agv_ws    |    현재 터미널</a:t>
             </a:r>
           </a:p>
         </p:txBody>
@@ -24899,18 +24898,18 @@
         </p:nvSpPr>
         <p:spPr>
           <a:xfrm>
-            <a:off x="685800" y="1737360"/>
-            <a:ext cx="10972800" cy="3611880"/>
+            <a:off x="749808" y="1874519"/>
+            <a:ext cx="10652760" cy="1993392"/>
           </a:xfrm>
           <a:prstGeom prst="roundRect">
             <a:avLst/>
           </a:prstGeom>
           <a:solidFill>
-            <a:srgbClr val="F4F7FB"/>
+            <a:srgbClr val="FFF8EB"/>
           </a:solidFill>
           <a:ln>
             <a:solidFill>
-              <a:srgbClr val="D2DCE8"/>
+              <a:srgbClr val="ECC680"/>
             </a:solidFill>
           </a:ln>
         </p:spPr>
@@ -24929,10 +24928,23 @@
           </a:fontRef>
         </p:style>
         <p:txBody>
-          <a:bodyPr rtlCol="0" anchor="ctr"/>
-          <a:lstStyle/>
-          <a:p>
-            <a:pPr algn="ctr"/>
+          <a:bodyPr rtlCol="0" anchor="ctr" wrap="square" lIns="73152" rIns="73152" tIns="36576" bIns="36576"/>
+          <a:lstStyle/>
+          <a:p>
+            <a:pPr algn="ctr">
+              <a:spcAft>
+                <a:spcPts val="0"/>
+              </a:spcAft>
+              <a:defRPr sz="2300" b="1">
+                <a:solidFill>
+                  <a:srgbClr val="122C4E"/>
+                </a:solidFill>
+                <a:latin typeface="Noto Sans CJK KR"/>
+              </a:defRPr>
+            </a:pPr>
+            <a:r>
+              <a:t>front_half_angle_deg를 15°와 45°로 각각 실행해 장애물 판정 영역이 어떻게 달라지는지 비교한다.</a:t>
+            </a:r>
           </a:p>
         </p:txBody>
       </p:sp>
@@ -24944,111 +24956,8 @@
         </p:nvSpPr>
         <p:spPr>
           <a:xfrm>
-            <a:off x="896112" y="1993392"/>
-            <a:ext cx="10332720" cy="2971800"/>
-          </a:xfrm>
-          <a:prstGeom prst="rect">
-            <a:avLst/>
-          </a:prstGeom>
-          <a:noFill/>
-        </p:spPr>
-        <p:txBody>
-          <a:bodyPr wrap="square" lIns="109728" rIns="109728">
-            <a:spAutoFit/>
-          </a:bodyPr>
-          <a:lstStyle/>
-          <a:p>
-            <a:pPr>
-              <a:spcAft>
-                <a:spcPts val="800"/>
-              </a:spcAft>
-              <a:defRPr sz="1800">
-                <a:solidFill>
-                  <a:srgbClr val="122C4E"/>
-                </a:solidFill>
-                <a:latin typeface="Noto Sans CJK KR"/>
-              </a:defRPr>
-            </a:pPr>
-            <a:r>
-              <a:t>• □ 완료 화면: /scan frame·RViz point·/obstacle_distance 출력이 장애물 위치에 반응한다.</a:t>
-            </a:r>
-          </a:p>
-          <a:p>
-            <a:pPr>
-              <a:spcAft>
-                <a:spcPts val="800"/>
-              </a:spcAft>
-              <a:defRPr sz="1800">
-                <a:solidFill>
-                  <a:srgbClr val="122C4E"/>
-                </a:solidFill>
-                <a:latin typeface="Noto Sans CJK KR"/>
-              </a:defRPr>
-            </a:pPr>
-            <a:r>
-              <a:t>• □ Complete 파일: blocks/D_sensors/M13_lidar_sensor/complete/</a:t>
-            </a:r>
-          </a:p>
-          <a:p>
-            <a:pPr>
-              <a:spcAft>
-                <a:spcPts val="800"/>
-              </a:spcAft>
-              <a:defRPr sz="1800">
-                <a:solidFill>
-                  <a:srgbClr val="122C4E"/>
-                </a:solidFill>
-                <a:latin typeface="Noto Sans CJK KR"/>
-              </a:defRPr>
-            </a:pPr>
-            <a:r>
-              <a:t>• □ 정상 로그·캡처: logs/validation.log, screenshots/validation_terminal.png</a:t>
-            </a:r>
-          </a:p>
-          <a:p>
-            <a:pPr>
-              <a:spcAft>
-                <a:spcPts val="800"/>
-              </a:spcAft>
-              <a:defRPr sz="1800">
-                <a:solidFill>
-                  <a:srgbClr val="122C4E"/>
-                </a:solidFill>
-                <a:latin typeface="Noto Sans CJK KR"/>
-              </a:defRPr>
-            </a:pPr>
-            <a:r>
-              <a:t>• □ 버전 식별: CHECKSUM_or_TAG.txt의 SHA-256 manifest</a:t>
-            </a:r>
-          </a:p>
-          <a:p>
-            <a:pPr>
-              <a:spcAft>
-                <a:spcPts val="800"/>
-              </a:spcAft>
-              <a:defRPr sz="1800">
-                <a:solidFill>
-                  <a:srgbClr val="122C4E"/>
-                </a:solidFill>
-                <a:latin typeface="Noto Sans CJK KR"/>
-              </a:defRPr>
-            </a:pPr>
-            <a:r>
-              <a:t>• □ 다음 시작 조건: M14 IMU</a:t>
-            </a:r>
-          </a:p>
-        </p:txBody>
-      </p:sp>
-      <p:sp>
-        <p:nvSpPr>
-          <p:cNvPr id="9" name="TextBox 8"/>
-          <p:cNvSpPr txBox="1"/>
-          <p:nvPr/>
-        </p:nvSpPr>
-        <p:spPr>
-          <a:xfrm>
-            <a:off x="868680" y="5596128"/>
-            <a:ext cx="10515600" cy="338328"/>
+            <a:off x="877824" y="4590288"/>
+            <a:ext cx="10241280" cy="594360"/>
           </a:xfrm>
           <a:prstGeom prst="rect">
             <a:avLst/>
@@ -25065,15 +24974,15 @@
               <a:spcAft>
                 <a:spcPts val="0"/>
               </a:spcAft>
-              <a:defRPr sz="1700" b="1">
-                <a:solidFill>
-                  <a:srgbClr val="2A8B5A"/>
-                </a:solidFill>
-                <a:latin typeface="Noto Sans CJK KR"/>
-              </a:defRPr>
-            </a:pPr>
-            <a:r>
-              <a:t>다음 모듈을 시작하기 전, 이 슬라이드의 Complete와 다음 모듈의 Starter를 비교합니다.</a:t>
+              <a:defRPr sz="1900" b="1">
+                <a:solidFill>
+                  <a:srgbClr val="DB7E22"/>
+                </a:solidFill>
+                <a:latin typeface="Noto Sans CJK KR"/>
+              </a:defRPr>
+            </a:pPr>
+            <a:r>
+              <a:t>기록할 것: 바꾼 값(단위) · 기대한 변화 · 실제 출력/화면 · 원래 값으로 되돌린 결과</a:t>
             </a:r>
           </a:p>
         </p:txBody>
@@ -25130,6 +25039,425 @@
               </a:defRPr>
             </a:pPr>
             <a:r>
+              <a:t>체크포인트를 저장하고 다음 모듈로 넘긴다</a:t>
+            </a:r>
+          </a:p>
+        </p:txBody>
+      </p:sp>
+      <p:sp>
+        <p:nvSpPr>
+          <p:cNvPr id="3" name="TextBox 2"/>
+          <p:cNvSpPr txBox="1"/>
+          <p:nvPr/>
+        </p:nvSpPr>
+        <p:spPr>
+          <a:xfrm>
+            <a:off x="603504" y="859536"/>
+            <a:ext cx="10698480" cy="292608"/>
+          </a:xfrm>
+          <a:prstGeom prst="rect">
+            <a:avLst/>
+          </a:prstGeom>
+          <a:noFill/>
+        </p:spPr>
+        <p:txBody>
+          <a:bodyPr wrap="square" lIns="73152" rIns="73152" tIns="36576" bIns="36576">
+            <a:spAutoFit/>
+          </a:bodyPr>
+          <a:lstStyle/>
+          <a:p>
+            <a:pPr algn="l">
+              <a:spcAft>
+                <a:spcPts val="0"/>
+              </a:spcAft>
+              <a:defRPr sz="1700" b="0">
+                <a:solidFill>
+                  <a:srgbClr val="5C6672"/>
+                </a:solidFill>
+                <a:latin typeface="Noto Sans CJK KR"/>
+              </a:defRPr>
+            </a:pPr>
+            <a:r>
+              <a:t>현재 Complete는 다음 Starter의 기준선입니다.</a:t>
+            </a:r>
+          </a:p>
+        </p:txBody>
+      </p:sp>
+      <p:sp>
+        <p:nvSpPr>
+          <p:cNvPr id="4" name="TextBox 3"/>
+          <p:cNvSpPr txBox="1"/>
+          <p:nvPr/>
+        </p:nvSpPr>
+        <p:spPr>
+          <a:xfrm>
+            <a:off x="530352" y="6510528"/>
+            <a:ext cx="7772400" cy="201168"/>
+          </a:xfrm>
+          <a:prstGeom prst="rect">
+            <a:avLst/>
+          </a:prstGeom>
+          <a:noFill/>
+        </p:spPr>
+        <p:txBody>
+          <a:bodyPr wrap="square" lIns="73152" rIns="73152" tIns="36576" bIns="36576">
+            <a:spAutoFit/>
+          </a:bodyPr>
+          <a:lstStyle/>
+          <a:p>
+            <a:pPr algn="l">
+              <a:spcAft>
+                <a:spcPts val="0"/>
+              </a:spcAft>
+              <a:defRPr sz="1000" b="0">
+                <a:solidFill>
+                  <a:srgbClr val="5C6672"/>
+                </a:solidFill>
+                <a:latin typeface="Noto Sans CJK KR"/>
+              </a:defRPr>
+            </a:pPr>
+            <a:r>
+              <a:t>ROS 2 Jazzy · Gazebo Harmonic · M13 · 따라 하기형 AGV 실습</a:t>
+            </a:r>
+          </a:p>
+        </p:txBody>
+      </p:sp>
+      <p:sp>
+        <p:nvSpPr>
+          <p:cNvPr id="5" name="TextBox 4"/>
+          <p:cNvSpPr txBox="1"/>
+          <p:nvPr/>
+        </p:nvSpPr>
+        <p:spPr>
+          <a:xfrm>
+            <a:off x="9144000" y="6510528"/>
+            <a:ext cx="2468880" cy="201168"/>
+          </a:xfrm>
+          <a:prstGeom prst="rect">
+            <a:avLst/>
+          </a:prstGeom>
+          <a:noFill/>
+        </p:spPr>
+        <p:txBody>
+          <a:bodyPr wrap="square" lIns="73152" rIns="73152" tIns="36576" bIns="36576">
+            <a:spAutoFit/>
+          </a:bodyPr>
+          <a:lstStyle/>
+          <a:p>
+            <a:pPr algn="r">
+              <a:spcAft>
+                <a:spcPts val="0"/>
+              </a:spcAft>
+              <a:defRPr sz="1000" b="0">
+                <a:solidFill>
+                  <a:srgbClr val="5C6672"/>
+                </a:solidFill>
+                <a:latin typeface="Noto Sans CJK KR"/>
+              </a:defRPr>
+            </a:pPr>
+            <a:r>
+              <a:t>명령·파일 경로는 슬라이드에서 복사 가능</a:t>
+            </a:r>
+          </a:p>
+        </p:txBody>
+      </p:sp>
+      <p:sp>
+        <p:nvSpPr>
+          <p:cNvPr id="6" name="Rectangle 5"/>
+          <p:cNvSpPr/>
+          <p:nvPr/>
+        </p:nvSpPr>
+        <p:spPr>
+          <a:xfrm>
+            <a:off x="566928" y="1188720"/>
+            <a:ext cx="11064240" cy="347472"/>
+          </a:xfrm>
+          <a:prstGeom prst="rect">
+            <a:avLst/>
+          </a:prstGeom>
+          <a:solidFill>
+            <a:srgbClr val="F4F7FB"/>
+          </a:solidFill>
+          <a:ln>
+            <a:solidFill>
+              <a:srgbClr val="F4F7FB"/>
+            </a:solidFill>
+          </a:ln>
+        </p:spPr>
+        <p:style>
+          <a:lnRef idx="1">
+            <a:schemeClr val="accent1"/>
+          </a:lnRef>
+          <a:fillRef idx="3">
+            <a:schemeClr val="accent1"/>
+          </a:fillRef>
+          <a:effectRef idx="2">
+            <a:schemeClr val="accent1"/>
+          </a:effectRef>
+          <a:fontRef idx="minor">
+            <a:schemeClr val="lt1"/>
+          </a:fontRef>
+        </p:style>
+        <p:txBody>
+          <a:bodyPr rtlCol="0" anchor="ctr" wrap="square" lIns="73152" rIns="73152" tIns="36576" bIns="36576"/>
+          <a:lstStyle/>
+          <a:p>
+            <a:pPr algn="l">
+              <a:spcAft>
+                <a:spcPts val="0"/>
+              </a:spcAft>
+              <a:defRPr sz="1300" b="1">
+                <a:solidFill>
+                  <a:srgbClr val="122C4E"/>
+                </a:solidFill>
+                <a:latin typeface="Noto Sans CJK KR"/>
+              </a:defRPr>
+            </a:pPr>
+            <a:r>
+              <a:t>현재 단계 체크포인트    |    현재 폴더 ~/ros2_curri/agv_ws    |    현재 터미널</a:t>
+            </a:r>
+          </a:p>
+        </p:txBody>
+      </p:sp>
+      <p:sp>
+        <p:nvSpPr>
+          <p:cNvPr id="7" name="Rounded Rectangle 6"/>
+          <p:cNvSpPr/>
+          <p:nvPr/>
+        </p:nvSpPr>
+        <p:spPr>
+          <a:xfrm>
+            <a:off x="685800" y="1737360"/>
+            <a:ext cx="10972800" cy="3611880"/>
+          </a:xfrm>
+          <a:prstGeom prst="roundRect">
+            <a:avLst/>
+          </a:prstGeom>
+          <a:solidFill>
+            <a:srgbClr val="F4F7FB"/>
+          </a:solidFill>
+          <a:ln>
+            <a:solidFill>
+              <a:srgbClr val="D2DCE8"/>
+            </a:solidFill>
+          </a:ln>
+        </p:spPr>
+        <p:style>
+          <a:lnRef idx="1">
+            <a:schemeClr val="accent1"/>
+          </a:lnRef>
+          <a:fillRef idx="3">
+            <a:schemeClr val="accent1"/>
+          </a:fillRef>
+          <a:effectRef idx="2">
+            <a:schemeClr val="accent1"/>
+          </a:effectRef>
+          <a:fontRef idx="minor">
+            <a:schemeClr val="lt1"/>
+          </a:fontRef>
+        </p:style>
+        <p:txBody>
+          <a:bodyPr rtlCol="0" anchor="ctr"/>
+          <a:lstStyle/>
+          <a:p>
+            <a:pPr algn="ctr"/>
+          </a:p>
+        </p:txBody>
+      </p:sp>
+      <p:sp>
+        <p:nvSpPr>
+          <p:cNvPr id="8" name="TextBox 7"/>
+          <p:cNvSpPr txBox="1"/>
+          <p:nvPr/>
+        </p:nvSpPr>
+        <p:spPr>
+          <a:xfrm>
+            <a:off x="896112" y="1993392"/>
+            <a:ext cx="10332720" cy="2971800"/>
+          </a:xfrm>
+          <a:prstGeom prst="rect">
+            <a:avLst/>
+          </a:prstGeom>
+          <a:noFill/>
+        </p:spPr>
+        <p:txBody>
+          <a:bodyPr wrap="square" lIns="109728" rIns="109728">
+            <a:spAutoFit/>
+          </a:bodyPr>
+          <a:lstStyle/>
+          <a:p>
+            <a:pPr>
+              <a:spcAft>
+                <a:spcPts val="800"/>
+              </a:spcAft>
+              <a:defRPr sz="1800">
+                <a:solidFill>
+                  <a:srgbClr val="122C4E"/>
+                </a:solidFill>
+                <a:latin typeface="Noto Sans CJK KR"/>
+              </a:defRPr>
+            </a:pPr>
+            <a:r>
+              <a:t>• □ 완료 화면: /scan frame·RViz point·/obstacle_distance 출력이 장애물 위치에 반응한다.</a:t>
+            </a:r>
+          </a:p>
+          <a:p>
+            <a:pPr>
+              <a:spcAft>
+                <a:spcPts val="800"/>
+              </a:spcAft>
+              <a:defRPr sz="1800">
+                <a:solidFill>
+                  <a:srgbClr val="122C4E"/>
+                </a:solidFill>
+                <a:latin typeface="Noto Sans CJK KR"/>
+              </a:defRPr>
+            </a:pPr>
+            <a:r>
+              <a:t>• □ Complete 파일: blocks/D_sensors/M13_lidar_sensor/complete/</a:t>
+            </a:r>
+          </a:p>
+          <a:p>
+            <a:pPr>
+              <a:spcAft>
+                <a:spcPts val="800"/>
+              </a:spcAft>
+              <a:defRPr sz="1800">
+                <a:solidFill>
+                  <a:srgbClr val="122C4E"/>
+                </a:solidFill>
+                <a:latin typeface="Noto Sans CJK KR"/>
+              </a:defRPr>
+            </a:pPr>
+            <a:r>
+              <a:t>• □ 정상 로그·캡처: logs/validation.log, screenshots/validation_terminal.png</a:t>
+            </a:r>
+          </a:p>
+          <a:p>
+            <a:pPr>
+              <a:spcAft>
+                <a:spcPts val="800"/>
+              </a:spcAft>
+              <a:defRPr sz="1800">
+                <a:solidFill>
+                  <a:srgbClr val="122C4E"/>
+                </a:solidFill>
+                <a:latin typeface="Noto Sans CJK KR"/>
+              </a:defRPr>
+            </a:pPr>
+            <a:r>
+              <a:t>• □ 버전 식별: CHECKSUM_or_TAG.txt의 SHA-256 manifest</a:t>
+            </a:r>
+          </a:p>
+          <a:p>
+            <a:pPr>
+              <a:spcAft>
+                <a:spcPts val="800"/>
+              </a:spcAft>
+              <a:defRPr sz="1800">
+                <a:solidFill>
+                  <a:srgbClr val="122C4E"/>
+                </a:solidFill>
+                <a:latin typeface="Noto Sans CJK KR"/>
+              </a:defRPr>
+            </a:pPr>
+            <a:r>
+              <a:t>• □ 다음 시작 조건: M14 IMU</a:t>
+            </a:r>
+          </a:p>
+        </p:txBody>
+      </p:sp>
+      <p:sp>
+        <p:nvSpPr>
+          <p:cNvPr id="9" name="TextBox 8"/>
+          <p:cNvSpPr txBox="1"/>
+          <p:nvPr/>
+        </p:nvSpPr>
+        <p:spPr>
+          <a:xfrm>
+            <a:off x="868680" y="5596128"/>
+            <a:ext cx="10515600" cy="338328"/>
+          </a:xfrm>
+          <a:prstGeom prst="rect">
+            <a:avLst/>
+          </a:prstGeom>
+          <a:noFill/>
+        </p:spPr>
+        <p:txBody>
+          <a:bodyPr wrap="square" lIns="73152" rIns="73152" tIns="36576" bIns="36576">
+            <a:spAutoFit/>
+          </a:bodyPr>
+          <a:lstStyle/>
+          <a:p>
+            <a:pPr algn="ctr">
+              <a:spcAft>
+                <a:spcPts val="0"/>
+              </a:spcAft>
+              <a:defRPr sz="1700" b="1">
+                <a:solidFill>
+                  <a:srgbClr val="2A8B5A"/>
+                </a:solidFill>
+                <a:latin typeface="Noto Sans CJK KR"/>
+              </a:defRPr>
+            </a:pPr>
+            <a:r>
+              <a:t>다음 모듈을 시작하기 전, 이 슬라이드의 Complete와 다음 모듈의 Starter를 비교합니다.</a:t>
+            </a:r>
+          </a:p>
+        </p:txBody>
+      </p:sp>
+    </p:spTree>
+  </p:cSld>
+  <p:clrMapOvr>
+    <a:masterClrMapping/>
+  </p:clrMapOvr>
+</p:sld>
+</file>
+
+<file path=ppt/slides/slide46.xml><?xml version="1.0" encoding="utf-8"?>
+<p:sld xmlns:a="http://schemas.openxmlformats.org/drawingml/2006/main" xmlns:p="http://schemas.openxmlformats.org/presentationml/2006/main" xmlns:r="http://schemas.openxmlformats.org/officeDocument/2006/relationships">
+  <p:cSld>
+    <p:spTree>
+      <p:nvGrpSpPr>
+        <p:cNvPr id="1" name=""/>
+        <p:cNvGrpSpPr/>
+        <p:nvPr/>
+      </p:nvGrpSpPr>
+      <p:grpSpPr/>
+      <p:sp>
+        <p:nvSpPr>
+          <p:cNvPr id="2" name="TextBox 1"/>
+          <p:cNvSpPr txBox="1"/>
+          <p:nvPr/>
+        </p:nvSpPr>
+        <p:spPr>
+          <a:xfrm>
+            <a:off x="566928" y="347472"/>
+            <a:ext cx="10881360" cy="438912"/>
+          </a:xfrm>
+          <a:prstGeom prst="rect">
+            <a:avLst/>
+          </a:prstGeom>
+          <a:noFill/>
+        </p:spPr>
+        <p:txBody>
+          <a:bodyPr wrap="square" lIns="73152" rIns="73152" tIns="36576" bIns="36576">
+            <a:spAutoFit/>
+          </a:bodyPr>
+          <a:lstStyle/>
+          <a:p>
+            <a:pPr algn="l">
+              <a:spcAft>
+                <a:spcPts val="0"/>
+              </a:spcAft>
+              <a:defRPr sz="3200" b="1">
+                <a:solidFill>
+                  <a:srgbClr val="122C4E"/>
+                </a:solidFill>
+                <a:latin typeface="Noto Sans CJK KR"/>
+              </a:defRPr>
+            </a:pPr>
+            <a:r>
               <a:t>공식 참고 자료</a:t>
             </a:r>
           </a:p>
@@ -26390,7 +26718,7 @@
               </a:defRPr>
             </a:pPr>
             <a:r>
-              <a:t>~/agv_ws/src/</a:t>
+              <a:t>~/ros2_curri/agv_ws/src/</a:t>
             </a:r>
             <a:br/>
             <a:r>
@@ -26673,7 +27001,7 @@
               </a:defRPr>
             </a:pPr>
             <a:r>
-              <a:t>현재 단계 1/2    |    현재 폴더 ~/agv_ws    |    현재 터미널</a:t>
+              <a:t>현재 단계 1/2    |    현재 폴더 ~/ros2_curri/agv_ws    |    현재 터미널</a:t>
             </a:r>
           </a:p>
         </p:txBody>
@@ -27123,7 +27451,7 @@
               </a:defRPr>
             </a:pPr>
             <a:r>
-              <a:t>현재 단계 2/2    |    현재 폴더 ~/agv_ws    |    현재 터미널</a:t>
+              <a:t>현재 단계 2/2    |    현재 폴더 ~/ros2_curri/agv_ws    |    현재 터미널</a:t>
             </a:r>
           </a:p>
         </p:txBody>
@@ -27259,7 +27587,7 @@
               </a:defRPr>
             </a:pPr>
             <a:r>
-              <a:t>source ~/agv_ws/install/setup.bash</a:t>
+              <a:t>source ~/ros2_curri/agv_ws/install/setup.bash</a:t>
             </a:r>
             <a:br/>
             <a:r>
@@ -27441,7 +27769,7 @@
               </a:defRPr>
             </a:pPr>
             <a:r>
-              <a:t>~/agv_ws/src/agv_gazebo/models/agv/model.sdf</a:t>
+              <a:t>~/ros2_curri/agv_ws/src/agv_gazebo/models/agv/model.sdf</a:t>
             </a:r>
           </a:p>
         </p:txBody>
@@ -27577,7 +27905,7 @@
               </a:defRPr>
             </a:pPr>
             <a:r>
-              <a:t>현재 단계 3/27    |    현재 폴더 ~/agv_ws    |    현재 터미널</a:t>
+              <a:t>현재 단계 3/27    |    현재 폴더 ~/ros2_curri/agv_ws    |    현재 터미널</a:t>
             </a:r>
           </a:p>
         </p:txBody>
@@ -27674,11 +28002,11 @@
               </a:defRPr>
             </a:pPr>
             <a:r>
-              <a:t>파일 생성: mkdir -p ~/agv_ws/src/agv_gazebo/models/agv</a:t>
-            </a:r>
-            <a:br/>
-            <a:r>
-              <a:t>파일 열기: nano ~/agv_ws/src/agv_gazebo/models/agv/model.sdf</a:t>
+              <a:t>파일 생성: mkdir -p ~/ros2_curri/agv_ws/src/agv_gazebo/models/agv</a:t>
+            </a:r>
+            <a:br/>
+            <a:r>
+              <a:t>파일 열기: nano ~/ros2_curri/agv_ws/src/agv_gazebo/models/agv/model.sdf</a:t>
             </a:r>
           </a:p>
         </p:txBody>

--- a/blocks/D_sensors/M13_lidar_sensor/M13_2D_LiDAR_LaserScan.pptx
+++ b/blocks/D_sensors/M13_lidar_sensor/M13_2D_LiDAR_LaserScan.pptx
@@ -9553,7 +9553,7 @@
               <a:spcAft>
                 <a:spcPts val="0"/>
               </a:spcAft>
-              <a:defRPr sz="1800" b="1">
+              <a:defRPr sz="1400" b="1">
                 <a:solidFill>
                   <a:srgbClr val="FFFFFF"/>
                 </a:solidFill>
@@ -9561,7 +9561,7 @@
               </a:defRPr>
             </a:pPr>
             <a:r>
-              <a:t>M13 · Block D · ROS 2 + Gazebo Sim AGV</a:t>
+              <a:t>ROS 2 기반 AGV End-to-End 개발 커리큘럼 · M13 · Block D</a:t>
             </a:r>
           </a:p>
         </p:txBody>
@@ -9771,7 +9771,7 @@
               <a:spcAft>
                 <a:spcPts val="0"/>
               </a:spcAft>
-              <a:defRPr sz="1000" b="0">
+              <a:defRPr sz="900" b="0">
                 <a:solidFill>
                   <a:srgbClr val="5C6672"/>
                 </a:solidFill>
@@ -9779,7 +9779,7 @@
               </a:defRPr>
             </a:pPr>
             <a:r>
-              <a:t>ROS 2 Jazzy · Gazebo Harmonic · M13 · 따라 하기형 AGV 실습</a:t>
+              <a:t>ROS 2 기반 AGV End-to-End 개발 커리큘럼 · M13 · Block D</a:t>
             </a:r>
           </a:p>
         </p:txBody>
@@ -9945,7 +9945,7 @@
               <a:spcAft>
                 <a:spcPts val="0"/>
               </a:spcAft>
-              <a:defRPr sz="1000" b="0">
+              <a:defRPr sz="900" b="0">
                 <a:solidFill>
                   <a:srgbClr val="5C6672"/>
                 </a:solidFill>
@@ -9953,7 +9953,7 @@
               </a:defRPr>
             </a:pPr>
             <a:r>
-              <a:t>ROS 2 Jazzy · Gazebo Harmonic · M13 · 따라 하기형 AGV 실습</a:t>
+              <a:t>ROS 2 기반 AGV End-to-End 개발 커리큘럼 · M13 · Block D</a:t>
             </a:r>
           </a:p>
         </p:txBody>
@@ -10821,7 +10821,7 @@
               <a:spcAft>
                 <a:spcPts val="0"/>
               </a:spcAft>
-              <a:defRPr sz="1000" b="0">
+              <a:defRPr sz="900" b="0">
                 <a:solidFill>
                   <a:srgbClr val="5C6672"/>
                 </a:solidFill>
@@ -10829,7 +10829,7 @@
               </a:defRPr>
             </a:pPr>
             <a:r>
-              <a:t>ROS 2 Jazzy · Gazebo Harmonic · M13 · 따라 하기형 AGV 실습</a:t>
+              <a:t>ROS 2 기반 AGV End-to-End 개발 커리큘럼 · M13 · Block D</a:t>
             </a:r>
           </a:p>
         </p:txBody>
@@ -11375,7 +11375,7 @@
               <a:spcAft>
                 <a:spcPts val="0"/>
               </a:spcAft>
-              <a:defRPr sz="1000" b="0">
+              <a:defRPr sz="900" b="0">
                 <a:solidFill>
                   <a:srgbClr val="5C6672"/>
                 </a:solidFill>
@@ -11383,7 +11383,7 @@
               </a:defRPr>
             </a:pPr>
             <a:r>
-              <a:t>ROS 2 Jazzy · Gazebo Harmonic · M13 · 따라 하기형 AGV 실습</a:t>
+              <a:t>ROS 2 기반 AGV End-to-End 개발 커리큘럼 · M13 · Block D</a:t>
             </a:r>
           </a:p>
         </p:txBody>
@@ -12138,7 +12138,7 @@
               <a:spcAft>
                 <a:spcPts val="0"/>
               </a:spcAft>
-              <a:defRPr sz="1000" b="0">
+              <a:defRPr sz="900" b="0">
                 <a:solidFill>
                   <a:srgbClr val="5C6672"/>
                 </a:solidFill>
@@ -12146,7 +12146,7 @@
               </a:defRPr>
             </a:pPr>
             <a:r>
-              <a:t>ROS 2 Jazzy · Gazebo Harmonic · M13 · 따라 하기형 AGV 실습</a:t>
+              <a:t>ROS 2 기반 AGV End-to-End 개발 커리큘럼 · M13 · Block D</a:t>
             </a:r>
           </a:p>
         </p:txBody>
@@ -12666,7 +12666,7 @@
               <a:spcAft>
                 <a:spcPts val="0"/>
               </a:spcAft>
-              <a:defRPr sz="1000" b="0">
+              <a:defRPr sz="900" b="0">
                 <a:solidFill>
                   <a:srgbClr val="5C6672"/>
                 </a:solidFill>
@@ -12674,7 +12674,7 @@
               </a:defRPr>
             </a:pPr>
             <a:r>
-              <a:t>ROS 2 Jazzy · Gazebo Harmonic · M13 · 따라 하기형 AGV 실습</a:t>
+              <a:t>ROS 2 기반 AGV End-to-End 개발 커리큘럼 · M13 · Block D</a:t>
             </a:r>
           </a:p>
         </p:txBody>
@@ -13455,7 +13455,7 @@
               <a:spcAft>
                 <a:spcPts val="0"/>
               </a:spcAft>
-              <a:defRPr sz="1000" b="0">
+              <a:defRPr sz="900" b="0">
                 <a:solidFill>
                   <a:srgbClr val="5C6672"/>
                 </a:solidFill>
@@ -13463,7 +13463,7 @@
               </a:defRPr>
             </a:pPr>
             <a:r>
-              <a:t>ROS 2 Jazzy · Gazebo Harmonic · M13 · 따라 하기형 AGV 실습</a:t>
+              <a:t>ROS 2 기반 AGV End-to-End 개발 커리큘럼 · M13 · Block D</a:t>
             </a:r>
           </a:p>
         </p:txBody>
@@ -14244,7 +14244,7 @@
               <a:spcAft>
                 <a:spcPts val="0"/>
               </a:spcAft>
-              <a:defRPr sz="1000" b="0">
+              <a:defRPr sz="900" b="0">
                 <a:solidFill>
                   <a:srgbClr val="5C6672"/>
                 </a:solidFill>
@@ -14252,7 +14252,7 @@
               </a:defRPr>
             </a:pPr>
             <a:r>
-              <a:t>ROS 2 Jazzy · Gazebo Harmonic · M13 · 따라 하기형 AGV 실습</a:t>
+              <a:t>ROS 2 기반 AGV End-to-End 개발 커리큘럼 · M13 · Block D</a:t>
             </a:r>
           </a:p>
         </p:txBody>
@@ -15033,7 +15033,7 @@
               <a:spcAft>
                 <a:spcPts val="0"/>
               </a:spcAft>
-              <a:defRPr sz="1000" b="0">
+              <a:defRPr sz="900" b="0">
                 <a:solidFill>
                   <a:srgbClr val="5C6672"/>
                 </a:solidFill>
@@ -15041,7 +15041,7 @@
               </a:defRPr>
             </a:pPr>
             <a:r>
-              <a:t>ROS 2 Jazzy · Gazebo Harmonic · M13 · 따라 하기형 AGV 실습</a:t>
+              <a:t>ROS 2 기반 AGV End-to-End 개발 커리큘럼 · M13 · Block D</a:t>
             </a:r>
           </a:p>
         </p:txBody>
@@ -15822,7 +15822,7 @@
               <a:spcAft>
                 <a:spcPts val="0"/>
               </a:spcAft>
-              <a:defRPr sz="1000" b="0">
+              <a:defRPr sz="900" b="0">
                 <a:solidFill>
                   <a:srgbClr val="5C6672"/>
                 </a:solidFill>
@@ -15830,7 +15830,7 @@
               </a:defRPr>
             </a:pPr>
             <a:r>
-              <a:t>ROS 2 Jazzy · Gazebo Harmonic · M13 · 따라 하기형 AGV 실습</a:t>
+              <a:t>ROS 2 기반 AGV End-to-End 개발 커리큘럼 · M13 · Block D</a:t>
             </a:r>
           </a:p>
         </p:txBody>
@@ -16391,7 +16391,7 @@
               <a:spcAft>
                 <a:spcPts val="0"/>
               </a:spcAft>
-              <a:defRPr sz="1000" b="0">
+              <a:defRPr sz="900" b="0">
                 <a:solidFill>
                   <a:srgbClr val="5C6672"/>
                 </a:solidFill>
@@ -16399,7 +16399,7 @@
               </a:defRPr>
             </a:pPr>
             <a:r>
-              <a:t>ROS 2 Jazzy · Gazebo Harmonic · M13 · 따라 하기형 AGV 실습</a:t>
+              <a:t>ROS 2 기반 AGV End-to-End 개발 커리큘럼 · M13 · Block D</a:t>
             </a:r>
           </a:p>
         </p:txBody>
@@ -16865,7 +16865,7 @@
               <a:spcAft>
                 <a:spcPts val="0"/>
               </a:spcAft>
-              <a:defRPr sz="1000" b="0">
+              <a:defRPr sz="900" b="0">
                 <a:solidFill>
                   <a:srgbClr val="5C6672"/>
                 </a:solidFill>
@@ -16873,7 +16873,7 @@
               </a:defRPr>
             </a:pPr>
             <a:r>
-              <a:t>ROS 2 Jazzy · Gazebo Harmonic · M13 · 따라 하기형 AGV 실습</a:t>
+              <a:t>ROS 2 기반 AGV End-to-End 개발 커리큘럼 · M13 · Block D</a:t>
             </a:r>
           </a:p>
         </p:txBody>
@@ -17326,7 +17326,7 @@
               <a:spcAft>
                 <a:spcPts val="0"/>
               </a:spcAft>
-              <a:defRPr sz="1000" b="0">
+              <a:defRPr sz="900" b="0">
                 <a:solidFill>
                   <a:srgbClr val="5C6672"/>
                 </a:solidFill>
@@ -17334,7 +17334,7 @@
               </a:defRPr>
             </a:pPr>
             <a:r>
-              <a:t>ROS 2 Jazzy · Gazebo Harmonic · M13 · 따라 하기형 AGV 실습</a:t>
+              <a:t>ROS 2 기반 AGV End-to-End 개발 커리큘럼 · M13 · Block D</a:t>
             </a:r>
           </a:p>
         </p:txBody>
@@ -17800,7 +17800,7 @@
               <a:spcAft>
                 <a:spcPts val="0"/>
               </a:spcAft>
-              <a:defRPr sz="1000" b="0">
+              <a:defRPr sz="900" b="0">
                 <a:solidFill>
                   <a:srgbClr val="5C6672"/>
                 </a:solidFill>
@@ -17808,7 +17808,7 @@
               </a:defRPr>
             </a:pPr>
             <a:r>
-              <a:t>ROS 2 Jazzy · Gazebo Harmonic · M13 · 따라 하기형 AGV 실습</a:t>
+              <a:t>ROS 2 기반 AGV End-to-End 개발 커리큘럼 · M13 · Block D</a:t>
             </a:r>
           </a:p>
         </p:txBody>
@@ -18274,7 +18274,7 @@
               <a:spcAft>
                 <a:spcPts val="0"/>
               </a:spcAft>
-              <a:defRPr sz="1000" b="0">
+              <a:defRPr sz="900" b="0">
                 <a:solidFill>
                   <a:srgbClr val="5C6672"/>
                 </a:solidFill>
@@ -18282,7 +18282,7 @@
               </a:defRPr>
             </a:pPr>
             <a:r>
-              <a:t>ROS 2 Jazzy · Gazebo Harmonic · M13 · 따라 하기형 AGV 실습</a:t>
+              <a:t>ROS 2 기반 AGV End-to-End 개발 커리큘럼 · M13 · Block D</a:t>
             </a:r>
           </a:p>
         </p:txBody>
@@ -18748,7 +18748,7 @@
               <a:spcAft>
                 <a:spcPts val="0"/>
               </a:spcAft>
-              <a:defRPr sz="1000" b="0">
+              <a:defRPr sz="900" b="0">
                 <a:solidFill>
                   <a:srgbClr val="5C6672"/>
                 </a:solidFill>
@@ -18756,7 +18756,7 @@
               </a:defRPr>
             </a:pPr>
             <a:r>
-              <a:t>ROS 2 Jazzy · Gazebo Harmonic · M13 · 따라 하기형 AGV 실습</a:t>
+              <a:t>ROS 2 기반 AGV End-to-End 개발 커리큘럼 · M13 · Block D</a:t>
             </a:r>
           </a:p>
         </p:txBody>
@@ -19222,7 +19222,7 @@
               <a:spcAft>
                 <a:spcPts val="0"/>
               </a:spcAft>
-              <a:defRPr sz="1000" b="0">
+              <a:defRPr sz="900" b="0">
                 <a:solidFill>
                   <a:srgbClr val="5C6672"/>
                 </a:solidFill>
@@ -19230,7 +19230,7 @@
               </a:defRPr>
             </a:pPr>
             <a:r>
-              <a:t>ROS 2 Jazzy · Gazebo Harmonic · M13 · 따라 하기형 AGV 실습</a:t>
+              <a:t>ROS 2 기반 AGV End-to-End 개발 커리큘럼 · M13 · Block D</a:t>
             </a:r>
           </a:p>
         </p:txBody>
@@ -19696,7 +19696,7 @@
               <a:spcAft>
                 <a:spcPts val="0"/>
               </a:spcAft>
-              <a:defRPr sz="1000" b="0">
+              <a:defRPr sz="900" b="0">
                 <a:solidFill>
                   <a:srgbClr val="5C6672"/>
                 </a:solidFill>
@@ -19704,7 +19704,7 @@
               </a:defRPr>
             </a:pPr>
             <a:r>
-              <a:t>ROS 2 Jazzy · Gazebo Harmonic · M13 · 따라 하기형 AGV 실습</a:t>
+              <a:t>ROS 2 기반 AGV End-to-End 개발 커리큘럼 · M13 · Block D</a:t>
             </a:r>
           </a:p>
         </p:txBody>
@@ -20170,7 +20170,7 @@
               <a:spcAft>
                 <a:spcPts val="0"/>
               </a:spcAft>
-              <a:defRPr sz="1000" b="0">
+              <a:defRPr sz="900" b="0">
                 <a:solidFill>
                   <a:srgbClr val="5C6672"/>
                 </a:solidFill>
@@ -20178,7 +20178,7 @@
               </a:defRPr>
             </a:pPr>
             <a:r>
-              <a:t>ROS 2 Jazzy · Gazebo Harmonic · M13 · 따라 하기형 AGV 실습</a:t>
+              <a:t>ROS 2 기반 AGV End-to-End 개발 커리큘럼 · M13 · Block D</a:t>
             </a:r>
           </a:p>
         </p:txBody>
@@ -20644,7 +20644,7 @@
               <a:spcAft>
                 <a:spcPts val="0"/>
               </a:spcAft>
-              <a:defRPr sz="1000" b="0">
+              <a:defRPr sz="900" b="0">
                 <a:solidFill>
                   <a:srgbClr val="5C6672"/>
                 </a:solidFill>
@@ -20652,7 +20652,7 @@
               </a:defRPr>
             </a:pPr>
             <a:r>
-              <a:t>ROS 2 Jazzy · Gazebo Harmonic · M13 · 따라 하기형 AGV 실습</a:t>
+              <a:t>ROS 2 기반 AGV End-to-End 개발 커리큘럼 · M13 · Block D</a:t>
             </a:r>
           </a:p>
         </p:txBody>
@@ -21118,7 +21118,7 @@
               <a:spcAft>
                 <a:spcPts val="0"/>
               </a:spcAft>
-              <a:defRPr sz="1000" b="0">
+              <a:defRPr sz="900" b="0">
                 <a:solidFill>
                   <a:srgbClr val="5C6672"/>
                 </a:solidFill>
@@ -21126,7 +21126,7 @@
               </a:defRPr>
             </a:pPr>
             <a:r>
-              <a:t>ROS 2 Jazzy · Gazebo Harmonic · M13 · 따라 하기형 AGV 실습</a:t>
+              <a:t>ROS 2 기반 AGV End-to-End 개발 커리큘럼 · M13 · Block D</a:t>
             </a:r>
           </a:p>
         </p:txBody>
@@ -21592,7 +21592,7 @@
               <a:spcAft>
                 <a:spcPts val="0"/>
               </a:spcAft>
-              <a:defRPr sz="1000" b="0">
+              <a:defRPr sz="900" b="0">
                 <a:solidFill>
                   <a:srgbClr val="5C6672"/>
                 </a:solidFill>
@@ -21600,7 +21600,7 @@
               </a:defRPr>
             </a:pPr>
             <a:r>
-              <a:t>ROS 2 Jazzy · Gazebo Harmonic · M13 · 따라 하기형 AGV 실습</a:t>
+              <a:t>ROS 2 기반 AGV End-to-End 개발 커리큘럼 · M13 · Block D</a:t>
             </a:r>
           </a:p>
         </p:txBody>
@@ -22066,7 +22066,7 @@
               <a:spcAft>
                 <a:spcPts val="0"/>
               </a:spcAft>
-              <a:defRPr sz="1000" b="0">
+              <a:defRPr sz="900" b="0">
                 <a:solidFill>
                   <a:srgbClr val="5C6672"/>
                 </a:solidFill>
@@ -22074,7 +22074,7 @@
               </a:defRPr>
             </a:pPr>
             <a:r>
-              <a:t>ROS 2 Jazzy · Gazebo Harmonic · M13 · 따라 하기형 AGV 실습</a:t>
+              <a:t>ROS 2 기반 AGV End-to-End 개발 커리큘럼 · M13 · Block D</a:t>
             </a:r>
           </a:p>
         </p:txBody>
@@ -22485,7 +22485,7 @@
               <a:spcAft>
                 <a:spcPts val="0"/>
               </a:spcAft>
-              <a:defRPr sz="1000" b="0">
+              <a:defRPr sz="900" b="0">
                 <a:solidFill>
                   <a:srgbClr val="5C6672"/>
                 </a:solidFill>
@@ -22493,7 +22493,7 @@
               </a:defRPr>
             </a:pPr>
             <a:r>
-              <a:t>ROS 2 Jazzy · Gazebo Harmonic · M13 · 따라 하기형 AGV 실습</a:t>
+              <a:t>ROS 2 기반 AGV End-to-End 개발 커리큘럼 · M13 · Block D</a:t>
             </a:r>
           </a:p>
         </p:txBody>
@@ -22959,7 +22959,7 @@
               <a:spcAft>
                 <a:spcPts val="0"/>
               </a:spcAft>
-              <a:defRPr sz="1000" b="0">
+              <a:defRPr sz="900" b="0">
                 <a:solidFill>
                   <a:srgbClr val="5C6672"/>
                 </a:solidFill>
@@ -22967,7 +22967,7 @@
               </a:defRPr>
             </a:pPr>
             <a:r>
-              <a:t>ROS 2 Jazzy · Gazebo Harmonic · M13 · 따라 하기형 AGV 실습</a:t>
+              <a:t>ROS 2 기반 AGV End-to-End 개발 커리큘럼 · M13 · Block D</a:t>
             </a:r>
           </a:p>
         </p:txBody>
@@ -23433,7 +23433,7 @@
               <a:spcAft>
                 <a:spcPts val="0"/>
               </a:spcAft>
-              <a:defRPr sz="1000" b="0">
+              <a:defRPr sz="900" b="0">
                 <a:solidFill>
                   <a:srgbClr val="5C6672"/>
                 </a:solidFill>
@@ -23441,7 +23441,7 @@
               </a:defRPr>
             </a:pPr>
             <a:r>
-              <a:t>ROS 2 Jazzy · Gazebo Harmonic · M13 · 따라 하기형 AGV 실습</a:t>
+              <a:t>ROS 2 기반 AGV End-to-End 개발 커리큘럼 · M13 · Block D</a:t>
             </a:r>
           </a:p>
         </p:txBody>
@@ -23907,7 +23907,7 @@
               <a:spcAft>
                 <a:spcPts val="0"/>
               </a:spcAft>
-              <a:defRPr sz="1000" b="0">
+              <a:defRPr sz="900" b="0">
                 <a:solidFill>
                   <a:srgbClr val="5C6672"/>
                 </a:solidFill>
@@ -23915,7 +23915,7 @@
               </a:defRPr>
             </a:pPr>
             <a:r>
-              <a:t>ROS 2 Jazzy · Gazebo Harmonic · M13 · 따라 하기형 AGV 실습</a:t>
+              <a:t>ROS 2 기반 AGV End-to-End 개발 커리큘럼 · M13 · Block D</a:t>
             </a:r>
           </a:p>
         </p:txBody>
@@ -24381,7 +24381,7 @@
               <a:spcAft>
                 <a:spcPts val="0"/>
               </a:spcAft>
-              <a:defRPr sz="1000" b="0">
+              <a:defRPr sz="900" b="0">
                 <a:solidFill>
                   <a:srgbClr val="5C6672"/>
                 </a:solidFill>
@@ -24389,7 +24389,7 @@
               </a:defRPr>
             </a:pPr>
             <a:r>
-              <a:t>ROS 2 Jazzy · Gazebo Harmonic · M13 · 따라 하기형 AGV 실습</a:t>
+              <a:t>ROS 2 기반 AGV End-to-End 개발 커리큘럼 · M13 · Block D</a:t>
             </a:r>
           </a:p>
         </p:txBody>
@@ -24855,7 +24855,7 @@
               <a:spcAft>
                 <a:spcPts val="0"/>
               </a:spcAft>
-              <a:defRPr sz="1000" b="0">
+              <a:defRPr sz="900" b="0">
                 <a:solidFill>
                   <a:srgbClr val="5C6672"/>
                 </a:solidFill>
@@ -24863,7 +24863,7 @@
               </a:defRPr>
             </a:pPr>
             <a:r>
-              <a:t>ROS 2 Jazzy · Gazebo Harmonic · M13 · 따라 하기형 AGV 실습</a:t>
+              <a:t>ROS 2 기반 AGV End-to-End 개발 커리큘럼 · M13 · Block D</a:t>
             </a:r>
           </a:p>
         </p:txBody>
@@ -25329,7 +25329,7 @@
               <a:spcAft>
                 <a:spcPts val="0"/>
               </a:spcAft>
-              <a:defRPr sz="1000" b="0">
+              <a:defRPr sz="900" b="0">
                 <a:solidFill>
                   <a:srgbClr val="5C6672"/>
                 </a:solidFill>
@@ -25337,7 +25337,7 @@
               </a:defRPr>
             </a:pPr>
             <a:r>
-              <a:t>ROS 2 Jazzy · Gazebo Harmonic · M13 · 따라 하기형 AGV 실습</a:t>
+              <a:t>ROS 2 기반 AGV End-to-End 개발 커리큘럼 · M13 · Block D</a:t>
             </a:r>
           </a:p>
         </p:txBody>
@@ -25803,7 +25803,7 @@
               <a:spcAft>
                 <a:spcPts val="0"/>
               </a:spcAft>
-              <a:defRPr sz="1000" b="0">
+              <a:defRPr sz="900" b="0">
                 <a:solidFill>
                   <a:srgbClr val="5C6672"/>
                 </a:solidFill>
@@ -25811,7 +25811,7 @@
               </a:defRPr>
             </a:pPr>
             <a:r>
-              <a:t>ROS 2 Jazzy · Gazebo Harmonic · M13 · 따라 하기형 AGV 실습</a:t>
+              <a:t>ROS 2 기반 AGV End-to-End 개발 커리큘럼 · M13 · Block D</a:t>
             </a:r>
           </a:p>
         </p:txBody>
@@ -26277,7 +26277,7 @@
               <a:spcAft>
                 <a:spcPts val="0"/>
               </a:spcAft>
-              <a:defRPr sz="1000" b="0">
+              <a:defRPr sz="900" b="0">
                 <a:solidFill>
                   <a:srgbClr val="5C6672"/>
                 </a:solidFill>
@@ -26285,7 +26285,7 @@
               </a:defRPr>
             </a:pPr>
             <a:r>
-              <a:t>ROS 2 Jazzy · Gazebo Harmonic · M13 · 따라 하기형 AGV 실습</a:t>
+              <a:t>ROS 2 기반 AGV End-to-End 개발 커리큘럼 · M13 · Block D</a:t>
             </a:r>
           </a:p>
         </p:txBody>
@@ -26751,7 +26751,7 @@
               <a:spcAft>
                 <a:spcPts val="0"/>
               </a:spcAft>
-              <a:defRPr sz="1000" b="0">
+              <a:defRPr sz="900" b="0">
                 <a:solidFill>
                   <a:srgbClr val="5C6672"/>
                 </a:solidFill>
@@ -26759,7 +26759,7 @@
               </a:defRPr>
             </a:pPr>
             <a:r>
-              <a:t>ROS 2 Jazzy · Gazebo Harmonic · M13 · 따라 하기형 AGV 실습</a:t>
+              <a:t>ROS 2 기반 AGV End-to-End 개발 커리큘럼 · M13 · Block D</a:t>
             </a:r>
           </a:p>
         </p:txBody>
@@ -27225,7 +27225,7 @@
               <a:spcAft>
                 <a:spcPts val="0"/>
               </a:spcAft>
-              <a:defRPr sz="1000" b="0">
+              <a:defRPr sz="900" b="0">
                 <a:solidFill>
                   <a:srgbClr val="5C6672"/>
                 </a:solidFill>
@@ -27233,7 +27233,7 @@
               </a:defRPr>
             </a:pPr>
             <a:r>
-              <a:t>ROS 2 Jazzy · Gazebo Harmonic · M13 · 따라 하기형 AGV 실습</a:t>
+              <a:t>ROS 2 기반 AGV End-to-End 개발 커리큘럼 · M13 · Block D</a:t>
             </a:r>
           </a:p>
         </p:txBody>
@@ -27558,7 +27558,7 @@
               <a:spcAft>
                 <a:spcPts val="0"/>
               </a:spcAft>
-              <a:defRPr sz="1000" b="0">
+              <a:defRPr sz="900" b="0">
                 <a:solidFill>
                   <a:srgbClr val="5C6672"/>
                 </a:solidFill>
@@ -27566,7 +27566,7 @@
               </a:defRPr>
             </a:pPr>
             <a:r>
-              <a:t>ROS 2 Jazzy · Gazebo Harmonic · M13 · 따라 하기형 AGV 실습</a:t>
+              <a:t>ROS 2 기반 AGV End-to-End 개발 커리큘럼 · M13 · Block D</a:t>
             </a:r>
           </a:p>
         </p:txBody>
@@ -28032,7 +28032,7 @@
               <a:spcAft>
                 <a:spcPts val="0"/>
               </a:spcAft>
-              <a:defRPr sz="1000" b="0">
+              <a:defRPr sz="900" b="0">
                 <a:solidFill>
                   <a:srgbClr val="5C6672"/>
                 </a:solidFill>
@@ -28040,7 +28040,7 @@
               </a:defRPr>
             </a:pPr>
             <a:r>
-              <a:t>ROS 2 Jazzy · Gazebo Harmonic · M13 · 따라 하기형 AGV 실습</a:t>
+              <a:t>ROS 2 기반 AGV End-to-End 개발 커리큘럼 · M13 · Block D</a:t>
             </a:r>
           </a:p>
         </p:txBody>
@@ -28506,7 +28506,7 @@
               <a:spcAft>
                 <a:spcPts val="0"/>
               </a:spcAft>
-              <a:defRPr sz="1000" b="0">
+              <a:defRPr sz="900" b="0">
                 <a:solidFill>
                   <a:srgbClr val="5C6672"/>
                 </a:solidFill>
@@ -28514,7 +28514,7 @@
               </a:defRPr>
             </a:pPr>
             <a:r>
-              <a:t>ROS 2 Jazzy · Gazebo Harmonic · M13 · 따라 하기형 AGV 실습</a:t>
+              <a:t>ROS 2 기반 AGV End-to-End 개발 커리큘럼 · M13 · Block D</a:t>
             </a:r>
           </a:p>
         </p:txBody>
@@ -28977,7 +28977,7 @@
               <a:spcAft>
                 <a:spcPts val="0"/>
               </a:spcAft>
-              <a:defRPr sz="1000" b="0">
+              <a:defRPr sz="900" b="0">
                 <a:solidFill>
                   <a:srgbClr val="5C6672"/>
                 </a:solidFill>
@@ -28985,7 +28985,7 @@
               </a:defRPr>
             </a:pPr>
             <a:r>
-              <a:t>ROS 2 Jazzy · Gazebo Harmonic · M13 · 따라 하기형 AGV 실습</a:t>
+              <a:t>ROS 2 기반 AGV End-to-End 개발 커리큘럼 · M13 · Block D</a:t>
             </a:r>
           </a:p>
         </p:txBody>
@@ -29505,7 +29505,7 @@
               <a:spcAft>
                 <a:spcPts val="0"/>
               </a:spcAft>
-              <a:defRPr sz="1000" b="0">
+              <a:defRPr sz="900" b="0">
                 <a:solidFill>
                   <a:srgbClr val="5C6672"/>
                 </a:solidFill>
@@ -29513,7 +29513,7 @@
               </a:defRPr>
             </a:pPr>
             <a:r>
-              <a:t>ROS 2 Jazzy · Gazebo Harmonic · M13 · 따라 하기형 AGV 실습</a:t>
+              <a:t>ROS 2 기반 AGV End-to-End 개발 커리큘럼 · M13 · Block D</a:t>
             </a:r>
           </a:p>
         </p:txBody>
@@ -30294,7 +30294,7 @@
               <a:spcAft>
                 <a:spcPts val="0"/>
               </a:spcAft>
-              <a:defRPr sz="1000" b="0">
+              <a:defRPr sz="900" b="0">
                 <a:solidFill>
                   <a:srgbClr val="5C6672"/>
                 </a:solidFill>
@@ -30302,7 +30302,7 @@
               </a:defRPr>
             </a:pPr>
             <a:r>
-              <a:t>ROS 2 Jazzy · Gazebo Harmonic · M13 · 따라 하기형 AGV 실습</a:t>
+              <a:t>ROS 2 기반 AGV End-to-End 개발 커리큘럼 · M13 · Block D</a:t>
             </a:r>
           </a:p>
         </p:txBody>
@@ -30768,7 +30768,7 @@
               <a:spcAft>
                 <a:spcPts val="0"/>
               </a:spcAft>
-              <a:defRPr sz="1000" b="0">
+              <a:defRPr sz="900" b="0">
                 <a:solidFill>
                   <a:srgbClr val="5C6672"/>
                 </a:solidFill>
@@ -30776,7 +30776,7 @@
               </a:defRPr>
             </a:pPr>
             <a:r>
-              <a:t>ROS 2 Jazzy · Gazebo Harmonic · M13 · 따라 하기형 AGV 실습</a:t>
+              <a:t>ROS 2 기반 AGV End-to-End 개발 커리큘럼 · M13 · Block D</a:t>
             </a:r>
           </a:p>
         </p:txBody>
@@ -31242,7 +31242,7 @@
               <a:spcAft>
                 <a:spcPts val="0"/>
               </a:spcAft>
-              <a:defRPr sz="1000" b="0">
+              <a:defRPr sz="900" b="0">
                 <a:solidFill>
                   <a:srgbClr val="5C6672"/>
                 </a:solidFill>
@@ -31250,7 +31250,7 @@
               </a:defRPr>
             </a:pPr>
             <a:r>
-              <a:t>ROS 2 Jazzy · Gazebo Harmonic · M13 · 따라 하기형 AGV 실습</a:t>
+              <a:t>ROS 2 기반 AGV End-to-End 개발 커리큘럼 · M13 · Block D</a:t>
             </a:r>
           </a:p>
         </p:txBody>
@@ -31692,7 +31692,7 @@
               <a:spcAft>
                 <a:spcPts val="0"/>
               </a:spcAft>
-              <a:defRPr sz="1000" b="0">
+              <a:defRPr sz="900" b="0">
                 <a:solidFill>
                   <a:srgbClr val="5C6672"/>
                 </a:solidFill>
@@ -31700,7 +31700,7 @@
               </a:defRPr>
             </a:pPr>
             <a:r>
-              <a:t>ROS 2 Jazzy · Gazebo Harmonic · M13 · 따라 하기형 AGV 실습</a:t>
+              <a:t>ROS 2 기반 AGV End-to-End 개발 커리큘럼 · M13 · Block D</a:t>
             </a:r>
           </a:p>
         </p:txBody>
@@ -32220,7 +32220,7 @@
               <a:spcAft>
                 <a:spcPts val="0"/>
               </a:spcAft>
-              <a:defRPr sz="1000" b="0">
+              <a:defRPr sz="900" b="0">
                 <a:solidFill>
                   <a:srgbClr val="5C6672"/>
                 </a:solidFill>
@@ -32228,7 +32228,7 @@
               </a:defRPr>
             </a:pPr>
             <a:r>
-              <a:t>ROS 2 Jazzy · Gazebo Harmonic · M13 · 따라 하기형 AGV 실습</a:t>
+              <a:t>ROS 2 기반 AGV End-to-End 개발 커리큘럼 · M13 · Block D</a:t>
             </a:r>
           </a:p>
         </p:txBody>
@@ -33009,7 +33009,7 @@
               <a:spcAft>
                 <a:spcPts val="0"/>
               </a:spcAft>
-              <a:defRPr sz="1000" b="0">
+              <a:defRPr sz="900" b="0">
                 <a:solidFill>
                   <a:srgbClr val="5C6672"/>
                 </a:solidFill>
@@ -33017,7 +33017,7 @@
               </a:defRPr>
             </a:pPr>
             <a:r>
-              <a:t>ROS 2 Jazzy · Gazebo Harmonic · M13 · 따라 하기형 AGV 실습</a:t>
+              <a:t>ROS 2 기반 AGV End-to-End 개발 커리큘럼 · M13 · Block D</a:t>
             </a:r>
           </a:p>
         </p:txBody>
@@ -33649,7 +33649,7 @@
               <a:spcAft>
                 <a:spcPts val="0"/>
               </a:spcAft>
-              <a:defRPr sz="1000" b="0">
+              <a:defRPr sz="900" b="0">
                 <a:solidFill>
                   <a:srgbClr val="5C6672"/>
                 </a:solidFill>
@@ -33657,7 +33657,7 @@
               </a:defRPr>
             </a:pPr>
             <a:r>
-              <a:t>ROS 2 Jazzy · Gazebo Harmonic · M13 · 따라 하기형 AGV 실습</a:t>
+              <a:t>ROS 2 기반 AGV End-to-End 개발 커리큘럼 · M13 · Block D</a:t>
             </a:r>
           </a:p>
         </p:txBody>
@@ -34438,7 +34438,7 @@
               <a:spcAft>
                 <a:spcPts val="0"/>
               </a:spcAft>
-              <a:defRPr sz="1000" b="0">
+              <a:defRPr sz="900" b="0">
                 <a:solidFill>
                   <a:srgbClr val="5C6672"/>
                 </a:solidFill>
@@ -34446,7 +34446,7 @@
               </a:defRPr>
             </a:pPr>
             <a:r>
-              <a:t>ROS 2 Jazzy · Gazebo Harmonic · M13 · 따라 하기형 AGV 실습</a:t>
+              <a:t>ROS 2 기반 AGV End-to-End 개발 커리큘럼 · M13 · Block D</a:t>
             </a:r>
           </a:p>
         </p:txBody>
@@ -35235,7 +35235,7 @@
               <a:spcAft>
                 <a:spcPts val="0"/>
               </a:spcAft>
-              <a:defRPr sz="1000" b="0">
+              <a:defRPr sz="900" b="0">
                 <a:solidFill>
                   <a:srgbClr val="5C6672"/>
                 </a:solidFill>
@@ -35243,7 +35243,7 @@
               </a:defRPr>
             </a:pPr>
             <a:r>
-              <a:t>ROS 2 Jazzy · Gazebo Harmonic · M13 · 따라 하기형 AGV 실습</a:t>
+              <a:t>ROS 2 기반 AGV End-to-End 개발 커리큘럼 · M13 · Block D</a:t>
             </a:r>
           </a:p>
         </p:txBody>
@@ -36028,7 +36028,7 @@
               <a:spcAft>
                 <a:spcPts val="0"/>
               </a:spcAft>
-              <a:defRPr sz="1000" b="0">
+              <a:defRPr sz="900" b="0">
                 <a:solidFill>
                   <a:srgbClr val="5C6672"/>
                 </a:solidFill>
@@ -36036,7 +36036,7 @@
               </a:defRPr>
             </a:pPr>
             <a:r>
-              <a:t>ROS 2 Jazzy · Gazebo Harmonic · M13 · 따라 하기형 AGV 실습</a:t>
+              <a:t>ROS 2 기반 AGV End-to-End 개발 커리큘럼 · M13 · Block D</a:t>
             </a:r>
           </a:p>
         </p:txBody>
@@ -36597,7 +36597,7 @@
               <a:spcAft>
                 <a:spcPts val="0"/>
               </a:spcAft>
-              <a:defRPr sz="1000" b="0">
+              <a:defRPr sz="900" b="0">
                 <a:solidFill>
                   <a:srgbClr val="5C6672"/>
                 </a:solidFill>
@@ -36605,7 +36605,7 @@
               </a:defRPr>
             </a:pPr>
             <a:r>
-              <a:t>ROS 2 Jazzy · Gazebo Harmonic · M13 · 따라 하기형 AGV 실습</a:t>
+              <a:t>ROS 2 기반 AGV End-to-End 개발 커리큘럼 · M13 · Block D</a:t>
             </a:r>
           </a:p>
         </p:txBody>
@@ -37065,7 +37065,7 @@
               <a:spcAft>
                 <a:spcPts val="0"/>
               </a:spcAft>
-              <a:defRPr sz="1000" b="0">
+              <a:defRPr sz="900" b="0">
                 <a:solidFill>
                   <a:srgbClr val="5C6672"/>
                 </a:solidFill>
@@ -37073,7 +37073,7 @@
               </a:defRPr>
             </a:pPr>
             <a:r>
-              <a:t>ROS 2 Jazzy · Gazebo Harmonic · M13 · 따라 하기형 AGV 실습</a:t>
+              <a:t>ROS 2 기반 AGV End-to-End 개발 커리큘럼 · M13 · Block D</a:t>
             </a:r>
           </a:p>
         </p:txBody>
@@ -37533,7 +37533,7 @@
               <a:spcAft>
                 <a:spcPts val="0"/>
               </a:spcAft>
-              <a:defRPr sz="1000" b="0">
+              <a:defRPr sz="900" b="0">
                 <a:solidFill>
                   <a:srgbClr val="5C6672"/>
                 </a:solidFill>
@@ -37541,7 +37541,7 @@
               </a:defRPr>
             </a:pPr>
             <a:r>
-              <a:t>ROS 2 Jazzy · Gazebo Harmonic · M13 · 따라 하기형 AGV 실습</a:t>
+              <a:t>ROS 2 기반 AGV End-to-End 개발 커리큘럼 · M13 · Block D</a:t>
             </a:r>
           </a:p>
         </p:txBody>
@@ -37999,7 +37999,7 @@
               <a:spcAft>
                 <a:spcPts val="0"/>
               </a:spcAft>
-              <a:defRPr sz="1000" b="0">
+              <a:defRPr sz="900" b="0">
                 <a:solidFill>
                   <a:srgbClr val="5C6672"/>
                 </a:solidFill>
@@ -38007,7 +38007,7 @@
               </a:defRPr>
             </a:pPr>
             <a:r>
-              <a:t>ROS 2 Jazzy · Gazebo Harmonic · M13 · 따라 하기형 AGV 실습</a:t>
+              <a:t>ROS 2 기반 AGV End-to-End 개발 커리큘럼 · M13 · Block D</a:t>
             </a:r>
           </a:p>
         </p:txBody>
@@ -38449,7 +38449,7 @@
               <a:spcAft>
                 <a:spcPts val="0"/>
               </a:spcAft>
-              <a:defRPr sz="1000" b="0">
+              <a:defRPr sz="900" b="0">
                 <a:solidFill>
                   <a:srgbClr val="5C6672"/>
                 </a:solidFill>
@@ -38457,7 +38457,7 @@
               </a:defRPr>
             </a:pPr>
             <a:r>
-              <a:t>ROS 2 Jazzy · Gazebo Harmonic · M13 · 따라 하기형 AGV 실습</a:t>
+              <a:t>ROS 2 기반 AGV End-to-End 개발 커리큘럼 · M13 · Block D</a:t>
             </a:r>
           </a:p>
         </p:txBody>
@@ -38903,7 +38903,7 @@
               <a:spcAft>
                 <a:spcPts val="0"/>
               </a:spcAft>
-              <a:defRPr sz="1000" b="0">
+              <a:defRPr sz="900" b="0">
                 <a:solidFill>
                   <a:srgbClr val="5C6672"/>
                 </a:solidFill>
@@ -38911,7 +38911,7 @@
               </a:defRPr>
             </a:pPr>
             <a:r>
-              <a:t>ROS 2 Jazzy · Gazebo Harmonic · M13 · 따라 하기형 AGV 실습</a:t>
+              <a:t>ROS 2 기반 AGV End-to-End 개발 커리큘럼 · M13 · Block D</a:t>
             </a:r>
           </a:p>
         </p:txBody>
@@ -39275,7 +39275,7 @@
               <a:spcAft>
                 <a:spcPts val="0"/>
               </a:spcAft>
-              <a:defRPr sz="1000" b="0">
+              <a:defRPr sz="900" b="0">
                 <a:solidFill>
                   <a:srgbClr val="5C6672"/>
                 </a:solidFill>
@@ -39283,7 +39283,7 @@
               </a:defRPr>
             </a:pPr>
             <a:r>
-              <a:t>ROS 2 Jazzy · Gazebo Harmonic · M13 · 따라 하기형 AGV 실습</a:t>
+              <a:t>ROS 2 기반 AGV End-to-End 개발 커리큘럼 · M13 · Block D</a:t>
             </a:r>
           </a:p>
         </p:txBody>
@@ -39512,7 +39512,7 @@
               <a:spcAft>
                 <a:spcPts val="0"/>
               </a:spcAft>
-              <a:defRPr sz="1000" b="0">
+              <a:defRPr sz="900" b="0">
                 <a:solidFill>
                   <a:srgbClr val="5C6672"/>
                 </a:solidFill>
@@ -39520,7 +39520,7 @@
               </a:defRPr>
             </a:pPr>
             <a:r>
-              <a:t>ROS 2 Jazzy · Gazebo Harmonic · M13 · 따라 하기형 AGV 실습</a:t>
+              <a:t>ROS 2 기반 AGV End-to-End 개발 커리큘럼 · M13 · Block D</a:t>
             </a:r>
           </a:p>
         </p:txBody>
@@ -39749,7 +39749,7 @@
               <a:spcAft>
                 <a:spcPts val="0"/>
               </a:spcAft>
-              <a:defRPr sz="1000" b="0">
+              <a:defRPr sz="900" b="0">
                 <a:solidFill>
                   <a:srgbClr val="5C6672"/>
                 </a:solidFill>
@@ -39757,7 +39757,7 @@
               </a:defRPr>
             </a:pPr>
             <a:r>
-              <a:t>ROS 2 Jazzy · Gazebo Harmonic · M13 · 따라 하기형 AGV 실습</a:t>
+              <a:t>ROS 2 기반 AGV End-to-End 개발 커리큘럼 · M13 · Block D</a:t>
             </a:r>
           </a:p>
         </p:txBody>
@@ -40156,7 +40156,7 @@
               <a:spcAft>
                 <a:spcPts val="0"/>
               </a:spcAft>
-              <a:defRPr sz="1000" b="0">
+              <a:defRPr sz="900" b="0">
                 <a:solidFill>
                   <a:srgbClr val="5C6672"/>
                 </a:solidFill>
@@ -40164,7 +40164,7 @@
               </a:defRPr>
             </a:pPr>
             <a:r>
-              <a:t>ROS 2 Jazzy · Gazebo Harmonic · M13 · 따라 하기형 AGV 실습</a:t>
+              <a:t>ROS 2 기반 AGV End-to-End 개발 커리큘럼 · M13 · Block D</a:t>
             </a:r>
           </a:p>
         </p:txBody>
@@ -40681,7 +40681,7 @@
               <a:spcAft>
                 <a:spcPts val="0"/>
               </a:spcAft>
-              <a:defRPr sz="1000" b="0">
+              <a:defRPr sz="900" b="0">
                 <a:solidFill>
                   <a:srgbClr val="5C6672"/>
                 </a:solidFill>
@@ -40689,7 +40689,7 @@
               </a:defRPr>
             </a:pPr>
             <a:r>
-              <a:t>ROS 2 Jazzy · Gazebo Harmonic · M13 · 따라 하기형 AGV 실습</a:t>
+              <a:t>ROS 2 기반 AGV End-to-End 개발 커리큘럼 · M13 · Block D</a:t>
             </a:r>
           </a:p>
         </p:txBody>
@@ -41065,7 +41065,7 @@
               <a:spcAft>
                 <a:spcPts val="0"/>
               </a:spcAft>
-              <a:defRPr sz="1000" b="0">
+              <a:defRPr sz="900" b="0">
                 <a:solidFill>
                   <a:srgbClr val="5C6672"/>
                 </a:solidFill>
@@ -41073,7 +41073,7 @@
               </a:defRPr>
             </a:pPr>
             <a:r>
-              <a:t>ROS 2 Jazzy · Gazebo Harmonic · M13 · 따라 하기형 AGV 실습</a:t>
+              <a:t>ROS 2 기반 AGV End-to-End 개발 커리큘럼 · M13 · Block D</a:t>
             </a:r>
           </a:p>
         </p:txBody>
@@ -41394,7 +41394,7 @@
               <a:spcAft>
                 <a:spcPts val="0"/>
               </a:spcAft>
-              <a:defRPr sz="1000" b="0">
+              <a:defRPr sz="900" b="0">
                 <a:solidFill>
                   <a:srgbClr val="5C6672"/>
                 </a:solidFill>
@@ -41402,7 +41402,7 @@
               </a:defRPr>
             </a:pPr>
             <a:r>
-              <a:t>ROS 2 Jazzy · Gazebo Harmonic · M13 · 따라 하기형 AGV 실습</a:t>
+              <a:t>ROS 2 기반 AGV End-to-End 개발 커리큘럼 · M13 · Block D</a:t>
             </a:r>
           </a:p>
         </p:txBody>
@@ -41813,7 +41813,7 @@
               <a:spcAft>
                 <a:spcPts val="0"/>
               </a:spcAft>
-              <a:defRPr sz="1000" b="0">
+              <a:defRPr sz="900" b="0">
                 <a:solidFill>
                   <a:srgbClr val="5C6672"/>
                 </a:solidFill>
@@ -41821,7 +41821,7 @@
               </a:defRPr>
             </a:pPr>
             <a:r>
-              <a:t>ROS 2 Jazzy · Gazebo Harmonic · M13 · 따라 하기형 AGV 실습</a:t>
+              <a:t>ROS 2 기반 AGV End-to-End 개발 커리큘럼 · M13 · Block D</a:t>
             </a:r>
           </a:p>
         </p:txBody>
@@ -42344,7 +42344,7 @@
               <a:spcAft>
                 <a:spcPts val="0"/>
               </a:spcAft>
-              <a:defRPr sz="1000" b="0">
+              <a:defRPr sz="900" b="0">
                 <a:solidFill>
                   <a:srgbClr val="5C6672"/>
                 </a:solidFill>
@@ -42352,7 +42352,7 @@
               </a:defRPr>
             </a:pPr>
             <a:r>
-              <a:t>ROS 2 Jazzy · Gazebo Harmonic · M13 · 따라 하기형 AGV 실습</a:t>
+              <a:t>ROS 2 기반 AGV End-to-End 개발 커리큘럼 · M13 · Block D</a:t>
             </a:r>
           </a:p>
         </p:txBody>
@@ -42581,7 +42581,7 @@
               <a:spcAft>
                 <a:spcPts val="0"/>
               </a:spcAft>
-              <a:defRPr sz="1000" b="0">
+              <a:defRPr sz="900" b="0">
                 <a:solidFill>
                   <a:srgbClr val="5C6672"/>
                 </a:solidFill>
@@ -42589,7 +42589,7 @@
               </a:defRPr>
             </a:pPr>
             <a:r>
-              <a:t>ROS 2 Jazzy · Gazebo Harmonic · M13 · 따라 하기형 AGV 실습</a:t>
+              <a:t>ROS 2 기반 AGV End-to-End 개발 커리큘럼 · M13 · Block D</a:t>
             </a:r>
           </a:p>
         </p:txBody>
@@ -43135,7 +43135,7 @@
               <a:spcAft>
                 <a:spcPts val="0"/>
               </a:spcAft>
-              <a:defRPr sz="1000" b="0">
+              <a:defRPr sz="900" b="0">
                 <a:solidFill>
                   <a:srgbClr val="5C6672"/>
                 </a:solidFill>
@@ -43143,7 +43143,7 @@
               </a:defRPr>
             </a:pPr>
             <a:r>
-              <a:t>ROS 2 Jazzy · Gazebo Harmonic · M13 · 따라 하기형 AGV 실습</a:t>
+              <a:t>ROS 2 기반 AGV End-to-End 개발 커리큘럼 · M13 · Block D</a:t>
             </a:r>
           </a:p>
         </p:txBody>
